--- a/D7016B_Demo1_Viktor_Lindberg.pptx
+++ b/D7016B_Demo1_Viktor_Lindberg.pptx
@@ -5,7 +5,7 @@
     <p:sldMasterId id="2147483648" r:id="rId1"/>
   </p:sldMasterIdLst>
   <p:notesMasterIdLst>
-    <p:notesMasterId r:id="rId16"/>
+    <p:notesMasterId r:id="rId26"/>
   </p:notesMasterIdLst>
   <p:sldIdLst>
     <p:sldId id="256" r:id="rId2"/>
@@ -22,6 +22,16 @@
     <p:sldId id="267" r:id="rId13"/>
     <p:sldId id="268" r:id="rId14"/>
     <p:sldId id="269" r:id="rId15"/>
+    <p:sldId id="270" r:id="rId16"/>
+    <p:sldId id="271" r:id="rId17"/>
+    <p:sldId id="272" r:id="rId18"/>
+    <p:sldId id="273" r:id="rId19"/>
+    <p:sldId id="274" r:id="rId20"/>
+    <p:sldId id="275" r:id="rId21"/>
+    <p:sldId id="276" r:id="rId22"/>
+    <p:sldId id="277" r:id="rId23"/>
+    <p:sldId id="278" r:id="rId24"/>
+    <p:sldId id="279" r:id="rId25"/>
   </p:sldIdLst>
   <p:sldSz cx="9144000" cy="5143500" type="screen16x9"/>
   <p:notesSz cx="5143500" cy="9144000"/>
@@ -823,6 +833,280 @@
     </a:ln>
     <a:effectLst/>
   </c:spPr>
+  <c:externalData r:id="rId1">
+    <c:autoUpdate val="0"/>
+  </c:externalData>
+</c:chartSpace>
+</file>
+
+<file path=ppt/charts/chart3.xml><?xml version="1.0" encoding="utf-8"?>
+<c:chartSpace xmlns:c="http://schemas.openxmlformats.org/drawingml/2006/chart" xmlns:a="http://schemas.openxmlformats.org/drawingml/2006/main" xmlns:r="http://schemas.openxmlformats.org/officeDocument/2006/relationships" xmlns:c16r2="http://schemas.microsoft.com/office/drawing/2015/06/chart">
+  <c:date1904 val="0"/>
+  <c:lang val="en-GB"/>
+  <c:roundedCorners val="1"/>
+  <c:style val="2"/>
+  <c:chart>
+    <c:title>
+      <c:tx>
+        <c:rich>
+          <a:bodyPr/>
+          <a:lstStyle/>
+          <a:p>
+            <a:r>
+              <a:rPr sz="1000" b="1">
+                <a:solidFill>
+                  <a:srgbClr val="16262B"/>
+                </a:solidFill>
+                <a:latin typeface="Calibri"/>
+              </a:rPr>
+              <a:t>Lateral deviation from the slab measurements (mm, RMS)</a:t>
+            </a:r>
+          </a:p>
+        </c:rich>
+      </c:tx>
+      <c:overlay val="0"/>
+    </c:title>
+    <c:autoTitleDeleted val="0"/>
+    <c:plotArea>
+      <c:layout/>
+      <c:barChart>
+        <c:barDir val="col"/>
+        <c:grouping val="clustered"/>
+        <c:varyColors val="1"/>
+        <c:ser>
+          <c:idx val="0"/>
+          <c:order val="0"/>
+          <c:tx>
+            <c:strRef>
+              <c:f>Sheet1!$B$1</c:f>
+              <c:strCache>
+                <c:ptCount val="1"/>
+                <c:pt idx="0">
+                  <c:v>Lateral deviation (mm)</c:v>
+                </c:pt>
+              </c:strCache>
+            </c:strRef>
+          </c:tx>
+          <c:spPr>
+            <a:solidFill>
+              <a:srgbClr val="6FBAC3"/>
+            </a:solidFill>
+          </c:spPr>
+          <c:invertIfNegative val="1"/>
+          <c:dPt>
+            <c:idx val="0"/>
+            <c:invertIfNegative val="1"/>
+            <c:bubble3D val="0"/>
+            <c:spPr>
+              <a:solidFill>
+                <a:srgbClr val="028090"/>
+              </a:solidFill>
+            </c:spPr>
+            <c:extLst>
+              <c:ext xmlns:c16="http://schemas.microsoft.com/office/drawing/2014/chart" uri="{C3380CC4-5D6E-409C-BE32-E72D297353CC}">
+                <c16:uniqueId val="{00000001-CEA8-4C42-BB11-46A3B147655D}"/>
+              </c:ext>
+            </c:extLst>
+          </c:dPt>
+          <c:dLbls>
+            <c:numFmt formatCode="0.0" sourceLinked="0"/>
+            <c:spPr>
+              <a:noFill/>
+              <a:ln>
+                <a:noFill/>
+              </a:ln>
+              <a:effectLst/>
+            </c:spPr>
+            <c:txPr>
+              <a:bodyPr/>
+              <a:lstStyle/>
+              <a:p>
+                <a:pPr>
+                  <a:defRPr sz="900"/>
+                </a:pPr>
+                <a:endParaRPr lang="sv-SE"/>
+              </a:p>
+            </c:txPr>
+            <c:dLblPos val="outEnd"/>
+            <c:showLegendKey val="0"/>
+            <c:showVal val="1"/>
+            <c:showCatName val="0"/>
+            <c:showSerName val="0"/>
+            <c:showPercent val="0"/>
+            <c:showBubbleSize val="0"/>
+            <c:showLeaderLines val="0"/>
+            <c:extLst>
+              <c:ext xmlns:c15="http://schemas.microsoft.com/office/drawing/2012/chart" uri="{CE6537A1-D6FC-4f65-9D91-7224C49458BB}">
+                <c15:showLeaderLines val="0"/>
+              </c:ext>
+            </c:extLst>
+          </c:dLbls>
+          <c:cat>
+            <c:strRef>
+              <c:f>Sheet1!$A$2:$A$5</c:f>
+              <c:strCache>
+                <c:ptCount val="4"/>
+                <c:pt idx="0">
+                  <c:v>1 m · 261 pts</c:v>
+                </c:pt>
+                <c:pt idx="1">
+                  <c:v>2 m · 131 pts</c:v>
+                </c:pt>
+                <c:pt idx="2">
+                  <c:v>5 m · 52 pts</c:v>
+                </c:pt>
+                <c:pt idx="3">
+                  <c:v>10 m · 26 pts</c:v>
+                </c:pt>
+              </c:strCache>
+            </c:strRef>
+          </c:cat>
+          <c:val>
+            <c:numRef>
+              <c:f>Sheet1!$B$2:$B$5</c:f>
+              <c:numCache>
+                <c:formatCode>General</c:formatCode>
+                <c:ptCount val="4"/>
+                <c:pt idx="0">
+                  <c:v>1.35</c:v>
+                </c:pt>
+                <c:pt idx="1">
+                  <c:v>2.06</c:v>
+                </c:pt>
+                <c:pt idx="2">
+                  <c:v>2.67</c:v>
+                </c:pt>
+                <c:pt idx="3">
+                  <c:v>3.3</c:v>
+                </c:pt>
+              </c:numCache>
+            </c:numRef>
+          </c:val>
+          <c:extLst>
+            <c:ext xmlns:c14="http://schemas.microsoft.com/office/drawing/2007/8/2/chart" uri="{6F2FDCE9-48DA-4B69-8628-5D25D57E5C99}">
+              <c14:invertSolidFillFmt>
+                <c14:spPr xmlns:c14="http://schemas.microsoft.com/office/drawing/2007/8/2/chart">
+                  <a:solidFill>
+                    <a:srgbClr val="FFFFFF"/>
+                  </a:solidFill>
+                </c14:spPr>
+              </c14:invertSolidFillFmt>
+            </c:ext>
+            <c:ext xmlns:c16="http://schemas.microsoft.com/office/drawing/2014/chart" uri="{C3380CC4-5D6E-409C-BE32-E72D297353CC}">
+              <c16:uniqueId val="{00000002-CEA8-4C42-BB11-46A3B147655D}"/>
+            </c:ext>
+          </c:extLst>
+        </c:ser>
+        <c:dLbls>
+          <c:dLblPos val="outEnd"/>
+          <c:showLegendKey val="0"/>
+          <c:showVal val="1"/>
+          <c:showCatName val="0"/>
+          <c:showSerName val="0"/>
+          <c:showPercent val="0"/>
+          <c:showBubbleSize val="0"/>
+        </c:dLbls>
+        <c:gapWidth val="55"/>
+        <c:axId val="-2068027336"/>
+        <c:axId val="-2113994440"/>
+      </c:barChart>
+      <c:catAx>
+        <c:axId val="-2068027336"/>
+        <c:scaling>
+          <c:orientation val="minMax"/>
+        </c:scaling>
+        <c:delete val="0"/>
+        <c:axPos val="b"/>
+        <c:numFmt formatCode="General" sourceLinked="0"/>
+        <c:majorTickMark val="out"/>
+        <c:minorTickMark val="none"/>
+        <c:tickLblPos val="nextTo"/>
+        <c:spPr>
+          <a:ln>
+            <a:solidFill>
+              <a:srgbClr val="B8C7CA"/>
+            </a:solidFill>
+          </a:ln>
+        </c:spPr>
+        <c:txPr>
+          <a:bodyPr/>
+          <a:lstStyle/>
+          <a:p>
+            <a:pPr>
+              <a:defRPr sz="900"/>
+            </a:pPr>
+            <a:endParaRPr lang="sv-SE"/>
+          </a:p>
+        </c:txPr>
+        <c:crossAx val="-2113994440"/>
+        <c:crosses val="autoZero"/>
+        <c:auto val="1"/>
+        <c:lblAlgn val="ctr"/>
+        <c:lblOffset val="100"/>
+        <c:noMultiLvlLbl val="0"/>
+      </c:catAx>
+      <c:valAx>
+        <c:axId val="-2113994440"/>
+        <c:scaling>
+          <c:orientation val="minMax"/>
+          <c:max val="4"/>
+          <c:min val="0"/>
+        </c:scaling>
+        <c:delete val="0"/>
+        <c:axPos val="l"/>
+        <c:majorGridlines>
+          <c:spPr>
+            <a:ln>
+              <a:solidFill>
+                <a:srgbClr val="E3ECEC"/>
+              </a:solidFill>
+            </a:ln>
+          </c:spPr>
+        </c:majorGridlines>
+        <c:numFmt formatCode="General" sourceLinked="1"/>
+        <c:majorTickMark val="out"/>
+        <c:minorTickMark val="none"/>
+        <c:tickLblPos val="nextTo"/>
+        <c:spPr>
+          <a:ln>
+            <a:noFill/>
+          </a:ln>
+        </c:spPr>
+        <c:txPr>
+          <a:bodyPr/>
+          <a:lstStyle/>
+          <a:p>
+            <a:pPr>
+              <a:defRPr sz="900"/>
+            </a:pPr>
+            <a:endParaRPr lang="sv-SE"/>
+          </a:p>
+        </c:txPr>
+        <c:crossAx val="-2068027336"/>
+        <c:crosses val="autoZero"/>
+        <c:crossBetween val="between"/>
+        <c:majorUnit val="1"/>
+      </c:valAx>
+    </c:plotArea>
+    <c:plotVisOnly val="1"/>
+    <c:dispBlanksAs val="gap"/>
+    <c:showDLblsOverMax val="1"/>
+  </c:chart>
+  <c:txPr>
+    <a:bodyPr/>
+    <a:lstStyle/>
+    <a:p>
+      <a:pPr>
+        <a:defRPr sz="900">
+          <a:solidFill>
+            <a:srgbClr val="5F7178"/>
+          </a:solidFill>
+          <a:latin typeface="Calibri"/>
+        </a:defRPr>
+      </a:pPr>
+      <a:endParaRPr lang="en-US"/>
+    </a:p>
+  </c:txPr>
   <c:externalData r:id="rId1">
     <c:autoUpdate val="0"/>
   </c:externalData>
@@ -10934,6 +11218,3191 @@
 </p:sld>
 </file>
 
+<file path=ppt/slides/slide15.xml><?xml version="1.0" encoding="utf-8"?>
+<p:sld xmlns:a="http://schemas.openxmlformats.org/drawingml/2006/main" xmlns:r="http://schemas.openxmlformats.org/officeDocument/2006/relationships" xmlns:p="http://schemas.openxmlformats.org/presentationml/2006/main">
+  <p:cSld>
+    <p:bg>
+      <p:bgPr>
+        <a:solidFill>
+          <a:srgbClr val="0B2027"/>
+        </a:solidFill>
+        <a:effectLst/>
+      </p:bgPr>
+    </p:bg>
+    <p:spTree>
+      <p:nvGrpSpPr>
+        <p:cNvPr id="1" name=""/>
+        <p:cNvGrpSpPr/>
+        <p:nvPr/>
+      </p:nvGrpSpPr>
+      <p:grpSpPr>
+        <a:xfrm>
+          <a:off x="0" y="0"/>
+          <a:ext cx="0" cy="0"/>
+          <a:chOff x="0" y="0"/>
+          <a:chExt cx="0" cy="0"/>
+        </a:xfrm>
+      </p:grpSpPr>
+      <p:sp>
+        <p:nvSpPr>
+          <p:cNvPr id="2" name="Shape 0"/>
+          <p:cNvSpPr/>
+          <p:nvPr/>
+        </p:nvSpPr>
+        <p:spPr>
+          <a:xfrm>
+            <a:off x="6675120" y="-1005840"/>
+            <a:ext cx="3840480" cy="3840480"/>
+          </a:xfrm>
+          <a:prstGeom prst="ellipse">
+            <a:avLst/>
+          </a:prstGeom>
+          <a:solidFill>
+            <a:srgbClr val="028090">
+              <a:alpha val="22000"/>
+            </a:srgbClr>
+          </a:solidFill>
+          <a:ln w="12700">
+            <a:solidFill>
+              <a:srgbClr val="333333"/>
+            </a:solidFill>
+            <a:prstDash val="solid"/>
+          </a:ln>
+        </p:spPr>
+        <p:txBody>
+          <a:bodyPr/>
+          <a:lstStyle/>
+          <a:p>
+            <a:endParaRPr lang="sv-SE"/>
+          </a:p>
+        </p:txBody>
+      </p:sp>
+      <p:sp>
+        <p:nvSpPr>
+          <p:cNvPr id="3" name="Shape 1"/>
+          <p:cNvSpPr/>
+          <p:nvPr/>
+        </p:nvSpPr>
+        <p:spPr>
+          <a:xfrm>
+            <a:off x="7680960" y="2651760"/>
+            <a:ext cx="2377440" cy="2377440"/>
+          </a:xfrm>
+          <a:prstGeom prst="ellipse">
+            <a:avLst/>
+          </a:prstGeom>
+          <a:solidFill>
+            <a:srgbClr val="00A896">
+              <a:alpha val="15000"/>
+            </a:srgbClr>
+          </a:solidFill>
+          <a:ln w="12700">
+            <a:solidFill>
+              <a:srgbClr val="333333"/>
+            </a:solidFill>
+            <a:prstDash val="solid"/>
+          </a:ln>
+        </p:spPr>
+        <p:txBody>
+          <a:bodyPr/>
+          <a:lstStyle/>
+          <a:p>
+            <a:endParaRPr lang="sv-SE"/>
+          </a:p>
+        </p:txBody>
+      </p:sp>
+      <p:sp>
+        <p:nvSpPr>
+          <p:cNvPr id="4" name="Text 2"/>
+          <p:cNvSpPr txBox="1"/>
+          <p:nvPr/>
+        </p:nvSpPr>
+        <p:spPr>
+          <a:xfrm>
+            <a:off x="457200" y="1097280"/>
+            <a:ext cx="6766560" cy="256032"/>
+          </a:xfrm>
+          <a:prstGeom prst="rect">
+            <a:avLst/>
+          </a:prstGeom>
+          <a:noFill/>
+          <a:ln/>
+        </p:spPr>
+        <p:txBody>
+          <a:bodyPr wrap="square" lIns="0" tIns="0" rIns="0" bIns="0" rtlCol="0" anchor="ctr"/>
+          <a:lstStyle/>
+          <a:p>
+            <a:pPr marL="0" indent="0">
+              <a:buNone/>
+            </a:pPr>
+            <a:r>
+              <a:rPr lang="en-US" sz="1150" b="1" kern="0" spc="200" dirty="0">
+                <a:solidFill>
+                  <a:srgbClr val="00A896"/>
+                </a:solidFill>
+                <a:latin typeface="Calibri" pitchFamily="34" charset="0"/>
+                <a:ea typeface="Calibri" pitchFamily="34" charset="-122"/>
+                <a:cs typeface="Calibri" pitchFamily="34" charset="-120"/>
+              </a:rPr>
+              <a:t>D7016B · PROJECT DEMONSTRATION 2</a:t>
+            </a:r>
+            <a:endParaRPr lang="en-US" sz="1150" dirty="0"/>
+          </a:p>
+        </p:txBody>
+      </p:sp>
+      <p:sp>
+        <p:nvSpPr>
+          <p:cNvPr id="5" name="Text 3"/>
+          <p:cNvSpPr txBox="1"/>
+          <p:nvPr/>
+        </p:nvSpPr>
+        <p:spPr>
+          <a:xfrm>
+            <a:off x="457200" y="1417320"/>
+            <a:ext cx="6858000" cy="1097280"/>
+          </a:xfrm>
+          <a:prstGeom prst="rect">
+            <a:avLst/>
+          </a:prstGeom>
+          <a:noFill/>
+          <a:ln/>
+        </p:spPr>
+        <p:txBody>
+          <a:bodyPr wrap="square" lIns="0" tIns="0" rIns="0" bIns="0" rtlCol="0" anchor="ctr"/>
+          <a:lstStyle/>
+          <a:p>
+            <a:pPr marL="0" indent="0">
+              <a:buNone/>
+            </a:pPr>
+            <a:r>
+              <a:rPr lang="en-US" sz="3100" b="1" dirty="0">
+                <a:solidFill>
+                  <a:srgbClr val="FFFFFF"/>
+                </a:solidFill>
+                <a:latin typeface="Cambria" pitchFamily="34" charset="0"/>
+                <a:ea typeface="Cambria" pitchFamily="34" charset="-122"/>
+                <a:cs typeface="Cambria" pitchFamily="34" charset="-120"/>
+              </a:rPr>
+              <a:t>Track change over time as 3D curves</a:t>
+            </a:r>
+            <a:endParaRPr lang="en-US" sz="3100" dirty="0"/>
+          </a:p>
+        </p:txBody>
+      </p:sp>
+      <p:sp>
+        <p:nvSpPr>
+          <p:cNvPr id="6" name="Text 4"/>
+          <p:cNvSpPr txBox="1"/>
+          <p:nvPr/>
+        </p:nvSpPr>
+        <p:spPr>
+          <a:xfrm>
+            <a:off x="457200" y="2560320"/>
+            <a:ext cx="6583680" cy="365760"/>
+          </a:xfrm>
+          <a:prstGeom prst="rect">
+            <a:avLst/>
+          </a:prstGeom>
+          <a:noFill/>
+          <a:ln/>
+        </p:spPr>
+        <p:txBody>
+          <a:bodyPr wrap="square" lIns="0" tIns="0" rIns="0" bIns="0" rtlCol="0" anchor="ctr"/>
+          <a:lstStyle/>
+          <a:p>
+            <a:pPr marL="0" indent="0">
+              <a:buNone/>
+            </a:pPr>
+            <a:r>
+              <a:rPr lang="en-US" sz="1600" i="1" dirty="0">
+                <a:solidFill>
+                  <a:srgbClr val="00A896"/>
+                </a:solidFill>
+                <a:latin typeface="Calibri" pitchFamily="34" charset="0"/>
+                <a:ea typeface="Calibri" pitchFamily="34" charset="-122"/>
+                <a:cs typeface="Calibri" pitchFamily="34" charset="-120"/>
+              </a:rPr>
+              <a:t>…comparing runs of the same track</a:t>
+            </a:r>
+            <a:endParaRPr lang="en-US" sz="1600" dirty="0"/>
+          </a:p>
+        </p:txBody>
+      </p:sp>
+      <p:sp>
+        <p:nvSpPr>
+          <p:cNvPr id="7" name="Text 5"/>
+          <p:cNvSpPr txBox="1"/>
+          <p:nvPr/>
+        </p:nvSpPr>
+        <p:spPr>
+          <a:xfrm>
+            <a:off x="457200" y="3703320"/>
+            <a:ext cx="5943600" cy="914400"/>
+          </a:xfrm>
+          <a:prstGeom prst="rect">
+            <a:avLst/>
+          </a:prstGeom>
+          <a:noFill/>
+          <a:ln/>
+        </p:spPr>
+        <p:txBody>
+          <a:bodyPr wrap="square" lIns="0" tIns="0" rIns="0" bIns="0" rtlCol="0" anchor="ctr"/>
+          <a:lstStyle/>
+          <a:p>
+            <a:pPr marL="0" indent="0">
+              <a:lnSpc>
+                <a:spcPts val="1800"/>
+              </a:lnSpc>
+              <a:buNone/>
+            </a:pPr>
+            <a:r>
+              <a:rPr lang="en-US" sz="1250" b="1" dirty="0">
+                <a:solidFill>
+                  <a:srgbClr val="C7D8DB"/>
+                </a:solidFill>
+                <a:latin typeface="Calibri" pitchFamily="34" charset="0"/>
+                <a:ea typeface="Calibri" pitchFamily="34" charset="-122"/>
+                <a:cs typeface="Calibri" pitchFamily="34" charset="-120"/>
+              </a:rPr>
+              <a:t>Viktor Lindberg</a:t>
+            </a:r>
+            <a:endParaRPr lang="en-US" sz="1250" dirty="0"/>
+          </a:p>
+          <a:p>
+            <a:pPr marL="0" indent="0">
+              <a:lnSpc>
+                <a:spcPts val="1800"/>
+              </a:lnSpc>
+              <a:buNone/>
+            </a:pPr>
+            <a:r>
+              <a:rPr lang="en-US" sz="1250" dirty="0">
+                <a:solidFill>
+                  <a:srgbClr val="C7D8DB"/>
+                </a:solidFill>
+                <a:latin typeface="Calibri" pitchFamily="34" charset="0"/>
+                <a:ea typeface="Calibri" pitchFamily="34" charset="-122"/>
+                <a:cs typeface="Calibri" pitchFamily="34" charset="-120"/>
+              </a:rPr>
+              <a:t>Supervisor: Amit Patwardhan</a:t>
+            </a:r>
+            <a:endParaRPr lang="en-US" sz="1250" dirty="0"/>
+          </a:p>
+          <a:p>
+            <a:pPr marL="0" indent="0">
+              <a:lnSpc>
+                <a:spcPts val="1800"/>
+              </a:lnSpc>
+              <a:buNone/>
+            </a:pPr>
+            <a:r>
+              <a:rPr lang="en-US" sz="1250" dirty="0">
+                <a:solidFill>
+                  <a:srgbClr val="C7D8DB"/>
+                </a:solidFill>
+                <a:latin typeface="Calibri" pitchFamily="34" charset="0"/>
+                <a:ea typeface="Calibri" pitchFamily="34" charset="-122"/>
+                <a:cs typeface="Calibri" pitchFamily="34" charset="-120"/>
+              </a:rPr>
+              <a:t>Luleå University of Technology · D7016B – Industrial AI and </a:t>
+            </a:r>
+            <a:r>
+              <a:rPr lang="en-US" sz="1250" dirty="0" err="1">
+                <a:solidFill>
+                  <a:srgbClr val="C7D8DB"/>
+                </a:solidFill>
+                <a:latin typeface="Calibri" pitchFamily="34" charset="0"/>
+                <a:ea typeface="Calibri" pitchFamily="34" charset="-122"/>
+                <a:cs typeface="Calibri" pitchFamily="34" charset="-120"/>
+              </a:rPr>
+              <a:t>eMaintenance</a:t>
+            </a:r>
+            <a:r>
+              <a:rPr lang="en-US" sz="1250" dirty="0">
+                <a:solidFill>
+                  <a:srgbClr val="C7D8DB"/>
+                </a:solidFill>
+                <a:latin typeface="Calibri" pitchFamily="34" charset="0"/>
+                <a:ea typeface="Calibri" pitchFamily="34" charset="-122"/>
+                <a:cs typeface="Calibri" pitchFamily="34" charset="-120"/>
+              </a:rPr>
+              <a:t>: Part II</a:t>
+            </a:r>
+            <a:endParaRPr lang="en-US" sz="1250" dirty="0"/>
+          </a:p>
+        </p:txBody>
+      </p:sp>
+    </p:spTree>
+  </p:cSld>
+  <p:clrMapOvr>
+    <a:masterClrMapping/>
+  </p:clrMapOvr>
+</p:sld>
+</file>
+
+<file path=ppt/slides/slide16.xml><?xml version="1.0" encoding="utf-8"?>
+<p:sld xmlns:a="http://schemas.openxmlformats.org/drawingml/2006/main" xmlns:r="http://schemas.openxmlformats.org/officeDocument/2006/relationships" xmlns:p="http://schemas.openxmlformats.org/presentationml/2006/main">
+  <p:cSld>
+    <p:spTree>
+      <p:nvGrpSpPr>
+        <p:cNvPr id="1" name=""/>
+        <p:cNvGrpSpPr/>
+        <p:nvPr/>
+      </p:nvGrpSpPr>
+      <p:grpSpPr>
+        <a:xfrm>
+          <a:off x="0" y="0"/>
+          <a:ext cx="0" cy="0"/>
+          <a:chOff x="0" y="0"/>
+          <a:chExt cx="0" cy="0"/>
+        </a:xfrm>
+      </p:grpSpPr>
+      <p:sp>
+        <p:nvSpPr>
+          <p:cNvPr id="2" name="Text 0"/>
+          <p:cNvSpPr txBox="1"/>
+          <p:nvPr/>
+        </p:nvSpPr>
+        <p:spPr>
+          <a:xfrm>
+            <a:off x="457200" y="274320"/>
+            <a:ext cx="8229600" cy="228600"/>
+          </a:xfrm>
+          <a:prstGeom prst="rect">
+            <a:avLst/>
+          </a:prstGeom>
+          <a:noFill/>
+          <a:ln/>
+        </p:spPr>
+        <p:txBody>
+          <a:bodyPr wrap="square" lIns="0" tIns="0" rIns="0" bIns="0" rtlCol="0" anchor="ctr"/>
+          <a:lstStyle/>
+          <a:p>
+            <a:pPr marL="0" indent="0">
+              <a:buNone/>
+            </a:pPr>
+            <a:r>
+              <a:rPr lang="en-US" sz="1100" b="1" kern="0" spc="200" dirty="0">
+                <a:solidFill>
+                  <a:srgbClr val="028090"/>
+                </a:solidFill>
+                <a:latin typeface="Calibri" pitchFamily="34" charset="0"/>
+                <a:ea typeface="Calibri" pitchFamily="34" charset="-122"/>
+                <a:cs typeface="Calibri" pitchFamily="34" charset="-120"/>
+              </a:rPr>
+              <a:t>THE DATA</a:t>
+            </a:r>
+            <a:endParaRPr lang="en-US" sz="1100" dirty="0"/>
+          </a:p>
+        </p:txBody>
+      </p:sp>
+      <p:sp>
+        <p:nvSpPr>
+          <p:cNvPr id="3" name="Text 1"/>
+          <p:cNvSpPr txBox="1"/>
+          <p:nvPr/>
+        </p:nvSpPr>
+        <p:spPr>
+          <a:xfrm>
+            <a:off x="457200" y="502920"/>
+            <a:ext cx="8229600" cy="548640"/>
+          </a:xfrm>
+          <a:prstGeom prst="rect">
+            <a:avLst/>
+          </a:prstGeom>
+          <a:noFill/>
+          <a:ln/>
+        </p:spPr>
+        <p:txBody>
+          <a:bodyPr wrap="square" lIns="0" tIns="0" rIns="0" bIns="0" rtlCol="0" anchor="ctr"/>
+          <a:lstStyle/>
+          <a:p>
+            <a:pPr marL="0" indent="0">
+              <a:buNone/>
+            </a:pPr>
+            <a:r>
+              <a:rPr lang="en-US" sz="2700" b="1" dirty="0">
+                <a:solidFill>
+                  <a:srgbClr val="16262B"/>
+                </a:solidFill>
+                <a:latin typeface="Cambria" pitchFamily="34" charset="0"/>
+                <a:ea typeface="Cambria" pitchFamily="34" charset="-122"/>
+                <a:cs typeface="Cambria" pitchFamily="34" charset="-120"/>
+              </a:rPr>
+              <a:t>One scan of double track, no vibration data</a:t>
+            </a:r>
+            <a:endParaRPr lang="en-US" sz="2700" dirty="0"/>
+          </a:p>
+        </p:txBody>
+      </p:sp>
+      <p:pic>
+        <p:nvPicPr>
+          <p:cNvPr id="4" name="Picture 3" descr="f1_topdown.png"/>
+          <p:cNvPicPr>
+            <a:picLocks noChangeAspect="1"/>
+          </p:cNvPicPr>
+          <p:nvPr/>
+        </p:nvPicPr>
+        <p:blipFill>
+          <a:blip r:embed="rId2"/>
+          <a:stretch>
+            <a:fillRect/>
+          </a:stretch>
+        </p:blipFill>
+        <p:spPr>
+          <a:xfrm>
+            <a:off x="457200" y="1280160"/>
+            <a:ext cx="4572000" cy="3017520"/>
+          </a:xfrm>
+          <a:prstGeom prst="rect">
+            <a:avLst/>
+          </a:prstGeom>
+        </p:spPr>
+      </p:pic>
+      <p:sp>
+        <p:nvSpPr>
+          <p:cNvPr id="5" name="Text 3"/>
+          <p:cNvSpPr txBox="1"/>
+          <p:nvPr/>
+        </p:nvSpPr>
+        <p:spPr>
+          <a:xfrm>
+            <a:off x="457200" y="4343400"/>
+            <a:ext cx="4572000" cy="237744"/>
+          </a:xfrm>
+          <a:prstGeom prst="rect">
+            <a:avLst/>
+          </a:prstGeom>
+          <a:noFill/>
+          <a:ln/>
+        </p:spPr>
+        <p:txBody>
+          <a:bodyPr wrap="square" lIns="0" tIns="0" rIns="0" bIns="0" rtlCol="0" anchor="ctr"/>
+          <a:lstStyle/>
+          <a:p>
+            <a:pPr marL="0" indent="0">
+              <a:buNone/>
+            </a:pPr>
+            <a:r>
+              <a:rPr lang="en-US" sz="950" i="1" dirty="0">
+                <a:solidFill>
+                  <a:srgbClr val="5F7178"/>
+                </a:solidFill>
+                <a:latin typeface="Calibri" pitchFamily="34" charset="0"/>
+                <a:ea typeface="Calibri" pitchFamily="34" charset="-122"/>
+                <a:cs typeface="Calibri" pitchFamily="34" charset="-120"/>
+              </a:rPr>
+              <a:t>Top-down point density (log scale). Two parallel tracks run through the scan.</a:t>
+            </a:r>
+            <a:endParaRPr lang="en-US" sz="950" dirty="0"/>
+          </a:p>
+        </p:txBody>
+      </p:sp>
+      <p:sp>
+        <p:nvSpPr>
+          <p:cNvPr id="6" name="Shape 4"/>
+          <p:cNvSpPr/>
+          <p:nvPr/>
+        </p:nvSpPr>
+        <p:spPr>
+          <a:xfrm>
+            <a:off x="5257800" y="1325880"/>
+            <a:ext cx="3429000" cy="676656"/>
+          </a:xfrm>
+          <a:prstGeom prst="roundRect">
+            <a:avLst>
+              <a:gd name="adj" fmla="val 9375"/>
+            </a:avLst>
+          </a:prstGeom>
+          <a:solidFill>
+            <a:srgbClr val="EDF5F5"/>
+          </a:solidFill>
+          <a:ln w="12700">
+            <a:solidFill>
+              <a:srgbClr val="EDF5F5"/>
+            </a:solidFill>
+            <a:prstDash val="solid"/>
+          </a:ln>
+        </p:spPr>
+        <p:txBody>
+          <a:bodyPr/>
+          <a:lstStyle/>
+          <a:p>
+            <a:endParaRPr lang="sv-SE"/>
+          </a:p>
+        </p:txBody>
+      </p:sp>
+      <p:sp>
+        <p:nvSpPr>
+          <p:cNvPr id="7" name="Text 5"/>
+          <p:cNvSpPr txBox="1"/>
+          <p:nvPr/>
+        </p:nvSpPr>
+        <p:spPr>
+          <a:xfrm>
+            <a:off x="5367528" y="1325880"/>
+            <a:ext cx="1005840" cy="676656"/>
+          </a:xfrm>
+          <a:prstGeom prst="rect">
+            <a:avLst/>
+          </a:prstGeom>
+          <a:noFill/>
+          <a:ln/>
+        </p:spPr>
+        <p:txBody>
+          <a:bodyPr wrap="square" lIns="0" tIns="0" rIns="0" bIns="0" rtlCol="0" anchor="ctr"/>
+          <a:lstStyle/>
+          <a:p>
+            <a:pPr marL="0" indent="0" algn="ctr">
+              <a:buNone/>
+            </a:pPr>
+            <a:r>
+              <a:rPr lang="en-US" sz="1800" b="1" dirty="0">
+                <a:solidFill>
+                  <a:srgbClr val="028090"/>
+                </a:solidFill>
+                <a:latin typeface="Cambria" pitchFamily="34" charset="0"/>
+                <a:ea typeface="Cambria" pitchFamily="34" charset="-122"/>
+                <a:cs typeface="Cambria" pitchFamily="34" charset="-120"/>
+              </a:rPr>
+              <a:t>15.9 M</a:t>
+            </a:r>
+            <a:endParaRPr lang="en-US" sz="1800" dirty="0"/>
+          </a:p>
+        </p:txBody>
+      </p:sp>
+      <p:sp>
+        <p:nvSpPr>
+          <p:cNvPr id="8" name="Text 6"/>
+          <p:cNvSpPr txBox="1"/>
+          <p:nvPr/>
+        </p:nvSpPr>
+        <p:spPr>
+          <a:xfrm>
+            <a:off x="6446520" y="1399032"/>
+            <a:ext cx="2148840" cy="237744"/>
+          </a:xfrm>
+          <a:prstGeom prst="rect">
+            <a:avLst/>
+          </a:prstGeom>
+          <a:noFill/>
+          <a:ln/>
+        </p:spPr>
+        <p:txBody>
+          <a:bodyPr wrap="square" lIns="0" tIns="0" rIns="0" bIns="0" rtlCol="0" anchor="ctr"/>
+          <a:lstStyle/>
+          <a:p>
+            <a:pPr marL="0" indent="0">
+              <a:buNone/>
+            </a:pPr>
+            <a:r>
+              <a:rPr lang="en-US" sz="1100" b="1" dirty="0">
+                <a:solidFill>
+                  <a:srgbClr val="16262B"/>
+                </a:solidFill>
+                <a:latin typeface="Calibri" pitchFamily="34" charset="0"/>
+                <a:ea typeface="Calibri" pitchFamily="34" charset="-122"/>
+                <a:cs typeface="Calibri" pitchFamily="34" charset="-120"/>
+              </a:rPr>
+              <a:t>points in one LAZ file</a:t>
+            </a:r>
+            <a:endParaRPr lang="en-US" sz="1100" dirty="0"/>
+          </a:p>
+        </p:txBody>
+      </p:sp>
+      <p:sp>
+        <p:nvSpPr>
+          <p:cNvPr id="9" name="Text 7"/>
+          <p:cNvSpPr txBox="1"/>
+          <p:nvPr/>
+        </p:nvSpPr>
+        <p:spPr>
+          <a:xfrm>
+            <a:off x="6446520" y="1636776"/>
+            <a:ext cx="2148840" cy="310896"/>
+          </a:xfrm>
+          <a:prstGeom prst="rect">
+            <a:avLst/>
+          </a:prstGeom>
+          <a:noFill/>
+          <a:ln/>
+        </p:spPr>
+        <p:txBody>
+          <a:bodyPr wrap="square" lIns="0" tIns="0" rIns="0" bIns="0" rtlCol="0" anchor="ctr"/>
+          <a:lstStyle/>
+          <a:p>
+            <a:pPr marL="0" indent="0">
+              <a:buNone/>
+            </a:pPr>
+            <a:r>
+              <a:rPr lang="en-US" sz="900" dirty="0">
+                <a:solidFill>
+                  <a:srgbClr val="5F7178"/>
+                </a:solidFill>
+                <a:latin typeface="Calibri" pitchFamily="34" charset="0"/>
+                <a:ea typeface="Calibri" pitchFamily="34" charset="-122"/>
+                <a:cs typeface="Calibri" pitchFamily="34" charset="-120"/>
+              </a:rPr>
+              <a:t>47 MB, LAS 1.2, point format 0</a:t>
+            </a:r>
+            <a:endParaRPr lang="en-US" sz="900" dirty="0"/>
+          </a:p>
+        </p:txBody>
+      </p:sp>
+      <p:sp>
+        <p:nvSpPr>
+          <p:cNvPr id="10" name="Shape 4"/>
+          <p:cNvSpPr/>
+          <p:nvPr/>
+        </p:nvSpPr>
+        <p:spPr>
+          <a:xfrm>
+            <a:off x="5257800" y="2093976"/>
+            <a:ext cx="3429000" cy="676656"/>
+          </a:xfrm>
+          <a:prstGeom prst="roundRect">
+            <a:avLst>
+              <a:gd name="adj" fmla="val 9375"/>
+            </a:avLst>
+          </a:prstGeom>
+          <a:solidFill>
+            <a:srgbClr val="EDF5F5"/>
+          </a:solidFill>
+          <a:ln w="12700">
+            <a:solidFill>
+              <a:srgbClr val="EDF5F5"/>
+            </a:solidFill>
+            <a:prstDash val="solid"/>
+          </a:ln>
+        </p:spPr>
+        <p:txBody>
+          <a:bodyPr/>
+          <a:lstStyle/>
+          <a:p>
+            <a:endParaRPr lang="sv-SE"/>
+          </a:p>
+        </p:txBody>
+      </p:sp>
+      <p:sp>
+        <p:nvSpPr>
+          <p:cNvPr id="11" name="Text 5"/>
+          <p:cNvSpPr txBox="1"/>
+          <p:nvPr/>
+        </p:nvSpPr>
+        <p:spPr>
+          <a:xfrm>
+            <a:off x="5367528" y="2093976"/>
+            <a:ext cx="1005840" cy="676656"/>
+          </a:xfrm>
+          <a:prstGeom prst="rect">
+            <a:avLst/>
+          </a:prstGeom>
+          <a:noFill/>
+          <a:ln/>
+        </p:spPr>
+        <p:txBody>
+          <a:bodyPr wrap="square" lIns="0" tIns="0" rIns="0" bIns="0" rtlCol="0" anchor="ctr"/>
+          <a:lstStyle/>
+          <a:p>
+            <a:pPr marL="0" indent="0" algn="ctr">
+              <a:buNone/>
+            </a:pPr>
+            <a:r>
+              <a:rPr lang="en-US" sz="1800" b="1" dirty="0">
+                <a:solidFill>
+                  <a:srgbClr val="028090"/>
+                </a:solidFill>
+                <a:latin typeface="Cambria" pitchFamily="34" charset="0"/>
+                <a:ea typeface="Cambria" pitchFamily="34" charset="-122"/>
+                <a:cs typeface="Cambria" pitchFamily="34" charset="-120"/>
+              </a:rPr>
+              <a:t>≈ 260 m</a:t>
+            </a:r>
+            <a:endParaRPr lang="en-US" sz="1800" dirty="0"/>
+          </a:p>
+        </p:txBody>
+      </p:sp>
+      <p:sp>
+        <p:nvSpPr>
+          <p:cNvPr id="12" name="Text 6"/>
+          <p:cNvSpPr txBox="1"/>
+          <p:nvPr/>
+        </p:nvSpPr>
+        <p:spPr>
+          <a:xfrm>
+            <a:off x="6446520" y="2167128"/>
+            <a:ext cx="2148840" cy="237744"/>
+          </a:xfrm>
+          <a:prstGeom prst="rect">
+            <a:avLst/>
+          </a:prstGeom>
+          <a:noFill/>
+          <a:ln/>
+        </p:spPr>
+        <p:txBody>
+          <a:bodyPr wrap="square" lIns="0" tIns="0" rIns="0" bIns="0" rtlCol="0" anchor="ctr"/>
+          <a:lstStyle/>
+          <a:p>
+            <a:pPr marL="0" indent="0">
+              <a:buNone/>
+            </a:pPr>
+            <a:r>
+              <a:rPr lang="en-US" sz="1100" b="1" dirty="0">
+                <a:solidFill>
+                  <a:srgbClr val="16262B"/>
+                </a:solidFill>
+                <a:latin typeface="Calibri" pitchFamily="34" charset="0"/>
+                <a:ea typeface="Calibri" pitchFamily="34" charset="-122"/>
+                <a:cs typeface="Calibri" pitchFamily="34" charset="-120"/>
+              </a:rPr>
+              <a:t>of track, with one gentle curve</a:t>
+            </a:r>
+            <a:endParaRPr lang="en-US" sz="1100" dirty="0"/>
+          </a:p>
+        </p:txBody>
+      </p:sp>
+      <p:sp>
+        <p:nvSpPr>
+          <p:cNvPr id="13" name="Text 7"/>
+          <p:cNvSpPr txBox="1"/>
+          <p:nvPr/>
+        </p:nvSpPr>
+        <p:spPr>
+          <a:xfrm>
+            <a:off x="6446520" y="2404872"/>
+            <a:ext cx="2148840" cy="310896"/>
+          </a:xfrm>
+          <a:prstGeom prst="rect">
+            <a:avLst/>
+          </a:prstGeom>
+          <a:noFill/>
+          <a:ln/>
+        </p:spPr>
+        <p:txBody>
+          <a:bodyPr wrap="square" lIns="0" tIns="0" rIns="0" bIns="0" rtlCol="0" anchor="ctr"/>
+          <a:lstStyle/>
+          <a:p>
+            <a:pPr marL="0" indent="0">
+              <a:buNone/>
+            </a:pPr>
+            <a:r>
+              <a:rPr lang="en-US" sz="900" dirty="0">
+                <a:solidFill>
+                  <a:srgbClr val="5F7178"/>
+                </a:solidFill>
+                <a:latin typeface="Calibri" pitchFamily="34" charset="0"/>
+                <a:ea typeface="Calibri" pitchFamily="34" charset="-122"/>
+                <a:cs typeface="Calibri" pitchFamily="34" charset="-120"/>
+              </a:rPr>
+              <a:t>straight for most of the scan, curving at the start</a:t>
+            </a:r>
+            <a:endParaRPr lang="en-US" sz="900" dirty="0"/>
+          </a:p>
+        </p:txBody>
+      </p:sp>
+      <p:sp>
+        <p:nvSpPr>
+          <p:cNvPr id="14" name="Shape 4"/>
+          <p:cNvSpPr/>
+          <p:nvPr/>
+        </p:nvSpPr>
+        <p:spPr>
+          <a:xfrm>
+            <a:off x="5257800" y="2862072"/>
+            <a:ext cx="3429000" cy="676656"/>
+          </a:xfrm>
+          <a:prstGeom prst="roundRect">
+            <a:avLst>
+              <a:gd name="adj" fmla="val 9375"/>
+            </a:avLst>
+          </a:prstGeom>
+          <a:solidFill>
+            <a:srgbClr val="EDF5F5"/>
+          </a:solidFill>
+          <a:ln w="12700">
+            <a:solidFill>
+              <a:srgbClr val="EDF5F5"/>
+            </a:solidFill>
+            <a:prstDash val="solid"/>
+          </a:ln>
+        </p:spPr>
+        <p:txBody>
+          <a:bodyPr/>
+          <a:lstStyle/>
+          <a:p>
+            <a:endParaRPr lang="sv-SE"/>
+          </a:p>
+        </p:txBody>
+      </p:sp>
+      <p:sp>
+        <p:nvSpPr>
+          <p:cNvPr id="15" name="Text 5"/>
+          <p:cNvSpPr txBox="1"/>
+          <p:nvPr/>
+        </p:nvSpPr>
+        <p:spPr>
+          <a:xfrm>
+            <a:off x="5367528" y="2862072"/>
+            <a:ext cx="1005840" cy="676656"/>
+          </a:xfrm>
+          <a:prstGeom prst="rect">
+            <a:avLst/>
+          </a:prstGeom>
+          <a:noFill/>
+          <a:ln/>
+        </p:spPr>
+        <p:txBody>
+          <a:bodyPr wrap="square" lIns="0" tIns="0" rIns="0" bIns="0" rtlCol="0" anchor="ctr"/>
+          <a:lstStyle/>
+          <a:p>
+            <a:pPr marL="0" indent="0" algn="ctr">
+              <a:buNone/>
+            </a:pPr>
+            <a:r>
+              <a:rPr lang="en-US" sz="1800" b="1" dirty="0">
+                <a:solidFill>
+                  <a:srgbClr val="028090"/>
+                </a:solidFill>
+                <a:latin typeface="Cambria" pitchFamily="34" charset="0"/>
+                <a:ea typeface="Cambria" pitchFamily="34" charset="-122"/>
+                <a:cs typeface="Cambria" pitchFamily="34" charset="-120"/>
+              </a:rPr>
+              <a:t>2</a:t>
+            </a:r>
+            <a:endParaRPr lang="en-US" sz="1800" dirty="0"/>
+          </a:p>
+        </p:txBody>
+      </p:sp>
+      <p:sp>
+        <p:nvSpPr>
+          <p:cNvPr id="16" name="Text 6"/>
+          <p:cNvSpPr txBox="1"/>
+          <p:nvPr/>
+        </p:nvSpPr>
+        <p:spPr>
+          <a:xfrm>
+            <a:off x="6446520" y="2935224"/>
+            <a:ext cx="2148840" cy="237744"/>
+          </a:xfrm>
+          <a:prstGeom prst="rect">
+            <a:avLst/>
+          </a:prstGeom>
+          <a:noFill/>
+          <a:ln/>
+        </p:spPr>
+        <p:txBody>
+          <a:bodyPr wrap="square" lIns="0" tIns="0" rIns="0" bIns="0" rtlCol="0" anchor="ctr"/>
+          <a:lstStyle/>
+          <a:p>
+            <a:pPr marL="0" indent="0">
+              <a:buNone/>
+            </a:pPr>
+            <a:r>
+              <a:rPr lang="en-US" sz="1100" b="1" dirty="0">
+                <a:solidFill>
+                  <a:srgbClr val="16262B"/>
+                </a:solidFill>
+                <a:latin typeface="Calibri" pitchFamily="34" charset="0"/>
+                <a:ea typeface="Calibri" pitchFamily="34" charset="-122"/>
+                <a:cs typeface="Calibri" pitchFamily="34" charset="-120"/>
+              </a:rPr>
+              <a:t>tracks in the scan</a:t>
+            </a:r>
+            <a:endParaRPr lang="en-US" sz="1100" dirty="0"/>
+          </a:p>
+        </p:txBody>
+      </p:sp>
+      <p:sp>
+        <p:nvSpPr>
+          <p:cNvPr id="17" name="Text 7"/>
+          <p:cNvSpPr txBox="1"/>
+          <p:nvPr/>
+        </p:nvSpPr>
+        <p:spPr>
+          <a:xfrm>
+            <a:off x="6446520" y="3172968"/>
+            <a:ext cx="2148840" cy="310896"/>
+          </a:xfrm>
+          <a:prstGeom prst="rect">
+            <a:avLst/>
+          </a:prstGeom>
+          <a:noFill/>
+          <a:ln/>
+        </p:spPr>
+        <p:txBody>
+          <a:bodyPr wrap="square" lIns="0" tIns="0" rIns="0" bIns="0" rtlCol="0" anchor="ctr"/>
+          <a:lstStyle/>
+          <a:p>
+            <a:pPr marL="0" indent="0">
+              <a:buNone/>
+            </a:pPr>
+            <a:r>
+              <a:rPr lang="en-US" sz="900" dirty="0">
+                <a:solidFill>
+                  <a:srgbClr val="5F7178"/>
+                </a:solidFill>
+                <a:latin typeface="Calibri" pitchFamily="34" charset="0"/>
+                <a:ea typeface="Calibri" pitchFamily="34" charset="-122"/>
+                <a:cs typeface="Calibri" pitchFamily="34" charset="-120"/>
+              </a:rPr>
+              <a:t>the LiDAR rode the left one, so we work on that track</a:t>
+            </a:r>
+            <a:endParaRPr lang="en-US" sz="900" dirty="0"/>
+          </a:p>
+        </p:txBody>
+      </p:sp>
+      <p:sp>
+        <p:nvSpPr>
+          <p:cNvPr id="18" name="Shape 4"/>
+          <p:cNvSpPr/>
+          <p:nvPr/>
+        </p:nvSpPr>
+        <p:spPr>
+          <a:xfrm>
+            <a:off x="5257800" y="3630168"/>
+            <a:ext cx="3429000" cy="676656"/>
+          </a:xfrm>
+          <a:prstGeom prst="roundRect">
+            <a:avLst>
+              <a:gd name="adj" fmla="val 9375"/>
+            </a:avLst>
+          </a:prstGeom>
+          <a:solidFill>
+            <a:srgbClr val="EDF5F5"/>
+          </a:solidFill>
+          <a:ln w="12700">
+            <a:solidFill>
+              <a:srgbClr val="EDF5F5"/>
+            </a:solidFill>
+            <a:prstDash val="solid"/>
+          </a:ln>
+        </p:spPr>
+        <p:txBody>
+          <a:bodyPr/>
+          <a:lstStyle/>
+          <a:p>
+            <a:endParaRPr lang="sv-SE"/>
+          </a:p>
+        </p:txBody>
+      </p:sp>
+      <p:sp>
+        <p:nvSpPr>
+          <p:cNvPr id="19" name="Text 5"/>
+          <p:cNvSpPr txBox="1"/>
+          <p:nvPr/>
+        </p:nvSpPr>
+        <p:spPr>
+          <a:xfrm>
+            <a:off x="5367528" y="3630168"/>
+            <a:ext cx="1005840" cy="676656"/>
+          </a:xfrm>
+          <a:prstGeom prst="rect">
+            <a:avLst/>
+          </a:prstGeom>
+          <a:noFill/>
+          <a:ln/>
+        </p:spPr>
+        <p:txBody>
+          <a:bodyPr wrap="square" lIns="0" tIns="0" rIns="0" bIns="0" rtlCol="0" anchor="ctr"/>
+          <a:lstStyle/>
+          <a:p>
+            <a:pPr marL="0" indent="0" algn="ctr">
+              <a:buNone/>
+            </a:pPr>
+            <a:r>
+              <a:rPr lang="en-US" sz="1800" b="1" dirty="0">
+                <a:solidFill>
+                  <a:srgbClr val="028090"/>
+                </a:solidFill>
+                <a:latin typeface="Cambria" pitchFamily="34" charset="0"/>
+                <a:ea typeface="Cambria" pitchFamily="34" charset="-122"/>
+                <a:cs typeface="Cambria" pitchFamily="34" charset="-120"/>
+              </a:rPr>
+              <a:t>0</a:t>
+            </a:r>
+            <a:endParaRPr lang="en-US" sz="1800" dirty="0"/>
+          </a:p>
+        </p:txBody>
+      </p:sp>
+      <p:sp>
+        <p:nvSpPr>
+          <p:cNvPr id="20" name="Text 6"/>
+          <p:cNvSpPr txBox="1"/>
+          <p:nvPr/>
+        </p:nvSpPr>
+        <p:spPr>
+          <a:xfrm>
+            <a:off x="6446520" y="3703320"/>
+            <a:ext cx="2148840" cy="237744"/>
+          </a:xfrm>
+          <a:prstGeom prst="rect">
+            <a:avLst/>
+          </a:prstGeom>
+          <a:noFill/>
+          <a:ln/>
+        </p:spPr>
+        <p:txBody>
+          <a:bodyPr wrap="square" lIns="0" tIns="0" rIns="0" bIns="0" rtlCol="0" anchor="ctr"/>
+          <a:lstStyle/>
+          <a:p>
+            <a:pPr marL="0" indent="0">
+              <a:buNone/>
+            </a:pPr>
+            <a:r>
+              <a:rPr lang="en-US" sz="1100" b="1" dirty="0">
+                <a:solidFill>
+                  <a:srgbClr val="16262B"/>
+                </a:solidFill>
+                <a:latin typeface="Calibri" pitchFamily="34" charset="0"/>
+                <a:ea typeface="Calibri" pitchFamily="34" charset="-122"/>
+                <a:cs typeface="Calibri" pitchFamily="34" charset="-120"/>
+              </a:rPr>
+              <a:t>timestamps or coordinate system</a:t>
+            </a:r>
+            <a:endParaRPr lang="en-US" sz="1100" dirty="0"/>
+          </a:p>
+        </p:txBody>
+      </p:sp>
+      <p:sp>
+        <p:nvSpPr>
+          <p:cNvPr id="21" name="Text 7"/>
+          <p:cNvSpPr txBox="1"/>
+          <p:nvPr/>
+        </p:nvSpPr>
+        <p:spPr>
+          <a:xfrm>
+            <a:off x="6446520" y="3941063"/>
+            <a:ext cx="2148840" cy="310896"/>
+          </a:xfrm>
+          <a:prstGeom prst="rect">
+            <a:avLst/>
+          </a:prstGeom>
+          <a:noFill/>
+          <a:ln/>
+        </p:spPr>
+        <p:txBody>
+          <a:bodyPr wrap="square" lIns="0" tIns="0" rIns="0" bIns="0" rtlCol="0" anchor="ctr"/>
+          <a:lstStyle/>
+          <a:p>
+            <a:pPr marL="0" indent="0">
+              <a:buNone/>
+            </a:pPr>
+            <a:r>
+              <a:rPr lang="en-US" sz="900" dirty="0">
+                <a:solidFill>
+                  <a:srgbClr val="5F7178"/>
+                </a:solidFill>
+                <a:latin typeface="Calibri" pitchFamily="34" charset="0"/>
+                <a:ea typeface="Calibri" pitchFamily="34" charset="-122"/>
+                <a:cs typeface="Calibri" pitchFamily="34" charset="-120"/>
+              </a:rPr>
+              <a:t>only intensity is stored besides X, Y and Z</a:t>
+            </a:r>
+            <a:endParaRPr lang="en-US" sz="900" dirty="0"/>
+          </a:p>
+        </p:txBody>
+      </p:sp>
+    </p:spTree>
+  </p:cSld>
+  <p:clrMapOvr>
+    <a:masterClrMapping/>
+  </p:clrMapOvr>
+</p:sld>
+</file>
+
+<file path=ppt/slides/slide17.xml><?xml version="1.0" encoding="utf-8"?>
+<p:sld xmlns:a="http://schemas.openxmlformats.org/drawingml/2006/main" xmlns:r="http://schemas.openxmlformats.org/officeDocument/2006/relationships" xmlns:p="http://schemas.openxmlformats.org/presentationml/2006/main">
+  <p:cSld>
+    <p:spTree>
+      <p:nvGrpSpPr>
+        <p:cNvPr id="1" name=""/>
+        <p:cNvGrpSpPr/>
+        <p:nvPr/>
+      </p:nvGrpSpPr>
+      <p:grpSpPr>
+        <a:xfrm>
+          <a:off x="0" y="0"/>
+          <a:ext cx="0" cy="0"/>
+          <a:chOff x="0" y="0"/>
+          <a:chExt cx="0" cy="0"/>
+        </a:xfrm>
+      </p:grpSpPr>
+      <p:sp>
+        <p:nvSpPr>
+          <p:cNvPr id="2" name="Text 0"/>
+          <p:cNvSpPr txBox="1"/>
+          <p:nvPr/>
+        </p:nvSpPr>
+        <p:spPr>
+          <a:xfrm>
+            <a:off x="457200" y="274320"/>
+            <a:ext cx="8229600" cy="228600"/>
+          </a:xfrm>
+          <a:prstGeom prst="rect">
+            <a:avLst/>
+          </a:prstGeom>
+          <a:noFill/>
+          <a:ln/>
+        </p:spPr>
+        <p:txBody>
+          <a:bodyPr wrap="square" lIns="0" tIns="0" rIns="0" bIns="0" rtlCol="0" anchor="ctr"/>
+          <a:lstStyle/>
+          <a:p>
+            <a:pPr marL="0" indent="0">
+              <a:buNone/>
+            </a:pPr>
+            <a:r>
+              <a:rPr lang="en-US" sz="1100" b="1" kern="0" spc="200" dirty="0">
+                <a:solidFill>
+                  <a:srgbClr val="028090"/>
+                </a:solidFill>
+                <a:latin typeface="Calibri" pitchFamily="34" charset="0"/>
+                <a:ea typeface="Calibri" pitchFamily="34" charset="-122"/>
+                <a:cs typeface="Calibri" pitchFamily="34" charset="-120"/>
+              </a:rPr>
+              <a:t>DIRECTION</a:t>
+            </a:r>
+            <a:endParaRPr lang="en-US" sz="1100" dirty="0"/>
+          </a:p>
+        </p:txBody>
+      </p:sp>
+      <p:sp>
+        <p:nvSpPr>
+          <p:cNvPr id="3" name="Text 1"/>
+          <p:cNvSpPr txBox="1"/>
+          <p:nvPr/>
+        </p:nvSpPr>
+        <p:spPr>
+          <a:xfrm>
+            <a:off x="457200" y="502920"/>
+            <a:ext cx="8229600" cy="548640"/>
+          </a:xfrm>
+          <a:prstGeom prst="rect">
+            <a:avLst/>
+          </a:prstGeom>
+          <a:noFill/>
+          <a:ln/>
+        </p:spPr>
+        <p:txBody>
+          <a:bodyPr wrap="square" lIns="0" tIns="0" rIns="0" bIns="0" rtlCol="0" anchor="ctr"/>
+          <a:lstStyle/>
+          <a:p>
+            <a:pPr marL="0" indent="0">
+              <a:buNone/>
+            </a:pPr>
+            <a:r>
+              <a:rPr lang="en-US" sz="2700" b="1" dirty="0">
+                <a:solidFill>
+                  <a:srgbClr val="16262B"/>
+                </a:solidFill>
+                <a:latin typeface="Cambria" pitchFamily="34" charset="0"/>
+                <a:ea typeface="Cambria" pitchFamily="34" charset="-122"/>
+                <a:cs typeface="Cambria" pitchFamily="34" charset="-120"/>
+              </a:rPr>
+              <a:t>From fault types to change over time</a:t>
+            </a:r>
+            <a:endParaRPr lang="en-US" sz="2700" dirty="0"/>
+          </a:p>
+        </p:txBody>
+      </p:sp>
+      <p:sp>
+        <p:nvSpPr>
+          <p:cNvPr id="4" name="Shape 4"/>
+          <p:cNvSpPr/>
+          <p:nvPr/>
+        </p:nvSpPr>
+        <p:spPr>
+          <a:xfrm>
+            <a:off x="457200" y="1325880"/>
+            <a:ext cx="3611880" cy="1691640"/>
+          </a:xfrm>
+          <a:prstGeom prst="roundRect">
+            <a:avLst>
+              <a:gd name="adj" fmla="val 9375"/>
+            </a:avLst>
+          </a:prstGeom>
+          <a:solidFill>
+            <a:srgbClr val="EDF5F5"/>
+          </a:solidFill>
+          <a:ln w="12700">
+            <a:solidFill>
+              <a:srgbClr val="EDF5F5"/>
+            </a:solidFill>
+            <a:prstDash val="solid"/>
+          </a:ln>
+        </p:spPr>
+        <p:txBody>
+          <a:bodyPr/>
+          <a:lstStyle/>
+          <a:p>
+            <a:endParaRPr lang="sv-SE"/>
+          </a:p>
+        </p:txBody>
+      </p:sp>
+      <p:sp>
+        <p:nvSpPr>
+          <p:cNvPr id="5" name="TextBox 4"/>
+          <p:cNvSpPr txBox="1"/>
+          <p:nvPr/>
+        </p:nvSpPr>
+        <p:spPr>
+          <a:xfrm>
+            <a:off x="685800" y="1481328"/>
+            <a:ext cx="3200400" cy="228600"/>
+          </a:xfrm>
+          <a:prstGeom prst="rect">
+            <a:avLst/>
+          </a:prstGeom>
+          <a:noFill/>
+        </p:spPr>
+        <p:txBody>
+          <a:bodyPr wrap="square" lIns="0" tIns="0" rIns="0" bIns="0" anchor="t">
+            <a:spAutoFit/>
+          </a:bodyPr>
+          <a:lstStyle/>
+          <a:p>
+            <a:r>
+              <a:rPr sz="1100" b="1" spc="200">
+                <a:solidFill>
+                  <a:srgbClr val="5F7178"/>
+                </a:solidFill>
+                <a:latin typeface="Calibri"/>
+              </a:rPr>
+              <a:t>BEFORE</a:t>
+            </a:r>
+          </a:p>
+        </p:txBody>
+      </p:sp>
+      <p:sp>
+        <p:nvSpPr>
+          <p:cNvPr id="6" name="TextBox 5"/>
+          <p:cNvSpPr txBox="1"/>
+          <p:nvPr/>
+        </p:nvSpPr>
+        <p:spPr>
+          <a:xfrm>
+            <a:off x="685800" y="1755648"/>
+            <a:ext cx="3200400" cy="274320"/>
+          </a:xfrm>
+          <a:prstGeom prst="rect">
+            <a:avLst/>
+          </a:prstGeom>
+          <a:noFill/>
+        </p:spPr>
+        <p:txBody>
+          <a:bodyPr wrap="square" lIns="0" tIns="0" rIns="0" bIns="0" anchor="t">
+            <a:spAutoFit/>
+          </a:bodyPr>
+          <a:lstStyle/>
+          <a:p>
+            <a:r>
+              <a:rPr sz="1500" b="1">
+                <a:solidFill>
+                  <a:srgbClr val="5F7178"/>
+                </a:solidFill>
+                <a:latin typeface="Calibri"/>
+              </a:rPr>
+              <a:t>Link vibration events to geometry</a:t>
+            </a:r>
+          </a:p>
+        </p:txBody>
+      </p:sp>
+      <p:sp>
+        <p:nvSpPr>
+          <p:cNvPr id="7" name="TextBox 6"/>
+          <p:cNvSpPr txBox="1"/>
+          <p:nvPr/>
+        </p:nvSpPr>
+        <p:spPr>
+          <a:xfrm>
+            <a:off x="685800" y="2157984"/>
+            <a:ext cx="3200400" cy="777240"/>
+          </a:xfrm>
+          <a:prstGeom prst="rect">
+            <a:avLst/>
+          </a:prstGeom>
+          <a:noFill/>
+        </p:spPr>
+        <p:txBody>
+          <a:bodyPr wrap="square" lIns="0" tIns="0" rIns="0" bIns="0" anchor="t">
+            <a:spAutoFit/>
+          </a:bodyPr>
+          <a:lstStyle/>
+          <a:p>
+            <a:r>
+              <a:rPr sz="1150" b="0">
+                <a:solidFill>
+                  <a:srgbClr val="5F7178"/>
+                </a:solidFill>
+                <a:latin typeface="Calibri"/>
+              </a:rPr>
+              <a:t>Cluster the abnormal vibration events by their geometry, then predict the fault type from vibration alone.</a:t>
+            </a:r>
+          </a:p>
+        </p:txBody>
+      </p:sp>
+      <p:sp>
+        <p:nvSpPr>
+          <p:cNvPr id="8" name="Right Arrow 7"/>
+          <p:cNvSpPr/>
+          <p:nvPr/>
+        </p:nvSpPr>
+        <p:spPr>
+          <a:xfrm>
+            <a:off x="4206240" y="1965960"/>
+            <a:ext cx="731520" cy="457200"/>
+          </a:xfrm>
+          <a:prstGeom prst="rightArrow">
+            <a:avLst/>
+          </a:prstGeom>
+          <a:solidFill>
+            <a:srgbClr val="028090"/>
+          </a:solidFill>
+          <a:ln>
+            <a:noFill/>
+          </a:ln>
+        </p:spPr>
+        <p:style>
+          <a:lnRef idx="1">
+            <a:schemeClr val="accent1"/>
+          </a:lnRef>
+          <a:fillRef idx="3">
+            <a:schemeClr val="accent1"/>
+          </a:fillRef>
+          <a:effectRef idx="2">
+            <a:schemeClr val="accent1"/>
+          </a:effectRef>
+          <a:fontRef idx="minor">
+            <a:schemeClr val="lt1"/>
+          </a:fontRef>
+        </p:style>
+        <p:txBody>
+          <a:bodyPr rtlCol="0" anchor="ctr"/>
+          <a:lstStyle/>
+          <a:p>
+            <a:pPr algn="ctr"/>
+            <a:endParaRPr/>
+          </a:p>
+        </p:txBody>
+      </p:sp>
+      <p:sp>
+        <p:nvSpPr>
+          <p:cNvPr id="9" name="Shape 16"/>
+          <p:cNvSpPr/>
+          <p:nvPr/>
+        </p:nvSpPr>
+        <p:spPr>
+          <a:xfrm>
+            <a:off x="5074920" y="1325880"/>
+            <a:ext cx="3611880" cy="1691640"/>
+          </a:xfrm>
+          <a:prstGeom prst="roundRect">
+            <a:avLst>
+              <a:gd name="adj" fmla="val 9091"/>
+            </a:avLst>
+          </a:prstGeom>
+          <a:solidFill>
+            <a:srgbClr val="0B2027"/>
+          </a:solidFill>
+          <a:ln w="12700">
+            <a:solidFill>
+              <a:srgbClr val="0B2027"/>
+            </a:solidFill>
+            <a:prstDash val="solid"/>
+          </a:ln>
+        </p:spPr>
+        <p:txBody>
+          <a:bodyPr/>
+          <a:lstStyle/>
+          <a:p>
+            <a:endParaRPr lang="sv-SE"/>
+          </a:p>
+        </p:txBody>
+      </p:sp>
+      <p:sp>
+        <p:nvSpPr>
+          <p:cNvPr id="10" name="TextBox 9"/>
+          <p:cNvSpPr txBox="1"/>
+          <p:nvPr/>
+        </p:nvSpPr>
+        <p:spPr>
+          <a:xfrm>
+            <a:off x="5303520" y="1481328"/>
+            <a:ext cx="3200400" cy="228600"/>
+          </a:xfrm>
+          <a:prstGeom prst="rect">
+            <a:avLst/>
+          </a:prstGeom>
+          <a:noFill/>
+        </p:spPr>
+        <p:txBody>
+          <a:bodyPr wrap="square" lIns="0" tIns="0" rIns="0" bIns="0" anchor="t">
+            <a:spAutoFit/>
+          </a:bodyPr>
+          <a:lstStyle/>
+          <a:p>
+            <a:r>
+              <a:rPr sz="1100" b="1" spc="200">
+                <a:solidFill>
+                  <a:srgbClr val="00A896"/>
+                </a:solidFill>
+                <a:latin typeface="Calibri"/>
+              </a:rPr>
+              <a:t>NOW</a:t>
+            </a:r>
+          </a:p>
+        </p:txBody>
+      </p:sp>
+      <p:sp>
+        <p:nvSpPr>
+          <p:cNvPr id="11" name="TextBox 10"/>
+          <p:cNvSpPr txBox="1"/>
+          <p:nvPr/>
+        </p:nvSpPr>
+        <p:spPr>
+          <a:xfrm>
+            <a:off x="5303520" y="1755648"/>
+            <a:ext cx="3200400" cy="274320"/>
+          </a:xfrm>
+          <a:prstGeom prst="rect">
+            <a:avLst/>
+          </a:prstGeom>
+          <a:noFill/>
+        </p:spPr>
+        <p:txBody>
+          <a:bodyPr wrap="square" lIns="0" tIns="0" rIns="0" bIns="0" anchor="t">
+            <a:spAutoFit/>
+          </a:bodyPr>
+          <a:lstStyle/>
+          <a:p>
+            <a:r>
+              <a:rPr sz="1500" b="1">
+                <a:solidFill>
+                  <a:srgbClr val="FFFFFF"/>
+                </a:solidFill>
+                <a:latin typeface="Calibri"/>
+              </a:rPr>
+              <a:t>Follow the track over time</a:t>
+            </a:r>
+          </a:p>
+        </p:txBody>
+      </p:sp>
+      <p:sp>
+        <p:nvSpPr>
+          <p:cNvPr id="12" name="TextBox 11"/>
+          <p:cNvSpPr txBox="1"/>
+          <p:nvPr/>
+        </p:nvSpPr>
+        <p:spPr>
+          <a:xfrm>
+            <a:off x="5303520" y="2157984"/>
+            <a:ext cx="3200400" cy="777240"/>
+          </a:xfrm>
+          <a:prstGeom prst="rect">
+            <a:avLst/>
+          </a:prstGeom>
+          <a:noFill/>
+        </p:spPr>
+        <p:txBody>
+          <a:bodyPr wrap="square" lIns="0" tIns="0" rIns="0" bIns="0" anchor="t">
+            <a:spAutoFit/>
+          </a:bodyPr>
+          <a:lstStyle/>
+          <a:p>
+            <a:r>
+              <a:rPr sz="1150" b="0">
+                <a:solidFill>
+                  <a:srgbClr val="C7D8DB"/>
+                </a:solidFill>
+                <a:latin typeface="Calibri"/>
+              </a:rPr>
+              <a:t>Represent every run as a 3D curve and compare runs of the same track, to see where faults appear and how they grow.</a:t>
+            </a:r>
+          </a:p>
+        </p:txBody>
+      </p:sp>
+      <p:sp>
+        <p:nvSpPr>
+          <p:cNvPr id="13" name="Shape 4"/>
+          <p:cNvSpPr/>
+          <p:nvPr/>
+        </p:nvSpPr>
+        <p:spPr>
+          <a:xfrm>
+            <a:off x="457200" y="3200400"/>
+            <a:ext cx="8229600" cy="777240"/>
+          </a:xfrm>
+          <a:prstGeom prst="roundRect">
+            <a:avLst>
+              <a:gd name="adj" fmla="val 9375"/>
+            </a:avLst>
+          </a:prstGeom>
+          <a:solidFill>
+            <a:srgbClr val="EDF5F5"/>
+          </a:solidFill>
+          <a:ln w="12700">
+            <a:solidFill>
+              <a:srgbClr val="EDF5F5"/>
+            </a:solidFill>
+            <a:prstDash val="solid"/>
+          </a:ln>
+        </p:spPr>
+        <p:txBody>
+          <a:bodyPr/>
+          <a:lstStyle/>
+          <a:p>
+            <a:endParaRPr lang="sv-SE"/>
+          </a:p>
+        </p:txBody>
+      </p:sp>
+      <p:sp>
+        <p:nvSpPr>
+          <p:cNvPr id="14" name="TextBox 13"/>
+          <p:cNvSpPr txBox="1"/>
+          <p:nvPr/>
+        </p:nvSpPr>
+        <p:spPr>
+          <a:xfrm>
+            <a:off x="731520" y="3200400"/>
+            <a:ext cx="7680960" cy="777240"/>
+          </a:xfrm>
+          <a:prstGeom prst="rect">
+            <a:avLst/>
+          </a:prstGeom>
+          <a:noFill/>
+        </p:spPr>
+        <p:txBody>
+          <a:bodyPr wrap="square" lIns="0" tIns="0" rIns="0" bIns="0" anchor="ctr">
+            <a:spAutoFit/>
+          </a:bodyPr>
+          <a:lstStyle/>
+          <a:p>
+            <a:r>
+              <a:rPr sz="1200" b="1">
+                <a:solidFill>
+                  <a:srgbClr val="028090"/>
+                </a:solidFill>
+                <a:latin typeface="Calibri"/>
+              </a:rPr>
+              <a:t>Why the change.  </a:t>
+            </a:r>
+            <a:r>
+              <a:rPr sz="1200" b="0">
+                <a:solidFill>
+                  <a:srgbClr val="16262B"/>
+                </a:solidFill>
+                <a:latin typeface="Calibri"/>
+              </a:rPr>
+              <a:t>The vibration data that would link events to the geometry is not available, so the first idea cannot be tested. A point cloud gives every point an exact location, so runs of the same track can be compared directly.</a:t>
+            </a:r>
+          </a:p>
+        </p:txBody>
+      </p:sp>
+      <p:sp>
+        <p:nvSpPr>
+          <p:cNvPr id="15" name="Shape 16"/>
+          <p:cNvSpPr/>
+          <p:nvPr/>
+        </p:nvSpPr>
+        <p:spPr>
+          <a:xfrm>
+            <a:off x="457200" y="4160520"/>
+            <a:ext cx="8229600" cy="457200"/>
+          </a:xfrm>
+          <a:prstGeom prst="roundRect">
+            <a:avLst>
+              <a:gd name="adj" fmla="val 9091"/>
+            </a:avLst>
+          </a:prstGeom>
+          <a:solidFill>
+            <a:srgbClr val="0B2027"/>
+          </a:solidFill>
+          <a:ln w="12700">
+            <a:solidFill>
+              <a:srgbClr val="0B2027"/>
+            </a:solidFill>
+            <a:prstDash val="solid"/>
+          </a:ln>
+        </p:spPr>
+        <p:txBody>
+          <a:bodyPr/>
+          <a:lstStyle/>
+          <a:p>
+            <a:endParaRPr lang="sv-SE"/>
+          </a:p>
+        </p:txBody>
+      </p:sp>
+      <p:sp>
+        <p:nvSpPr>
+          <p:cNvPr id="16" name="Text 17"/>
+          <p:cNvSpPr txBox="1"/>
+          <p:nvPr/>
+        </p:nvSpPr>
+        <p:spPr>
+          <a:xfrm>
+            <a:off x="731520" y="4160520"/>
+            <a:ext cx="7680960" cy="457200"/>
+          </a:xfrm>
+          <a:prstGeom prst="rect">
+            <a:avLst/>
+          </a:prstGeom>
+          <a:noFill/>
+          <a:ln/>
+        </p:spPr>
+        <p:txBody>
+          <a:bodyPr wrap="square" lIns="0" tIns="0" rIns="0" bIns="0" rtlCol="0" anchor="ctr"/>
+          <a:lstStyle/>
+          <a:p>
+            <a:pPr marL="0" indent="0">
+              <a:buNone/>
+            </a:pPr>
+            <a:r>
+              <a:rPr lang="en-US" sz="1200" b="1" dirty="0">
+                <a:solidFill>
+                  <a:srgbClr val="FFFFFF"/>
+                </a:solidFill>
+                <a:latin typeface="Calibri" pitchFamily="34" charset="0"/>
+                <a:ea typeface="Calibri" pitchFamily="34" charset="-122"/>
+                <a:cs typeface="Calibri" pitchFamily="34" charset="-120"/>
+              </a:rPr>
+              <a:t>One run is a snapshot. Several runs show a trend.</a:t>
+            </a:r>
+            <a:endParaRPr lang="en-US" sz="1200" dirty="0"/>
+          </a:p>
+        </p:txBody>
+      </p:sp>
+    </p:spTree>
+  </p:cSld>
+  <p:clrMapOvr>
+    <a:masterClrMapping/>
+  </p:clrMapOvr>
+</p:sld>
+</file>
+
+<file path=ppt/slides/slide18.xml><?xml version="1.0" encoding="utf-8"?>
+<p:sld xmlns:a="http://schemas.openxmlformats.org/drawingml/2006/main" xmlns:r="http://schemas.openxmlformats.org/officeDocument/2006/relationships" xmlns:p="http://schemas.openxmlformats.org/presentationml/2006/main">
+  <p:cSld>
+    <p:spTree>
+      <p:nvGrpSpPr>
+        <p:cNvPr id="1" name=""/>
+        <p:cNvGrpSpPr/>
+        <p:nvPr/>
+      </p:nvGrpSpPr>
+      <p:grpSpPr>
+        <a:xfrm>
+          <a:off x="0" y="0"/>
+          <a:ext cx="0" cy="0"/>
+          <a:chOff x="0" y="0"/>
+          <a:chExt cx="0" cy="0"/>
+        </a:xfrm>
+      </p:grpSpPr>
+      <p:sp>
+        <p:nvSpPr>
+          <p:cNvPr id="2" name="Text 0"/>
+          <p:cNvSpPr txBox="1"/>
+          <p:nvPr/>
+        </p:nvSpPr>
+        <p:spPr>
+          <a:xfrm>
+            <a:off x="457200" y="274320"/>
+            <a:ext cx="8229600" cy="228600"/>
+          </a:xfrm>
+          <a:prstGeom prst="rect">
+            <a:avLst/>
+          </a:prstGeom>
+          <a:noFill/>
+          <a:ln/>
+        </p:spPr>
+        <p:txBody>
+          <a:bodyPr wrap="square" lIns="0" tIns="0" rIns="0" bIns="0" rtlCol="0" anchor="ctr"/>
+          <a:lstStyle/>
+          <a:p>
+            <a:pPr marL="0" indent="0">
+              <a:buNone/>
+            </a:pPr>
+            <a:r>
+              <a:rPr lang="en-US" sz="1100" b="1" kern="0" spc="200" dirty="0">
+                <a:solidFill>
+                  <a:srgbClr val="028090"/>
+                </a:solidFill>
+                <a:latin typeface="Calibri" pitchFamily="34" charset="0"/>
+                <a:ea typeface="Calibri" pitchFamily="34" charset="-122"/>
+                <a:cs typeface="Calibri" pitchFamily="34" charset="-120"/>
+              </a:rPr>
+              <a:t>REPRESENTATION</a:t>
+            </a:r>
+            <a:endParaRPr lang="en-US" sz="1100" dirty="0"/>
+          </a:p>
+        </p:txBody>
+      </p:sp>
+      <p:sp>
+        <p:nvSpPr>
+          <p:cNvPr id="3" name="Text 1"/>
+          <p:cNvSpPr txBox="1"/>
+          <p:nvPr/>
+        </p:nvSpPr>
+        <p:spPr>
+          <a:xfrm>
+            <a:off x="457200" y="502920"/>
+            <a:ext cx="8229600" cy="548640"/>
+          </a:xfrm>
+          <a:prstGeom prst="rect">
+            <a:avLst/>
+          </a:prstGeom>
+          <a:noFill/>
+          <a:ln/>
+        </p:spPr>
+        <p:txBody>
+          <a:bodyPr wrap="square" lIns="0" tIns="0" rIns="0" bIns="0" rtlCol="0" anchor="ctr"/>
+          <a:lstStyle/>
+          <a:p>
+            <a:pPr marL="0" indent="0">
+              <a:buNone/>
+            </a:pPr>
+            <a:r>
+              <a:rPr lang="en-US" sz="2700" b="1" dirty="0">
+                <a:solidFill>
+                  <a:srgbClr val="16262B"/>
+                </a:solidFill>
+                <a:latin typeface="Cambria" pitchFamily="34" charset="0"/>
+                <a:ea typeface="Cambria" pitchFamily="34" charset="-122"/>
+                <a:cs typeface="Cambria" pitchFamily="34" charset="-120"/>
+              </a:rPr>
+              <a:t>One run becomes one 3D curve</a:t>
+            </a:r>
+            <a:endParaRPr lang="en-US" sz="2700" dirty="0"/>
+          </a:p>
+        </p:txBody>
+      </p:sp>
+      <p:sp>
+        <p:nvSpPr>
+          <p:cNvPr id="4" name="Shape 2"/>
+          <p:cNvSpPr/>
+          <p:nvPr/>
+        </p:nvSpPr>
+        <p:spPr>
+          <a:xfrm>
+            <a:off x="457200" y="1325880"/>
+            <a:ext cx="384048" cy="384048"/>
+          </a:xfrm>
+          <a:prstGeom prst="ellipse">
+            <a:avLst/>
+          </a:prstGeom>
+          <a:solidFill>
+            <a:srgbClr val="028090"/>
+          </a:solidFill>
+          <a:ln w="12700">
+            <a:solidFill>
+              <a:srgbClr val="028090"/>
+            </a:solidFill>
+            <a:prstDash val="solid"/>
+          </a:ln>
+        </p:spPr>
+        <p:txBody>
+          <a:bodyPr/>
+          <a:lstStyle/>
+          <a:p>
+            <a:endParaRPr lang="sv-SE"/>
+          </a:p>
+        </p:txBody>
+      </p:sp>
+      <p:sp>
+        <p:nvSpPr>
+          <p:cNvPr id="5" name="Text 3"/>
+          <p:cNvSpPr txBox="1"/>
+          <p:nvPr/>
+        </p:nvSpPr>
+        <p:spPr>
+          <a:xfrm>
+            <a:off x="457200" y="1325880"/>
+            <a:ext cx="384048" cy="384048"/>
+          </a:xfrm>
+          <a:prstGeom prst="rect">
+            <a:avLst/>
+          </a:prstGeom>
+          <a:noFill/>
+          <a:ln/>
+        </p:spPr>
+        <p:txBody>
+          <a:bodyPr wrap="square" lIns="0" tIns="0" rIns="0" bIns="0" rtlCol="0" anchor="ctr"/>
+          <a:lstStyle/>
+          <a:p>
+            <a:pPr marL="0" indent="0" algn="ctr">
+              <a:buNone/>
+            </a:pPr>
+            <a:r>
+              <a:rPr lang="en-US" sz="1400" b="1" dirty="0">
+                <a:solidFill>
+                  <a:srgbClr val="FFFFFF"/>
+                </a:solidFill>
+                <a:latin typeface="Calibri" pitchFamily="34" charset="0"/>
+                <a:ea typeface="Calibri" pitchFamily="34" charset="-122"/>
+                <a:cs typeface="Calibri" pitchFamily="34" charset="-120"/>
+              </a:rPr>
+              <a:t>1</a:t>
+            </a:r>
+            <a:endParaRPr lang="en-US" sz="1400" dirty="0"/>
+          </a:p>
+        </p:txBody>
+      </p:sp>
+      <p:sp>
+        <p:nvSpPr>
+          <p:cNvPr id="6" name="Text 4"/>
+          <p:cNvSpPr txBox="1"/>
+          <p:nvPr/>
+        </p:nvSpPr>
+        <p:spPr>
+          <a:xfrm>
+            <a:off x="1005840" y="1316736"/>
+            <a:ext cx="1463040" cy="274320"/>
+          </a:xfrm>
+          <a:prstGeom prst="rect">
+            <a:avLst/>
+          </a:prstGeom>
+          <a:noFill/>
+          <a:ln/>
+        </p:spPr>
+        <p:txBody>
+          <a:bodyPr wrap="square" lIns="0" tIns="0" rIns="0" bIns="0" rtlCol="0" anchor="ctr"/>
+          <a:lstStyle/>
+          <a:p>
+            <a:pPr marL="0" indent="0">
+              <a:buNone/>
+            </a:pPr>
+            <a:r>
+              <a:rPr lang="en-US" sz="1400" b="1" dirty="0">
+                <a:solidFill>
+                  <a:srgbClr val="16262B"/>
+                </a:solidFill>
+                <a:latin typeface="Calibri" pitchFamily="34" charset="0"/>
+                <a:ea typeface="Calibri" pitchFamily="34" charset="-122"/>
+                <a:cs typeface="Calibri" pitchFamily="34" charset="-120"/>
+              </a:rPr>
+              <a:t>Reference</a:t>
+            </a:r>
+            <a:endParaRPr lang="en-US" sz="1400" dirty="0"/>
+          </a:p>
+        </p:txBody>
+      </p:sp>
+      <p:sp>
+        <p:nvSpPr>
+          <p:cNvPr id="7" name="Text 5"/>
+          <p:cNvSpPr txBox="1"/>
+          <p:nvPr/>
+        </p:nvSpPr>
+        <p:spPr>
+          <a:xfrm>
+            <a:off x="2514600" y="1307592"/>
+            <a:ext cx="2148840" cy="420624"/>
+          </a:xfrm>
+          <a:prstGeom prst="rect">
+            <a:avLst/>
+          </a:prstGeom>
+          <a:noFill/>
+          <a:ln/>
+        </p:spPr>
+        <p:txBody>
+          <a:bodyPr wrap="square" lIns="0" tIns="0" rIns="0" bIns="0" rtlCol="0" anchor="ctr"/>
+          <a:lstStyle/>
+          <a:p>
+            <a:pPr marL="0" indent="0">
+              <a:buNone/>
+            </a:pPr>
+            <a:r>
+              <a:rPr lang="en-US" sz="1100" dirty="0">
+                <a:solidFill>
+                  <a:srgbClr val="5F7178"/>
+                </a:solidFill>
+                <a:latin typeface="Calibri" pitchFamily="34" charset="0"/>
+                <a:ea typeface="Calibri" pitchFamily="34" charset="-122"/>
+                <a:cs typeface="Calibri" pitchFamily="34" charset="-120"/>
+              </a:rPr>
+              <a:t>one track centreline from run 1, used for every run</a:t>
+            </a:r>
+            <a:endParaRPr lang="en-US" sz="1100" dirty="0"/>
+          </a:p>
+        </p:txBody>
+      </p:sp>
+      <p:sp>
+        <p:nvSpPr>
+          <p:cNvPr id="8" name="Shape 2"/>
+          <p:cNvSpPr/>
+          <p:nvPr/>
+        </p:nvSpPr>
+        <p:spPr>
+          <a:xfrm>
+            <a:off x="457200" y="1929384"/>
+            <a:ext cx="384048" cy="384048"/>
+          </a:xfrm>
+          <a:prstGeom prst="ellipse">
+            <a:avLst/>
+          </a:prstGeom>
+          <a:solidFill>
+            <a:srgbClr val="028090"/>
+          </a:solidFill>
+          <a:ln w="12700">
+            <a:solidFill>
+              <a:srgbClr val="028090"/>
+            </a:solidFill>
+            <a:prstDash val="solid"/>
+          </a:ln>
+        </p:spPr>
+        <p:txBody>
+          <a:bodyPr/>
+          <a:lstStyle/>
+          <a:p>
+            <a:endParaRPr lang="sv-SE"/>
+          </a:p>
+        </p:txBody>
+      </p:sp>
+      <p:sp>
+        <p:nvSpPr>
+          <p:cNvPr id="9" name="Text 3"/>
+          <p:cNvSpPr txBox="1"/>
+          <p:nvPr/>
+        </p:nvSpPr>
+        <p:spPr>
+          <a:xfrm>
+            <a:off x="457200" y="1929384"/>
+            <a:ext cx="384048" cy="384048"/>
+          </a:xfrm>
+          <a:prstGeom prst="rect">
+            <a:avLst/>
+          </a:prstGeom>
+          <a:noFill/>
+          <a:ln/>
+        </p:spPr>
+        <p:txBody>
+          <a:bodyPr wrap="square" lIns="0" tIns="0" rIns="0" bIns="0" rtlCol="0" anchor="ctr"/>
+          <a:lstStyle/>
+          <a:p>
+            <a:pPr marL="0" indent="0" algn="ctr">
+              <a:buNone/>
+            </a:pPr>
+            <a:r>
+              <a:rPr lang="en-US" sz="1400" b="1" dirty="0">
+                <a:solidFill>
+                  <a:srgbClr val="FFFFFF"/>
+                </a:solidFill>
+                <a:latin typeface="Calibri" pitchFamily="34" charset="0"/>
+                <a:ea typeface="Calibri" pitchFamily="34" charset="-122"/>
+                <a:cs typeface="Calibri" pitchFamily="34" charset="-120"/>
+              </a:rPr>
+              <a:t>2</a:t>
+            </a:r>
+            <a:endParaRPr lang="en-US" sz="1400" dirty="0"/>
+          </a:p>
+        </p:txBody>
+      </p:sp>
+      <p:sp>
+        <p:nvSpPr>
+          <p:cNvPr id="10" name="Text 4"/>
+          <p:cNvSpPr txBox="1"/>
+          <p:nvPr/>
+        </p:nvSpPr>
+        <p:spPr>
+          <a:xfrm>
+            <a:off x="1005840" y="1920240"/>
+            <a:ext cx="1463040" cy="274320"/>
+          </a:xfrm>
+          <a:prstGeom prst="rect">
+            <a:avLst/>
+          </a:prstGeom>
+          <a:noFill/>
+          <a:ln/>
+        </p:spPr>
+        <p:txBody>
+          <a:bodyPr wrap="square" lIns="0" tIns="0" rIns="0" bIns="0" rtlCol="0" anchor="ctr"/>
+          <a:lstStyle/>
+          <a:p>
+            <a:pPr marL="0" indent="0">
+              <a:buNone/>
+            </a:pPr>
+            <a:r>
+              <a:rPr lang="en-US" sz="1400" b="1" dirty="0">
+                <a:solidFill>
+                  <a:srgbClr val="16262B"/>
+                </a:solidFill>
+                <a:latin typeface="Calibri" pitchFamily="34" charset="0"/>
+                <a:ea typeface="Calibri" pitchFamily="34" charset="-122"/>
+                <a:cs typeface="Calibri" pitchFamily="34" charset="-120"/>
+              </a:rPr>
+              <a:t>Position</a:t>
+            </a:r>
+            <a:endParaRPr lang="en-US" sz="1400" dirty="0"/>
+          </a:p>
+        </p:txBody>
+      </p:sp>
+      <p:sp>
+        <p:nvSpPr>
+          <p:cNvPr id="11" name="Text 5"/>
+          <p:cNvSpPr txBox="1"/>
+          <p:nvPr/>
+        </p:nvSpPr>
+        <p:spPr>
+          <a:xfrm>
+            <a:off x="2514600" y="1911095"/>
+            <a:ext cx="2148840" cy="420624"/>
+          </a:xfrm>
+          <a:prstGeom prst="rect">
+            <a:avLst/>
+          </a:prstGeom>
+          <a:noFill/>
+          <a:ln/>
+        </p:spPr>
+        <p:txBody>
+          <a:bodyPr wrap="square" lIns="0" tIns="0" rIns="0" bIns="0" rtlCol="0" anchor="ctr"/>
+          <a:lstStyle/>
+          <a:p>
+            <a:pPr marL="0" indent="0">
+              <a:buNone/>
+            </a:pPr>
+            <a:r>
+              <a:rPr lang="en-US" sz="1100" dirty="0">
+                <a:solidFill>
+                  <a:srgbClr val="5F7178"/>
+                </a:solidFill>
+                <a:latin typeface="Calibri" pitchFamily="34" charset="0"/>
+                <a:ea typeface="Calibri" pitchFamily="34" charset="-122"/>
+                <a:cs typeface="Calibri" pitchFamily="34" charset="-120"/>
+              </a:rPr>
+              <a:t>chainage s, sideways offset d and the LiDAR height Z</a:t>
+            </a:r>
+            <a:endParaRPr lang="en-US" sz="1100" dirty="0"/>
+          </a:p>
+        </p:txBody>
+      </p:sp>
+      <p:sp>
+        <p:nvSpPr>
+          <p:cNvPr id="12" name="Shape 2"/>
+          <p:cNvSpPr/>
+          <p:nvPr/>
+        </p:nvSpPr>
+        <p:spPr>
+          <a:xfrm>
+            <a:off x="457200" y="2532888"/>
+            <a:ext cx="384048" cy="384048"/>
+          </a:xfrm>
+          <a:prstGeom prst="ellipse">
+            <a:avLst/>
+          </a:prstGeom>
+          <a:solidFill>
+            <a:srgbClr val="028090"/>
+          </a:solidFill>
+          <a:ln w="12700">
+            <a:solidFill>
+              <a:srgbClr val="028090"/>
+            </a:solidFill>
+            <a:prstDash val="solid"/>
+          </a:ln>
+        </p:spPr>
+        <p:txBody>
+          <a:bodyPr/>
+          <a:lstStyle/>
+          <a:p>
+            <a:endParaRPr lang="sv-SE"/>
+          </a:p>
+        </p:txBody>
+      </p:sp>
+      <p:sp>
+        <p:nvSpPr>
+          <p:cNvPr id="13" name="Text 3"/>
+          <p:cNvSpPr txBox="1"/>
+          <p:nvPr/>
+        </p:nvSpPr>
+        <p:spPr>
+          <a:xfrm>
+            <a:off x="457200" y="2532888"/>
+            <a:ext cx="384048" cy="384048"/>
+          </a:xfrm>
+          <a:prstGeom prst="rect">
+            <a:avLst/>
+          </a:prstGeom>
+          <a:noFill/>
+          <a:ln/>
+        </p:spPr>
+        <p:txBody>
+          <a:bodyPr wrap="square" lIns="0" tIns="0" rIns="0" bIns="0" rtlCol="0" anchor="ctr"/>
+          <a:lstStyle/>
+          <a:p>
+            <a:pPr marL="0" indent="0" algn="ctr">
+              <a:buNone/>
+            </a:pPr>
+            <a:r>
+              <a:rPr lang="en-US" sz="1400" b="1" dirty="0">
+                <a:solidFill>
+                  <a:srgbClr val="FFFFFF"/>
+                </a:solidFill>
+                <a:latin typeface="Calibri" pitchFamily="34" charset="0"/>
+                <a:ea typeface="Calibri" pitchFamily="34" charset="-122"/>
+                <a:cs typeface="Calibri" pitchFamily="34" charset="-120"/>
+              </a:rPr>
+              <a:t>3</a:t>
+            </a:r>
+            <a:endParaRPr lang="en-US" sz="1400" dirty="0"/>
+          </a:p>
+        </p:txBody>
+      </p:sp>
+      <p:sp>
+        <p:nvSpPr>
+          <p:cNvPr id="14" name="Text 4"/>
+          <p:cNvSpPr txBox="1"/>
+          <p:nvPr/>
+        </p:nvSpPr>
+        <p:spPr>
+          <a:xfrm>
+            <a:off x="1005840" y="2523744"/>
+            <a:ext cx="1463040" cy="274320"/>
+          </a:xfrm>
+          <a:prstGeom prst="rect">
+            <a:avLst/>
+          </a:prstGeom>
+          <a:noFill/>
+          <a:ln/>
+        </p:spPr>
+        <p:txBody>
+          <a:bodyPr wrap="square" lIns="0" tIns="0" rIns="0" bIns="0" rtlCol="0" anchor="ctr"/>
+          <a:lstStyle/>
+          <a:p>
+            <a:pPr marL="0" indent="0">
+              <a:buNone/>
+            </a:pPr>
+            <a:r>
+              <a:rPr lang="en-US" sz="1400" b="1" dirty="0">
+                <a:solidFill>
+                  <a:srgbClr val="16262B"/>
+                </a:solidFill>
+                <a:latin typeface="Calibri" pitchFamily="34" charset="0"/>
+                <a:ea typeface="Calibri" pitchFamily="34" charset="-122"/>
+                <a:cs typeface="Calibri" pitchFamily="34" charset="-120"/>
+              </a:rPr>
+              <a:t>Control points</a:t>
+            </a:r>
+            <a:endParaRPr lang="en-US" sz="1400" dirty="0"/>
+          </a:p>
+        </p:txBody>
+      </p:sp>
+      <p:sp>
+        <p:nvSpPr>
+          <p:cNvPr id="15" name="Text 5"/>
+          <p:cNvSpPr txBox="1"/>
+          <p:nvPr/>
+        </p:nvSpPr>
+        <p:spPr>
+          <a:xfrm>
+            <a:off x="2514600" y="2514600"/>
+            <a:ext cx="2148840" cy="420624"/>
+          </a:xfrm>
+          <a:prstGeom prst="rect">
+            <a:avLst/>
+          </a:prstGeom>
+          <a:noFill/>
+          <a:ln/>
+        </p:spPr>
+        <p:txBody>
+          <a:bodyPr wrap="square" lIns="0" tIns="0" rIns="0" bIns="0" rtlCol="0" anchor="ctr"/>
+          <a:lstStyle/>
+          <a:p>
+            <a:pPr marL="0" indent="0">
+              <a:buNone/>
+            </a:pPr>
+            <a:r>
+              <a:rPr lang="en-US" sz="1100" dirty="0">
+                <a:solidFill>
+                  <a:srgbClr val="5F7178"/>
+                </a:solidFill>
+                <a:latin typeface="Calibri" pitchFamily="34" charset="0"/>
+                <a:ea typeface="Calibri" pitchFamily="34" charset="-122"/>
+                <a:cs typeface="Calibri" pitchFamily="34" charset="-120"/>
+              </a:rPr>
+              <a:t>1 m averages on a fixed grid, so runs line up</a:t>
+            </a:r>
+            <a:endParaRPr lang="en-US" sz="1100" dirty="0"/>
+          </a:p>
+        </p:txBody>
+      </p:sp>
+      <p:sp>
+        <p:nvSpPr>
+          <p:cNvPr id="16" name="Shape 2"/>
+          <p:cNvSpPr/>
+          <p:nvPr/>
+        </p:nvSpPr>
+        <p:spPr>
+          <a:xfrm>
+            <a:off x="457200" y="3136391"/>
+            <a:ext cx="384048" cy="384048"/>
+          </a:xfrm>
+          <a:prstGeom prst="ellipse">
+            <a:avLst/>
+          </a:prstGeom>
+          <a:solidFill>
+            <a:srgbClr val="028090"/>
+          </a:solidFill>
+          <a:ln w="12700">
+            <a:solidFill>
+              <a:srgbClr val="028090"/>
+            </a:solidFill>
+            <a:prstDash val="solid"/>
+          </a:ln>
+        </p:spPr>
+        <p:txBody>
+          <a:bodyPr/>
+          <a:lstStyle/>
+          <a:p>
+            <a:endParaRPr lang="sv-SE"/>
+          </a:p>
+        </p:txBody>
+      </p:sp>
+      <p:sp>
+        <p:nvSpPr>
+          <p:cNvPr id="17" name="Text 3"/>
+          <p:cNvSpPr txBox="1"/>
+          <p:nvPr/>
+        </p:nvSpPr>
+        <p:spPr>
+          <a:xfrm>
+            <a:off x="457200" y="3136391"/>
+            <a:ext cx="384048" cy="384048"/>
+          </a:xfrm>
+          <a:prstGeom prst="rect">
+            <a:avLst/>
+          </a:prstGeom>
+          <a:noFill/>
+          <a:ln/>
+        </p:spPr>
+        <p:txBody>
+          <a:bodyPr wrap="square" lIns="0" tIns="0" rIns="0" bIns="0" rtlCol="0" anchor="ctr"/>
+          <a:lstStyle/>
+          <a:p>
+            <a:pPr marL="0" indent="0" algn="ctr">
+              <a:buNone/>
+            </a:pPr>
+            <a:r>
+              <a:rPr lang="en-US" sz="1400" b="1" dirty="0">
+                <a:solidFill>
+                  <a:srgbClr val="FFFFFF"/>
+                </a:solidFill>
+                <a:latin typeface="Calibri" pitchFamily="34" charset="0"/>
+                <a:ea typeface="Calibri" pitchFamily="34" charset="-122"/>
+                <a:cs typeface="Calibri" pitchFamily="34" charset="-120"/>
+              </a:rPr>
+              <a:t>4</a:t>
+            </a:r>
+            <a:endParaRPr lang="en-US" sz="1400" dirty="0"/>
+          </a:p>
+        </p:txBody>
+      </p:sp>
+      <p:sp>
+        <p:nvSpPr>
+          <p:cNvPr id="18" name="Text 4"/>
+          <p:cNvSpPr txBox="1"/>
+          <p:nvPr/>
+        </p:nvSpPr>
+        <p:spPr>
+          <a:xfrm>
+            <a:off x="1005840" y="3127248"/>
+            <a:ext cx="1463040" cy="274320"/>
+          </a:xfrm>
+          <a:prstGeom prst="rect">
+            <a:avLst/>
+          </a:prstGeom>
+          <a:noFill/>
+          <a:ln/>
+        </p:spPr>
+        <p:txBody>
+          <a:bodyPr wrap="square" lIns="0" tIns="0" rIns="0" bIns="0" rtlCol="0" anchor="ctr"/>
+          <a:lstStyle/>
+          <a:p>
+            <a:pPr marL="0" indent="0">
+              <a:buNone/>
+            </a:pPr>
+            <a:r>
+              <a:rPr lang="en-US" sz="1400" b="1" dirty="0">
+                <a:solidFill>
+                  <a:srgbClr val="16262B"/>
+                </a:solidFill>
+                <a:latin typeface="Calibri" pitchFamily="34" charset="0"/>
+                <a:ea typeface="Calibri" pitchFamily="34" charset="-122"/>
+                <a:cs typeface="Calibri" pitchFamily="34" charset="-120"/>
+              </a:rPr>
+              <a:t>Catmull-Rom</a:t>
+            </a:r>
+            <a:endParaRPr lang="en-US" sz="1400" dirty="0"/>
+          </a:p>
+        </p:txBody>
+      </p:sp>
+      <p:sp>
+        <p:nvSpPr>
+          <p:cNvPr id="19" name="Text 5"/>
+          <p:cNvSpPr txBox="1"/>
+          <p:nvPr/>
+        </p:nvSpPr>
+        <p:spPr>
+          <a:xfrm>
+            <a:off x="2514600" y="3118103"/>
+            <a:ext cx="2148840" cy="420624"/>
+          </a:xfrm>
+          <a:prstGeom prst="rect">
+            <a:avLst/>
+          </a:prstGeom>
+          <a:noFill/>
+          <a:ln/>
+        </p:spPr>
+        <p:txBody>
+          <a:bodyPr wrap="square" lIns="0" tIns="0" rIns="0" bIns="0" rtlCol="0" anchor="ctr"/>
+          <a:lstStyle/>
+          <a:p>
+            <a:pPr marL="0" indent="0">
+              <a:buNone/>
+            </a:pPr>
+            <a:r>
+              <a:rPr lang="en-US" sz="1100" dirty="0">
+                <a:solidFill>
+                  <a:srgbClr val="5F7178"/>
+                </a:solidFill>
+                <a:latin typeface="Calibri" pitchFamily="34" charset="0"/>
+                <a:ea typeface="Calibri" pitchFamily="34" charset="-122"/>
+                <a:cs typeface="Calibri" pitchFamily="34" charset="-120"/>
+              </a:rPr>
+              <a:t>a smooth curve through every control point</a:t>
+            </a:r>
+            <a:endParaRPr lang="en-US" sz="1100" dirty="0"/>
+          </a:p>
+        </p:txBody>
+      </p:sp>
+      <p:sp>
+        <p:nvSpPr>
+          <p:cNvPr id="20" name="Shape 2"/>
+          <p:cNvSpPr/>
+          <p:nvPr/>
+        </p:nvSpPr>
+        <p:spPr>
+          <a:xfrm>
+            <a:off x="457200" y="3739896"/>
+            <a:ext cx="384048" cy="384048"/>
+          </a:xfrm>
+          <a:prstGeom prst="ellipse">
+            <a:avLst/>
+          </a:prstGeom>
+          <a:solidFill>
+            <a:srgbClr val="028090"/>
+          </a:solidFill>
+          <a:ln w="12700">
+            <a:solidFill>
+              <a:srgbClr val="028090"/>
+            </a:solidFill>
+            <a:prstDash val="solid"/>
+          </a:ln>
+        </p:spPr>
+        <p:txBody>
+          <a:bodyPr/>
+          <a:lstStyle/>
+          <a:p>
+            <a:endParaRPr lang="sv-SE"/>
+          </a:p>
+        </p:txBody>
+      </p:sp>
+      <p:sp>
+        <p:nvSpPr>
+          <p:cNvPr id="21" name="Text 3"/>
+          <p:cNvSpPr txBox="1"/>
+          <p:nvPr/>
+        </p:nvSpPr>
+        <p:spPr>
+          <a:xfrm>
+            <a:off x="457200" y="3739896"/>
+            <a:ext cx="384048" cy="384048"/>
+          </a:xfrm>
+          <a:prstGeom prst="rect">
+            <a:avLst/>
+          </a:prstGeom>
+          <a:noFill/>
+          <a:ln/>
+        </p:spPr>
+        <p:txBody>
+          <a:bodyPr wrap="square" lIns="0" tIns="0" rIns="0" bIns="0" rtlCol="0" anchor="ctr"/>
+          <a:lstStyle/>
+          <a:p>
+            <a:pPr marL="0" indent="0" algn="ctr">
+              <a:buNone/>
+            </a:pPr>
+            <a:r>
+              <a:rPr lang="en-US" sz="1400" b="1" dirty="0">
+                <a:solidFill>
+                  <a:srgbClr val="FFFFFF"/>
+                </a:solidFill>
+                <a:latin typeface="Calibri" pitchFamily="34" charset="0"/>
+                <a:ea typeface="Calibri" pitchFamily="34" charset="-122"/>
+                <a:cs typeface="Calibri" pitchFamily="34" charset="-120"/>
+              </a:rPr>
+              <a:t>5</a:t>
+            </a:r>
+            <a:endParaRPr lang="en-US" sz="1400" dirty="0"/>
+          </a:p>
+        </p:txBody>
+      </p:sp>
+      <p:sp>
+        <p:nvSpPr>
+          <p:cNvPr id="22" name="Text 4"/>
+          <p:cNvSpPr txBox="1"/>
+          <p:nvPr/>
+        </p:nvSpPr>
+        <p:spPr>
+          <a:xfrm>
+            <a:off x="1005840" y="3730752"/>
+            <a:ext cx="1463040" cy="274320"/>
+          </a:xfrm>
+          <a:prstGeom prst="rect">
+            <a:avLst/>
+          </a:prstGeom>
+          <a:noFill/>
+          <a:ln/>
+        </p:spPr>
+        <p:txBody>
+          <a:bodyPr wrap="square" lIns="0" tIns="0" rIns="0" bIns="0" rtlCol="0" anchor="ctr"/>
+          <a:lstStyle/>
+          <a:p>
+            <a:pPr marL="0" indent="0">
+              <a:buNone/>
+            </a:pPr>
+            <a:r>
+              <a:rPr lang="en-US" sz="1400" b="1" dirty="0">
+                <a:solidFill>
+                  <a:srgbClr val="16262B"/>
+                </a:solidFill>
+                <a:latin typeface="Calibri" pitchFamily="34" charset="0"/>
+                <a:ea typeface="Calibri" pitchFamily="34" charset="-122"/>
+                <a:cs typeface="Calibri" pitchFamily="34" charset="-120"/>
+              </a:rPr>
+              <a:t>Repeatable</a:t>
+            </a:r>
+            <a:endParaRPr lang="en-US" sz="1400" dirty="0"/>
+          </a:p>
+        </p:txBody>
+      </p:sp>
+      <p:sp>
+        <p:nvSpPr>
+          <p:cNvPr id="23" name="Text 5"/>
+          <p:cNvSpPr txBox="1"/>
+          <p:nvPr/>
+        </p:nvSpPr>
+        <p:spPr>
+          <a:xfrm>
+            <a:off x="2514600" y="3721608"/>
+            <a:ext cx="2148840" cy="420624"/>
+          </a:xfrm>
+          <a:prstGeom prst="rect">
+            <a:avLst/>
+          </a:prstGeom>
+          <a:noFill/>
+          <a:ln/>
+        </p:spPr>
+        <p:txBody>
+          <a:bodyPr wrap="square" lIns="0" tIns="0" rIns="0" bIns="0" rtlCol="0" anchor="ctr"/>
+          <a:lstStyle/>
+          <a:p>
+            <a:pPr marL="0" indent="0">
+              <a:buNone/>
+            </a:pPr>
+            <a:r>
+              <a:rPr lang="en-US" sz="1100" dirty="0">
+                <a:solidFill>
+                  <a:srgbClr val="5F7178"/>
+                </a:solidFill>
+                <a:latin typeface="Calibri" pitchFamily="34" charset="0"/>
+                <a:ea typeface="Calibri" pitchFamily="34" charset="-122"/>
+                <a:cs typeface="Calibri" pitchFamily="34" charset="-120"/>
+              </a:rPr>
+              <a:t>settings and file hashes stored; rebuilds are byte-identical</a:t>
+            </a:r>
+            <a:endParaRPr lang="en-US" sz="1100" dirty="0"/>
+          </a:p>
+        </p:txBody>
+      </p:sp>
+      <p:pic>
+        <p:nvPicPr>
+          <p:cNvPr id="24" name="Picture 23" descr="f6_catmull_rom.png"/>
+          <p:cNvPicPr>
+            <a:picLocks noChangeAspect="1"/>
+          </p:cNvPicPr>
+          <p:nvPr/>
+        </p:nvPicPr>
+        <p:blipFill>
+          <a:blip r:embed="rId2"/>
+          <a:stretch>
+            <a:fillRect/>
+          </a:stretch>
+        </p:blipFill>
+        <p:spPr>
+          <a:xfrm>
+            <a:off x="4846320" y="1234440"/>
+            <a:ext cx="3840480" cy="2618509"/>
+          </a:xfrm>
+          <a:prstGeom prst="rect">
+            <a:avLst/>
+          </a:prstGeom>
+        </p:spPr>
+      </p:pic>
+      <p:sp>
+        <p:nvSpPr>
+          <p:cNvPr id="25" name="Text 3"/>
+          <p:cNvSpPr txBox="1"/>
+          <p:nvPr/>
+        </p:nvSpPr>
+        <p:spPr>
+          <a:xfrm>
+            <a:off x="4846320" y="3950208"/>
+            <a:ext cx="3840480" cy="365760"/>
+          </a:xfrm>
+          <a:prstGeom prst="rect">
+            <a:avLst/>
+          </a:prstGeom>
+          <a:noFill/>
+          <a:ln/>
+        </p:spPr>
+        <p:txBody>
+          <a:bodyPr wrap="square" lIns="0" tIns="0" rIns="0" bIns="0" rtlCol="0" anchor="ctr"/>
+          <a:lstStyle/>
+          <a:p>
+            <a:pPr marL="0" indent="0">
+              <a:buNone/>
+            </a:pPr>
+            <a:r>
+              <a:rPr lang="en-US" sz="950" i="1" dirty="0">
+                <a:solidFill>
+                  <a:srgbClr val="5F7178"/>
+                </a:solidFill>
+                <a:latin typeface="Calibri" pitchFamily="34" charset="0"/>
+                <a:ea typeface="Calibri" pitchFamily="34" charset="-122"/>
+                <a:cs typeface="Calibri" pitchFamily="34" charset="-120"/>
+              </a:rPr>
+              <a:t>Left rail, 15 m of the run. A curve through every slab copies the noise; one through 1 m control points does not.</a:t>
+            </a:r>
+            <a:endParaRPr lang="en-US" sz="950" dirty="0"/>
+          </a:p>
+        </p:txBody>
+      </p:sp>
+    </p:spTree>
+  </p:cSld>
+  <p:clrMapOvr>
+    <a:masterClrMapping/>
+  </p:clrMapOvr>
+</p:sld>
+</file>
+
+<file path=ppt/slides/slide19.xml><?xml version="1.0" encoding="utf-8"?>
+<p:sld xmlns:a="http://schemas.openxmlformats.org/drawingml/2006/main" xmlns:r="http://schemas.openxmlformats.org/officeDocument/2006/relationships" xmlns:p="http://schemas.openxmlformats.org/presentationml/2006/main">
+  <p:cSld>
+    <p:spTree>
+      <p:nvGrpSpPr>
+        <p:cNvPr id="1" name=""/>
+        <p:cNvGrpSpPr/>
+        <p:nvPr/>
+      </p:nvGrpSpPr>
+      <p:grpSpPr>
+        <a:xfrm>
+          <a:off x="0" y="0"/>
+          <a:ext cx="0" cy="0"/>
+          <a:chOff x="0" y="0"/>
+          <a:chExt cx="0" cy="0"/>
+        </a:xfrm>
+      </p:grpSpPr>
+      <p:sp>
+        <p:nvSpPr>
+          <p:cNvPr id="2" name="Text 0"/>
+          <p:cNvSpPr txBox="1"/>
+          <p:nvPr/>
+        </p:nvSpPr>
+        <p:spPr>
+          <a:xfrm>
+            <a:off x="457200" y="274320"/>
+            <a:ext cx="8229600" cy="228600"/>
+          </a:xfrm>
+          <a:prstGeom prst="rect">
+            <a:avLst/>
+          </a:prstGeom>
+          <a:noFill/>
+          <a:ln/>
+        </p:spPr>
+        <p:txBody>
+          <a:bodyPr wrap="square" lIns="0" tIns="0" rIns="0" bIns="0" rtlCol="0" anchor="ctr"/>
+          <a:lstStyle/>
+          <a:p>
+            <a:pPr marL="0" indent="0">
+              <a:buNone/>
+            </a:pPr>
+            <a:r>
+              <a:rPr lang="en-US" sz="1100" b="1" kern="0" spc="200" dirty="0">
+                <a:solidFill>
+                  <a:srgbClr val="028090"/>
+                </a:solidFill>
+                <a:latin typeface="Calibri" pitchFamily="34" charset="0"/>
+                <a:ea typeface="Calibri" pitchFamily="34" charset="-122"/>
+                <a:cs typeface="Calibri" pitchFamily="34" charset="-120"/>
+              </a:rPr>
+              <a:t>FIRST TEST</a:t>
+            </a:r>
+            <a:endParaRPr lang="en-US" sz="1100" dirty="0"/>
+          </a:p>
+        </p:txBody>
+      </p:sp>
+      <p:sp>
+        <p:nvSpPr>
+          <p:cNvPr id="3" name="Text 1"/>
+          <p:cNvSpPr txBox="1"/>
+          <p:nvPr/>
+        </p:nvSpPr>
+        <p:spPr>
+          <a:xfrm>
+            <a:off x="457200" y="502920"/>
+            <a:ext cx="8229600" cy="548640"/>
+          </a:xfrm>
+          <a:prstGeom prst="rect">
+            <a:avLst/>
+          </a:prstGeom>
+          <a:noFill/>
+          <a:ln/>
+        </p:spPr>
+        <p:txBody>
+          <a:bodyPr wrap="square" lIns="0" tIns="0" rIns="0" bIns="0" rtlCol="0" anchor="ctr"/>
+          <a:lstStyle/>
+          <a:p>
+            <a:pPr marL="0" indent="0">
+              <a:buNone/>
+            </a:pPr>
+            <a:r>
+              <a:rPr lang="en-US" sz="2700" b="1" dirty="0">
+                <a:solidFill>
+                  <a:srgbClr val="16262B"/>
+                </a:solidFill>
+                <a:latin typeface="Cambria" pitchFamily="34" charset="0"/>
+                <a:ea typeface="Cambria" pitchFamily="34" charset="-122"/>
+                <a:cs typeface="Cambria" pitchFamily="34" charset="-120"/>
+              </a:rPr>
+              <a:t>Catmull-Rom on the real run</a:t>
+            </a:r>
+            <a:endParaRPr lang="en-US" sz="2700" dirty="0"/>
+          </a:p>
+        </p:txBody>
+      </p:sp>
+      <p:graphicFrame>
+        <p:nvGraphicFramePr>
+          <p:cNvPr id="4" name="Chart 3"/>
+          <p:cNvGraphicFramePr>
+            <a:graphicFrameLocks noGrp="1"/>
+          </p:cNvGraphicFramePr>
+          <p:nvPr/>
+        </p:nvGraphicFramePr>
+        <p:xfrm>
+          <a:off x="457200" y="1234440"/>
+          <a:ext cx="4754880" cy="2697480"/>
+        </p:xfrm>
+        <a:graphic>
+          <a:graphicData uri="http://schemas.openxmlformats.org/drawingml/2006/chart">
+            <c:chart xmlns:c="http://schemas.openxmlformats.org/drawingml/2006/chart" xmlns:r="http://schemas.openxmlformats.org/officeDocument/2006/relationships" r:id="rId2"/>
+          </a:graphicData>
+        </a:graphic>
+      </p:graphicFrame>
+      <p:sp>
+        <p:nvSpPr>
+          <p:cNvPr id="5" name="Text 3"/>
+          <p:cNvSpPr txBox="1"/>
+          <p:nvPr/>
+        </p:nvSpPr>
+        <p:spPr>
+          <a:xfrm>
+            <a:off x="457200" y="4023360"/>
+            <a:ext cx="4754880" cy="365760"/>
+          </a:xfrm>
+          <a:prstGeom prst="rect">
+            <a:avLst/>
+          </a:prstGeom>
+          <a:noFill/>
+          <a:ln/>
+        </p:spPr>
+        <p:txBody>
+          <a:bodyPr wrap="square" lIns="0" tIns="0" rIns="0" bIns="0" rtlCol="0" anchor="ctr"/>
+          <a:lstStyle/>
+          <a:p>
+            <a:pPr marL="0" indent="0">
+              <a:buNone/>
+            </a:pPr>
+            <a:r>
+              <a:rPr lang="en-US" sz="950" i="1" dirty="0">
+                <a:solidFill>
+                  <a:srgbClr val="5F7178"/>
+                </a:solidFill>
+                <a:latin typeface="Calibri" pitchFamily="34" charset="0"/>
+                <a:ea typeface="Calibri" pitchFamily="34" charset="-122"/>
+                <a:cs typeface="Calibri" pitchFamily="34" charset="-120"/>
+              </a:rPr>
+              <a:t>Control points are averages over 1, 2, 5 and 10 m. Wider spacing smooths away real lateral structure of a few millimetres.</a:t>
+            </a:r>
+            <a:endParaRPr lang="en-US" sz="950" dirty="0"/>
+          </a:p>
+        </p:txBody>
+      </p:sp>
+      <p:sp>
+        <p:nvSpPr>
+          <p:cNvPr id="6" name="Shape 4"/>
+          <p:cNvSpPr/>
+          <p:nvPr/>
+        </p:nvSpPr>
+        <p:spPr>
+          <a:xfrm>
+            <a:off x="5440680" y="1280160"/>
+            <a:ext cx="3246120" cy="877824"/>
+          </a:xfrm>
+          <a:prstGeom prst="roundRect">
+            <a:avLst>
+              <a:gd name="adj" fmla="val 9375"/>
+            </a:avLst>
+          </a:prstGeom>
+          <a:solidFill>
+            <a:srgbClr val="EDF5F5"/>
+          </a:solidFill>
+          <a:ln w="12700">
+            <a:solidFill>
+              <a:srgbClr val="EDF5F5"/>
+            </a:solidFill>
+            <a:prstDash val="solid"/>
+          </a:ln>
+        </p:spPr>
+        <p:txBody>
+          <a:bodyPr/>
+          <a:lstStyle/>
+          <a:p>
+            <a:endParaRPr lang="sv-SE"/>
+          </a:p>
+        </p:txBody>
+      </p:sp>
+      <p:sp>
+        <p:nvSpPr>
+          <p:cNvPr id="7" name="Text 5"/>
+          <p:cNvSpPr txBox="1"/>
+          <p:nvPr/>
+        </p:nvSpPr>
+        <p:spPr>
+          <a:xfrm>
+            <a:off x="5550408" y="1280160"/>
+            <a:ext cx="1371600" cy="877824"/>
+          </a:xfrm>
+          <a:prstGeom prst="rect">
+            <a:avLst/>
+          </a:prstGeom>
+          <a:noFill/>
+          <a:ln/>
+        </p:spPr>
+        <p:txBody>
+          <a:bodyPr wrap="square" lIns="0" tIns="0" rIns="0" bIns="0" rtlCol="0" anchor="ctr"/>
+          <a:lstStyle/>
+          <a:p>
+            <a:pPr marL="0" indent="0" algn="ctr">
+              <a:buNone/>
+            </a:pPr>
+            <a:r>
+              <a:rPr lang="en-US" sz="1800" b="1" dirty="0">
+                <a:solidFill>
+                  <a:srgbClr val="028090"/>
+                </a:solidFill>
+                <a:latin typeface="Cambria" pitchFamily="34" charset="0"/>
+                <a:ea typeface="Cambria" pitchFamily="34" charset="-122"/>
+                <a:cs typeface="Cambria" pitchFamily="34" charset="-120"/>
+              </a:rPr>
+              <a:t>261</a:t>
+            </a:r>
+            <a:endParaRPr lang="en-US" sz="1800" dirty="0"/>
+          </a:p>
+        </p:txBody>
+      </p:sp>
+      <p:sp>
+        <p:nvSpPr>
+          <p:cNvPr id="8" name="Text 6"/>
+          <p:cNvSpPr txBox="1"/>
+          <p:nvPr/>
+        </p:nvSpPr>
+        <p:spPr>
+          <a:xfrm>
+            <a:off x="6995160" y="1353312"/>
+            <a:ext cx="1600199" cy="237744"/>
+          </a:xfrm>
+          <a:prstGeom prst="rect">
+            <a:avLst/>
+          </a:prstGeom>
+          <a:noFill/>
+          <a:ln/>
+        </p:spPr>
+        <p:txBody>
+          <a:bodyPr wrap="square" lIns="0" tIns="0" rIns="0" bIns="0" rtlCol="0" anchor="ctr"/>
+          <a:lstStyle/>
+          <a:p>
+            <a:pPr marL="0" indent="0">
+              <a:buNone/>
+            </a:pPr>
+            <a:r>
+              <a:rPr lang="en-US" sz="1100" b="1" dirty="0">
+                <a:solidFill>
+                  <a:srgbClr val="16262B"/>
+                </a:solidFill>
+                <a:latin typeface="Calibri" pitchFamily="34" charset="0"/>
+                <a:ea typeface="Calibri" pitchFamily="34" charset="-122"/>
+                <a:cs typeface="Calibri" pitchFamily="34" charset="-120"/>
+              </a:rPr>
+              <a:t>control points per rail</a:t>
+            </a:r>
+            <a:endParaRPr lang="en-US" sz="1100" dirty="0"/>
+          </a:p>
+        </p:txBody>
+      </p:sp>
+      <p:sp>
+        <p:nvSpPr>
+          <p:cNvPr id="9" name="Text 7"/>
+          <p:cNvSpPr txBox="1"/>
+          <p:nvPr/>
+        </p:nvSpPr>
+        <p:spPr>
+          <a:xfrm>
+            <a:off x="6995160" y="1591056"/>
+            <a:ext cx="1600199" cy="512063"/>
+          </a:xfrm>
+          <a:prstGeom prst="rect">
+            <a:avLst/>
+          </a:prstGeom>
+          <a:noFill/>
+          <a:ln/>
+        </p:spPr>
+        <p:txBody>
+          <a:bodyPr wrap="square" lIns="0" tIns="0" rIns="0" bIns="0" rtlCol="0" anchor="ctr"/>
+          <a:lstStyle/>
+          <a:p>
+            <a:pPr marL="0" indent="0">
+              <a:buNone/>
+            </a:pPr>
+            <a:r>
+              <a:rPr lang="en-US" sz="900" dirty="0">
+                <a:solidFill>
+                  <a:srgbClr val="5F7178"/>
+                </a:solidFill>
+                <a:latin typeface="Calibri" pitchFamily="34" charset="0"/>
+                <a:ea typeface="Calibri" pitchFamily="34" charset="-122"/>
+                <a:cs typeface="Calibri" pitchFamily="34" charset="-120"/>
+              </a:rPr>
+              <a:t>1 m spacing keeps the curve within 1.4 mm of the measurements</a:t>
+            </a:r>
+            <a:endParaRPr lang="en-US" sz="900" dirty="0"/>
+          </a:p>
+        </p:txBody>
+      </p:sp>
+      <p:sp>
+        <p:nvSpPr>
+          <p:cNvPr id="10" name="Shape 4"/>
+          <p:cNvSpPr/>
+          <p:nvPr/>
+        </p:nvSpPr>
+        <p:spPr>
+          <a:xfrm>
+            <a:off x="5440680" y="2249424"/>
+            <a:ext cx="3246120" cy="877824"/>
+          </a:xfrm>
+          <a:prstGeom prst="roundRect">
+            <a:avLst>
+              <a:gd name="adj" fmla="val 9375"/>
+            </a:avLst>
+          </a:prstGeom>
+          <a:solidFill>
+            <a:srgbClr val="EDF5F5"/>
+          </a:solidFill>
+          <a:ln w="12700">
+            <a:solidFill>
+              <a:srgbClr val="EDF5F5"/>
+            </a:solidFill>
+            <a:prstDash val="solid"/>
+          </a:ln>
+        </p:spPr>
+        <p:txBody>
+          <a:bodyPr/>
+          <a:lstStyle/>
+          <a:p>
+            <a:endParaRPr lang="sv-SE"/>
+          </a:p>
+        </p:txBody>
+      </p:sp>
+      <p:sp>
+        <p:nvSpPr>
+          <p:cNvPr id="11" name="Text 5"/>
+          <p:cNvSpPr txBox="1"/>
+          <p:nvPr/>
+        </p:nvSpPr>
+        <p:spPr>
+          <a:xfrm>
+            <a:off x="5550408" y="2249424"/>
+            <a:ext cx="1371600" cy="877824"/>
+          </a:xfrm>
+          <a:prstGeom prst="rect">
+            <a:avLst/>
+          </a:prstGeom>
+          <a:noFill/>
+          <a:ln/>
+        </p:spPr>
+        <p:txBody>
+          <a:bodyPr wrap="square" lIns="0" tIns="0" rIns="0" bIns="0" rtlCol="0" anchor="ctr"/>
+          <a:lstStyle/>
+          <a:p>
+            <a:pPr marL="0" indent="0" algn="ctr">
+              <a:buNone/>
+            </a:pPr>
+            <a:r>
+              <a:rPr lang="en-US" sz="1800" b="1" dirty="0">
+                <a:solidFill>
+                  <a:srgbClr val="028090"/>
+                </a:solidFill>
+                <a:latin typeface="Cambria" pitchFamily="34" charset="0"/>
+                <a:ea typeface="Cambria" pitchFamily="34" charset="-122"/>
+                <a:cs typeface="Cambria" pitchFamily="34" charset="-120"/>
+              </a:rPr>
+              <a:t>0.9 mm</a:t>
+            </a:r>
+            <a:endParaRPr lang="en-US" sz="1800" dirty="0"/>
+          </a:p>
+        </p:txBody>
+      </p:sp>
+      <p:sp>
+        <p:nvSpPr>
+          <p:cNvPr id="12" name="Text 6"/>
+          <p:cNvSpPr txBox="1"/>
+          <p:nvPr/>
+        </p:nvSpPr>
+        <p:spPr>
+          <a:xfrm>
+            <a:off x="6995160" y="2322576"/>
+            <a:ext cx="1600199" cy="237744"/>
+          </a:xfrm>
+          <a:prstGeom prst="rect">
+            <a:avLst/>
+          </a:prstGeom>
+          <a:noFill/>
+          <a:ln/>
+        </p:spPr>
+        <p:txBody>
+          <a:bodyPr wrap="square" lIns="0" tIns="0" rIns="0" bIns="0" rtlCol="0" anchor="ctr"/>
+          <a:lstStyle/>
+          <a:p>
+            <a:pPr marL="0" indent="0">
+              <a:buNone/>
+            </a:pPr>
+            <a:r>
+              <a:rPr lang="en-US" sz="1100" b="1" dirty="0">
+                <a:solidFill>
+                  <a:srgbClr val="16262B"/>
+                </a:solidFill>
+                <a:latin typeface="Calibri" pitchFamily="34" charset="0"/>
+                <a:ea typeface="Calibri" pitchFamily="34" charset="-122"/>
+                <a:cs typeface="Calibri" pitchFamily="34" charset="-120"/>
+              </a:rPr>
+              <a:t>noise floor, gauge</a:t>
+            </a:r>
+            <a:endParaRPr lang="en-US" sz="1100" dirty="0"/>
+          </a:p>
+        </p:txBody>
+      </p:sp>
+      <p:sp>
+        <p:nvSpPr>
+          <p:cNvPr id="13" name="Text 7"/>
+          <p:cNvSpPr txBox="1"/>
+          <p:nvPr/>
+        </p:nvSpPr>
+        <p:spPr>
+          <a:xfrm>
+            <a:off x="6995160" y="2560320"/>
+            <a:ext cx="1600199" cy="512063"/>
+          </a:xfrm>
+          <a:prstGeom prst="rect">
+            <a:avLst/>
+          </a:prstGeom>
+          <a:noFill/>
+          <a:ln/>
+        </p:spPr>
+        <p:txBody>
+          <a:bodyPr wrap="square" lIns="0" tIns="0" rIns="0" bIns="0" rtlCol="0" anchor="ctr"/>
+          <a:lstStyle/>
+          <a:p>
+            <a:pPr marL="0" indent="0">
+              <a:buNone/>
+            </a:pPr>
+            <a:r>
+              <a:rPr lang="en-US" sz="900" dirty="0">
+                <a:solidFill>
+                  <a:srgbClr val="5F7178"/>
+                </a:solidFill>
+                <a:latin typeface="Calibri" pitchFamily="34" charset="0"/>
+                <a:ea typeface="Calibri" pitchFamily="34" charset="-122"/>
+                <a:cs typeface="Calibri" pitchFamily="34" charset="-120"/>
+              </a:rPr>
+              <a:t>lateral 1.4–1.5 mm, height 0.3 mm; two halves of the scan compared (RMS)</a:t>
+            </a:r>
+            <a:endParaRPr lang="en-US" sz="900" dirty="0"/>
+          </a:p>
+        </p:txBody>
+      </p:sp>
+      <p:sp>
+        <p:nvSpPr>
+          <p:cNvPr id="14" name="Shape 4"/>
+          <p:cNvSpPr/>
+          <p:nvPr/>
+        </p:nvSpPr>
+        <p:spPr>
+          <a:xfrm>
+            <a:off x="5440680" y="3218688"/>
+            <a:ext cx="3246120" cy="877824"/>
+          </a:xfrm>
+          <a:prstGeom prst="roundRect">
+            <a:avLst>
+              <a:gd name="adj" fmla="val 9375"/>
+            </a:avLst>
+          </a:prstGeom>
+          <a:solidFill>
+            <a:srgbClr val="EDF5F5"/>
+          </a:solidFill>
+          <a:ln w="12700">
+            <a:solidFill>
+              <a:srgbClr val="EDF5F5"/>
+            </a:solidFill>
+            <a:prstDash val="solid"/>
+          </a:ln>
+        </p:spPr>
+        <p:txBody>
+          <a:bodyPr/>
+          <a:lstStyle/>
+          <a:p>
+            <a:endParaRPr lang="sv-SE"/>
+          </a:p>
+        </p:txBody>
+      </p:sp>
+      <p:sp>
+        <p:nvSpPr>
+          <p:cNvPr id="15" name="Text 5"/>
+          <p:cNvSpPr txBox="1"/>
+          <p:nvPr/>
+        </p:nvSpPr>
+        <p:spPr>
+          <a:xfrm>
+            <a:off x="5550408" y="3218688"/>
+            <a:ext cx="1371600" cy="877824"/>
+          </a:xfrm>
+          <a:prstGeom prst="rect">
+            <a:avLst/>
+          </a:prstGeom>
+          <a:noFill/>
+          <a:ln/>
+        </p:spPr>
+        <p:txBody>
+          <a:bodyPr wrap="square" lIns="0" tIns="0" rIns="0" bIns="0" rtlCol="0" anchor="ctr"/>
+          <a:lstStyle/>
+          <a:p>
+            <a:pPr marL="0" indent="0" algn="ctr">
+              <a:buNone/>
+            </a:pPr>
+            <a:r>
+              <a:rPr lang="en-US" sz="1800" b="1" dirty="0">
+                <a:solidFill>
+                  <a:srgbClr val="028090"/>
+                </a:solidFill>
+                <a:latin typeface="Cambria" pitchFamily="34" charset="0"/>
+                <a:ea typeface="Cambria" pitchFamily="34" charset="-122"/>
+                <a:cs typeface="Cambria" pitchFamily="34" charset="-120"/>
+              </a:rPr>
+              <a:t>3.9 mm</a:t>
+            </a:r>
+            <a:endParaRPr lang="en-US" sz="1800" dirty="0"/>
+          </a:p>
+        </p:txBody>
+      </p:sp>
+      <p:sp>
+        <p:nvSpPr>
+          <p:cNvPr id="16" name="Text 6"/>
+          <p:cNvSpPr txBox="1"/>
+          <p:nvPr/>
+        </p:nvSpPr>
+        <p:spPr>
+          <a:xfrm>
+            <a:off x="6995160" y="3291840"/>
+            <a:ext cx="1600199" cy="237744"/>
+          </a:xfrm>
+          <a:prstGeom prst="rect">
+            <a:avLst/>
+          </a:prstGeom>
+          <a:noFill/>
+          <a:ln/>
+        </p:spPr>
+        <p:txBody>
+          <a:bodyPr wrap="square" lIns="0" tIns="0" rIns="0" bIns="0" rtlCol="0" anchor="ctr"/>
+          <a:lstStyle/>
+          <a:p>
+            <a:pPr marL="0" indent="0">
+              <a:buNone/>
+            </a:pPr>
+            <a:r>
+              <a:rPr lang="en-US" sz="1100" b="1" dirty="0">
+                <a:solidFill>
+                  <a:srgbClr val="16262B"/>
+                </a:solidFill>
+                <a:latin typeface="Calibri" pitchFamily="34" charset="0"/>
+                <a:ea typeface="Calibri" pitchFamily="34" charset="-122"/>
+                <a:cs typeface="Calibri" pitchFamily="34" charset="-120"/>
+              </a:rPr>
+              <a:t>change recovered</a:t>
+            </a:r>
+            <a:endParaRPr lang="en-US" sz="1100" dirty="0"/>
+          </a:p>
+        </p:txBody>
+      </p:sp>
+      <p:sp>
+        <p:nvSpPr>
+          <p:cNvPr id="17" name="Text 7"/>
+          <p:cNvSpPr txBox="1"/>
+          <p:nvPr/>
+        </p:nvSpPr>
+        <p:spPr>
+          <a:xfrm>
+            <a:off x="6995160" y="3529584"/>
+            <a:ext cx="1600199" cy="512063"/>
+          </a:xfrm>
+          <a:prstGeom prst="rect">
+            <a:avLst/>
+          </a:prstGeom>
+          <a:noFill/>
+          <a:ln/>
+        </p:spPr>
+        <p:txBody>
+          <a:bodyPr wrap="square" lIns="0" tIns="0" rIns="0" bIns="0" rtlCol="0" anchor="ctr"/>
+          <a:lstStyle/>
+          <a:p>
+            <a:pPr marL="0" indent="0">
+              <a:buNone/>
+            </a:pPr>
+            <a:r>
+              <a:rPr lang="en-US" sz="900" dirty="0">
+                <a:solidFill>
+                  <a:srgbClr val="5F7178"/>
+                </a:solidFill>
+                <a:latin typeface="Calibri" pitchFamily="34" charset="0"/>
+                <a:ea typeface="Calibri" pitchFamily="34" charset="-122"/>
+                <a:cs typeface="Calibri" pitchFamily="34" charset="-120"/>
+              </a:rPr>
+              <a:t>a known 4 mm gauge change added to one half of the scan; found across the stretch</a:t>
+            </a:r>
+            <a:endParaRPr lang="en-US" sz="900" dirty="0"/>
+          </a:p>
+        </p:txBody>
+      </p:sp>
+    </p:spTree>
+  </p:cSld>
+  <p:clrMapOvr>
+    <a:masterClrMapping/>
+  </p:clrMapOvr>
+</p:sld>
+</file>
+
 <file path=ppt/slides/slide2.xml><?xml version="1.0" encoding="utf-8"?>
 <p:sld xmlns:a="http://schemas.openxmlformats.org/drawingml/2006/main" xmlns:r="http://schemas.openxmlformats.org/officeDocument/2006/relationships" xmlns:p="http://schemas.openxmlformats.org/presentationml/2006/main">
   <p:cSld name="Slide 2">
@@ -11689,6 +15158,6260 @@
         </p:txBody>
       </p:sp>
     </p:spTree>
+  </p:cSld>
+  <p:clrMapOvr>
+    <a:masterClrMapping/>
+  </p:clrMapOvr>
+</p:sld>
+</file>
+
+<file path=ppt/slides/slide20.xml><?xml version="1.0" encoding="utf-8"?>
+<p:sld xmlns:a="http://schemas.openxmlformats.org/drawingml/2006/main" xmlns:r="http://schemas.openxmlformats.org/officeDocument/2006/relationships" xmlns:p="http://schemas.openxmlformats.org/presentationml/2006/main">
+  <p:cSld>
+    <p:spTree>
+      <p:nvGrpSpPr>
+        <p:cNvPr id="1" name=""/>
+        <p:cNvGrpSpPr/>
+        <p:nvPr/>
+      </p:nvGrpSpPr>
+      <p:grpSpPr>
+        <a:xfrm>
+          <a:off x="0" y="0"/>
+          <a:ext cx="0" cy="0"/>
+          <a:chOff x="0" y="0"/>
+          <a:chExt cx="0" cy="0"/>
+        </a:xfrm>
+      </p:grpSpPr>
+      <p:sp>
+        <p:nvSpPr>
+          <p:cNvPr id="2" name="Text 0"/>
+          <p:cNvSpPr txBox="1"/>
+          <p:nvPr/>
+        </p:nvSpPr>
+        <p:spPr>
+          <a:xfrm>
+            <a:off x="457200" y="274320"/>
+            <a:ext cx="8229600" cy="228600"/>
+          </a:xfrm>
+          <a:prstGeom prst="rect">
+            <a:avLst/>
+          </a:prstGeom>
+          <a:noFill/>
+          <a:ln/>
+        </p:spPr>
+        <p:txBody>
+          <a:bodyPr wrap="square" lIns="0" tIns="0" rIns="0" bIns="0" rtlCol="0" anchor="ctr"/>
+          <a:lstStyle/>
+          <a:p>
+            <a:pPr marL="0" indent="0">
+              <a:buNone/>
+            </a:pPr>
+            <a:r>
+              <a:rPr lang="en-US" sz="1100" b="1" kern="0" spc="200" dirty="0">
+                <a:solidFill>
+                  <a:srgbClr val="028090"/>
+                </a:solidFill>
+                <a:latin typeface="Calibri" pitchFamily="34" charset="0"/>
+                <a:ea typeface="Calibri" pitchFamily="34" charset="-122"/>
+                <a:cs typeface="Calibri" pitchFamily="34" charset="-120"/>
+              </a:rPr>
+              <a:t>COMPARING RUNS</a:t>
+            </a:r>
+            <a:endParaRPr lang="en-US" sz="1100" dirty="0"/>
+          </a:p>
+        </p:txBody>
+      </p:sp>
+      <p:sp>
+        <p:nvSpPr>
+          <p:cNvPr id="3" name="Text 1"/>
+          <p:cNvSpPr txBox="1"/>
+          <p:nvPr/>
+        </p:nvSpPr>
+        <p:spPr>
+          <a:xfrm>
+            <a:off x="457200" y="502920"/>
+            <a:ext cx="8229600" cy="548640"/>
+          </a:xfrm>
+          <a:prstGeom prst="rect">
+            <a:avLst/>
+          </a:prstGeom>
+          <a:noFill/>
+          <a:ln/>
+        </p:spPr>
+        <p:txBody>
+          <a:bodyPr wrap="square" lIns="0" tIns="0" rIns="0" bIns="0" rtlCol="0" anchor="ctr"/>
+          <a:lstStyle/>
+          <a:p>
+            <a:pPr marL="0" indent="0">
+              <a:buNone/>
+            </a:pPr>
+            <a:r>
+              <a:rPr lang="en-US" sz="2700" b="1" dirty="0">
+                <a:solidFill>
+                  <a:srgbClr val="16262B"/>
+                </a:solidFill>
+                <a:latin typeface="Cambria" pitchFamily="34" charset="0"/>
+                <a:ea typeface="Cambria" pitchFamily="34" charset="-122"/>
+                <a:cs typeface="Cambria" pitchFamily="34" charset="-120"/>
+              </a:rPr>
+              <a:t>Comparing two runs of the same track</a:t>
+            </a:r>
+            <a:endParaRPr lang="en-US" sz="2700" dirty="0"/>
+          </a:p>
+        </p:txBody>
+      </p:sp>
+      <p:sp>
+        <p:nvSpPr>
+          <p:cNvPr id="4" name="Shape 2"/>
+          <p:cNvSpPr/>
+          <p:nvPr/>
+        </p:nvSpPr>
+        <p:spPr>
+          <a:xfrm>
+            <a:off x="457200" y="1325880"/>
+            <a:ext cx="384048" cy="384048"/>
+          </a:xfrm>
+          <a:prstGeom prst="ellipse">
+            <a:avLst/>
+          </a:prstGeom>
+          <a:solidFill>
+            <a:srgbClr val="028090"/>
+          </a:solidFill>
+          <a:ln w="12700">
+            <a:solidFill>
+              <a:srgbClr val="028090"/>
+            </a:solidFill>
+            <a:prstDash val="solid"/>
+          </a:ln>
+        </p:spPr>
+        <p:txBody>
+          <a:bodyPr/>
+          <a:lstStyle/>
+          <a:p>
+            <a:endParaRPr lang="sv-SE"/>
+          </a:p>
+        </p:txBody>
+      </p:sp>
+      <p:sp>
+        <p:nvSpPr>
+          <p:cNvPr id="5" name="Text 3"/>
+          <p:cNvSpPr txBox="1"/>
+          <p:nvPr/>
+        </p:nvSpPr>
+        <p:spPr>
+          <a:xfrm>
+            <a:off x="457200" y="1325880"/>
+            <a:ext cx="384048" cy="384048"/>
+          </a:xfrm>
+          <a:prstGeom prst="rect">
+            <a:avLst/>
+          </a:prstGeom>
+          <a:noFill/>
+          <a:ln/>
+        </p:spPr>
+        <p:txBody>
+          <a:bodyPr wrap="square" lIns="0" tIns="0" rIns="0" bIns="0" rtlCol="0" anchor="ctr"/>
+          <a:lstStyle/>
+          <a:p>
+            <a:pPr marL="0" indent="0" algn="ctr">
+              <a:buNone/>
+            </a:pPr>
+            <a:r>
+              <a:rPr lang="en-US" sz="1400" b="1" dirty="0">
+                <a:solidFill>
+                  <a:srgbClr val="FFFFFF"/>
+                </a:solidFill>
+                <a:latin typeface="Calibri" pitchFamily="34" charset="0"/>
+                <a:ea typeface="Calibri" pitchFamily="34" charset="-122"/>
+                <a:cs typeface="Calibri" pitchFamily="34" charset="-120"/>
+              </a:rPr>
+              <a:t>1</a:t>
+            </a:r>
+            <a:endParaRPr lang="en-US" sz="1400" dirty="0"/>
+          </a:p>
+        </p:txBody>
+      </p:sp>
+      <p:sp>
+        <p:nvSpPr>
+          <p:cNvPr id="6" name="Text 4"/>
+          <p:cNvSpPr txBox="1"/>
+          <p:nvPr/>
+        </p:nvSpPr>
+        <p:spPr>
+          <a:xfrm>
+            <a:off x="1005840" y="1316736"/>
+            <a:ext cx="1463040" cy="274320"/>
+          </a:xfrm>
+          <a:prstGeom prst="rect">
+            <a:avLst/>
+          </a:prstGeom>
+          <a:noFill/>
+          <a:ln/>
+        </p:spPr>
+        <p:txBody>
+          <a:bodyPr wrap="square" lIns="0" tIns="0" rIns="0" bIns="0" rtlCol="0" anchor="ctr"/>
+          <a:lstStyle/>
+          <a:p>
+            <a:pPr marL="0" indent="0">
+              <a:buNone/>
+            </a:pPr>
+            <a:r>
+              <a:rPr lang="en-US" sz="1400" b="1" dirty="0">
+                <a:solidFill>
+                  <a:srgbClr val="16262B"/>
+                </a:solidFill>
+                <a:latin typeface="Calibri" pitchFamily="34" charset="0"/>
+                <a:ea typeface="Calibri" pitchFamily="34" charset="-122"/>
+                <a:cs typeface="Calibri" pitchFamily="34" charset="-120"/>
+              </a:rPr>
+              <a:t>Same frame</a:t>
+            </a:r>
+            <a:endParaRPr lang="en-US" sz="1400" dirty="0"/>
+          </a:p>
+        </p:txBody>
+      </p:sp>
+      <p:sp>
+        <p:nvSpPr>
+          <p:cNvPr id="7" name="Text 5"/>
+          <p:cNvSpPr txBox="1"/>
+          <p:nvPr/>
+        </p:nvSpPr>
+        <p:spPr>
+          <a:xfrm>
+            <a:off x="2514600" y="1307592"/>
+            <a:ext cx="2148840" cy="420624"/>
+          </a:xfrm>
+          <a:prstGeom prst="rect">
+            <a:avLst/>
+          </a:prstGeom>
+          <a:noFill/>
+          <a:ln/>
+        </p:spPr>
+        <p:txBody>
+          <a:bodyPr wrap="square" lIns="0" tIns="0" rIns="0" bIns="0" rtlCol="0" anchor="ctr"/>
+          <a:lstStyle/>
+          <a:p>
+            <a:pPr marL="0" indent="0">
+              <a:buNone/>
+            </a:pPr>
+            <a:r>
+              <a:rPr lang="en-US" sz="1100" dirty="0">
+                <a:solidFill>
+                  <a:srgbClr val="5F7178"/>
+                </a:solidFill>
+                <a:latin typeface="Calibri" pitchFamily="34" charset="0"/>
+                <a:ea typeface="Calibri" pitchFamily="34" charset="-122"/>
+                <a:cs typeface="Calibri" pitchFamily="34" charset="-120"/>
+              </a:rPr>
+              <a:t>both runs projected onto the same reference frame</a:t>
+            </a:r>
+            <a:endParaRPr lang="en-US" sz="1100" dirty="0"/>
+          </a:p>
+        </p:txBody>
+      </p:sp>
+      <p:sp>
+        <p:nvSpPr>
+          <p:cNvPr id="8" name="Shape 2"/>
+          <p:cNvSpPr/>
+          <p:nvPr/>
+        </p:nvSpPr>
+        <p:spPr>
+          <a:xfrm>
+            <a:off x="457200" y="1929384"/>
+            <a:ext cx="384048" cy="384048"/>
+          </a:xfrm>
+          <a:prstGeom prst="ellipse">
+            <a:avLst/>
+          </a:prstGeom>
+          <a:solidFill>
+            <a:srgbClr val="028090"/>
+          </a:solidFill>
+          <a:ln w="12700">
+            <a:solidFill>
+              <a:srgbClr val="028090"/>
+            </a:solidFill>
+            <a:prstDash val="solid"/>
+          </a:ln>
+        </p:spPr>
+        <p:txBody>
+          <a:bodyPr/>
+          <a:lstStyle/>
+          <a:p>
+            <a:endParaRPr lang="sv-SE"/>
+          </a:p>
+        </p:txBody>
+      </p:sp>
+      <p:sp>
+        <p:nvSpPr>
+          <p:cNvPr id="9" name="Text 3"/>
+          <p:cNvSpPr txBox="1"/>
+          <p:nvPr/>
+        </p:nvSpPr>
+        <p:spPr>
+          <a:xfrm>
+            <a:off x="457200" y="1929384"/>
+            <a:ext cx="384048" cy="384048"/>
+          </a:xfrm>
+          <a:prstGeom prst="rect">
+            <a:avLst/>
+          </a:prstGeom>
+          <a:noFill/>
+          <a:ln/>
+        </p:spPr>
+        <p:txBody>
+          <a:bodyPr wrap="square" lIns="0" tIns="0" rIns="0" bIns="0" rtlCol="0" anchor="ctr"/>
+          <a:lstStyle/>
+          <a:p>
+            <a:pPr marL="0" indent="0" algn="ctr">
+              <a:buNone/>
+            </a:pPr>
+            <a:r>
+              <a:rPr lang="en-US" sz="1400" b="1" dirty="0">
+                <a:solidFill>
+                  <a:srgbClr val="FFFFFF"/>
+                </a:solidFill>
+                <a:latin typeface="Calibri" pitchFamily="34" charset="0"/>
+                <a:ea typeface="Calibri" pitchFamily="34" charset="-122"/>
+                <a:cs typeface="Calibri" pitchFamily="34" charset="-120"/>
+              </a:rPr>
+              <a:t>2</a:t>
+            </a:r>
+            <a:endParaRPr lang="en-US" sz="1400" dirty="0"/>
+          </a:p>
+        </p:txBody>
+      </p:sp>
+      <p:sp>
+        <p:nvSpPr>
+          <p:cNvPr id="10" name="Text 4"/>
+          <p:cNvSpPr txBox="1"/>
+          <p:nvPr/>
+        </p:nvSpPr>
+        <p:spPr>
+          <a:xfrm>
+            <a:off x="1005840" y="1920240"/>
+            <a:ext cx="1463040" cy="274320"/>
+          </a:xfrm>
+          <a:prstGeom prst="rect">
+            <a:avLst/>
+          </a:prstGeom>
+          <a:noFill/>
+          <a:ln/>
+        </p:spPr>
+        <p:txBody>
+          <a:bodyPr wrap="square" lIns="0" tIns="0" rIns="0" bIns="0" rtlCol="0" anchor="ctr"/>
+          <a:lstStyle/>
+          <a:p>
+            <a:pPr marL="0" indent="0">
+              <a:buNone/>
+            </a:pPr>
+            <a:r>
+              <a:rPr lang="en-US" sz="1400" b="1" dirty="0">
+                <a:solidFill>
+                  <a:srgbClr val="16262B"/>
+                </a:solidFill>
+                <a:latin typeface="Calibri" pitchFamily="34" charset="0"/>
+                <a:ea typeface="Calibri" pitchFamily="34" charset="-122"/>
+                <a:cs typeface="Calibri" pitchFamily="34" charset="-120"/>
+              </a:rPr>
+              <a:t>Curve per run</a:t>
+            </a:r>
+            <a:endParaRPr lang="en-US" sz="1400" dirty="0"/>
+          </a:p>
+        </p:txBody>
+      </p:sp>
+      <p:sp>
+        <p:nvSpPr>
+          <p:cNvPr id="11" name="Text 5"/>
+          <p:cNvSpPr txBox="1"/>
+          <p:nvPr/>
+        </p:nvSpPr>
+        <p:spPr>
+          <a:xfrm>
+            <a:off x="2514600" y="1911095"/>
+            <a:ext cx="2148840" cy="420624"/>
+          </a:xfrm>
+          <a:prstGeom prst="rect">
+            <a:avLst/>
+          </a:prstGeom>
+          <a:noFill/>
+          <a:ln/>
+        </p:spPr>
+        <p:txBody>
+          <a:bodyPr wrap="square" lIns="0" tIns="0" rIns="0" bIns="0" rtlCol="0" anchor="ctr"/>
+          <a:lstStyle/>
+          <a:p>
+            <a:pPr marL="0" indent="0">
+              <a:buNone/>
+            </a:pPr>
+            <a:r>
+              <a:rPr lang="en-US" sz="1100" dirty="0">
+                <a:solidFill>
+                  <a:srgbClr val="5F7178"/>
+                </a:solidFill>
+                <a:latin typeface="Calibri" pitchFamily="34" charset="0"/>
+                <a:ea typeface="Calibri" pitchFamily="34" charset="-122"/>
+                <a:cs typeface="Calibri" pitchFamily="34" charset="-120"/>
+              </a:rPr>
+              <a:t>rail curves through 1 m control points</a:t>
+            </a:r>
+            <a:endParaRPr lang="en-US" sz="1100" dirty="0"/>
+          </a:p>
+        </p:txBody>
+      </p:sp>
+      <p:sp>
+        <p:nvSpPr>
+          <p:cNvPr id="12" name="Shape 2"/>
+          <p:cNvSpPr/>
+          <p:nvPr/>
+        </p:nvSpPr>
+        <p:spPr>
+          <a:xfrm>
+            <a:off x="457200" y="2532888"/>
+            <a:ext cx="384048" cy="384048"/>
+          </a:xfrm>
+          <a:prstGeom prst="ellipse">
+            <a:avLst/>
+          </a:prstGeom>
+          <a:solidFill>
+            <a:srgbClr val="028090"/>
+          </a:solidFill>
+          <a:ln w="12700">
+            <a:solidFill>
+              <a:srgbClr val="028090"/>
+            </a:solidFill>
+            <a:prstDash val="solid"/>
+          </a:ln>
+        </p:spPr>
+        <p:txBody>
+          <a:bodyPr/>
+          <a:lstStyle/>
+          <a:p>
+            <a:endParaRPr lang="sv-SE"/>
+          </a:p>
+        </p:txBody>
+      </p:sp>
+      <p:sp>
+        <p:nvSpPr>
+          <p:cNvPr id="13" name="Text 3"/>
+          <p:cNvSpPr txBox="1"/>
+          <p:nvPr/>
+        </p:nvSpPr>
+        <p:spPr>
+          <a:xfrm>
+            <a:off x="457200" y="2532888"/>
+            <a:ext cx="384048" cy="384048"/>
+          </a:xfrm>
+          <a:prstGeom prst="rect">
+            <a:avLst/>
+          </a:prstGeom>
+          <a:noFill/>
+          <a:ln/>
+        </p:spPr>
+        <p:txBody>
+          <a:bodyPr wrap="square" lIns="0" tIns="0" rIns="0" bIns="0" rtlCol="0" anchor="ctr"/>
+          <a:lstStyle/>
+          <a:p>
+            <a:pPr marL="0" indent="0" algn="ctr">
+              <a:buNone/>
+            </a:pPr>
+            <a:r>
+              <a:rPr lang="en-US" sz="1400" b="1" dirty="0">
+                <a:solidFill>
+                  <a:srgbClr val="FFFFFF"/>
+                </a:solidFill>
+                <a:latin typeface="Calibri" pitchFamily="34" charset="0"/>
+                <a:ea typeface="Calibri" pitchFamily="34" charset="-122"/>
+                <a:cs typeface="Calibri" pitchFamily="34" charset="-120"/>
+              </a:rPr>
+              <a:t>3</a:t>
+            </a:r>
+            <a:endParaRPr lang="en-US" sz="1400" dirty="0"/>
+          </a:p>
+        </p:txBody>
+      </p:sp>
+      <p:sp>
+        <p:nvSpPr>
+          <p:cNvPr id="14" name="Text 4"/>
+          <p:cNvSpPr txBox="1"/>
+          <p:nvPr/>
+        </p:nvSpPr>
+        <p:spPr>
+          <a:xfrm>
+            <a:off x="1005840" y="2523744"/>
+            <a:ext cx="1463040" cy="274320"/>
+          </a:xfrm>
+          <a:prstGeom prst="rect">
+            <a:avLst/>
+          </a:prstGeom>
+          <a:noFill/>
+          <a:ln/>
+        </p:spPr>
+        <p:txBody>
+          <a:bodyPr wrap="square" lIns="0" tIns="0" rIns="0" bIns="0" rtlCol="0" anchor="ctr"/>
+          <a:lstStyle/>
+          <a:p>
+            <a:pPr marL="0" indent="0">
+              <a:buNone/>
+            </a:pPr>
+            <a:r>
+              <a:rPr lang="en-US" sz="1400" b="1" dirty="0">
+                <a:solidFill>
+                  <a:srgbClr val="16262B"/>
+                </a:solidFill>
+                <a:latin typeface="Calibri" pitchFamily="34" charset="0"/>
+                <a:ea typeface="Calibri" pitchFamily="34" charset="-122"/>
+                <a:cs typeface="Calibri" pitchFamily="34" charset="-120"/>
+              </a:rPr>
+              <a:t>Resample</a:t>
+            </a:r>
+            <a:endParaRPr lang="en-US" sz="1400" dirty="0"/>
+          </a:p>
+        </p:txBody>
+      </p:sp>
+      <p:sp>
+        <p:nvSpPr>
+          <p:cNvPr id="15" name="Text 5"/>
+          <p:cNvSpPr txBox="1"/>
+          <p:nvPr/>
+        </p:nvSpPr>
+        <p:spPr>
+          <a:xfrm>
+            <a:off x="2514600" y="2514600"/>
+            <a:ext cx="2148840" cy="420624"/>
+          </a:xfrm>
+          <a:prstGeom prst="rect">
+            <a:avLst/>
+          </a:prstGeom>
+          <a:noFill/>
+          <a:ln/>
+        </p:spPr>
+        <p:txBody>
+          <a:bodyPr wrap="square" lIns="0" tIns="0" rIns="0" bIns="0" rtlCol="0" anchor="ctr"/>
+          <a:lstStyle/>
+          <a:p>
+            <a:pPr marL="0" indent="0">
+              <a:buNone/>
+            </a:pPr>
+            <a:r>
+              <a:rPr lang="en-US" sz="1100" dirty="0">
+                <a:solidFill>
+                  <a:srgbClr val="5F7178"/>
+                </a:solidFill>
+                <a:latin typeface="Calibri" pitchFamily="34" charset="0"/>
+                <a:ea typeface="Calibri" pitchFamily="34" charset="-122"/>
+                <a:cs typeface="Calibri" pitchFamily="34" charset="-120"/>
+              </a:rPr>
+              <a:t>evaluate every curve at the same chainage</a:t>
+            </a:r>
+            <a:endParaRPr lang="en-US" sz="1100" dirty="0"/>
+          </a:p>
+        </p:txBody>
+      </p:sp>
+      <p:sp>
+        <p:nvSpPr>
+          <p:cNvPr id="16" name="Shape 2"/>
+          <p:cNvSpPr/>
+          <p:nvPr/>
+        </p:nvSpPr>
+        <p:spPr>
+          <a:xfrm>
+            <a:off x="457200" y="3136391"/>
+            <a:ext cx="384048" cy="384048"/>
+          </a:xfrm>
+          <a:prstGeom prst="ellipse">
+            <a:avLst/>
+          </a:prstGeom>
+          <a:solidFill>
+            <a:srgbClr val="028090"/>
+          </a:solidFill>
+          <a:ln w="12700">
+            <a:solidFill>
+              <a:srgbClr val="028090"/>
+            </a:solidFill>
+            <a:prstDash val="solid"/>
+          </a:ln>
+        </p:spPr>
+        <p:txBody>
+          <a:bodyPr/>
+          <a:lstStyle/>
+          <a:p>
+            <a:endParaRPr lang="sv-SE"/>
+          </a:p>
+        </p:txBody>
+      </p:sp>
+      <p:sp>
+        <p:nvSpPr>
+          <p:cNvPr id="17" name="Text 3"/>
+          <p:cNvSpPr txBox="1"/>
+          <p:nvPr/>
+        </p:nvSpPr>
+        <p:spPr>
+          <a:xfrm>
+            <a:off x="457200" y="3136391"/>
+            <a:ext cx="384048" cy="384048"/>
+          </a:xfrm>
+          <a:prstGeom prst="rect">
+            <a:avLst/>
+          </a:prstGeom>
+          <a:noFill/>
+          <a:ln/>
+        </p:spPr>
+        <p:txBody>
+          <a:bodyPr wrap="square" lIns="0" tIns="0" rIns="0" bIns="0" rtlCol="0" anchor="ctr"/>
+          <a:lstStyle/>
+          <a:p>
+            <a:pPr marL="0" indent="0" algn="ctr">
+              <a:buNone/>
+            </a:pPr>
+            <a:r>
+              <a:rPr lang="en-US" sz="1400" b="1" dirty="0">
+                <a:solidFill>
+                  <a:srgbClr val="FFFFFF"/>
+                </a:solidFill>
+                <a:latin typeface="Calibri" pitchFamily="34" charset="0"/>
+                <a:ea typeface="Calibri" pitchFamily="34" charset="-122"/>
+                <a:cs typeface="Calibri" pitchFamily="34" charset="-120"/>
+              </a:rPr>
+              <a:t>4</a:t>
+            </a:r>
+            <a:endParaRPr lang="en-US" sz="1400" dirty="0"/>
+          </a:p>
+        </p:txBody>
+      </p:sp>
+      <p:sp>
+        <p:nvSpPr>
+          <p:cNvPr id="18" name="Text 4"/>
+          <p:cNvSpPr txBox="1"/>
+          <p:nvPr/>
+        </p:nvSpPr>
+        <p:spPr>
+          <a:xfrm>
+            <a:off x="1005840" y="3127248"/>
+            <a:ext cx="1463040" cy="274320"/>
+          </a:xfrm>
+          <a:prstGeom prst="rect">
+            <a:avLst/>
+          </a:prstGeom>
+          <a:noFill/>
+          <a:ln/>
+        </p:spPr>
+        <p:txBody>
+          <a:bodyPr wrap="square" lIns="0" tIns="0" rIns="0" bIns="0" rtlCol="0" anchor="ctr"/>
+          <a:lstStyle/>
+          <a:p>
+            <a:pPr marL="0" indent="0">
+              <a:buNone/>
+            </a:pPr>
+            <a:r>
+              <a:rPr lang="en-US" sz="1400" b="1" dirty="0">
+                <a:solidFill>
+                  <a:srgbClr val="16262B"/>
+                </a:solidFill>
+                <a:latin typeface="Calibri" pitchFamily="34" charset="0"/>
+                <a:ea typeface="Calibri" pitchFamily="34" charset="-122"/>
+                <a:cs typeface="Calibri" pitchFamily="34" charset="-120"/>
+              </a:rPr>
+              <a:t>Subtract</a:t>
+            </a:r>
+            <a:endParaRPr lang="en-US" sz="1400" dirty="0"/>
+          </a:p>
+        </p:txBody>
+      </p:sp>
+      <p:sp>
+        <p:nvSpPr>
+          <p:cNvPr id="19" name="Text 5"/>
+          <p:cNvSpPr txBox="1"/>
+          <p:nvPr/>
+        </p:nvSpPr>
+        <p:spPr>
+          <a:xfrm>
+            <a:off x="2514600" y="3118103"/>
+            <a:ext cx="2148840" cy="420624"/>
+          </a:xfrm>
+          <a:prstGeom prst="rect">
+            <a:avLst/>
+          </a:prstGeom>
+          <a:noFill/>
+          <a:ln/>
+        </p:spPr>
+        <p:txBody>
+          <a:bodyPr wrap="square" lIns="0" tIns="0" rIns="0" bIns="0" rtlCol="0" anchor="ctr"/>
+          <a:lstStyle/>
+          <a:p>
+            <a:pPr marL="0" indent="0">
+              <a:buNone/>
+            </a:pPr>
+            <a:r>
+              <a:rPr lang="en-US" sz="1100" dirty="0">
+                <a:solidFill>
+                  <a:srgbClr val="5F7178"/>
+                </a:solidFill>
+                <a:latin typeface="Calibri" pitchFamily="34" charset="0"/>
+                <a:ea typeface="Calibri" pitchFamily="34" charset="-122"/>
+                <a:cs typeface="Calibri" pitchFamily="34" charset="-120"/>
+              </a:rPr>
+              <a:t>difference per parameter and per section</a:t>
+            </a:r>
+            <a:endParaRPr lang="en-US" sz="1100" dirty="0"/>
+          </a:p>
+        </p:txBody>
+      </p:sp>
+      <p:sp>
+        <p:nvSpPr>
+          <p:cNvPr id="20" name="Shape 2"/>
+          <p:cNvSpPr/>
+          <p:nvPr/>
+        </p:nvSpPr>
+        <p:spPr>
+          <a:xfrm>
+            <a:off x="457200" y="3739896"/>
+            <a:ext cx="384048" cy="384048"/>
+          </a:xfrm>
+          <a:prstGeom prst="ellipse">
+            <a:avLst/>
+          </a:prstGeom>
+          <a:solidFill>
+            <a:srgbClr val="028090"/>
+          </a:solidFill>
+          <a:ln w="12700">
+            <a:solidFill>
+              <a:srgbClr val="028090"/>
+            </a:solidFill>
+            <a:prstDash val="solid"/>
+          </a:ln>
+        </p:spPr>
+        <p:txBody>
+          <a:bodyPr/>
+          <a:lstStyle/>
+          <a:p>
+            <a:endParaRPr lang="sv-SE"/>
+          </a:p>
+        </p:txBody>
+      </p:sp>
+      <p:sp>
+        <p:nvSpPr>
+          <p:cNvPr id="21" name="Text 3"/>
+          <p:cNvSpPr txBox="1"/>
+          <p:nvPr/>
+        </p:nvSpPr>
+        <p:spPr>
+          <a:xfrm>
+            <a:off x="457200" y="3739896"/>
+            <a:ext cx="384048" cy="384048"/>
+          </a:xfrm>
+          <a:prstGeom prst="rect">
+            <a:avLst/>
+          </a:prstGeom>
+          <a:noFill/>
+          <a:ln/>
+        </p:spPr>
+        <p:txBody>
+          <a:bodyPr wrap="square" lIns="0" tIns="0" rIns="0" bIns="0" rtlCol="0" anchor="ctr"/>
+          <a:lstStyle/>
+          <a:p>
+            <a:pPr marL="0" indent="0" algn="ctr">
+              <a:buNone/>
+            </a:pPr>
+            <a:r>
+              <a:rPr lang="en-US" sz="1400" b="1" dirty="0">
+                <a:solidFill>
+                  <a:srgbClr val="FFFFFF"/>
+                </a:solidFill>
+                <a:latin typeface="Calibri" pitchFamily="34" charset="0"/>
+                <a:ea typeface="Calibri" pitchFamily="34" charset="-122"/>
+                <a:cs typeface="Calibri" pitchFamily="34" charset="-120"/>
+              </a:rPr>
+              <a:t>5</a:t>
+            </a:r>
+            <a:endParaRPr lang="en-US" sz="1400" dirty="0"/>
+          </a:p>
+        </p:txBody>
+      </p:sp>
+      <p:sp>
+        <p:nvSpPr>
+          <p:cNvPr id="22" name="Text 4"/>
+          <p:cNvSpPr txBox="1"/>
+          <p:nvPr/>
+        </p:nvSpPr>
+        <p:spPr>
+          <a:xfrm>
+            <a:off x="1005840" y="3730752"/>
+            <a:ext cx="1463040" cy="274320"/>
+          </a:xfrm>
+          <a:prstGeom prst="rect">
+            <a:avLst/>
+          </a:prstGeom>
+          <a:noFill/>
+          <a:ln/>
+        </p:spPr>
+        <p:txBody>
+          <a:bodyPr wrap="square" lIns="0" tIns="0" rIns="0" bIns="0" rtlCol="0" anchor="ctr"/>
+          <a:lstStyle/>
+          <a:p>
+            <a:pPr marL="0" indent="0">
+              <a:buNone/>
+            </a:pPr>
+            <a:r>
+              <a:rPr lang="en-US" sz="1400" b="1" dirty="0">
+                <a:solidFill>
+                  <a:srgbClr val="16262B"/>
+                </a:solidFill>
+                <a:latin typeface="Calibri" pitchFamily="34" charset="0"/>
+                <a:ea typeface="Calibri" pitchFamily="34" charset="-122"/>
+                <a:cs typeface="Calibri" pitchFamily="34" charset="-120"/>
+              </a:rPr>
+              <a:t>Flag change</a:t>
+            </a:r>
+            <a:endParaRPr lang="en-US" sz="1400" dirty="0"/>
+          </a:p>
+        </p:txBody>
+      </p:sp>
+      <p:sp>
+        <p:nvSpPr>
+          <p:cNvPr id="23" name="Text 5"/>
+          <p:cNvSpPr txBox="1"/>
+          <p:nvPr/>
+        </p:nvSpPr>
+        <p:spPr>
+          <a:xfrm>
+            <a:off x="2514600" y="3721608"/>
+            <a:ext cx="2148840" cy="420624"/>
+          </a:xfrm>
+          <a:prstGeom prst="rect">
+            <a:avLst/>
+          </a:prstGeom>
+          <a:noFill/>
+          <a:ln/>
+        </p:spPr>
+        <p:txBody>
+          <a:bodyPr wrap="square" lIns="0" tIns="0" rIns="0" bIns="0" rtlCol="0" anchor="ctr"/>
+          <a:lstStyle/>
+          <a:p>
+            <a:pPr marL="0" indent="0">
+              <a:buNone/>
+            </a:pPr>
+            <a:r>
+              <a:rPr lang="en-US" sz="1100" dirty="0">
+                <a:solidFill>
+                  <a:srgbClr val="5F7178"/>
+                </a:solidFill>
+                <a:latin typeface="Calibri" pitchFamily="34" charset="0"/>
+                <a:ea typeface="Calibri" pitchFamily="34" charset="-122"/>
+                <a:cs typeface="Calibri" pitchFamily="34" charset="-120"/>
+              </a:rPr>
+              <a:t>mark where the difference exceeds the noise floor</a:t>
+            </a:r>
+            <a:endParaRPr lang="en-US" sz="1100" dirty="0"/>
+          </a:p>
+        </p:txBody>
+      </p:sp>
+      <p:pic>
+        <p:nvPicPr>
+          <p:cNvPr id="24" name="Picture 23" descr="f8_compare_runs.png"/>
+          <p:cNvPicPr>
+            <a:picLocks noChangeAspect="1"/>
+          </p:cNvPicPr>
+          <p:nvPr/>
+        </p:nvPicPr>
+        <p:blipFill>
+          <a:blip r:embed="rId2"/>
+          <a:stretch>
+            <a:fillRect/>
+          </a:stretch>
+        </p:blipFill>
+        <p:spPr>
+          <a:xfrm>
+            <a:off x="4846320" y="1234440"/>
+            <a:ext cx="3840480" cy="2588150"/>
+          </a:xfrm>
+          <a:prstGeom prst="rect">
+            <a:avLst/>
+          </a:prstGeom>
+        </p:spPr>
+      </p:pic>
+      <p:sp>
+        <p:nvSpPr>
+          <p:cNvPr id="25" name="Text 3"/>
+          <p:cNvSpPr txBox="1"/>
+          <p:nvPr/>
+        </p:nvSpPr>
+        <p:spPr>
+          <a:xfrm>
+            <a:off x="4846320" y="3886200"/>
+            <a:ext cx="3840480" cy="365760"/>
+          </a:xfrm>
+          <a:prstGeom prst="rect">
+            <a:avLst/>
+          </a:prstGeom>
+          <a:noFill/>
+          <a:ln/>
+        </p:spPr>
+        <p:txBody>
+          <a:bodyPr wrap="square" lIns="0" tIns="0" rIns="0" bIns="0" rtlCol="0" anchor="ctr"/>
+          <a:lstStyle/>
+          <a:p>
+            <a:pPr marL="0" indent="0">
+              <a:buNone/>
+            </a:pPr>
+            <a:r>
+              <a:rPr lang="en-US" sz="950" i="1" dirty="0">
+                <a:solidFill>
+                  <a:srgbClr val="5F7178"/>
+                </a:solidFill>
+                <a:latin typeface="Calibri" pitchFamily="34" charset="0"/>
+                <a:ea typeface="Calibri" pitchFamily="34" charset="-122"/>
+                <a:cs typeface="Calibri" pitchFamily="34" charset="-120"/>
+              </a:rPr>
+              <a:t>Run A: one half of the scan. Run B: the other half with a known 4 mm gauge widening added at 100–120 m.</a:t>
+            </a:r>
+            <a:endParaRPr lang="en-US" sz="950" dirty="0"/>
+          </a:p>
+        </p:txBody>
+      </p:sp>
+    </p:spTree>
+  </p:cSld>
+  <p:clrMapOvr>
+    <a:masterClrMapping/>
+  </p:clrMapOvr>
+</p:sld>
+</file>
+
+<file path=ppt/slides/slide21.xml><?xml version="1.0" encoding="utf-8"?>
+<p:sld xmlns:a="http://schemas.openxmlformats.org/drawingml/2006/main" xmlns:r="http://schemas.openxmlformats.org/officeDocument/2006/relationships" xmlns:p="http://schemas.openxmlformats.org/presentationml/2006/main">
+  <p:cSld>
+    <p:spTree>
+      <p:nvGrpSpPr>
+        <p:cNvPr id="1" name=""/>
+        <p:cNvGrpSpPr/>
+        <p:nvPr/>
+      </p:nvGrpSpPr>
+      <p:grpSpPr>
+        <a:xfrm>
+          <a:off x="0" y="0"/>
+          <a:ext cx="0" cy="0"/>
+          <a:chOff x="0" y="0"/>
+          <a:chExt cx="0" cy="0"/>
+        </a:xfrm>
+      </p:grpSpPr>
+      <p:sp>
+        <p:nvSpPr>
+          <p:cNvPr id="2" name="Text 0"/>
+          <p:cNvSpPr txBox="1"/>
+          <p:nvPr/>
+        </p:nvSpPr>
+        <p:spPr>
+          <a:xfrm>
+            <a:off x="457200" y="274320"/>
+            <a:ext cx="8229600" cy="228600"/>
+          </a:xfrm>
+          <a:prstGeom prst="rect">
+            <a:avLst/>
+          </a:prstGeom>
+          <a:noFill/>
+          <a:ln/>
+        </p:spPr>
+        <p:txBody>
+          <a:bodyPr wrap="square" lIns="0" tIns="0" rIns="0" bIns="0" rtlCol="0" anchor="ctr"/>
+          <a:lstStyle/>
+          <a:p>
+            <a:pPr marL="0" indent="0">
+              <a:buNone/>
+            </a:pPr>
+            <a:r>
+              <a:rPr lang="en-US" sz="1100" b="1" kern="0" spc="200" dirty="0">
+                <a:solidFill>
+                  <a:srgbClr val="028090"/>
+                </a:solidFill>
+                <a:latin typeface="Calibri" pitchFamily="34" charset="0"/>
+                <a:ea typeface="Calibri" pitchFamily="34" charset="-122"/>
+                <a:cs typeface="Calibri" pitchFamily="34" charset="-120"/>
+              </a:rPr>
+              <a:t>DATA LIMITS</a:t>
+            </a:r>
+            <a:endParaRPr lang="en-US" sz="1100" dirty="0"/>
+          </a:p>
+        </p:txBody>
+      </p:sp>
+      <p:sp>
+        <p:nvSpPr>
+          <p:cNvPr id="3" name="Text 1"/>
+          <p:cNvSpPr txBox="1"/>
+          <p:nvPr/>
+        </p:nvSpPr>
+        <p:spPr>
+          <a:xfrm>
+            <a:off x="457200" y="502920"/>
+            <a:ext cx="8229600" cy="548640"/>
+          </a:xfrm>
+          <a:prstGeom prst="rect">
+            <a:avLst/>
+          </a:prstGeom>
+          <a:noFill/>
+          <a:ln/>
+        </p:spPr>
+        <p:txBody>
+          <a:bodyPr wrap="square" lIns="0" tIns="0" rIns="0" bIns="0" rtlCol="0" anchor="ctr"/>
+          <a:lstStyle/>
+          <a:p>
+            <a:pPr marL="0" indent="0">
+              <a:buNone/>
+            </a:pPr>
+            <a:r>
+              <a:rPr lang="en-US" sz="2700" b="1" dirty="0">
+                <a:solidFill>
+                  <a:srgbClr val="16262B"/>
+                </a:solidFill>
+                <a:latin typeface="Cambria" pitchFamily="34" charset="0"/>
+                <a:ea typeface="Cambria" pitchFamily="34" charset="-122"/>
+                <a:cs typeface="Cambria" pitchFamily="34" charset="-120"/>
+              </a:rPr>
+              <a:t>What can be tracked over time</a:t>
+            </a:r>
+            <a:endParaRPr lang="en-US" sz="2700" dirty="0"/>
+          </a:p>
+        </p:txBody>
+      </p:sp>
+      <p:graphicFrame>
+        <p:nvGraphicFramePr>
+          <p:cNvPr id="4" name="Table 3"/>
+          <p:cNvGraphicFramePr>
+            <a:graphicFrameLocks noGrp="1"/>
+          </p:cNvGraphicFramePr>
+          <p:nvPr/>
+        </p:nvGraphicFramePr>
+        <p:xfrm>
+          <a:off x="457200" y="1280160"/>
+          <a:ext cx="4846320" cy="2578608"/>
+        </p:xfrm>
+        <a:graphic>
+          <a:graphicData uri="http://schemas.openxmlformats.org/drawingml/2006/table">
+            <a:tbl>
+              <a:tblPr>
+                <a:tableStyleId>{2D5ABB26-0587-4C30-8999-92F81FD0307C}</a:tableStyleId>
+              </a:tblPr>
+              <a:tblGrid>
+                <a:gridCol w="1188720">
+                  <a:extLst>
+                    <a:ext uri="{9D8B030D-6E8A-4147-A177-3AD203B41FA5}">
+                      <a16:colId xmlns:a16="http://schemas.microsoft.com/office/drawing/2014/main" val="20000"/>
+                    </a:ext>
+                  </a:extLst>
+                </a:gridCol>
+                <a:gridCol w="1097280">
+                  <a:extLst>
+                    <a:ext uri="{9D8B030D-6E8A-4147-A177-3AD203B41FA5}">
+                      <a16:colId xmlns:a16="http://schemas.microsoft.com/office/drawing/2014/main" val="20001"/>
+                    </a:ext>
+                  </a:extLst>
+                </a:gridCol>
+                <a:gridCol w="2560320">
+                  <a:extLst>
+                    <a:ext uri="{9D8B030D-6E8A-4147-A177-3AD203B41FA5}">
+                      <a16:colId xmlns:a16="http://schemas.microsoft.com/office/drawing/2014/main" val="20002"/>
+                    </a:ext>
+                  </a:extLst>
+                </a:gridCol>
+              </a:tblGrid>
+              <a:tr h="292608">
+                <a:tc>
+                  <a:txBody>
+                    <a:bodyPr/>
+                    <a:lstStyle/>
+                    <a:p>
+                      <a:r>
+                        <a:rPr sz="1050" b="1">
+                          <a:solidFill>
+                            <a:srgbClr val="FFFFFF"/>
+                          </a:solidFill>
+                          <a:latin typeface="Calibri"/>
+                        </a:rPr>
+                        <a:t>Parameter</a:t>
+                      </a:r>
+                    </a:p>
+                  </a:txBody>
+                  <a:tcPr marL="64008" marR="64008" marT="18288" marB="18288" anchor="ctr">
+                    <a:lnL w="19050">
+                      <a:solidFill>
+                        <a:srgbClr val="FFFFFF"/>
+                      </a:solidFill>
+                    </a:lnL>
+                    <a:lnR w="19050">
+                      <a:solidFill>
+                        <a:srgbClr val="FFFFFF"/>
+                      </a:solidFill>
+                    </a:lnR>
+                    <a:lnT w="19050">
+                      <a:solidFill>
+                        <a:srgbClr val="FFFFFF"/>
+                      </a:solidFill>
+                    </a:lnT>
+                    <a:lnB w="19050">
+                      <a:solidFill>
+                        <a:srgbClr val="FFFFFF"/>
+                      </a:solidFill>
+                    </a:lnB>
+                    <a:solidFill>
+                      <a:srgbClr val="028090"/>
+                    </a:solidFill>
+                  </a:tcPr>
+                </a:tc>
+                <a:tc>
+                  <a:txBody>
+                    <a:bodyPr/>
+                    <a:lstStyle/>
+                    <a:p>
+                      <a:r>
+                        <a:rPr sz="1050" b="1">
+                          <a:solidFill>
+                            <a:srgbClr val="FFFFFF"/>
+                          </a:solidFill>
+                          <a:latin typeface="Calibri"/>
+                        </a:rPr>
+                        <a:t>Over time?</a:t>
+                      </a:r>
+                    </a:p>
+                  </a:txBody>
+                  <a:tcPr marL="64008" marR="64008" marT="18288" marB="18288" anchor="ctr">
+                    <a:lnL w="19050">
+                      <a:solidFill>
+                        <a:srgbClr val="FFFFFF"/>
+                      </a:solidFill>
+                    </a:lnL>
+                    <a:lnR w="19050">
+                      <a:solidFill>
+                        <a:srgbClr val="FFFFFF"/>
+                      </a:solidFill>
+                    </a:lnR>
+                    <a:lnT w="19050">
+                      <a:solidFill>
+                        <a:srgbClr val="FFFFFF"/>
+                      </a:solidFill>
+                    </a:lnT>
+                    <a:lnB w="19050">
+                      <a:solidFill>
+                        <a:srgbClr val="FFFFFF"/>
+                      </a:solidFill>
+                    </a:lnB>
+                    <a:solidFill>
+                      <a:srgbClr val="028090"/>
+                    </a:solidFill>
+                  </a:tcPr>
+                </a:tc>
+                <a:tc>
+                  <a:txBody>
+                    <a:bodyPr/>
+                    <a:lstStyle/>
+                    <a:p>
+                      <a:r>
+                        <a:rPr sz="1050" b="1">
+                          <a:solidFill>
+                            <a:srgbClr val="FFFFFF"/>
+                          </a:solidFill>
+                          <a:latin typeface="Calibri"/>
+                        </a:rPr>
+                        <a:t>Why</a:t>
+                      </a:r>
+                    </a:p>
+                  </a:txBody>
+                  <a:tcPr marL="64008" marR="64008" marT="18288" marB="18288" anchor="ctr">
+                    <a:lnL w="19050">
+                      <a:solidFill>
+                        <a:srgbClr val="FFFFFF"/>
+                      </a:solidFill>
+                    </a:lnL>
+                    <a:lnR w="19050">
+                      <a:solidFill>
+                        <a:srgbClr val="FFFFFF"/>
+                      </a:solidFill>
+                    </a:lnR>
+                    <a:lnT w="19050">
+                      <a:solidFill>
+                        <a:srgbClr val="FFFFFF"/>
+                      </a:solidFill>
+                    </a:lnT>
+                    <a:lnB w="19050">
+                      <a:solidFill>
+                        <a:srgbClr val="FFFFFF"/>
+                      </a:solidFill>
+                    </a:lnB>
+                    <a:solidFill>
+                      <a:srgbClr val="028090"/>
+                    </a:solidFill>
+                  </a:tcPr>
+                </a:tc>
+                <a:extLst>
+                  <a:ext uri="{0D108BD9-81ED-4DB2-BD59-A6C34878D82A}">
+                    <a16:rowId xmlns:a16="http://schemas.microsoft.com/office/drawing/2014/main" val="10000"/>
+                  </a:ext>
+                </a:extLst>
+              </a:tr>
+              <a:tr h="457200">
+                <a:tc>
+                  <a:txBody>
+                    <a:bodyPr/>
+                    <a:lstStyle/>
+                    <a:p>
+                      <a:r>
+                        <a:rPr sz="1000" b="1">
+                          <a:solidFill>
+                            <a:srgbClr val="16262B"/>
+                          </a:solidFill>
+                          <a:latin typeface="Calibri"/>
+                        </a:rPr>
+                        <a:t>Gauge</a:t>
+                      </a:r>
+                    </a:p>
+                  </a:txBody>
+                  <a:tcPr marL="64008" marR="64008" marT="18288" marB="18288" anchor="ctr">
+                    <a:lnL w="19050">
+                      <a:solidFill>
+                        <a:srgbClr val="FFFFFF"/>
+                      </a:solidFill>
+                    </a:lnL>
+                    <a:lnR w="19050">
+                      <a:solidFill>
+                        <a:srgbClr val="FFFFFF"/>
+                      </a:solidFill>
+                    </a:lnR>
+                    <a:lnT w="19050">
+                      <a:solidFill>
+                        <a:srgbClr val="FFFFFF"/>
+                      </a:solidFill>
+                    </a:lnT>
+                    <a:lnB w="19050">
+                      <a:solidFill>
+                        <a:srgbClr val="FFFFFF"/>
+                      </a:solidFill>
+                    </a:lnB>
+                    <a:solidFill>
+                      <a:srgbClr val="EDF5F5"/>
+                    </a:solidFill>
+                  </a:tcPr>
+                </a:tc>
+                <a:tc>
+                  <a:txBody>
+                    <a:bodyPr/>
+                    <a:lstStyle/>
+                    <a:p>
+                      <a:r>
+                        <a:rPr sz="1000" b="1">
+                          <a:solidFill>
+                            <a:srgbClr val="028090"/>
+                          </a:solidFill>
+                          <a:latin typeface="Calibri"/>
+                        </a:rPr>
+                        <a:t>Yes</a:t>
+                      </a:r>
+                    </a:p>
+                  </a:txBody>
+                  <a:tcPr marL="64008" marR="64008" marT="18288" marB="18288" anchor="ctr">
+                    <a:lnL w="19050">
+                      <a:solidFill>
+                        <a:srgbClr val="FFFFFF"/>
+                      </a:solidFill>
+                    </a:lnL>
+                    <a:lnR w="19050">
+                      <a:solidFill>
+                        <a:srgbClr val="FFFFFF"/>
+                      </a:solidFill>
+                    </a:lnR>
+                    <a:lnT w="19050">
+                      <a:solidFill>
+                        <a:srgbClr val="FFFFFF"/>
+                      </a:solidFill>
+                    </a:lnT>
+                    <a:lnB w="19050">
+                      <a:solidFill>
+                        <a:srgbClr val="FFFFFF"/>
+                      </a:solidFill>
+                    </a:lnB>
+                    <a:solidFill>
+                      <a:srgbClr val="EDF5F5"/>
+                    </a:solidFill>
+                  </a:tcPr>
+                </a:tc>
+                <a:tc>
+                  <a:txBody>
+                    <a:bodyPr/>
+                    <a:lstStyle/>
+                    <a:p>
+                      <a:r>
+                        <a:rPr sz="1000" b="0">
+                          <a:solidFill>
+                            <a:srgbClr val="16262B"/>
+                          </a:solidFill>
+                          <a:latin typeface="Calibri"/>
+                        </a:rPr>
+                        <a:t>Measured inside one cross-section, so it does not depend on positioning between runs</a:t>
+                      </a:r>
+                    </a:p>
+                  </a:txBody>
+                  <a:tcPr marL="64008" marR="64008" marT="18288" marB="18288" anchor="ctr">
+                    <a:lnL w="19050">
+                      <a:solidFill>
+                        <a:srgbClr val="FFFFFF"/>
+                      </a:solidFill>
+                    </a:lnL>
+                    <a:lnR w="19050">
+                      <a:solidFill>
+                        <a:srgbClr val="FFFFFF"/>
+                      </a:solidFill>
+                    </a:lnR>
+                    <a:lnT w="19050">
+                      <a:solidFill>
+                        <a:srgbClr val="FFFFFF"/>
+                      </a:solidFill>
+                    </a:lnT>
+                    <a:lnB w="19050">
+                      <a:solidFill>
+                        <a:srgbClr val="FFFFFF"/>
+                      </a:solidFill>
+                    </a:lnB>
+                    <a:solidFill>
+                      <a:srgbClr val="EDF5F5"/>
+                    </a:solidFill>
+                  </a:tcPr>
+                </a:tc>
+                <a:extLst>
+                  <a:ext uri="{0D108BD9-81ED-4DB2-BD59-A6C34878D82A}">
+                    <a16:rowId xmlns:a16="http://schemas.microsoft.com/office/drawing/2014/main" val="10001"/>
+                  </a:ext>
+                </a:extLst>
+              </a:tr>
+              <a:tr h="457200">
+                <a:tc>
+                  <a:txBody>
+                    <a:bodyPr/>
+                    <a:lstStyle/>
+                    <a:p>
+                      <a:r>
+                        <a:rPr sz="1000" b="1">
+                          <a:solidFill>
+                            <a:srgbClr val="16262B"/>
+                          </a:solidFill>
+                          <a:latin typeface="Calibri"/>
+                        </a:rPr>
+                        <a:t>Alignment</a:t>
+                      </a:r>
+                    </a:p>
+                  </a:txBody>
+                  <a:tcPr marL="64008" marR="64008" marT="18288" marB="18288" anchor="ctr">
+                    <a:lnL w="19050">
+                      <a:solidFill>
+                        <a:srgbClr val="FFFFFF"/>
+                      </a:solidFill>
+                    </a:lnL>
+                    <a:lnR w="19050">
+                      <a:solidFill>
+                        <a:srgbClr val="FFFFFF"/>
+                      </a:solidFill>
+                    </a:lnR>
+                    <a:lnT w="19050">
+                      <a:solidFill>
+                        <a:srgbClr val="FFFFFF"/>
+                      </a:solidFill>
+                    </a:lnT>
+                    <a:lnB w="19050">
+                      <a:solidFill>
+                        <a:srgbClr val="FFFFFF"/>
+                      </a:solidFill>
+                    </a:lnB>
+                    <a:solidFill>
+                      <a:srgbClr val="FFFFFF"/>
+                    </a:solidFill>
+                  </a:tcPr>
+                </a:tc>
+                <a:tc>
+                  <a:txBody>
+                    <a:bodyPr/>
+                    <a:lstStyle/>
+                    <a:p>
+                      <a:r>
+                        <a:rPr sz="1000" b="1">
+                          <a:solidFill>
+                            <a:srgbClr val="028090"/>
+                          </a:solidFill>
+                          <a:latin typeface="Calibri"/>
+                        </a:rPr>
+                        <a:t>Yes, relative</a:t>
+                      </a:r>
+                    </a:p>
+                  </a:txBody>
+                  <a:tcPr marL="64008" marR="64008" marT="18288" marB="18288" anchor="ctr">
+                    <a:lnL w="19050">
+                      <a:solidFill>
+                        <a:srgbClr val="FFFFFF"/>
+                      </a:solidFill>
+                    </a:lnL>
+                    <a:lnR w="19050">
+                      <a:solidFill>
+                        <a:srgbClr val="FFFFFF"/>
+                      </a:solidFill>
+                    </a:lnR>
+                    <a:lnT w="19050">
+                      <a:solidFill>
+                        <a:srgbClr val="FFFFFF"/>
+                      </a:solidFill>
+                    </a:lnT>
+                    <a:lnB w="19050">
+                      <a:solidFill>
+                        <a:srgbClr val="FFFFFF"/>
+                      </a:solidFill>
+                    </a:lnB>
+                    <a:solidFill>
+                      <a:srgbClr val="FFFFFF"/>
+                    </a:solidFill>
+                  </a:tcPr>
+                </a:tc>
+                <a:tc>
+                  <a:txBody>
+                    <a:bodyPr/>
+                    <a:lstStyle/>
+                    <a:p>
+                      <a:r>
+                        <a:rPr sz="1000" b="0">
+                          <a:solidFill>
+                            <a:srgbClr val="16262B"/>
+                          </a:solidFill>
+                          <a:latin typeface="Calibri"/>
+                        </a:rPr>
+                        <a:t>Sideways offset from the shared reference frame; needs consistent positioning between runs</a:t>
+                      </a:r>
+                    </a:p>
+                  </a:txBody>
+                  <a:tcPr marL="64008" marR="64008" marT="18288" marB="18288" anchor="ctr">
+                    <a:lnL w="19050">
+                      <a:solidFill>
+                        <a:srgbClr val="FFFFFF"/>
+                      </a:solidFill>
+                    </a:lnL>
+                    <a:lnR w="19050">
+                      <a:solidFill>
+                        <a:srgbClr val="FFFFFF"/>
+                      </a:solidFill>
+                    </a:lnR>
+                    <a:lnT w="19050">
+                      <a:solidFill>
+                        <a:srgbClr val="FFFFFF"/>
+                      </a:solidFill>
+                    </a:lnT>
+                    <a:lnB w="19050">
+                      <a:solidFill>
+                        <a:srgbClr val="FFFFFF"/>
+                      </a:solidFill>
+                    </a:lnB>
+                    <a:solidFill>
+                      <a:srgbClr val="FFFFFF"/>
+                    </a:solidFill>
+                  </a:tcPr>
+                </a:tc>
+                <a:extLst>
+                  <a:ext uri="{0D108BD9-81ED-4DB2-BD59-A6C34878D82A}">
+                    <a16:rowId xmlns:a16="http://schemas.microsoft.com/office/drawing/2014/main" val="10002"/>
+                  </a:ext>
+                </a:extLst>
+              </a:tr>
+              <a:tr h="457200">
+                <a:tc>
+                  <a:txBody>
+                    <a:bodyPr/>
+                    <a:lstStyle/>
+                    <a:p>
+                      <a:r>
+                        <a:rPr sz="1000" b="1">
+                          <a:solidFill>
+                            <a:srgbClr val="16262B"/>
+                          </a:solidFill>
+                          <a:latin typeface="Calibri"/>
+                        </a:rPr>
+                        <a:t>Height (Z)</a:t>
+                      </a:r>
+                    </a:p>
+                  </a:txBody>
+                  <a:tcPr marL="64008" marR="64008" marT="18288" marB="18288" anchor="ctr">
+                    <a:lnL w="19050">
+                      <a:solidFill>
+                        <a:srgbClr val="FFFFFF"/>
+                      </a:solidFill>
+                    </a:lnL>
+                    <a:lnR w="19050">
+                      <a:solidFill>
+                        <a:srgbClr val="FFFFFF"/>
+                      </a:solidFill>
+                    </a:lnR>
+                    <a:lnT w="19050">
+                      <a:solidFill>
+                        <a:srgbClr val="FFFFFF"/>
+                      </a:solidFill>
+                    </a:lnT>
+                    <a:lnB w="19050">
+                      <a:solidFill>
+                        <a:srgbClr val="FFFFFF"/>
+                      </a:solidFill>
+                    </a:lnB>
+                    <a:solidFill>
+                      <a:srgbClr val="EDF5F5"/>
+                    </a:solidFill>
+                  </a:tcPr>
+                </a:tc>
+                <a:tc>
+                  <a:txBody>
+                    <a:bodyPr/>
+                    <a:lstStyle/>
+                    <a:p>
+                      <a:r>
+                        <a:rPr sz="1000" b="1">
+                          <a:solidFill>
+                            <a:srgbClr val="028090"/>
+                          </a:solidFill>
+                          <a:latin typeface="Calibri"/>
+                        </a:rPr>
+                        <a:t>Yes, relative</a:t>
+                      </a:r>
+                    </a:p>
+                  </a:txBody>
+                  <a:tcPr marL="64008" marR="64008" marT="18288" marB="18288" anchor="ctr">
+                    <a:lnL w="19050">
+                      <a:solidFill>
+                        <a:srgbClr val="FFFFFF"/>
+                      </a:solidFill>
+                    </a:lnL>
+                    <a:lnR w="19050">
+                      <a:solidFill>
+                        <a:srgbClr val="FFFFFF"/>
+                      </a:solidFill>
+                    </a:lnR>
+                    <a:lnT w="19050">
+                      <a:solidFill>
+                        <a:srgbClr val="FFFFFF"/>
+                      </a:solidFill>
+                    </a:lnT>
+                    <a:lnB w="19050">
+                      <a:solidFill>
+                        <a:srgbClr val="FFFFFF"/>
+                      </a:solidFill>
+                    </a:lnB>
+                    <a:solidFill>
+                      <a:srgbClr val="EDF5F5"/>
+                    </a:solidFill>
+                  </a:tcPr>
+                </a:tc>
+                <a:tc>
+                  <a:txBody>
+                    <a:bodyPr/>
+                    <a:lstStyle/>
+                    <a:p>
+                      <a:r>
+                        <a:rPr sz="1000" b="0">
+                          <a:solidFill>
+                            <a:srgbClr val="16262B"/>
+                          </a:solidFill>
+                          <a:latin typeface="Calibri"/>
+                        </a:rPr>
+                        <a:t>The LiDAR height Z as it is, relative to the sensor: shows change against the neighbouring track</a:t>
+                      </a:r>
+                    </a:p>
+                  </a:txBody>
+                  <a:tcPr marL="64008" marR="64008" marT="18288" marB="18288" anchor="ctr">
+                    <a:lnL w="19050">
+                      <a:solidFill>
+                        <a:srgbClr val="FFFFFF"/>
+                      </a:solidFill>
+                    </a:lnL>
+                    <a:lnR w="19050">
+                      <a:solidFill>
+                        <a:srgbClr val="FFFFFF"/>
+                      </a:solidFill>
+                    </a:lnR>
+                    <a:lnT w="19050">
+                      <a:solidFill>
+                        <a:srgbClr val="FFFFFF"/>
+                      </a:solidFill>
+                    </a:lnT>
+                    <a:lnB w="19050">
+                      <a:solidFill>
+                        <a:srgbClr val="FFFFFF"/>
+                      </a:solidFill>
+                    </a:lnB>
+                    <a:solidFill>
+                      <a:srgbClr val="EDF5F5"/>
+                    </a:solidFill>
+                  </a:tcPr>
+                </a:tc>
+                <a:extLst>
+                  <a:ext uri="{0D108BD9-81ED-4DB2-BD59-A6C34878D82A}">
+                    <a16:rowId xmlns:a16="http://schemas.microsoft.com/office/drawing/2014/main" val="10003"/>
+                  </a:ext>
+                </a:extLst>
+              </a:tr>
+              <a:tr h="457200">
+                <a:tc>
+                  <a:txBody>
+                    <a:bodyPr/>
+                    <a:lstStyle/>
+                    <a:p>
+                      <a:r>
+                        <a:rPr sz="1000" b="1">
+                          <a:solidFill>
+                            <a:srgbClr val="16262B"/>
+                          </a:solidFill>
+                          <a:latin typeface="Calibri"/>
+                        </a:rPr>
+                        <a:t>Cross-level, twist, surface</a:t>
+                      </a:r>
+                    </a:p>
+                  </a:txBody>
+                  <a:tcPr marL="64008" marR="64008" marT="18288" marB="18288" anchor="ctr">
+                    <a:lnL w="19050">
+                      <a:solidFill>
+                        <a:srgbClr val="FFFFFF"/>
+                      </a:solidFill>
+                    </a:lnL>
+                    <a:lnR w="19050">
+                      <a:solidFill>
+                        <a:srgbClr val="FFFFFF"/>
+                      </a:solidFill>
+                    </a:lnR>
+                    <a:lnT w="19050">
+                      <a:solidFill>
+                        <a:srgbClr val="FFFFFF"/>
+                      </a:solidFill>
+                    </a:lnT>
+                    <a:lnB w="19050">
+                      <a:solidFill>
+                        <a:srgbClr val="FFFFFF"/>
+                      </a:solidFill>
+                    </a:lnB>
+                    <a:solidFill>
+                      <a:srgbClr val="FFFFFF"/>
+                    </a:solidFill>
+                  </a:tcPr>
+                </a:tc>
+                <a:tc>
+                  <a:txBody>
+                    <a:bodyPr/>
+                    <a:lstStyle/>
+                    <a:p>
+                      <a:r>
+                        <a:rPr sz="1000" b="1">
+                          <a:solidFill>
+                            <a:srgbClr val="D9822B"/>
+                          </a:solidFill>
+                          <a:latin typeface="Calibri"/>
+                        </a:rPr>
+                        <a:t>No</a:t>
+                      </a:r>
+                    </a:p>
+                  </a:txBody>
+                  <a:tcPr marL="64008" marR="64008" marT="18288" marB="18288" anchor="ctr">
+                    <a:lnL w="19050">
+                      <a:solidFill>
+                        <a:srgbClr val="FFFFFF"/>
+                      </a:solidFill>
+                    </a:lnL>
+                    <a:lnR w="19050">
+                      <a:solidFill>
+                        <a:srgbClr val="FFFFFF"/>
+                      </a:solidFill>
+                    </a:lnR>
+                    <a:lnT w="19050">
+                      <a:solidFill>
+                        <a:srgbClr val="FFFFFF"/>
+                      </a:solidFill>
+                    </a:lnT>
+                    <a:lnB w="19050">
+                      <a:solidFill>
+                        <a:srgbClr val="FFFFFF"/>
+                      </a:solidFill>
+                    </a:lnB>
+                    <a:solidFill>
+                      <a:srgbClr val="FFFFFF"/>
+                    </a:solidFill>
+                  </a:tcPr>
+                </a:tc>
+                <a:tc>
+                  <a:txBody>
+                    <a:bodyPr/>
+                    <a:lstStyle/>
+                    <a:p>
+                      <a:r>
+                        <a:rPr sz="1000" b="0">
+                          <a:solidFill>
+                            <a:srgbClr val="16262B"/>
+                          </a:solidFill>
+                          <a:latin typeface="Calibri"/>
+                        </a:rPr>
+                        <a:t>The rails keep the same height and roll relative to the sensor; roll and elevation are needed</a:t>
+                      </a:r>
+                    </a:p>
+                  </a:txBody>
+                  <a:tcPr marL="64008" marR="64008" marT="18288" marB="18288" anchor="ctr">
+                    <a:lnL w="19050">
+                      <a:solidFill>
+                        <a:srgbClr val="FFFFFF"/>
+                      </a:solidFill>
+                    </a:lnL>
+                    <a:lnR w="19050">
+                      <a:solidFill>
+                        <a:srgbClr val="FFFFFF"/>
+                      </a:solidFill>
+                    </a:lnR>
+                    <a:lnT w="19050">
+                      <a:solidFill>
+                        <a:srgbClr val="FFFFFF"/>
+                      </a:solidFill>
+                    </a:lnT>
+                    <a:lnB w="19050">
+                      <a:solidFill>
+                        <a:srgbClr val="FFFFFF"/>
+                      </a:solidFill>
+                    </a:lnB>
+                    <a:solidFill>
+                      <a:srgbClr val="FFFFFF"/>
+                    </a:solidFill>
+                  </a:tcPr>
+                </a:tc>
+                <a:extLst>
+                  <a:ext uri="{0D108BD9-81ED-4DB2-BD59-A6C34878D82A}">
+                    <a16:rowId xmlns:a16="http://schemas.microsoft.com/office/drawing/2014/main" val="10004"/>
+                  </a:ext>
+                </a:extLst>
+              </a:tr>
+              <a:tr h="457200">
+                <a:tc>
+                  <a:txBody>
+                    <a:bodyPr/>
+                    <a:lstStyle/>
+                    <a:p>
+                      <a:r>
+                        <a:rPr sz="1000" b="1">
+                          <a:solidFill>
+                            <a:srgbClr val="16262B"/>
+                          </a:solidFill>
+                          <a:latin typeface="Calibri"/>
+                        </a:rPr>
+                        <a:t>Cant</a:t>
+                      </a:r>
+                    </a:p>
+                  </a:txBody>
+                  <a:tcPr marL="64008" marR="64008" marT="18288" marB="18288" anchor="ctr">
+                    <a:lnL w="19050">
+                      <a:solidFill>
+                        <a:srgbClr val="FFFFFF"/>
+                      </a:solidFill>
+                    </a:lnL>
+                    <a:lnR w="19050">
+                      <a:solidFill>
+                        <a:srgbClr val="FFFFFF"/>
+                      </a:solidFill>
+                    </a:lnR>
+                    <a:lnT w="19050">
+                      <a:solidFill>
+                        <a:srgbClr val="FFFFFF"/>
+                      </a:solidFill>
+                    </a:lnT>
+                    <a:lnB w="19050">
+                      <a:solidFill>
+                        <a:srgbClr val="FFFFFF"/>
+                      </a:solidFill>
+                    </a:lnB>
+                    <a:solidFill>
+                      <a:srgbClr val="EDF5F5"/>
+                    </a:solidFill>
+                  </a:tcPr>
+                </a:tc>
+                <a:tc>
+                  <a:txBody>
+                    <a:bodyPr/>
+                    <a:lstStyle/>
+                    <a:p>
+                      <a:r>
+                        <a:rPr sz="1000" b="1">
+                          <a:solidFill>
+                            <a:srgbClr val="D9822B"/>
+                          </a:solidFill>
+                          <a:latin typeface="Calibri"/>
+                        </a:rPr>
+                        <a:t>No</a:t>
+                      </a:r>
+                    </a:p>
+                  </a:txBody>
+                  <a:tcPr marL="64008" marR="64008" marT="18288" marB="18288" anchor="ctr">
+                    <a:lnL w="19050">
+                      <a:solidFill>
+                        <a:srgbClr val="FFFFFF"/>
+                      </a:solidFill>
+                    </a:lnL>
+                    <a:lnR w="19050">
+                      <a:solidFill>
+                        <a:srgbClr val="FFFFFF"/>
+                      </a:solidFill>
+                    </a:lnR>
+                    <a:lnT w="19050">
+                      <a:solidFill>
+                        <a:srgbClr val="FFFFFF"/>
+                      </a:solidFill>
+                    </a:lnT>
+                    <a:lnB w="19050">
+                      <a:solidFill>
+                        <a:srgbClr val="FFFFFF"/>
+                      </a:solidFill>
+                    </a:lnB>
+                    <a:solidFill>
+                      <a:srgbClr val="EDF5F5"/>
+                    </a:solidFill>
+                  </a:tcPr>
+                </a:tc>
+                <a:tc>
+                  <a:txBody>
+                    <a:bodyPr/>
+                    <a:lstStyle/>
+                    <a:p>
+                      <a:r>
+                        <a:rPr sz="1000" b="0">
+                          <a:solidFill>
+                            <a:srgbClr val="16262B"/>
+                          </a:solidFill>
+                          <a:latin typeface="Calibri"/>
+                        </a:rPr>
+                        <a:t>Needs cross-level and the designed values</a:t>
+                      </a:r>
+                    </a:p>
+                  </a:txBody>
+                  <a:tcPr marL="64008" marR="64008" marT="18288" marB="18288" anchor="ctr">
+                    <a:lnL w="19050">
+                      <a:solidFill>
+                        <a:srgbClr val="FFFFFF"/>
+                      </a:solidFill>
+                    </a:lnL>
+                    <a:lnR w="19050">
+                      <a:solidFill>
+                        <a:srgbClr val="FFFFFF"/>
+                      </a:solidFill>
+                    </a:lnR>
+                    <a:lnT w="19050">
+                      <a:solidFill>
+                        <a:srgbClr val="FFFFFF"/>
+                      </a:solidFill>
+                    </a:lnT>
+                    <a:lnB w="19050">
+                      <a:solidFill>
+                        <a:srgbClr val="FFFFFF"/>
+                      </a:solidFill>
+                    </a:lnB>
+                    <a:solidFill>
+                      <a:srgbClr val="EDF5F5"/>
+                    </a:solidFill>
+                  </a:tcPr>
+                </a:tc>
+                <a:extLst>
+                  <a:ext uri="{0D108BD9-81ED-4DB2-BD59-A6C34878D82A}">
+                    <a16:rowId xmlns:a16="http://schemas.microsoft.com/office/drawing/2014/main" val="10005"/>
+                  </a:ext>
+                </a:extLst>
+              </a:tr>
+            </a:tbl>
+          </a:graphicData>
+        </a:graphic>
+      </p:graphicFrame>
+      <p:pic>
+        <p:nvPicPr>
+          <p:cNvPr id="5" name="Picture 4" descr="f5_rail_height.png"/>
+          <p:cNvPicPr>
+            <a:picLocks noChangeAspect="1"/>
+          </p:cNvPicPr>
+          <p:nvPr/>
+        </p:nvPicPr>
+        <p:blipFill>
+          <a:blip r:embed="rId2"/>
+          <a:stretch>
+            <a:fillRect/>
+          </a:stretch>
+        </p:blipFill>
+        <p:spPr>
+          <a:xfrm>
+            <a:off x="5486400" y="1280160"/>
+            <a:ext cx="3200400" cy="1891145"/>
+          </a:xfrm>
+          <a:prstGeom prst="rect">
+            <a:avLst/>
+          </a:prstGeom>
+        </p:spPr>
+      </p:pic>
+      <p:sp>
+        <p:nvSpPr>
+          <p:cNvPr id="6" name="Text 3"/>
+          <p:cNvSpPr txBox="1"/>
+          <p:nvPr/>
+        </p:nvSpPr>
+        <p:spPr>
+          <a:xfrm>
+            <a:off x="5486400" y="3246120"/>
+            <a:ext cx="3200400" cy="548640"/>
+          </a:xfrm>
+          <a:prstGeom prst="rect">
+            <a:avLst/>
+          </a:prstGeom>
+          <a:noFill/>
+          <a:ln/>
+        </p:spPr>
+        <p:txBody>
+          <a:bodyPr wrap="square" lIns="0" tIns="0" rIns="0" bIns="0" rtlCol="0" anchor="ctr"/>
+          <a:lstStyle/>
+          <a:p>
+            <a:pPr marL="0" indent="0">
+              <a:buNone/>
+            </a:pPr>
+            <a:r>
+              <a:rPr lang="en-US" sz="950" i="1" dirty="0">
+                <a:solidFill>
+                  <a:srgbClr val="5F7178"/>
+                </a:solidFill>
+                <a:latin typeface="Calibri" pitchFamily="34" charset="0"/>
+                <a:ea typeface="Calibri" pitchFamily="34" charset="-122"/>
+                <a:cs typeface="Calibri" pitchFamily="34" charset="-120"/>
+              </a:rPr>
+              <a:t>Rail-head height along the scan. The neighbouring track moves about 28 cm relative to the LiDAR; the LiDAR’s own rails move 3 mm.</a:t>
+            </a:r>
+            <a:endParaRPr lang="en-US" sz="950" dirty="0"/>
+          </a:p>
+        </p:txBody>
+      </p:sp>
+      <p:sp>
+        <p:nvSpPr>
+          <p:cNvPr id="7" name="Shape 16"/>
+          <p:cNvSpPr/>
+          <p:nvPr/>
+        </p:nvSpPr>
+        <p:spPr>
+          <a:xfrm>
+            <a:off x="457200" y="4114800"/>
+            <a:ext cx="8229600" cy="530352"/>
+          </a:xfrm>
+          <a:prstGeom prst="roundRect">
+            <a:avLst>
+              <a:gd name="adj" fmla="val 9091"/>
+            </a:avLst>
+          </a:prstGeom>
+          <a:solidFill>
+            <a:srgbClr val="0B2027"/>
+          </a:solidFill>
+          <a:ln w="12700">
+            <a:solidFill>
+              <a:srgbClr val="0B2027"/>
+            </a:solidFill>
+            <a:prstDash val="solid"/>
+          </a:ln>
+        </p:spPr>
+        <p:txBody>
+          <a:bodyPr/>
+          <a:lstStyle/>
+          <a:p>
+            <a:endParaRPr lang="sv-SE"/>
+          </a:p>
+        </p:txBody>
+      </p:sp>
+      <p:sp>
+        <p:nvSpPr>
+          <p:cNvPr id="8" name="Text 17"/>
+          <p:cNvSpPr txBox="1"/>
+          <p:nvPr/>
+        </p:nvSpPr>
+        <p:spPr>
+          <a:xfrm>
+            <a:off x="731520" y="4114800"/>
+            <a:ext cx="7680960" cy="530352"/>
+          </a:xfrm>
+          <a:prstGeom prst="rect">
+            <a:avLst/>
+          </a:prstGeom>
+          <a:noFill/>
+          <a:ln/>
+        </p:spPr>
+        <p:txBody>
+          <a:bodyPr wrap="square" lIns="0" tIns="0" rIns="0" bIns="0" rtlCol="0" anchor="ctr"/>
+          <a:lstStyle/>
+          <a:p>
+            <a:pPr marL="0" indent="0">
+              <a:buNone/>
+            </a:pPr>
+            <a:r>
+              <a:rPr lang="en-US" sz="1200" b="1" dirty="0">
+                <a:solidFill>
+                  <a:srgbClr val="FFFFFF"/>
+                </a:solidFill>
+                <a:latin typeface="Calibri" pitchFamily="34" charset="0"/>
+                <a:ea typeface="Calibri" pitchFamily="34" charset="-122"/>
+                <a:cs typeface="Calibri" pitchFamily="34" charset="-120"/>
+              </a:rPr>
+              <a:t>Gauge, relative alignment and relative height can be followed over time. Cross-level, twist, surface and cant cannot.</a:t>
+            </a:r>
+            <a:endParaRPr lang="en-US" sz="1200" dirty="0"/>
+          </a:p>
+        </p:txBody>
+      </p:sp>
+    </p:spTree>
+  </p:cSld>
+  <p:clrMapOvr>
+    <a:masterClrMapping/>
+  </p:clrMapOvr>
+</p:sld>
+</file>
+
+<file path=ppt/slides/slide22.xml><?xml version="1.0" encoding="utf-8"?>
+<p:sld xmlns:a="http://schemas.openxmlformats.org/drawingml/2006/main" xmlns:r="http://schemas.openxmlformats.org/officeDocument/2006/relationships" xmlns:p="http://schemas.openxmlformats.org/presentationml/2006/main">
+  <p:cSld>
+    <p:spTree>
+      <p:nvGrpSpPr>
+        <p:cNvPr id="1" name=""/>
+        <p:cNvGrpSpPr/>
+        <p:nvPr/>
+      </p:nvGrpSpPr>
+      <p:grpSpPr>
+        <a:xfrm>
+          <a:off x="0" y="0"/>
+          <a:ext cx="0" cy="0"/>
+          <a:chOff x="0" y="0"/>
+          <a:chExt cx="0" cy="0"/>
+        </a:xfrm>
+      </p:grpSpPr>
+      <p:sp>
+        <p:nvSpPr>
+          <p:cNvPr id="2" name="Text 0"/>
+          <p:cNvSpPr txBox="1"/>
+          <p:nvPr/>
+        </p:nvSpPr>
+        <p:spPr>
+          <a:xfrm>
+            <a:off x="457200" y="274320"/>
+            <a:ext cx="8229600" cy="228600"/>
+          </a:xfrm>
+          <a:prstGeom prst="rect">
+            <a:avLst/>
+          </a:prstGeom>
+          <a:noFill/>
+          <a:ln/>
+        </p:spPr>
+        <p:txBody>
+          <a:bodyPr wrap="square" lIns="0" tIns="0" rIns="0" bIns="0" rtlCol="0" anchor="ctr"/>
+          <a:lstStyle/>
+          <a:p>
+            <a:pPr marL="0" indent="0">
+              <a:buNone/>
+            </a:pPr>
+            <a:r>
+              <a:rPr lang="en-US" sz="1100" b="1" kern="0" spc="200" dirty="0">
+                <a:solidFill>
+                  <a:srgbClr val="028090"/>
+                </a:solidFill>
+                <a:latin typeface="Calibri" pitchFamily="34" charset="0"/>
+                <a:ea typeface="Calibri" pitchFamily="34" charset="-122"/>
+                <a:cs typeface="Calibri" pitchFamily="34" charset="-120"/>
+              </a:rPr>
+              <a:t>TIME SERIES</a:t>
+            </a:r>
+            <a:endParaRPr lang="en-US" sz="1100" dirty="0"/>
+          </a:p>
+        </p:txBody>
+      </p:sp>
+      <p:sp>
+        <p:nvSpPr>
+          <p:cNvPr id="3" name="Text 1"/>
+          <p:cNvSpPr txBox="1"/>
+          <p:nvPr/>
+        </p:nvSpPr>
+        <p:spPr>
+          <a:xfrm>
+            <a:off x="457200" y="502920"/>
+            <a:ext cx="8229600" cy="548640"/>
+          </a:xfrm>
+          <a:prstGeom prst="rect">
+            <a:avLst/>
+          </a:prstGeom>
+          <a:noFill/>
+          <a:ln/>
+        </p:spPr>
+        <p:txBody>
+          <a:bodyPr wrap="square" lIns="0" tIns="0" rIns="0" bIns="0" rtlCol="0" anchor="ctr"/>
+          <a:lstStyle/>
+          <a:p>
+            <a:pPr marL="0" indent="0">
+              <a:buNone/>
+            </a:pPr>
+            <a:r>
+              <a:rPr lang="en-US" sz="2700" b="1" dirty="0">
+                <a:solidFill>
+                  <a:srgbClr val="16262B"/>
+                </a:solidFill>
+                <a:latin typeface="Cambria" pitchFamily="34" charset="0"/>
+                <a:ea typeface="Cambria" pitchFamily="34" charset="-122"/>
+                <a:cs typeface="Cambria" pitchFamily="34" charset="-120"/>
+              </a:rPr>
+              <a:t>From one table to a time series</a:t>
+            </a:r>
+            <a:endParaRPr lang="en-US" sz="2700" dirty="0"/>
+          </a:p>
+        </p:txBody>
+      </p:sp>
+      <p:graphicFrame>
+        <p:nvGraphicFramePr>
+          <p:cNvPr id="4" name="Table 3"/>
+          <p:cNvGraphicFramePr>
+            <a:graphicFrameLocks noGrp="1"/>
+          </p:cNvGraphicFramePr>
+          <p:nvPr/>
+        </p:nvGraphicFramePr>
+        <p:xfrm>
+          <a:off x="457200" y="1234440"/>
+          <a:ext cx="5120640" cy="2514600"/>
+        </p:xfrm>
+        <a:graphic>
+          <a:graphicData uri="http://schemas.openxmlformats.org/drawingml/2006/table">
+            <a:tbl>
+              <a:tblPr>
+                <a:tableStyleId>{2D5ABB26-0587-4C30-8999-92F81FD0307C}</a:tableStyleId>
+              </a:tblPr>
+              <a:tblGrid>
+                <a:gridCol w="594360">
+                  <a:extLst>
+                    <a:ext uri="{9D8B030D-6E8A-4147-A177-3AD203B41FA5}">
+                      <a16:colId xmlns:a16="http://schemas.microsoft.com/office/drawing/2014/main" val="20000"/>
+                    </a:ext>
+                  </a:extLst>
+                </a:gridCol>
+                <a:gridCol w="1051560">
+                  <a:extLst>
+                    <a:ext uri="{9D8B030D-6E8A-4147-A177-3AD203B41FA5}">
+                      <a16:colId xmlns:a16="http://schemas.microsoft.com/office/drawing/2014/main" val="20001"/>
+                    </a:ext>
+                  </a:extLst>
+                </a:gridCol>
+                <a:gridCol w="914400">
+                  <a:extLst>
+                    <a:ext uri="{9D8B030D-6E8A-4147-A177-3AD203B41FA5}">
+                      <a16:colId xmlns:a16="http://schemas.microsoft.com/office/drawing/2014/main" val="20002"/>
+                    </a:ext>
+                  </a:extLst>
+                </a:gridCol>
+                <a:gridCol w="777240">
+                  <a:extLst>
+                    <a:ext uri="{9D8B030D-6E8A-4147-A177-3AD203B41FA5}">
+                      <a16:colId xmlns:a16="http://schemas.microsoft.com/office/drawing/2014/main" val="20003"/>
+                    </a:ext>
+                  </a:extLst>
+                </a:gridCol>
+                <a:gridCol w="594360">
+                  <a:extLst>
+                    <a:ext uri="{9D8B030D-6E8A-4147-A177-3AD203B41FA5}">
+                      <a16:colId xmlns:a16="http://schemas.microsoft.com/office/drawing/2014/main" val="20004"/>
+                    </a:ext>
+                  </a:extLst>
+                </a:gridCol>
+                <a:gridCol w="594360">
+                  <a:extLst>
+                    <a:ext uri="{9D8B030D-6E8A-4147-A177-3AD203B41FA5}">
+                      <a16:colId xmlns:a16="http://schemas.microsoft.com/office/drawing/2014/main" val="20005"/>
+                    </a:ext>
+                  </a:extLst>
+                </a:gridCol>
+                <a:gridCol w="594360">
+                  <a:extLst>
+                    <a:ext uri="{9D8B030D-6E8A-4147-A177-3AD203B41FA5}">
+                      <a16:colId xmlns:a16="http://schemas.microsoft.com/office/drawing/2014/main" val="20006"/>
+                    </a:ext>
+                  </a:extLst>
+                </a:gridCol>
+              </a:tblGrid>
+              <a:tr h="228600">
+                <a:tc>
+                  <a:txBody>
+                    <a:bodyPr/>
+                    <a:lstStyle/>
+                    <a:p>
+                      <a:r>
+                        <a:rPr sz="950" b="1">
+                          <a:solidFill>
+                            <a:srgbClr val="FFFFFF"/>
+                          </a:solidFill>
+                          <a:latin typeface="Calibri"/>
+                        </a:rPr>
+                        <a:t>Section</a:t>
+                      </a:r>
+                    </a:p>
+                  </a:txBody>
+                  <a:tcPr marL="64008" marR="64008" marT="18288" marB="18288" anchor="ctr">
+                    <a:lnL w="19050">
+                      <a:solidFill>
+                        <a:srgbClr val="FFFFFF"/>
+                      </a:solidFill>
+                    </a:lnL>
+                    <a:lnR w="19050">
+                      <a:solidFill>
+                        <a:srgbClr val="FFFFFF"/>
+                      </a:solidFill>
+                    </a:lnR>
+                    <a:lnT w="19050">
+                      <a:solidFill>
+                        <a:srgbClr val="FFFFFF"/>
+                      </a:solidFill>
+                    </a:lnT>
+                    <a:lnB w="19050">
+                      <a:solidFill>
+                        <a:srgbClr val="FFFFFF"/>
+                      </a:solidFill>
+                    </a:lnB>
+                    <a:solidFill>
+                      <a:srgbClr val="028090"/>
+                    </a:solidFill>
+                  </a:tcPr>
+                </a:tc>
+                <a:tc>
+                  <a:txBody>
+                    <a:bodyPr/>
+                    <a:lstStyle/>
+                    <a:p>
+                      <a:r>
+                        <a:rPr sz="950" b="1">
+                          <a:solidFill>
+                            <a:srgbClr val="FFFFFF"/>
+                          </a:solidFill>
+                          <a:latin typeface="Calibri"/>
+                        </a:rPr>
+                        <a:t>s range (m)</a:t>
+                      </a:r>
+                    </a:p>
+                  </a:txBody>
+                  <a:tcPr marL="64008" marR="64008" marT="18288" marB="18288" anchor="ctr">
+                    <a:lnL w="19050">
+                      <a:solidFill>
+                        <a:srgbClr val="FFFFFF"/>
+                      </a:solidFill>
+                    </a:lnL>
+                    <a:lnR w="19050">
+                      <a:solidFill>
+                        <a:srgbClr val="FFFFFF"/>
+                      </a:solidFill>
+                    </a:lnR>
+                    <a:lnT w="19050">
+                      <a:solidFill>
+                        <a:srgbClr val="FFFFFF"/>
+                      </a:solidFill>
+                    </a:lnT>
+                    <a:lnB w="19050">
+                      <a:solidFill>
+                        <a:srgbClr val="FFFFFF"/>
+                      </a:solidFill>
+                    </a:lnB>
+                    <a:solidFill>
+                      <a:srgbClr val="028090"/>
+                    </a:solidFill>
+                  </a:tcPr>
+                </a:tc>
+                <a:tc>
+                  <a:txBody>
+                    <a:bodyPr/>
+                    <a:lstStyle/>
+                    <a:p>
+                      <a:r>
+                        <a:rPr sz="950" b="1">
+                          <a:solidFill>
+                            <a:srgbClr val="FFFFFF"/>
+                          </a:solidFill>
+                          <a:latin typeface="Calibri"/>
+                        </a:rPr>
+                        <a:t>Run 1 gauge</a:t>
+                      </a:r>
+                    </a:p>
+                  </a:txBody>
+                  <a:tcPr marL="64008" marR="64008" marT="18288" marB="18288" anchor="ctr">
+                    <a:lnL w="19050">
+                      <a:solidFill>
+                        <a:srgbClr val="FFFFFF"/>
+                      </a:solidFill>
+                    </a:lnL>
+                    <a:lnR w="19050">
+                      <a:solidFill>
+                        <a:srgbClr val="FFFFFF"/>
+                      </a:solidFill>
+                    </a:lnR>
+                    <a:lnT w="19050">
+                      <a:solidFill>
+                        <a:srgbClr val="FFFFFF"/>
+                      </a:solidFill>
+                    </a:lnT>
+                    <a:lnB w="19050">
+                      <a:solidFill>
+                        <a:srgbClr val="FFFFFF"/>
+                      </a:solidFill>
+                    </a:lnB>
+                    <a:solidFill>
+                      <a:srgbClr val="028090"/>
+                    </a:solidFill>
+                  </a:tcPr>
+                </a:tc>
+                <a:tc>
+                  <a:txBody>
+                    <a:bodyPr/>
+                    <a:lstStyle/>
+                    <a:p>
+                      <a:r>
+                        <a:rPr sz="950" b="1">
+                          <a:solidFill>
+                            <a:srgbClr val="FFFFFF"/>
+                          </a:solidFill>
+                          <a:latin typeface="Calibri"/>
+                        </a:rPr>
+                        <a:t>Run 1 TQI</a:t>
+                      </a:r>
+                    </a:p>
+                  </a:txBody>
+                  <a:tcPr marL="64008" marR="64008" marT="18288" marB="18288" anchor="ctr">
+                    <a:lnL w="19050">
+                      <a:solidFill>
+                        <a:srgbClr val="FFFFFF"/>
+                      </a:solidFill>
+                    </a:lnL>
+                    <a:lnR w="19050">
+                      <a:solidFill>
+                        <a:srgbClr val="FFFFFF"/>
+                      </a:solidFill>
+                    </a:lnR>
+                    <a:lnT w="19050">
+                      <a:solidFill>
+                        <a:srgbClr val="FFFFFF"/>
+                      </a:solidFill>
+                    </a:lnT>
+                    <a:lnB w="19050">
+                      <a:solidFill>
+                        <a:srgbClr val="FFFFFF"/>
+                      </a:solidFill>
+                    </a:lnB>
+                    <a:solidFill>
+                      <a:srgbClr val="028090"/>
+                    </a:solidFill>
+                  </a:tcPr>
+                </a:tc>
+                <a:tc>
+                  <a:txBody>
+                    <a:bodyPr/>
+                    <a:lstStyle/>
+                    <a:p>
+                      <a:r>
+                        <a:rPr sz="950" b="1">
+                          <a:solidFill>
+                            <a:srgbClr val="FFFFFF"/>
+                          </a:solidFill>
+                          <a:latin typeface="Calibri"/>
+                        </a:rPr>
+                        <a:t>Run 2</a:t>
+                      </a:r>
+                    </a:p>
+                  </a:txBody>
+                  <a:tcPr marL="64008" marR="64008" marT="18288" marB="18288" anchor="ctr">
+                    <a:lnL w="19050">
+                      <a:solidFill>
+                        <a:srgbClr val="FFFFFF"/>
+                      </a:solidFill>
+                    </a:lnL>
+                    <a:lnR w="19050">
+                      <a:solidFill>
+                        <a:srgbClr val="FFFFFF"/>
+                      </a:solidFill>
+                    </a:lnR>
+                    <a:lnT w="19050">
+                      <a:solidFill>
+                        <a:srgbClr val="FFFFFF"/>
+                      </a:solidFill>
+                    </a:lnT>
+                    <a:lnB w="19050">
+                      <a:solidFill>
+                        <a:srgbClr val="FFFFFF"/>
+                      </a:solidFill>
+                    </a:lnB>
+                    <a:solidFill>
+                      <a:srgbClr val="028090"/>
+                    </a:solidFill>
+                  </a:tcPr>
+                </a:tc>
+                <a:tc>
+                  <a:txBody>
+                    <a:bodyPr/>
+                    <a:lstStyle/>
+                    <a:p>
+                      <a:r>
+                        <a:rPr sz="950" b="1">
+                          <a:solidFill>
+                            <a:srgbClr val="FFFFFF"/>
+                          </a:solidFill>
+                          <a:latin typeface="Calibri"/>
+                        </a:rPr>
+                        <a:t>Run 3</a:t>
+                      </a:r>
+                    </a:p>
+                  </a:txBody>
+                  <a:tcPr marL="64008" marR="64008" marT="18288" marB="18288" anchor="ctr">
+                    <a:lnL w="19050">
+                      <a:solidFill>
+                        <a:srgbClr val="FFFFFF"/>
+                      </a:solidFill>
+                    </a:lnL>
+                    <a:lnR w="19050">
+                      <a:solidFill>
+                        <a:srgbClr val="FFFFFF"/>
+                      </a:solidFill>
+                    </a:lnR>
+                    <a:lnT w="19050">
+                      <a:solidFill>
+                        <a:srgbClr val="FFFFFF"/>
+                      </a:solidFill>
+                    </a:lnT>
+                    <a:lnB w="19050">
+                      <a:solidFill>
+                        <a:srgbClr val="FFFFFF"/>
+                      </a:solidFill>
+                    </a:lnB>
+                    <a:solidFill>
+                      <a:srgbClr val="028090"/>
+                    </a:solidFill>
+                  </a:tcPr>
+                </a:tc>
+                <a:tc>
+                  <a:txBody>
+                    <a:bodyPr/>
+                    <a:lstStyle/>
+                    <a:p>
+                      <a:r>
+                        <a:rPr sz="950" b="1">
+                          <a:solidFill>
+                            <a:srgbClr val="FFFFFF"/>
+                          </a:solidFill>
+                          <a:latin typeface="Calibri"/>
+                        </a:rPr>
+                        <a:t>Run n</a:t>
+                      </a:r>
+                    </a:p>
+                  </a:txBody>
+                  <a:tcPr marL="64008" marR="64008" marT="18288" marB="18288" anchor="ctr">
+                    <a:lnL w="19050">
+                      <a:solidFill>
+                        <a:srgbClr val="FFFFFF"/>
+                      </a:solidFill>
+                    </a:lnL>
+                    <a:lnR w="19050">
+                      <a:solidFill>
+                        <a:srgbClr val="FFFFFF"/>
+                      </a:solidFill>
+                    </a:lnR>
+                    <a:lnT w="19050">
+                      <a:solidFill>
+                        <a:srgbClr val="FFFFFF"/>
+                      </a:solidFill>
+                    </a:lnT>
+                    <a:lnB w="19050">
+                      <a:solidFill>
+                        <a:srgbClr val="FFFFFF"/>
+                      </a:solidFill>
+                    </a:lnB>
+                    <a:solidFill>
+                      <a:srgbClr val="028090"/>
+                    </a:solidFill>
+                  </a:tcPr>
+                </a:tc>
+                <a:extLst>
+                  <a:ext uri="{0D108BD9-81ED-4DB2-BD59-A6C34878D82A}">
+                    <a16:rowId xmlns:a16="http://schemas.microsoft.com/office/drawing/2014/main" val="10000"/>
+                  </a:ext>
+                </a:extLst>
+              </a:tr>
+              <a:tr h="228600">
+                <a:tc>
+                  <a:txBody>
+                    <a:bodyPr/>
+                    <a:lstStyle/>
+                    <a:p>
+                      <a:r>
+                        <a:rPr sz="1000" b="1">
+                          <a:solidFill>
+                            <a:srgbClr val="16262B"/>
+                          </a:solidFill>
+                          <a:latin typeface="Calibri"/>
+                        </a:rPr>
+                        <a:t>1</a:t>
+                      </a:r>
+                    </a:p>
+                  </a:txBody>
+                  <a:tcPr marL="64008" marR="64008" marT="18288" marB="18288" anchor="ctr">
+                    <a:lnL w="19050">
+                      <a:solidFill>
+                        <a:srgbClr val="FFFFFF"/>
+                      </a:solidFill>
+                    </a:lnL>
+                    <a:lnR w="19050">
+                      <a:solidFill>
+                        <a:srgbClr val="FFFFFF"/>
+                      </a:solidFill>
+                    </a:lnR>
+                    <a:lnT w="19050">
+                      <a:solidFill>
+                        <a:srgbClr val="FFFFFF"/>
+                      </a:solidFill>
+                    </a:lnT>
+                    <a:lnB w="19050">
+                      <a:solidFill>
+                        <a:srgbClr val="FFFFFF"/>
+                      </a:solidFill>
+                    </a:lnB>
+                    <a:solidFill>
+                      <a:srgbClr val="EDF5F5"/>
+                    </a:solidFill>
+                  </a:tcPr>
+                </a:tc>
+                <a:tc>
+                  <a:txBody>
+                    <a:bodyPr/>
+                    <a:lstStyle/>
+                    <a:p>
+                      <a:r>
+                        <a:rPr sz="1000" b="0">
+                          <a:solidFill>
+                            <a:srgbClr val="16262B"/>
+                          </a:solidFill>
+                          <a:latin typeface="Calibri"/>
+                        </a:rPr>
+                        <a:t>0 to 25</a:t>
+                      </a:r>
+                    </a:p>
+                  </a:txBody>
+                  <a:tcPr marL="64008" marR="64008" marT="18288" marB="18288" anchor="ctr">
+                    <a:lnL w="19050">
+                      <a:solidFill>
+                        <a:srgbClr val="FFFFFF"/>
+                      </a:solidFill>
+                    </a:lnL>
+                    <a:lnR w="19050">
+                      <a:solidFill>
+                        <a:srgbClr val="FFFFFF"/>
+                      </a:solidFill>
+                    </a:lnR>
+                    <a:lnT w="19050">
+                      <a:solidFill>
+                        <a:srgbClr val="FFFFFF"/>
+                      </a:solidFill>
+                    </a:lnT>
+                    <a:lnB w="19050">
+                      <a:solidFill>
+                        <a:srgbClr val="FFFFFF"/>
+                      </a:solidFill>
+                    </a:lnB>
+                    <a:solidFill>
+                      <a:srgbClr val="EDF5F5"/>
+                    </a:solidFill>
+                  </a:tcPr>
+                </a:tc>
+                <a:tc>
+                  <a:txBody>
+                    <a:bodyPr/>
+                    <a:lstStyle/>
+                    <a:p>
+                      <a:r>
+                        <a:rPr sz="1000" b="0">
+                          <a:solidFill>
+                            <a:srgbClr val="16262B"/>
+                          </a:solidFill>
+                          <a:latin typeface="Calibri"/>
+                        </a:rPr>
+                        <a:t>−2.6</a:t>
+                      </a:r>
+                    </a:p>
+                  </a:txBody>
+                  <a:tcPr marL="64008" marR="64008" marT="18288" marB="18288" anchor="ctr">
+                    <a:lnL w="19050">
+                      <a:solidFill>
+                        <a:srgbClr val="FFFFFF"/>
+                      </a:solidFill>
+                    </a:lnL>
+                    <a:lnR w="19050">
+                      <a:solidFill>
+                        <a:srgbClr val="FFFFFF"/>
+                      </a:solidFill>
+                    </a:lnR>
+                    <a:lnT w="19050">
+                      <a:solidFill>
+                        <a:srgbClr val="FFFFFF"/>
+                      </a:solidFill>
+                    </a:lnT>
+                    <a:lnB w="19050">
+                      <a:solidFill>
+                        <a:srgbClr val="FFFFFF"/>
+                      </a:solidFill>
+                    </a:lnB>
+                    <a:solidFill>
+                      <a:srgbClr val="EDF5F5"/>
+                    </a:solidFill>
+                  </a:tcPr>
+                </a:tc>
+                <a:tc>
+                  <a:txBody>
+                    <a:bodyPr/>
+                    <a:lstStyle/>
+                    <a:p>
+                      <a:r>
+                        <a:rPr sz="1000" b="0">
+                          <a:solidFill>
+                            <a:srgbClr val="16262B"/>
+                          </a:solidFill>
+                          <a:latin typeface="Calibri"/>
+                        </a:rPr>
+                        <a:t>0.85</a:t>
+                      </a:r>
+                    </a:p>
+                  </a:txBody>
+                  <a:tcPr marL="64008" marR="64008" marT="18288" marB="18288" anchor="ctr">
+                    <a:lnL w="19050">
+                      <a:solidFill>
+                        <a:srgbClr val="FFFFFF"/>
+                      </a:solidFill>
+                    </a:lnL>
+                    <a:lnR w="19050">
+                      <a:solidFill>
+                        <a:srgbClr val="FFFFFF"/>
+                      </a:solidFill>
+                    </a:lnR>
+                    <a:lnT w="19050">
+                      <a:solidFill>
+                        <a:srgbClr val="FFFFFF"/>
+                      </a:solidFill>
+                    </a:lnT>
+                    <a:lnB w="19050">
+                      <a:solidFill>
+                        <a:srgbClr val="FFFFFF"/>
+                      </a:solidFill>
+                    </a:lnB>
+                    <a:solidFill>
+                      <a:srgbClr val="EDF5F5"/>
+                    </a:solidFill>
+                  </a:tcPr>
+                </a:tc>
+                <a:tc>
+                  <a:txBody>
+                    <a:bodyPr/>
+                    <a:lstStyle/>
+                    <a:p>
+                      <a:r>
+                        <a:rPr sz="1000" b="0">
+                          <a:solidFill>
+                            <a:srgbClr val="9AA9AD"/>
+                          </a:solidFill>
+                          <a:latin typeface="Calibri"/>
+                        </a:rPr>
+                        <a:t>–</a:t>
+                      </a:r>
+                    </a:p>
+                  </a:txBody>
+                  <a:tcPr marL="64008" marR="64008" marT="18288" marB="18288" anchor="ctr">
+                    <a:lnL w="19050">
+                      <a:solidFill>
+                        <a:srgbClr val="FFFFFF"/>
+                      </a:solidFill>
+                    </a:lnL>
+                    <a:lnR w="19050">
+                      <a:solidFill>
+                        <a:srgbClr val="FFFFFF"/>
+                      </a:solidFill>
+                    </a:lnR>
+                    <a:lnT w="19050">
+                      <a:solidFill>
+                        <a:srgbClr val="FFFFFF"/>
+                      </a:solidFill>
+                    </a:lnT>
+                    <a:lnB w="19050">
+                      <a:solidFill>
+                        <a:srgbClr val="FFFFFF"/>
+                      </a:solidFill>
+                    </a:lnB>
+                    <a:solidFill>
+                      <a:srgbClr val="EDF5F5"/>
+                    </a:solidFill>
+                  </a:tcPr>
+                </a:tc>
+                <a:tc>
+                  <a:txBody>
+                    <a:bodyPr/>
+                    <a:lstStyle/>
+                    <a:p>
+                      <a:r>
+                        <a:rPr sz="1000" b="0">
+                          <a:solidFill>
+                            <a:srgbClr val="9AA9AD"/>
+                          </a:solidFill>
+                          <a:latin typeface="Calibri"/>
+                        </a:rPr>
+                        <a:t>–</a:t>
+                      </a:r>
+                    </a:p>
+                  </a:txBody>
+                  <a:tcPr marL="64008" marR="64008" marT="18288" marB="18288" anchor="ctr">
+                    <a:lnL w="19050">
+                      <a:solidFill>
+                        <a:srgbClr val="FFFFFF"/>
+                      </a:solidFill>
+                    </a:lnL>
+                    <a:lnR w="19050">
+                      <a:solidFill>
+                        <a:srgbClr val="FFFFFF"/>
+                      </a:solidFill>
+                    </a:lnR>
+                    <a:lnT w="19050">
+                      <a:solidFill>
+                        <a:srgbClr val="FFFFFF"/>
+                      </a:solidFill>
+                    </a:lnT>
+                    <a:lnB w="19050">
+                      <a:solidFill>
+                        <a:srgbClr val="FFFFFF"/>
+                      </a:solidFill>
+                    </a:lnB>
+                    <a:solidFill>
+                      <a:srgbClr val="EDF5F5"/>
+                    </a:solidFill>
+                  </a:tcPr>
+                </a:tc>
+                <a:tc>
+                  <a:txBody>
+                    <a:bodyPr/>
+                    <a:lstStyle/>
+                    <a:p>
+                      <a:r>
+                        <a:rPr sz="1000" b="0">
+                          <a:solidFill>
+                            <a:srgbClr val="9AA9AD"/>
+                          </a:solidFill>
+                          <a:latin typeface="Calibri"/>
+                        </a:rPr>
+                        <a:t>–</a:t>
+                      </a:r>
+                    </a:p>
+                  </a:txBody>
+                  <a:tcPr marL="64008" marR="64008" marT="18288" marB="18288" anchor="ctr">
+                    <a:lnL w="19050">
+                      <a:solidFill>
+                        <a:srgbClr val="FFFFFF"/>
+                      </a:solidFill>
+                    </a:lnL>
+                    <a:lnR w="19050">
+                      <a:solidFill>
+                        <a:srgbClr val="FFFFFF"/>
+                      </a:solidFill>
+                    </a:lnR>
+                    <a:lnT w="19050">
+                      <a:solidFill>
+                        <a:srgbClr val="FFFFFF"/>
+                      </a:solidFill>
+                    </a:lnT>
+                    <a:lnB w="19050">
+                      <a:solidFill>
+                        <a:srgbClr val="FFFFFF"/>
+                      </a:solidFill>
+                    </a:lnB>
+                    <a:solidFill>
+                      <a:srgbClr val="EDF5F5"/>
+                    </a:solidFill>
+                  </a:tcPr>
+                </a:tc>
+                <a:extLst>
+                  <a:ext uri="{0D108BD9-81ED-4DB2-BD59-A6C34878D82A}">
+                    <a16:rowId xmlns:a16="http://schemas.microsoft.com/office/drawing/2014/main" val="10001"/>
+                  </a:ext>
+                </a:extLst>
+              </a:tr>
+              <a:tr h="228600">
+                <a:tc>
+                  <a:txBody>
+                    <a:bodyPr/>
+                    <a:lstStyle/>
+                    <a:p>
+                      <a:r>
+                        <a:rPr sz="1000" b="1">
+                          <a:solidFill>
+                            <a:srgbClr val="16262B"/>
+                          </a:solidFill>
+                          <a:latin typeface="Calibri"/>
+                        </a:rPr>
+                        <a:t>2</a:t>
+                      </a:r>
+                    </a:p>
+                  </a:txBody>
+                  <a:tcPr marL="64008" marR="64008" marT="18288" marB="18288" anchor="ctr">
+                    <a:lnL w="19050">
+                      <a:solidFill>
+                        <a:srgbClr val="FFFFFF"/>
+                      </a:solidFill>
+                    </a:lnL>
+                    <a:lnR w="19050">
+                      <a:solidFill>
+                        <a:srgbClr val="FFFFFF"/>
+                      </a:solidFill>
+                    </a:lnR>
+                    <a:lnT w="19050">
+                      <a:solidFill>
+                        <a:srgbClr val="FFFFFF"/>
+                      </a:solidFill>
+                    </a:lnT>
+                    <a:lnB w="19050">
+                      <a:solidFill>
+                        <a:srgbClr val="FFFFFF"/>
+                      </a:solidFill>
+                    </a:lnB>
+                    <a:solidFill>
+                      <a:srgbClr val="FFFFFF"/>
+                    </a:solidFill>
+                  </a:tcPr>
+                </a:tc>
+                <a:tc>
+                  <a:txBody>
+                    <a:bodyPr/>
+                    <a:lstStyle/>
+                    <a:p>
+                      <a:r>
+                        <a:rPr sz="1000" b="0">
+                          <a:solidFill>
+                            <a:srgbClr val="16262B"/>
+                          </a:solidFill>
+                          <a:latin typeface="Calibri"/>
+                        </a:rPr>
+                        <a:t>25 to 50</a:t>
+                      </a:r>
+                    </a:p>
+                  </a:txBody>
+                  <a:tcPr marL="64008" marR="64008" marT="18288" marB="18288" anchor="ctr">
+                    <a:lnL w="19050">
+                      <a:solidFill>
+                        <a:srgbClr val="FFFFFF"/>
+                      </a:solidFill>
+                    </a:lnL>
+                    <a:lnR w="19050">
+                      <a:solidFill>
+                        <a:srgbClr val="FFFFFF"/>
+                      </a:solidFill>
+                    </a:lnR>
+                    <a:lnT w="19050">
+                      <a:solidFill>
+                        <a:srgbClr val="FFFFFF"/>
+                      </a:solidFill>
+                    </a:lnT>
+                    <a:lnB w="19050">
+                      <a:solidFill>
+                        <a:srgbClr val="FFFFFF"/>
+                      </a:solidFill>
+                    </a:lnB>
+                    <a:solidFill>
+                      <a:srgbClr val="FFFFFF"/>
+                    </a:solidFill>
+                  </a:tcPr>
+                </a:tc>
+                <a:tc>
+                  <a:txBody>
+                    <a:bodyPr/>
+                    <a:lstStyle/>
+                    <a:p>
+                      <a:r>
+                        <a:rPr sz="1000" b="0">
+                          <a:solidFill>
+                            <a:srgbClr val="16262B"/>
+                          </a:solidFill>
+                          <a:latin typeface="Calibri"/>
+                        </a:rPr>
+                        <a:t>−2.8</a:t>
+                      </a:r>
+                    </a:p>
+                  </a:txBody>
+                  <a:tcPr marL="64008" marR="64008" marT="18288" marB="18288" anchor="ctr">
+                    <a:lnL w="19050">
+                      <a:solidFill>
+                        <a:srgbClr val="FFFFFF"/>
+                      </a:solidFill>
+                    </a:lnL>
+                    <a:lnR w="19050">
+                      <a:solidFill>
+                        <a:srgbClr val="FFFFFF"/>
+                      </a:solidFill>
+                    </a:lnR>
+                    <a:lnT w="19050">
+                      <a:solidFill>
+                        <a:srgbClr val="FFFFFF"/>
+                      </a:solidFill>
+                    </a:lnT>
+                    <a:lnB w="19050">
+                      <a:solidFill>
+                        <a:srgbClr val="FFFFFF"/>
+                      </a:solidFill>
+                    </a:lnB>
+                    <a:solidFill>
+                      <a:srgbClr val="FFFFFF"/>
+                    </a:solidFill>
+                  </a:tcPr>
+                </a:tc>
+                <a:tc>
+                  <a:txBody>
+                    <a:bodyPr/>
+                    <a:lstStyle/>
+                    <a:p>
+                      <a:r>
+                        <a:rPr sz="1000" b="0">
+                          <a:solidFill>
+                            <a:srgbClr val="16262B"/>
+                          </a:solidFill>
+                          <a:latin typeface="Calibri"/>
+                        </a:rPr>
+                        <a:t>1.07</a:t>
+                      </a:r>
+                    </a:p>
+                  </a:txBody>
+                  <a:tcPr marL="64008" marR="64008" marT="18288" marB="18288" anchor="ctr">
+                    <a:lnL w="19050">
+                      <a:solidFill>
+                        <a:srgbClr val="FFFFFF"/>
+                      </a:solidFill>
+                    </a:lnL>
+                    <a:lnR w="19050">
+                      <a:solidFill>
+                        <a:srgbClr val="FFFFFF"/>
+                      </a:solidFill>
+                    </a:lnR>
+                    <a:lnT w="19050">
+                      <a:solidFill>
+                        <a:srgbClr val="FFFFFF"/>
+                      </a:solidFill>
+                    </a:lnT>
+                    <a:lnB w="19050">
+                      <a:solidFill>
+                        <a:srgbClr val="FFFFFF"/>
+                      </a:solidFill>
+                    </a:lnB>
+                    <a:solidFill>
+                      <a:srgbClr val="FFFFFF"/>
+                    </a:solidFill>
+                  </a:tcPr>
+                </a:tc>
+                <a:tc>
+                  <a:txBody>
+                    <a:bodyPr/>
+                    <a:lstStyle/>
+                    <a:p>
+                      <a:r>
+                        <a:rPr sz="1000" b="0">
+                          <a:solidFill>
+                            <a:srgbClr val="9AA9AD"/>
+                          </a:solidFill>
+                          <a:latin typeface="Calibri"/>
+                        </a:rPr>
+                        <a:t>–</a:t>
+                      </a:r>
+                    </a:p>
+                  </a:txBody>
+                  <a:tcPr marL="64008" marR="64008" marT="18288" marB="18288" anchor="ctr">
+                    <a:lnL w="19050">
+                      <a:solidFill>
+                        <a:srgbClr val="FFFFFF"/>
+                      </a:solidFill>
+                    </a:lnL>
+                    <a:lnR w="19050">
+                      <a:solidFill>
+                        <a:srgbClr val="FFFFFF"/>
+                      </a:solidFill>
+                    </a:lnR>
+                    <a:lnT w="19050">
+                      <a:solidFill>
+                        <a:srgbClr val="FFFFFF"/>
+                      </a:solidFill>
+                    </a:lnT>
+                    <a:lnB w="19050">
+                      <a:solidFill>
+                        <a:srgbClr val="FFFFFF"/>
+                      </a:solidFill>
+                    </a:lnB>
+                    <a:solidFill>
+                      <a:srgbClr val="FFFFFF"/>
+                    </a:solidFill>
+                  </a:tcPr>
+                </a:tc>
+                <a:tc>
+                  <a:txBody>
+                    <a:bodyPr/>
+                    <a:lstStyle/>
+                    <a:p>
+                      <a:r>
+                        <a:rPr sz="1000" b="0">
+                          <a:solidFill>
+                            <a:srgbClr val="9AA9AD"/>
+                          </a:solidFill>
+                          <a:latin typeface="Calibri"/>
+                        </a:rPr>
+                        <a:t>–</a:t>
+                      </a:r>
+                    </a:p>
+                  </a:txBody>
+                  <a:tcPr marL="64008" marR="64008" marT="18288" marB="18288" anchor="ctr">
+                    <a:lnL w="19050">
+                      <a:solidFill>
+                        <a:srgbClr val="FFFFFF"/>
+                      </a:solidFill>
+                    </a:lnL>
+                    <a:lnR w="19050">
+                      <a:solidFill>
+                        <a:srgbClr val="FFFFFF"/>
+                      </a:solidFill>
+                    </a:lnR>
+                    <a:lnT w="19050">
+                      <a:solidFill>
+                        <a:srgbClr val="FFFFFF"/>
+                      </a:solidFill>
+                    </a:lnT>
+                    <a:lnB w="19050">
+                      <a:solidFill>
+                        <a:srgbClr val="FFFFFF"/>
+                      </a:solidFill>
+                    </a:lnB>
+                    <a:solidFill>
+                      <a:srgbClr val="FFFFFF"/>
+                    </a:solidFill>
+                  </a:tcPr>
+                </a:tc>
+                <a:tc>
+                  <a:txBody>
+                    <a:bodyPr/>
+                    <a:lstStyle/>
+                    <a:p>
+                      <a:r>
+                        <a:rPr sz="1000" b="0">
+                          <a:solidFill>
+                            <a:srgbClr val="9AA9AD"/>
+                          </a:solidFill>
+                          <a:latin typeface="Calibri"/>
+                        </a:rPr>
+                        <a:t>–</a:t>
+                      </a:r>
+                    </a:p>
+                  </a:txBody>
+                  <a:tcPr marL="64008" marR="64008" marT="18288" marB="18288" anchor="ctr">
+                    <a:lnL w="19050">
+                      <a:solidFill>
+                        <a:srgbClr val="FFFFFF"/>
+                      </a:solidFill>
+                    </a:lnL>
+                    <a:lnR w="19050">
+                      <a:solidFill>
+                        <a:srgbClr val="FFFFFF"/>
+                      </a:solidFill>
+                    </a:lnR>
+                    <a:lnT w="19050">
+                      <a:solidFill>
+                        <a:srgbClr val="FFFFFF"/>
+                      </a:solidFill>
+                    </a:lnT>
+                    <a:lnB w="19050">
+                      <a:solidFill>
+                        <a:srgbClr val="FFFFFF"/>
+                      </a:solidFill>
+                    </a:lnB>
+                    <a:solidFill>
+                      <a:srgbClr val="FFFFFF"/>
+                    </a:solidFill>
+                  </a:tcPr>
+                </a:tc>
+                <a:extLst>
+                  <a:ext uri="{0D108BD9-81ED-4DB2-BD59-A6C34878D82A}">
+                    <a16:rowId xmlns:a16="http://schemas.microsoft.com/office/drawing/2014/main" val="10002"/>
+                  </a:ext>
+                </a:extLst>
+              </a:tr>
+              <a:tr h="228600">
+                <a:tc>
+                  <a:txBody>
+                    <a:bodyPr/>
+                    <a:lstStyle/>
+                    <a:p>
+                      <a:r>
+                        <a:rPr sz="1000" b="1">
+                          <a:solidFill>
+                            <a:srgbClr val="16262B"/>
+                          </a:solidFill>
+                          <a:latin typeface="Calibri"/>
+                        </a:rPr>
+                        <a:t>3</a:t>
+                      </a:r>
+                    </a:p>
+                  </a:txBody>
+                  <a:tcPr marL="64008" marR="64008" marT="18288" marB="18288" anchor="ctr">
+                    <a:lnL w="19050">
+                      <a:solidFill>
+                        <a:srgbClr val="FFFFFF"/>
+                      </a:solidFill>
+                    </a:lnL>
+                    <a:lnR w="19050">
+                      <a:solidFill>
+                        <a:srgbClr val="FFFFFF"/>
+                      </a:solidFill>
+                    </a:lnR>
+                    <a:lnT w="19050">
+                      <a:solidFill>
+                        <a:srgbClr val="FFFFFF"/>
+                      </a:solidFill>
+                    </a:lnT>
+                    <a:lnB w="19050">
+                      <a:solidFill>
+                        <a:srgbClr val="FFFFFF"/>
+                      </a:solidFill>
+                    </a:lnB>
+                    <a:solidFill>
+                      <a:srgbClr val="EDF5F5"/>
+                    </a:solidFill>
+                  </a:tcPr>
+                </a:tc>
+                <a:tc>
+                  <a:txBody>
+                    <a:bodyPr/>
+                    <a:lstStyle/>
+                    <a:p>
+                      <a:r>
+                        <a:rPr sz="1000" b="0">
+                          <a:solidFill>
+                            <a:srgbClr val="16262B"/>
+                          </a:solidFill>
+                          <a:latin typeface="Calibri"/>
+                        </a:rPr>
+                        <a:t>50 to 75</a:t>
+                      </a:r>
+                    </a:p>
+                  </a:txBody>
+                  <a:tcPr marL="64008" marR="64008" marT="18288" marB="18288" anchor="ctr">
+                    <a:lnL w="19050">
+                      <a:solidFill>
+                        <a:srgbClr val="FFFFFF"/>
+                      </a:solidFill>
+                    </a:lnL>
+                    <a:lnR w="19050">
+                      <a:solidFill>
+                        <a:srgbClr val="FFFFFF"/>
+                      </a:solidFill>
+                    </a:lnR>
+                    <a:lnT w="19050">
+                      <a:solidFill>
+                        <a:srgbClr val="FFFFFF"/>
+                      </a:solidFill>
+                    </a:lnT>
+                    <a:lnB w="19050">
+                      <a:solidFill>
+                        <a:srgbClr val="FFFFFF"/>
+                      </a:solidFill>
+                    </a:lnB>
+                    <a:solidFill>
+                      <a:srgbClr val="EDF5F5"/>
+                    </a:solidFill>
+                  </a:tcPr>
+                </a:tc>
+                <a:tc>
+                  <a:txBody>
+                    <a:bodyPr/>
+                    <a:lstStyle/>
+                    <a:p>
+                      <a:r>
+                        <a:rPr sz="1000" b="0">
+                          <a:solidFill>
+                            <a:srgbClr val="16262B"/>
+                          </a:solidFill>
+                          <a:latin typeface="Calibri"/>
+                        </a:rPr>
+                        <a:t>−1.9</a:t>
+                      </a:r>
+                    </a:p>
+                  </a:txBody>
+                  <a:tcPr marL="64008" marR="64008" marT="18288" marB="18288" anchor="ctr">
+                    <a:lnL w="19050">
+                      <a:solidFill>
+                        <a:srgbClr val="FFFFFF"/>
+                      </a:solidFill>
+                    </a:lnL>
+                    <a:lnR w="19050">
+                      <a:solidFill>
+                        <a:srgbClr val="FFFFFF"/>
+                      </a:solidFill>
+                    </a:lnR>
+                    <a:lnT w="19050">
+                      <a:solidFill>
+                        <a:srgbClr val="FFFFFF"/>
+                      </a:solidFill>
+                    </a:lnT>
+                    <a:lnB w="19050">
+                      <a:solidFill>
+                        <a:srgbClr val="FFFFFF"/>
+                      </a:solidFill>
+                    </a:lnB>
+                    <a:solidFill>
+                      <a:srgbClr val="EDF5F5"/>
+                    </a:solidFill>
+                  </a:tcPr>
+                </a:tc>
+                <a:tc>
+                  <a:txBody>
+                    <a:bodyPr/>
+                    <a:lstStyle/>
+                    <a:p>
+                      <a:r>
+                        <a:rPr sz="1000" b="0">
+                          <a:solidFill>
+                            <a:srgbClr val="16262B"/>
+                          </a:solidFill>
+                          <a:latin typeface="Calibri"/>
+                        </a:rPr>
+                        <a:t>0.65</a:t>
+                      </a:r>
+                    </a:p>
+                  </a:txBody>
+                  <a:tcPr marL="64008" marR="64008" marT="18288" marB="18288" anchor="ctr">
+                    <a:lnL w="19050">
+                      <a:solidFill>
+                        <a:srgbClr val="FFFFFF"/>
+                      </a:solidFill>
+                    </a:lnL>
+                    <a:lnR w="19050">
+                      <a:solidFill>
+                        <a:srgbClr val="FFFFFF"/>
+                      </a:solidFill>
+                    </a:lnR>
+                    <a:lnT w="19050">
+                      <a:solidFill>
+                        <a:srgbClr val="FFFFFF"/>
+                      </a:solidFill>
+                    </a:lnT>
+                    <a:lnB w="19050">
+                      <a:solidFill>
+                        <a:srgbClr val="FFFFFF"/>
+                      </a:solidFill>
+                    </a:lnB>
+                    <a:solidFill>
+                      <a:srgbClr val="EDF5F5"/>
+                    </a:solidFill>
+                  </a:tcPr>
+                </a:tc>
+                <a:tc>
+                  <a:txBody>
+                    <a:bodyPr/>
+                    <a:lstStyle/>
+                    <a:p>
+                      <a:r>
+                        <a:rPr sz="1000" b="0">
+                          <a:solidFill>
+                            <a:srgbClr val="9AA9AD"/>
+                          </a:solidFill>
+                          <a:latin typeface="Calibri"/>
+                        </a:rPr>
+                        <a:t>–</a:t>
+                      </a:r>
+                    </a:p>
+                  </a:txBody>
+                  <a:tcPr marL="64008" marR="64008" marT="18288" marB="18288" anchor="ctr">
+                    <a:lnL w="19050">
+                      <a:solidFill>
+                        <a:srgbClr val="FFFFFF"/>
+                      </a:solidFill>
+                    </a:lnL>
+                    <a:lnR w="19050">
+                      <a:solidFill>
+                        <a:srgbClr val="FFFFFF"/>
+                      </a:solidFill>
+                    </a:lnR>
+                    <a:lnT w="19050">
+                      <a:solidFill>
+                        <a:srgbClr val="FFFFFF"/>
+                      </a:solidFill>
+                    </a:lnT>
+                    <a:lnB w="19050">
+                      <a:solidFill>
+                        <a:srgbClr val="FFFFFF"/>
+                      </a:solidFill>
+                    </a:lnB>
+                    <a:solidFill>
+                      <a:srgbClr val="EDF5F5"/>
+                    </a:solidFill>
+                  </a:tcPr>
+                </a:tc>
+                <a:tc>
+                  <a:txBody>
+                    <a:bodyPr/>
+                    <a:lstStyle/>
+                    <a:p>
+                      <a:r>
+                        <a:rPr sz="1000" b="0">
+                          <a:solidFill>
+                            <a:srgbClr val="9AA9AD"/>
+                          </a:solidFill>
+                          <a:latin typeface="Calibri"/>
+                        </a:rPr>
+                        <a:t>–</a:t>
+                      </a:r>
+                    </a:p>
+                  </a:txBody>
+                  <a:tcPr marL="64008" marR="64008" marT="18288" marB="18288" anchor="ctr">
+                    <a:lnL w="19050">
+                      <a:solidFill>
+                        <a:srgbClr val="FFFFFF"/>
+                      </a:solidFill>
+                    </a:lnL>
+                    <a:lnR w="19050">
+                      <a:solidFill>
+                        <a:srgbClr val="FFFFFF"/>
+                      </a:solidFill>
+                    </a:lnR>
+                    <a:lnT w="19050">
+                      <a:solidFill>
+                        <a:srgbClr val="FFFFFF"/>
+                      </a:solidFill>
+                    </a:lnT>
+                    <a:lnB w="19050">
+                      <a:solidFill>
+                        <a:srgbClr val="FFFFFF"/>
+                      </a:solidFill>
+                    </a:lnB>
+                    <a:solidFill>
+                      <a:srgbClr val="EDF5F5"/>
+                    </a:solidFill>
+                  </a:tcPr>
+                </a:tc>
+                <a:tc>
+                  <a:txBody>
+                    <a:bodyPr/>
+                    <a:lstStyle/>
+                    <a:p>
+                      <a:r>
+                        <a:rPr sz="1000" b="0">
+                          <a:solidFill>
+                            <a:srgbClr val="9AA9AD"/>
+                          </a:solidFill>
+                          <a:latin typeface="Calibri"/>
+                        </a:rPr>
+                        <a:t>–</a:t>
+                      </a:r>
+                    </a:p>
+                  </a:txBody>
+                  <a:tcPr marL="64008" marR="64008" marT="18288" marB="18288" anchor="ctr">
+                    <a:lnL w="19050">
+                      <a:solidFill>
+                        <a:srgbClr val="FFFFFF"/>
+                      </a:solidFill>
+                    </a:lnL>
+                    <a:lnR w="19050">
+                      <a:solidFill>
+                        <a:srgbClr val="FFFFFF"/>
+                      </a:solidFill>
+                    </a:lnR>
+                    <a:lnT w="19050">
+                      <a:solidFill>
+                        <a:srgbClr val="FFFFFF"/>
+                      </a:solidFill>
+                    </a:lnT>
+                    <a:lnB w="19050">
+                      <a:solidFill>
+                        <a:srgbClr val="FFFFFF"/>
+                      </a:solidFill>
+                    </a:lnB>
+                    <a:solidFill>
+                      <a:srgbClr val="EDF5F5"/>
+                    </a:solidFill>
+                  </a:tcPr>
+                </a:tc>
+                <a:extLst>
+                  <a:ext uri="{0D108BD9-81ED-4DB2-BD59-A6C34878D82A}">
+                    <a16:rowId xmlns:a16="http://schemas.microsoft.com/office/drawing/2014/main" val="10003"/>
+                  </a:ext>
+                </a:extLst>
+              </a:tr>
+              <a:tr h="228600">
+                <a:tc>
+                  <a:txBody>
+                    <a:bodyPr/>
+                    <a:lstStyle/>
+                    <a:p>
+                      <a:r>
+                        <a:rPr sz="1000" b="1">
+                          <a:solidFill>
+                            <a:srgbClr val="16262B"/>
+                          </a:solidFill>
+                          <a:latin typeface="Calibri"/>
+                        </a:rPr>
+                        <a:t>4</a:t>
+                      </a:r>
+                    </a:p>
+                  </a:txBody>
+                  <a:tcPr marL="64008" marR="64008" marT="18288" marB="18288" anchor="ctr">
+                    <a:lnL w="19050">
+                      <a:solidFill>
+                        <a:srgbClr val="FFFFFF"/>
+                      </a:solidFill>
+                    </a:lnL>
+                    <a:lnR w="19050">
+                      <a:solidFill>
+                        <a:srgbClr val="FFFFFF"/>
+                      </a:solidFill>
+                    </a:lnR>
+                    <a:lnT w="19050">
+                      <a:solidFill>
+                        <a:srgbClr val="FFFFFF"/>
+                      </a:solidFill>
+                    </a:lnT>
+                    <a:lnB w="19050">
+                      <a:solidFill>
+                        <a:srgbClr val="FFFFFF"/>
+                      </a:solidFill>
+                    </a:lnB>
+                    <a:solidFill>
+                      <a:srgbClr val="FFFFFF"/>
+                    </a:solidFill>
+                  </a:tcPr>
+                </a:tc>
+                <a:tc>
+                  <a:txBody>
+                    <a:bodyPr/>
+                    <a:lstStyle/>
+                    <a:p>
+                      <a:r>
+                        <a:rPr sz="1000" b="0">
+                          <a:solidFill>
+                            <a:srgbClr val="16262B"/>
+                          </a:solidFill>
+                          <a:latin typeface="Calibri"/>
+                        </a:rPr>
+                        <a:t>75 to 100</a:t>
+                      </a:r>
+                    </a:p>
+                  </a:txBody>
+                  <a:tcPr marL="64008" marR="64008" marT="18288" marB="18288" anchor="ctr">
+                    <a:lnL w="19050">
+                      <a:solidFill>
+                        <a:srgbClr val="FFFFFF"/>
+                      </a:solidFill>
+                    </a:lnL>
+                    <a:lnR w="19050">
+                      <a:solidFill>
+                        <a:srgbClr val="FFFFFF"/>
+                      </a:solidFill>
+                    </a:lnR>
+                    <a:lnT w="19050">
+                      <a:solidFill>
+                        <a:srgbClr val="FFFFFF"/>
+                      </a:solidFill>
+                    </a:lnT>
+                    <a:lnB w="19050">
+                      <a:solidFill>
+                        <a:srgbClr val="FFFFFF"/>
+                      </a:solidFill>
+                    </a:lnB>
+                    <a:solidFill>
+                      <a:srgbClr val="FFFFFF"/>
+                    </a:solidFill>
+                  </a:tcPr>
+                </a:tc>
+                <a:tc>
+                  <a:txBody>
+                    <a:bodyPr/>
+                    <a:lstStyle/>
+                    <a:p>
+                      <a:r>
+                        <a:rPr sz="1000" b="0">
+                          <a:solidFill>
+                            <a:srgbClr val="16262B"/>
+                          </a:solidFill>
+                          <a:latin typeface="Calibri"/>
+                        </a:rPr>
+                        <a:t>−1.4</a:t>
+                      </a:r>
+                    </a:p>
+                  </a:txBody>
+                  <a:tcPr marL="64008" marR="64008" marT="18288" marB="18288" anchor="ctr">
+                    <a:lnL w="19050">
+                      <a:solidFill>
+                        <a:srgbClr val="FFFFFF"/>
+                      </a:solidFill>
+                    </a:lnL>
+                    <a:lnR w="19050">
+                      <a:solidFill>
+                        <a:srgbClr val="FFFFFF"/>
+                      </a:solidFill>
+                    </a:lnR>
+                    <a:lnT w="19050">
+                      <a:solidFill>
+                        <a:srgbClr val="FFFFFF"/>
+                      </a:solidFill>
+                    </a:lnT>
+                    <a:lnB w="19050">
+                      <a:solidFill>
+                        <a:srgbClr val="FFFFFF"/>
+                      </a:solidFill>
+                    </a:lnB>
+                    <a:solidFill>
+                      <a:srgbClr val="FFFFFF"/>
+                    </a:solidFill>
+                  </a:tcPr>
+                </a:tc>
+                <a:tc>
+                  <a:txBody>
+                    <a:bodyPr/>
+                    <a:lstStyle/>
+                    <a:p>
+                      <a:r>
+                        <a:rPr sz="1000" b="0">
+                          <a:solidFill>
+                            <a:srgbClr val="16262B"/>
+                          </a:solidFill>
+                          <a:latin typeface="Calibri"/>
+                        </a:rPr>
+                        <a:t>0.52</a:t>
+                      </a:r>
+                    </a:p>
+                  </a:txBody>
+                  <a:tcPr marL="64008" marR="64008" marT="18288" marB="18288" anchor="ctr">
+                    <a:lnL w="19050">
+                      <a:solidFill>
+                        <a:srgbClr val="FFFFFF"/>
+                      </a:solidFill>
+                    </a:lnL>
+                    <a:lnR w="19050">
+                      <a:solidFill>
+                        <a:srgbClr val="FFFFFF"/>
+                      </a:solidFill>
+                    </a:lnR>
+                    <a:lnT w="19050">
+                      <a:solidFill>
+                        <a:srgbClr val="FFFFFF"/>
+                      </a:solidFill>
+                    </a:lnT>
+                    <a:lnB w="19050">
+                      <a:solidFill>
+                        <a:srgbClr val="FFFFFF"/>
+                      </a:solidFill>
+                    </a:lnB>
+                    <a:solidFill>
+                      <a:srgbClr val="FFFFFF"/>
+                    </a:solidFill>
+                  </a:tcPr>
+                </a:tc>
+                <a:tc>
+                  <a:txBody>
+                    <a:bodyPr/>
+                    <a:lstStyle/>
+                    <a:p>
+                      <a:r>
+                        <a:rPr sz="1000" b="0">
+                          <a:solidFill>
+                            <a:srgbClr val="9AA9AD"/>
+                          </a:solidFill>
+                          <a:latin typeface="Calibri"/>
+                        </a:rPr>
+                        <a:t>–</a:t>
+                      </a:r>
+                    </a:p>
+                  </a:txBody>
+                  <a:tcPr marL="64008" marR="64008" marT="18288" marB="18288" anchor="ctr">
+                    <a:lnL w="19050">
+                      <a:solidFill>
+                        <a:srgbClr val="FFFFFF"/>
+                      </a:solidFill>
+                    </a:lnL>
+                    <a:lnR w="19050">
+                      <a:solidFill>
+                        <a:srgbClr val="FFFFFF"/>
+                      </a:solidFill>
+                    </a:lnR>
+                    <a:lnT w="19050">
+                      <a:solidFill>
+                        <a:srgbClr val="FFFFFF"/>
+                      </a:solidFill>
+                    </a:lnT>
+                    <a:lnB w="19050">
+                      <a:solidFill>
+                        <a:srgbClr val="FFFFFF"/>
+                      </a:solidFill>
+                    </a:lnB>
+                    <a:solidFill>
+                      <a:srgbClr val="FFFFFF"/>
+                    </a:solidFill>
+                  </a:tcPr>
+                </a:tc>
+                <a:tc>
+                  <a:txBody>
+                    <a:bodyPr/>
+                    <a:lstStyle/>
+                    <a:p>
+                      <a:r>
+                        <a:rPr sz="1000" b="0">
+                          <a:solidFill>
+                            <a:srgbClr val="9AA9AD"/>
+                          </a:solidFill>
+                          <a:latin typeface="Calibri"/>
+                        </a:rPr>
+                        <a:t>–</a:t>
+                      </a:r>
+                    </a:p>
+                  </a:txBody>
+                  <a:tcPr marL="64008" marR="64008" marT="18288" marB="18288" anchor="ctr">
+                    <a:lnL w="19050">
+                      <a:solidFill>
+                        <a:srgbClr val="FFFFFF"/>
+                      </a:solidFill>
+                    </a:lnL>
+                    <a:lnR w="19050">
+                      <a:solidFill>
+                        <a:srgbClr val="FFFFFF"/>
+                      </a:solidFill>
+                    </a:lnR>
+                    <a:lnT w="19050">
+                      <a:solidFill>
+                        <a:srgbClr val="FFFFFF"/>
+                      </a:solidFill>
+                    </a:lnT>
+                    <a:lnB w="19050">
+                      <a:solidFill>
+                        <a:srgbClr val="FFFFFF"/>
+                      </a:solidFill>
+                    </a:lnB>
+                    <a:solidFill>
+                      <a:srgbClr val="FFFFFF"/>
+                    </a:solidFill>
+                  </a:tcPr>
+                </a:tc>
+                <a:tc>
+                  <a:txBody>
+                    <a:bodyPr/>
+                    <a:lstStyle/>
+                    <a:p>
+                      <a:r>
+                        <a:rPr sz="1000" b="0">
+                          <a:solidFill>
+                            <a:srgbClr val="9AA9AD"/>
+                          </a:solidFill>
+                          <a:latin typeface="Calibri"/>
+                        </a:rPr>
+                        <a:t>–</a:t>
+                      </a:r>
+                    </a:p>
+                  </a:txBody>
+                  <a:tcPr marL="64008" marR="64008" marT="18288" marB="18288" anchor="ctr">
+                    <a:lnL w="19050">
+                      <a:solidFill>
+                        <a:srgbClr val="FFFFFF"/>
+                      </a:solidFill>
+                    </a:lnL>
+                    <a:lnR w="19050">
+                      <a:solidFill>
+                        <a:srgbClr val="FFFFFF"/>
+                      </a:solidFill>
+                    </a:lnR>
+                    <a:lnT w="19050">
+                      <a:solidFill>
+                        <a:srgbClr val="FFFFFF"/>
+                      </a:solidFill>
+                    </a:lnT>
+                    <a:lnB w="19050">
+                      <a:solidFill>
+                        <a:srgbClr val="FFFFFF"/>
+                      </a:solidFill>
+                    </a:lnB>
+                    <a:solidFill>
+                      <a:srgbClr val="FFFFFF"/>
+                    </a:solidFill>
+                  </a:tcPr>
+                </a:tc>
+                <a:extLst>
+                  <a:ext uri="{0D108BD9-81ED-4DB2-BD59-A6C34878D82A}">
+                    <a16:rowId xmlns:a16="http://schemas.microsoft.com/office/drawing/2014/main" val="10004"/>
+                  </a:ext>
+                </a:extLst>
+              </a:tr>
+              <a:tr h="228600">
+                <a:tc>
+                  <a:txBody>
+                    <a:bodyPr/>
+                    <a:lstStyle/>
+                    <a:p>
+                      <a:r>
+                        <a:rPr sz="1000" b="1">
+                          <a:solidFill>
+                            <a:srgbClr val="16262B"/>
+                          </a:solidFill>
+                          <a:latin typeface="Calibri"/>
+                        </a:rPr>
+                        <a:t>5</a:t>
+                      </a:r>
+                    </a:p>
+                  </a:txBody>
+                  <a:tcPr marL="64008" marR="64008" marT="18288" marB="18288" anchor="ctr">
+                    <a:lnL w="19050">
+                      <a:solidFill>
+                        <a:srgbClr val="FFFFFF"/>
+                      </a:solidFill>
+                    </a:lnL>
+                    <a:lnR w="19050">
+                      <a:solidFill>
+                        <a:srgbClr val="FFFFFF"/>
+                      </a:solidFill>
+                    </a:lnR>
+                    <a:lnT w="19050">
+                      <a:solidFill>
+                        <a:srgbClr val="FFFFFF"/>
+                      </a:solidFill>
+                    </a:lnT>
+                    <a:lnB w="19050">
+                      <a:solidFill>
+                        <a:srgbClr val="FFFFFF"/>
+                      </a:solidFill>
+                    </a:lnB>
+                    <a:solidFill>
+                      <a:srgbClr val="EDF5F5"/>
+                    </a:solidFill>
+                  </a:tcPr>
+                </a:tc>
+                <a:tc>
+                  <a:txBody>
+                    <a:bodyPr/>
+                    <a:lstStyle/>
+                    <a:p>
+                      <a:r>
+                        <a:rPr sz="1000" b="0">
+                          <a:solidFill>
+                            <a:srgbClr val="16262B"/>
+                          </a:solidFill>
+                          <a:latin typeface="Calibri"/>
+                        </a:rPr>
+                        <a:t>100 to 125</a:t>
+                      </a:r>
+                    </a:p>
+                  </a:txBody>
+                  <a:tcPr marL="64008" marR="64008" marT="18288" marB="18288" anchor="ctr">
+                    <a:lnL w="19050">
+                      <a:solidFill>
+                        <a:srgbClr val="FFFFFF"/>
+                      </a:solidFill>
+                    </a:lnL>
+                    <a:lnR w="19050">
+                      <a:solidFill>
+                        <a:srgbClr val="FFFFFF"/>
+                      </a:solidFill>
+                    </a:lnR>
+                    <a:lnT w="19050">
+                      <a:solidFill>
+                        <a:srgbClr val="FFFFFF"/>
+                      </a:solidFill>
+                    </a:lnT>
+                    <a:lnB w="19050">
+                      <a:solidFill>
+                        <a:srgbClr val="FFFFFF"/>
+                      </a:solidFill>
+                    </a:lnB>
+                    <a:solidFill>
+                      <a:srgbClr val="EDF5F5"/>
+                    </a:solidFill>
+                  </a:tcPr>
+                </a:tc>
+                <a:tc>
+                  <a:txBody>
+                    <a:bodyPr/>
+                    <a:lstStyle/>
+                    <a:p>
+                      <a:r>
+                        <a:rPr sz="1000" b="0">
+                          <a:solidFill>
+                            <a:srgbClr val="16262B"/>
+                          </a:solidFill>
+                          <a:latin typeface="Calibri"/>
+                        </a:rPr>
+                        <a:t>−1.2</a:t>
+                      </a:r>
+                    </a:p>
+                  </a:txBody>
+                  <a:tcPr marL="64008" marR="64008" marT="18288" marB="18288" anchor="ctr">
+                    <a:lnL w="19050">
+                      <a:solidFill>
+                        <a:srgbClr val="FFFFFF"/>
+                      </a:solidFill>
+                    </a:lnL>
+                    <a:lnR w="19050">
+                      <a:solidFill>
+                        <a:srgbClr val="FFFFFF"/>
+                      </a:solidFill>
+                    </a:lnR>
+                    <a:lnT w="19050">
+                      <a:solidFill>
+                        <a:srgbClr val="FFFFFF"/>
+                      </a:solidFill>
+                    </a:lnT>
+                    <a:lnB w="19050">
+                      <a:solidFill>
+                        <a:srgbClr val="FFFFFF"/>
+                      </a:solidFill>
+                    </a:lnB>
+                    <a:solidFill>
+                      <a:srgbClr val="EDF5F5"/>
+                    </a:solidFill>
+                  </a:tcPr>
+                </a:tc>
+                <a:tc>
+                  <a:txBody>
+                    <a:bodyPr/>
+                    <a:lstStyle/>
+                    <a:p>
+                      <a:r>
+                        <a:rPr sz="1000" b="0">
+                          <a:solidFill>
+                            <a:srgbClr val="16262B"/>
+                          </a:solidFill>
+                          <a:latin typeface="Calibri"/>
+                        </a:rPr>
+                        <a:t>0.35</a:t>
+                      </a:r>
+                    </a:p>
+                  </a:txBody>
+                  <a:tcPr marL="64008" marR="64008" marT="18288" marB="18288" anchor="ctr">
+                    <a:lnL w="19050">
+                      <a:solidFill>
+                        <a:srgbClr val="FFFFFF"/>
+                      </a:solidFill>
+                    </a:lnL>
+                    <a:lnR w="19050">
+                      <a:solidFill>
+                        <a:srgbClr val="FFFFFF"/>
+                      </a:solidFill>
+                    </a:lnR>
+                    <a:lnT w="19050">
+                      <a:solidFill>
+                        <a:srgbClr val="FFFFFF"/>
+                      </a:solidFill>
+                    </a:lnT>
+                    <a:lnB w="19050">
+                      <a:solidFill>
+                        <a:srgbClr val="FFFFFF"/>
+                      </a:solidFill>
+                    </a:lnB>
+                    <a:solidFill>
+                      <a:srgbClr val="EDF5F5"/>
+                    </a:solidFill>
+                  </a:tcPr>
+                </a:tc>
+                <a:tc>
+                  <a:txBody>
+                    <a:bodyPr/>
+                    <a:lstStyle/>
+                    <a:p>
+                      <a:r>
+                        <a:rPr sz="1000" b="0">
+                          <a:solidFill>
+                            <a:srgbClr val="9AA9AD"/>
+                          </a:solidFill>
+                          <a:latin typeface="Calibri"/>
+                        </a:rPr>
+                        <a:t>–</a:t>
+                      </a:r>
+                    </a:p>
+                  </a:txBody>
+                  <a:tcPr marL="64008" marR="64008" marT="18288" marB="18288" anchor="ctr">
+                    <a:lnL w="19050">
+                      <a:solidFill>
+                        <a:srgbClr val="FFFFFF"/>
+                      </a:solidFill>
+                    </a:lnL>
+                    <a:lnR w="19050">
+                      <a:solidFill>
+                        <a:srgbClr val="FFFFFF"/>
+                      </a:solidFill>
+                    </a:lnR>
+                    <a:lnT w="19050">
+                      <a:solidFill>
+                        <a:srgbClr val="FFFFFF"/>
+                      </a:solidFill>
+                    </a:lnT>
+                    <a:lnB w="19050">
+                      <a:solidFill>
+                        <a:srgbClr val="FFFFFF"/>
+                      </a:solidFill>
+                    </a:lnB>
+                    <a:solidFill>
+                      <a:srgbClr val="EDF5F5"/>
+                    </a:solidFill>
+                  </a:tcPr>
+                </a:tc>
+                <a:tc>
+                  <a:txBody>
+                    <a:bodyPr/>
+                    <a:lstStyle/>
+                    <a:p>
+                      <a:r>
+                        <a:rPr sz="1000" b="0">
+                          <a:solidFill>
+                            <a:srgbClr val="9AA9AD"/>
+                          </a:solidFill>
+                          <a:latin typeface="Calibri"/>
+                        </a:rPr>
+                        <a:t>–</a:t>
+                      </a:r>
+                    </a:p>
+                  </a:txBody>
+                  <a:tcPr marL="64008" marR="64008" marT="18288" marB="18288" anchor="ctr">
+                    <a:lnL w="19050">
+                      <a:solidFill>
+                        <a:srgbClr val="FFFFFF"/>
+                      </a:solidFill>
+                    </a:lnL>
+                    <a:lnR w="19050">
+                      <a:solidFill>
+                        <a:srgbClr val="FFFFFF"/>
+                      </a:solidFill>
+                    </a:lnR>
+                    <a:lnT w="19050">
+                      <a:solidFill>
+                        <a:srgbClr val="FFFFFF"/>
+                      </a:solidFill>
+                    </a:lnT>
+                    <a:lnB w="19050">
+                      <a:solidFill>
+                        <a:srgbClr val="FFFFFF"/>
+                      </a:solidFill>
+                    </a:lnB>
+                    <a:solidFill>
+                      <a:srgbClr val="EDF5F5"/>
+                    </a:solidFill>
+                  </a:tcPr>
+                </a:tc>
+                <a:tc>
+                  <a:txBody>
+                    <a:bodyPr/>
+                    <a:lstStyle/>
+                    <a:p>
+                      <a:r>
+                        <a:rPr sz="1000" b="0">
+                          <a:solidFill>
+                            <a:srgbClr val="9AA9AD"/>
+                          </a:solidFill>
+                          <a:latin typeface="Calibri"/>
+                        </a:rPr>
+                        <a:t>–</a:t>
+                      </a:r>
+                    </a:p>
+                  </a:txBody>
+                  <a:tcPr marL="64008" marR="64008" marT="18288" marB="18288" anchor="ctr">
+                    <a:lnL w="19050">
+                      <a:solidFill>
+                        <a:srgbClr val="FFFFFF"/>
+                      </a:solidFill>
+                    </a:lnL>
+                    <a:lnR w="19050">
+                      <a:solidFill>
+                        <a:srgbClr val="FFFFFF"/>
+                      </a:solidFill>
+                    </a:lnR>
+                    <a:lnT w="19050">
+                      <a:solidFill>
+                        <a:srgbClr val="FFFFFF"/>
+                      </a:solidFill>
+                    </a:lnT>
+                    <a:lnB w="19050">
+                      <a:solidFill>
+                        <a:srgbClr val="FFFFFF"/>
+                      </a:solidFill>
+                    </a:lnB>
+                    <a:solidFill>
+                      <a:srgbClr val="EDF5F5"/>
+                    </a:solidFill>
+                  </a:tcPr>
+                </a:tc>
+                <a:extLst>
+                  <a:ext uri="{0D108BD9-81ED-4DB2-BD59-A6C34878D82A}">
+                    <a16:rowId xmlns:a16="http://schemas.microsoft.com/office/drawing/2014/main" val="10005"/>
+                  </a:ext>
+                </a:extLst>
+              </a:tr>
+              <a:tr h="228600">
+                <a:tc>
+                  <a:txBody>
+                    <a:bodyPr/>
+                    <a:lstStyle/>
+                    <a:p>
+                      <a:r>
+                        <a:rPr sz="1000" b="1">
+                          <a:solidFill>
+                            <a:srgbClr val="16262B"/>
+                          </a:solidFill>
+                          <a:latin typeface="Calibri"/>
+                        </a:rPr>
+                        <a:t>6</a:t>
+                      </a:r>
+                    </a:p>
+                  </a:txBody>
+                  <a:tcPr marL="64008" marR="64008" marT="18288" marB="18288" anchor="ctr">
+                    <a:lnL w="19050">
+                      <a:solidFill>
+                        <a:srgbClr val="FFFFFF"/>
+                      </a:solidFill>
+                    </a:lnL>
+                    <a:lnR w="19050">
+                      <a:solidFill>
+                        <a:srgbClr val="FFFFFF"/>
+                      </a:solidFill>
+                    </a:lnR>
+                    <a:lnT w="19050">
+                      <a:solidFill>
+                        <a:srgbClr val="FFFFFF"/>
+                      </a:solidFill>
+                    </a:lnT>
+                    <a:lnB w="19050">
+                      <a:solidFill>
+                        <a:srgbClr val="FFFFFF"/>
+                      </a:solidFill>
+                    </a:lnB>
+                    <a:solidFill>
+                      <a:srgbClr val="FFFFFF"/>
+                    </a:solidFill>
+                  </a:tcPr>
+                </a:tc>
+                <a:tc>
+                  <a:txBody>
+                    <a:bodyPr/>
+                    <a:lstStyle/>
+                    <a:p>
+                      <a:r>
+                        <a:rPr sz="1000" b="0">
+                          <a:solidFill>
+                            <a:srgbClr val="16262B"/>
+                          </a:solidFill>
+                          <a:latin typeface="Calibri"/>
+                        </a:rPr>
+                        <a:t>125 to 150</a:t>
+                      </a:r>
+                    </a:p>
+                  </a:txBody>
+                  <a:tcPr marL="64008" marR="64008" marT="18288" marB="18288" anchor="ctr">
+                    <a:lnL w="19050">
+                      <a:solidFill>
+                        <a:srgbClr val="FFFFFF"/>
+                      </a:solidFill>
+                    </a:lnL>
+                    <a:lnR w="19050">
+                      <a:solidFill>
+                        <a:srgbClr val="FFFFFF"/>
+                      </a:solidFill>
+                    </a:lnR>
+                    <a:lnT w="19050">
+                      <a:solidFill>
+                        <a:srgbClr val="FFFFFF"/>
+                      </a:solidFill>
+                    </a:lnT>
+                    <a:lnB w="19050">
+                      <a:solidFill>
+                        <a:srgbClr val="FFFFFF"/>
+                      </a:solidFill>
+                    </a:lnB>
+                    <a:solidFill>
+                      <a:srgbClr val="FFFFFF"/>
+                    </a:solidFill>
+                  </a:tcPr>
+                </a:tc>
+                <a:tc>
+                  <a:txBody>
+                    <a:bodyPr/>
+                    <a:lstStyle/>
+                    <a:p>
+                      <a:r>
+                        <a:rPr sz="1000" b="0">
+                          <a:solidFill>
+                            <a:srgbClr val="16262B"/>
+                          </a:solidFill>
+                          <a:latin typeface="Calibri"/>
+                        </a:rPr>
+                        <a:t>−1.9</a:t>
+                      </a:r>
+                    </a:p>
+                  </a:txBody>
+                  <a:tcPr marL="64008" marR="64008" marT="18288" marB="18288" anchor="ctr">
+                    <a:lnL w="19050">
+                      <a:solidFill>
+                        <a:srgbClr val="FFFFFF"/>
+                      </a:solidFill>
+                    </a:lnL>
+                    <a:lnR w="19050">
+                      <a:solidFill>
+                        <a:srgbClr val="FFFFFF"/>
+                      </a:solidFill>
+                    </a:lnR>
+                    <a:lnT w="19050">
+                      <a:solidFill>
+                        <a:srgbClr val="FFFFFF"/>
+                      </a:solidFill>
+                    </a:lnT>
+                    <a:lnB w="19050">
+                      <a:solidFill>
+                        <a:srgbClr val="FFFFFF"/>
+                      </a:solidFill>
+                    </a:lnB>
+                    <a:solidFill>
+                      <a:srgbClr val="FFFFFF"/>
+                    </a:solidFill>
+                  </a:tcPr>
+                </a:tc>
+                <a:tc>
+                  <a:txBody>
+                    <a:bodyPr/>
+                    <a:lstStyle/>
+                    <a:p>
+                      <a:r>
+                        <a:rPr sz="1000" b="0">
+                          <a:solidFill>
+                            <a:srgbClr val="16262B"/>
+                          </a:solidFill>
+                          <a:latin typeface="Calibri"/>
+                        </a:rPr>
+                        <a:t>0.58</a:t>
+                      </a:r>
+                    </a:p>
+                  </a:txBody>
+                  <a:tcPr marL="64008" marR="64008" marT="18288" marB="18288" anchor="ctr">
+                    <a:lnL w="19050">
+                      <a:solidFill>
+                        <a:srgbClr val="FFFFFF"/>
+                      </a:solidFill>
+                    </a:lnL>
+                    <a:lnR w="19050">
+                      <a:solidFill>
+                        <a:srgbClr val="FFFFFF"/>
+                      </a:solidFill>
+                    </a:lnR>
+                    <a:lnT w="19050">
+                      <a:solidFill>
+                        <a:srgbClr val="FFFFFF"/>
+                      </a:solidFill>
+                    </a:lnT>
+                    <a:lnB w="19050">
+                      <a:solidFill>
+                        <a:srgbClr val="FFFFFF"/>
+                      </a:solidFill>
+                    </a:lnB>
+                    <a:solidFill>
+                      <a:srgbClr val="FFFFFF"/>
+                    </a:solidFill>
+                  </a:tcPr>
+                </a:tc>
+                <a:tc>
+                  <a:txBody>
+                    <a:bodyPr/>
+                    <a:lstStyle/>
+                    <a:p>
+                      <a:r>
+                        <a:rPr sz="1000" b="0">
+                          <a:solidFill>
+                            <a:srgbClr val="9AA9AD"/>
+                          </a:solidFill>
+                          <a:latin typeface="Calibri"/>
+                        </a:rPr>
+                        <a:t>–</a:t>
+                      </a:r>
+                    </a:p>
+                  </a:txBody>
+                  <a:tcPr marL="64008" marR="64008" marT="18288" marB="18288" anchor="ctr">
+                    <a:lnL w="19050">
+                      <a:solidFill>
+                        <a:srgbClr val="FFFFFF"/>
+                      </a:solidFill>
+                    </a:lnL>
+                    <a:lnR w="19050">
+                      <a:solidFill>
+                        <a:srgbClr val="FFFFFF"/>
+                      </a:solidFill>
+                    </a:lnR>
+                    <a:lnT w="19050">
+                      <a:solidFill>
+                        <a:srgbClr val="FFFFFF"/>
+                      </a:solidFill>
+                    </a:lnT>
+                    <a:lnB w="19050">
+                      <a:solidFill>
+                        <a:srgbClr val="FFFFFF"/>
+                      </a:solidFill>
+                    </a:lnB>
+                    <a:solidFill>
+                      <a:srgbClr val="FFFFFF"/>
+                    </a:solidFill>
+                  </a:tcPr>
+                </a:tc>
+                <a:tc>
+                  <a:txBody>
+                    <a:bodyPr/>
+                    <a:lstStyle/>
+                    <a:p>
+                      <a:r>
+                        <a:rPr sz="1000" b="0">
+                          <a:solidFill>
+                            <a:srgbClr val="9AA9AD"/>
+                          </a:solidFill>
+                          <a:latin typeface="Calibri"/>
+                        </a:rPr>
+                        <a:t>–</a:t>
+                      </a:r>
+                    </a:p>
+                  </a:txBody>
+                  <a:tcPr marL="64008" marR="64008" marT="18288" marB="18288" anchor="ctr">
+                    <a:lnL w="19050">
+                      <a:solidFill>
+                        <a:srgbClr val="FFFFFF"/>
+                      </a:solidFill>
+                    </a:lnL>
+                    <a:lnR w="19050">
+                      <a:solidFill>
+                        <a:srgbClr val="FFFFFF"/>
+                      </a:solidFill>
+                    </a:lnR>
+                    <a:lnT w="19050">
+                      <a:solidFill>
+                        <a:srgbClr val="FFFFFF"/>
+                      </a:solidFill>
+                    </a:lnT>
+                    <a:lnB w="19050">
+                      <a:solidFill>
+                        <a:srgbClr val="FFFFFF"/>
+                      </a:solidFill>
+                    </a:lnB>
+                    <a:solidFill>
+                      <a:srgbClr val="FFFFFF"/>
+                    </a:solidFill>
+                  </a:tcPr>
+                </a:tc>
+                <a:tc>
+                  <a:txBody>
+                    <a:bodyPr/>
+                    <a:lstStyle/>
+                    <a:p>
+                      <a:r>
+                        <a:rPr sz="1000" b="0">
+                          <a:solidFill>
+                            <a:srgbClr val="9AA9AD"/>
+                          </a:solidFill>
+                          <a:latin typeface="Calibri"/>
+                        </a:rPr>
+                        <a:t>–</a:t>
+                      </a:r>
+                    </a:p>
+                  </a:txBody>
+                  <a:tcPr marL="64008" marR="64008" marT="18288" marB="18288" anchor="ctr">
+                    <a:lnL w="19050">
+                      <a:solidFill>
+                        <a:srgbClr val="FFFFFF"/>
+                      </a:solidFill>
+                    </a:lnL>
+                    <a:lnR w="19050">
+                      <a:solidFill>
+                        <a:srgbClr val="FFFFFF"/>
+                      </a:solidFill>
+                    </a:lnR>
+                    <a:lnT w="19050">
+                      <a:solidFill>
+                        <a:srgbClr val="FFFFFF"/>
+                      </a:solidFill>
+                    </a:lnT>
+                    <a:lnB w="19050">
+                      <a:solidFill>
+                        <a:srgbClr val="FFFFFF"/>
+                      </a:solidFill>
+                    </a:lnB>
+                    <a:solidFill>
+                      <a:srgbClr val="FFFFFF"/>
+                    </a:solidFill>
+                  </a:tcPr>
+                </a:tc>
+                <a:extLst>
+                  <a:ext uri="{0D108BD9-81ED-4DB2-BD59-A6C34878D82A}">
+                    <a16:rowId xmlns:a16="http://schemas.microsoft.com/office/drawing/2014/main" val="10006"/>
+                  </a:ext>
+                </a:extLst>
+              </a:tr>
+              <a:tr h="228600">
+                <a:tc>
+                  <a:txBody>
+                    <a:bodyPr/>
+                    <a:lstStyle/>
+                    <a:p>
+                      <a:r>
+                        <a:rPr sz="1000" b="1">
+                          <a:solidFill>
+                            <a:srgbClr val="16262B"/>
+                          </a:solidFill>
+                          <a:latin typeface="Calibri"/>
+                        </a:rPr>
+                        <a:t>7</a:t>
+                      </a:r>
+                    </a:p>
+                  </a:txBody>
+                  <a:tcPr marL="64008" marR="64008" marT="18288" marB="18288" anchor="ctr">
+                    <a:lnL w="19050">
+                      <a:solidFill>
+                        <a:srgbClr val="FFFFFF"/>
+                      </a:solidFill>
+                    </a:lnL>
+                    <a:lnR w="19050">
+                      <a:solidFill>
+                        <a:srgbClr val="FFFFFF"/>
+                      </a:solidFill>
+                    </a:lnR>
+                    <a:lnT w="19050">
+                      <a:solidFill>
+                        <a:srgbClr val="FFFFFF"/>
+                      </a:solidFill>
+                    </a:lnT>
+                    <a:lnB w="19050">
+                      <a:solidFill>
+                        <a:srgbClr val="FFFFFF"/>
+                      </a:solidFill>
+                    </a:lnB>
+                    <a:solidFill>
+                      <a:srgbClr val="EDF5F5"/>
+                    </a:solidFill>
+                  </a:tcPr>
+                </a:tc>
+                <a:tc>
+                  <a:txBody>
+                    <a:bodyPr/>
+                    <a:lstStyle/>
+                    <a:p>
+                      <a:r>
+                        <a:rPr sz="1000" b="0">
+                          <a:solidFill>
+                            <a:srgbClr val="16262B"/>
+                          </a:solidFill>
+                          <a:latin typeface="Calibri"/>
+                        </a:rPr>
+                        <a:t>150 to 175</a:t>
+                      </a:r>
+                    </a:p>
+                  </a:txBody>
+                  <a:tcPr marL="64008" marR="64008" marT="18288" marB="18288" anchor="ctr">
+                    <a:lnL w="19050">
+                      <a:solidFill>
+                        <a:srgbClr val="FFFFFF"/>
+                      </a:solidFill>
+                    </a:lnL>
+                    <a:lnR w="19050">
+                      <a:solidFill>
+                        <a:srgbClr val="FFFFFF"/>
+                      </a:solidFill>
+                    </a:lnR>
+                    <a:lnT w="19050">
+                      <a:solidFill>
+                        <a:srgbClr val="FFFFFF"/>
+                      </a:solidFill>
+                    </a:lnT>
+                    <a:lnB w="19050">
+                      <a:solidFill>
+                        <a:srgbClr val="FFFFFF"/>
+                      </a:solidFill>
+                    </a:lnB>
+                    <a:solidFill>
+                      <a:srgbClr val="EDF5F5"/>
+                    </a:solidFill>
+                  </a:tcPr>
+                </a:tc>
+                <a:tc>
+                  <a:txBody>
+                    <a:bodyPr/>
+                    <a:lstStyle/>
+                    <a:p>
+                      <a:r>
+                        <a:rPr sz="1000" b="0">
+                          <a:solidFill>
+                            <a:srgbClr val="16262B"/>
+                          </a:solidFill>
+                          <a:latin typeface="Calibri"/>
+                        </a:rPr>
+                        <a:t>−3.0</a:t>
+                      </a:r>
+                    </a:p>
+                  </a:txBody>
+                  <a:tcPr marL="64008" marR="64008" marT="18288" marB="18288" anchor="ctr">
+                    <a:lnL w="19050">
+                      <a:solidFill>
+                        <a:srgbClr val="FFFFFF"/>
+                      </a:solidFill>
+                    </a:lnL>
+                    <a:lnR w="19050">
+                      <a:solidFill>
+                        <a:srgbClr val="FFFFFF"/>
+                      </a:solidFill>
+                    </a:lnR>
+                    <a:lnT w="19050">
+                      <a:solidFill>
+                        <a:srgbClr val="FFFFFF"/>
+                      </a:solidFill>
+                    </a:lnT>
+                    <a:lnB w="19050">
+                      <a:solidFill>
+                        <a:srgbClr val="FFFFFF"/>
+                      </a:solidFill>
+                    </a:lnB>
+                    <a:solidFill>
+                      <a:srgbClr val="EDF5F5"/>
+                    </a:solidFill>
+                  </a:tcPr>
+                </a:tc>
+                <a:tc>
+                  <a:txBody>
+                    <a:bodyPr/>
+                    <a:lstStyle/>
+                    <a:p>
+                      <a:r>
+                        <a:rPr sz="1000" b="0">
+                          <a:solidFill>
+                            <a:srgbClr val="16262B"/>
+                          </a:solidFill>
+                          <a:latin typeface="Calibri"/>
+                        </a:rPr>
+                        <a:t>0.43</a:t>
+                      </a:r>
+                    </a:p>
+                  </a:txBody>
+                  <a:tcPr marL="64008" marR="64008" marT="18288" marB="18288" anchor="ctr">
+                    <a:lnL w="19050">
+                      <a:solidFill>
+                        <a:srgbClr val="FFFFFF"/>
+                      </a:solidFill>
+                    </a:lnL>
+                    <a:lnR w="19050">
+                      <a:solidFill>
+                        <a:srgbClr val="FFFFFF"/>
+                      </a:solidFill>
+                    </a:lnR>
+                    <a:lnT w="19050">
+                      <a:solidFill>
+                        <a:srgbClr val="FFFFFF"/>
+                      </a:solidFill>
+                    </a:lnT>
+                    <a:lnB w="19050">
+                      <a:solidFill>
+                        <a:srgbClr val="FFFFFF"/>
+                      </a:solidFill>
+                    </a:lnB>
+                    <a:solidFill>
+                      <a:srgbClr val="EDF5F5"/>
+                    </a:solidFill>
+                  </a:tcPr>
+                </a:tc>
+                <a:tc>
+                  <a:txBody>
+                    <a:bodyPr/>
+                    <a:lstStyle/>
+                    <a:p>
+                      <a:r>
+                        <a:rPr sz="1000" b="0">
+                          <a:solidFill>
+                            <a:srgbClr val="9AA9AD"/>
+                          </a:solidFill>
+                          <a:latin typeface="Calibri"/>
+                        </a:rPr>
+                        <a:t>–</a:t>
+                      </a:r>
+                    </a:p>
+                  </a:txBody>
+                  <a:tcPr marL="64008" marR="64008" marT="18288" marB="18288" anchor="ctr">
+                    <a:lnL w="19050">
+                      <a:solidFill>
+                        <a:srgbClr val="FFFFFF"/>
+                      </a:solidFill>
+                    </a:lnL>
+                    <a:lnR w="19050">
+                      <a:solidFill>
+                        <a:srgbClr val="FFFFFF"/>
+                      </a:solidFill>
+                    </a:lnR>
+                    <a:lnT w="19050">
+                      <a:solidFill>
+                        <a:srgbClr val="FFFFFF"/>
+                      </a:solidFill>
+                    </a:lnT>
+                    <a:lnB w="19050">
+                      <a:solidFill>
+                        <a:srgbClr val="FFFFFF"/>
+                      </a:solidFill>
+                    </a:lnB>
+                    <a:solidFill>
+                      <a:srgbClr val="EDF5F5"/>
+                    </a:solidFill>
+                  </a:tcPr>
+                </a:tc>
+                <a:tc>
+                  <a:txBody>
+                    <a:bodyPr/>
+                    <a:lstStyle/>
+                    <a:p>
+                      <a:r>
+                        <a:rPr sz="1000" b="0">
+                          <a:solidFill>
+                            <a:srgbClr val="9AA9AD"/>
+                          </a:solidFill>
+                          <a:latin typeface="Calibri"/>
+                        </a:rPr>
+                        <a:t>–</a:t>
+                      </a:r>
+                    </a:p>
+                  </a:txBody>
+                  <a:tcPr marL="64008" marR="64008" marT="18288" marB="18288" anchor="ctr">
+                    <a:lnL w="19050">
+                      <a:solidFill>
+                        <a:srgbClr val="FFFFFF"/>
+                      </a:solidFill>
+                    </a:lnL>
+                    <a:lnR w="19050">
+                      <a:solidFill>
+                        <a:srgbClr val="FFFFFF"/>
+                      </a:solidFill>
+                    </a:lnR>
+                    <a:lnT w="19050">
+                      <a:solidFill>
+                        <a:srgbClr val="FFFFFF"/>
+                      </a:solidFill>
+                    </a:lnT>
+                    <a:lnB w="19050">
+                      <a:solidFill>
+                        <a:srgbClr val="FFFFFF"/>
+                      </a:solidFill>
+                    </a:lnB>
+                    <a:solidFill>
+                      <a:srgbClr val="EDF5F5"/>
+                    </a:solidFill>
+                  </a:tcPr>
+                </a:tc>
+                <a:tc>
+                  <a:txBody>
+                    <a:bodyPr/>
+                    <a:lstStyle/>
+                    <a:p>
+                      <a:r>
+                        <a:rPr sz="1000" b="0">
+                          <a:solidFill>
+                            <a:srgbClr val="9AA9AD"/>
+                          </a:solidFill>
+                          <a:latin typeface="Calibri"/>
+                        </a:rPr>
+                        <a:t>–</a:t>
+                      </a:r>
+                    </a:p>
+                  </a:txBody>
+                  <a:tcPr marL="64008" marR="64008" marT="18288" marB="18288" anchor="ctr">
+                    <a:lnL w="19050">
+                      <a:solidFill>
+                        <a:srgbClr val="FFFFFF"/>
+                      </a:solidFill>
+                    </a:lnL>
+                    <a:lnR w="19050">
+                      <a:solidFill>
+                        <a:srgbClr val="FFFFFF"/>
+                      </a:solidFill>
+                    </a:lnR>
+                    <a:lnT w="19050">
+                      <a:solidFill>
+                        <a:srgbClr val="FFFFFF"/>
+                      </a:solidFill>
+                    </a:lnT>
+                    <a:lnB w="19050">
+                      <a:solidFill>
+                        <a:srgbClr val="FFFFFF"/>
+                      </a:solidFill>
+                    </a:lnB>
+                    <a:solidFill>
+                      <a:srgbClr val="EDF5F5"/>
+                    </a:solidFill>
+                  </a:tcPr>
+                </a:tc>
+                <a:extLst>
+                  <a:ext uri="{0D108BD9-81ED-4DB2-BD59-A6C34878D82A}">
+                    <a16:rowId xmlns:a16="http://schemas.microsoft.com/office/drawing/2014/main" val="10007"/>
+                  </a:ext>
+                </a:extLst>
+              </a:tr>
+              <a:tr h="228600">
+                <a:tc>
+                  <a:txBody>
+                    <a:bodyPr/>
+                    <a:lstStyle/>
+                    <a:p>
+                      <a:r>
+                        <a:rPr sz="1000" b="1">
+                          <a:solidFill>
+                            <a:srgbClr val="16262B"/>
+                          </a:solidFill>
+                          <a:latin typeface="Calibri"/>
+                        </a:rPr>
+                        <a:t>8</a:t>
+                      </a:r>
+                    </a:p>
+                  </a:txBody>
+                  <a:tcPr marL="64008" marR="64008" marT="18288" marB="18288" anchor="ctr">
+                    <a:lnL w="19050">
+                      <a:solidFill>
+                        <a:srgbClr val="FFFFFF"/>
+                      </a:solidFill>
+                    </a:lnL>
+                    <a:lnR w="19050">
+                      <a:solidFill>
+                        <a:srgbClr val="FFFFFF"/>
+                      </a:solidFill>
+                    </a:lnR>
+                    <a:lnT w="19050">
+                      <a:solidFill>
+                        <a:srgbClr val="FFFFFF"/>
+                      </a:solidFill>
+                    </a:lnT>
+                    <a:lnB w="19050">
+                      <a:solidFill>
+                        <a:srgbClr val="FFFFFF"/>
+                      </a:solidFill>
+                    </a:lnB>
+                    <a:solidFill>
+                      <a:srgbClr val="FFFFFF"/>
+                    </a:solidFill>
+                  </a:tcPr>
+                </a:tc>
+                <a:tc>
+                  <a:txBody>
+                    <a:bodyPr/>
+                    <a:lstStyle/>
+                    <a:p>
+                      <a:r>
+                        <a:rPr sz="1000" b="0">
+                          <a:solidFill>
+                            <a:srgbClr val="16262B"/>
+                          </a:solidFill>
+                          <a:latin typeface="Calibri"/>
+                        </a:rPr>
+                        <a:t>175 to 200</a:t>
+                      </a:r>
+                    </a:p>
+                  </a:txBody>
+                  <a:tcPr marL="64008" marR="64008" marT="18288" marB="18288" anchor="ctr">
+                    <a:lnL w="19050">
+                      <a:solidFill>
+                        <a:srgbClr val="FFFFFF"/>
+                      </a:solidFill>
+                    </a:lnL>
+                    <a:lnR w="19050">
+                      <a:solidFill>
+                        <a:srgbClr val="FFFFFF"/>
+                      </a:solidFill>
+                    </a:lnR>
+                    <a:lnT w="19050">
+                      <a:solidFill>
+                        <a:srgbClr val="FFFFFF"/>
+                      </a:solidFill>
+                    </a:lnT>
+                    <a:lnB w="19050">
+                      <a:solidFill>
+                        <a:srgbClr val="FFFFFF"/>
+                      </a:solidFill>
+                    </a:lnB>
+                    <a:solidFill>
+                      <a:srgbClr val="FFFFFF"/>
+                    </a:solidFill>
+                  </a:tcPr>
+                </a:tc>
+                <a:tc>
+                  <a:txBody>
+                    <a:bodyPr/>
+                    <a:lstStyle/>
+                    <a:p>
+                      <a:r>
+                        <a:rPr sz="1000" b="0">
+                          <a:solidFill>
+                            <a:srgbClr val="16262B"/>
+                          </a:solidFill>
+                          <a:latin typeface="Calibri"/>
+                        </a:rPr>
+                        <a:t>−4.5</a:t>
+                      </a:r>
+                    </a:p>
+                  </a:txBody>
+                  <a:tcPr marL="64008" marR="64008" marT="18288" marB="18288" anchor="ctr">
+                    <a:lnL w="19050">
+                      <a:solidFill>
+                        <a:srgbClr val="FFFFFF"/>
+                      </a:solidFill>
+                    </a:lnL>
+                    <a:lnR w="19050">
+                      <a:solidFill>
+                        <a:srgbClr val="FFFFFF"/>
+                      </a:solidFill>
+                    </a:lnR>
+                    <a:lnT w="19050">
+                      <a:solidFill>
+                        <a:srgbClr val="FFFFFF"/>
+                      </a:solidFill>
+                    </a:lnT>
+                    <a:lnB w="19050">
+                      <a:solidFill>
+                        <a:srgbClr val="FFFFFF"/>
+                      </a:solidFill>
+                    </a:lnB>
+                    <a:solidFill>
+                      <a:srgbClr val="FFFFFF"/>
+                    </a:solidFill>
+                  </a:tcPr>
+                </a:tc>
+                <a:tc>
+                  <a:txBody>
+                    <a:bodyPr/>
+                    <a:lstStyle/>
+                    <a:p>
+                      <a:r>
+                        <a:rPr sz="1000" b="0">
+                          <a:solidFill>
+                            <a:srgbClr val="16262B"/>
+                          </a:solidFill>
+                          <a:latin typeface="Calibri"/>
+                        </a:rPr>
+                        <a:t>0.60</a:t>
+                      </a:r>
+                    </a:p>
+                  </a:txBody>
+                  <a:tcPr marL="64008" marR="64008" marT="18288" marB="18288" anchor="ctr">
+                    <a:lnL w="19050">
+                      <a:solidFill>
+                        <a:srgbClr val="FFFFFF"/>
+                      </a:solidFill>
+                    </a:lnL>
+                    <a:lnR w="19050">
+                      <a:solidFill>
+                        <a:srgbClr val="FFFFFF"/>
+                      </a:solidFill>
+                    </a:lnR>
+                    <a:lnT w="19050">
+                      <a:solidFill>
+                        <a:srgbClr val="FFFFFF"/>
+                      </a:solidFill>
+                    </a:lnT>
+                    <a:lnB w="19050">
+                      <a:solidFill>
+                        <a:srgbClr val="FFFFFF"/>
+                      </a:solidFill>
+                    </a:lnB>
+                    <a:solidFill>
+                      <a:srgbClr val="FFFFFF"/>
+                    </a:solidFill>
+                  </a:tcPr>
+                </a:tc>
+                <a:tc>
+                  <a:txBody>
+                    <a:bodyPr/>
+                    <a:lstStyle/>
+                    <a:p>
+                      <a:r>
+                        <a:rPr sz="1000" b="0">
+                          <a:solidFill>
+                            <a:srgbClr val="9AA9AD"/>
+                          </a:solidFill>
+                          <a:latin typeface="Calibri"/>
+                        </a:rPr>
+                        <a:t>–</a:t>
+                      </a:r>
+                    </a:p>
+                  </a:txBody>
+                  <a:tcPr marL="64008" marR="64008" marT="18288" marB="18288" anchor="ctr">
+                    <a:lnL w="19050">
+                      <a:solidFill>
+                        <a:srgbClr val="FFFFFF"/>
+                      </a:solidFill>
+                    </a:lnL>
+                    <a:lnR w="19050">
+                      <a:solidFill>
+                        <a:srgbClr val="FFFFFF"/>
+                      </a:solidFill>
+                    </a:lnR>
+                    <a:lnT w="19050">
+                      <a:solidFill>
+                        <a:srgbClr val="FFFFFF"/>
+                      </a:solidFill>
+                    </a:lnT>
+                    <a:lnB w="19050">
+                      <a:solidFill>
+                        <a:srgbClr val="FFFFFF"/>
+                      </a:solidFill>
+                    </a:lnB>
+                    <a:solidFill>
+                      <a:srgbClr val="FFFFFF"/>
+                    </a:solidFill>
+                  </a:tcPr>
+                </a:tc>
+                <a:tc>
+                  <a:txBody>
+                    <a:bodyPr/>
+                    <a:lstStyle/>
+                    <a:p>
+                      <a:r>
+                        <a:rPr sz="1000" b="0">
+                          <a:solidFill>
+                            <a:srgbClr val="9AA9AD"/>
+                          </a:solidFill>
+                          <a:latin typeface="Calibri"/>
+                        </a:rPr>
+                        <a:t>–</a:t>
+                      </a:r>
+                    </a:p>
+                  </a:txBody>
+                  <a:tcPr marL="64008" marR="64008" marT="18288" marB="18288" anchor="ctr">
+                    <a:lnL w="19050">
+                      <a:solidFill>
+                        <a:srgbClr val="FFFFFF"/>
+                      </a:solidFill>
+                    </a:lnL>
+                    <a:lnR w="19050">
+                      <a:solidFill>
+                        <a:srgbClr val="FFFFFF"/>
+                      </a:solidFill>
+                    </a:lnR>
+                    <a:lnT w="19050">
+                      <a:solidFill>
+                        <a:srgbClr val="FFFFFF"/>
+                      </a:solidFill>
+                    </a:lnT>
+                    <a:lnB w="19050">
+                      <a:solidFill>
+                        <a:srgbClr val="FFFFFF"/>
+                      </a:solidFill>
+                    </a:lnB>
+                    <a:solidFill>
+                      <a:srgbClr val="FFFFFF"/>
+                    </a:solidFill>
+                  </a:tcPr>
+                </a:tc>
+                <a:tc>
+                  <a:txBody>
+                    <a:bodyPr/>
+                    <a:lstStyle/>
+                    <a:p>
+                      <a:r>
+                        <a:rPr sz="1000" b="0">
+                          <a:solidFill>
+                            <a:srgbClr val="9AA9AD"/>
+                          </a:solidFill>
+                          <a:latin typeface="Calibri"/>
+                        </a:rPr>
+                        <a:t>–</a:t>
+                      </a:r>
+                    </a:p>
+                  </a:txBody>
+                  <a:tcPr marL="64008" marR="64008" marT="18288" marB="18288" anchor="ctr">
+                    <a:lnL w="19050">
+                      <a:solidFill>
+                        <a:srgbClr val="FFFFFF"/>
+                      </a:solidFill>
+                    </a:lnL>
+                    <a:lnR w="19050">
+                      <a:solidFill>
+                        <a:srgbClr val="FFFFFF"/>
+                      </a:solidFill>
+                    </a:lnR>
+                    <a:lnT w="19050">
+                      <a:solidFill>
+                        <a:srgbClr val="FFFFFF"/>
+                      </a:solidFill>
+                    </a:lnT>
+                    <a:lnB w="19050">
+                      <a:solidFill>
+                        <a:srgbClr val="FFFFFF"/>
+                      </a:solidFill>
+                    </a:lnB>
+                    <a:solidFill>
+                      <a:srgbClr val="FFFFFF"/>
+                    </a:solidFill>
+                  </a:tcPr>
+                </a:tc>
+                <a:extLst>
+                  <a:ext uri="{0D108BD9-81ED-4DB2-BD59-A6C34878D82A}">
+                    <a16:rowId xmlns:a16="http://schemas.microsoft.com/office/drawing/2014/main" val="10008"/>
+                  </a:ext>
+                </a:extLst>
+              </a:tr>
+              <a:tr h="228600">
+                <a:tc>
+                  <a:txBody>
+                    <a:bodyPr/>
+                    <a:lstStyle/>
+                    <a:p>
+                      <a:r>
+                        <a:rPr sz="1000" b="1">
+                          <a:solidFill>
+                            <a:srgbClr val="16262B"/>
+                          </a:solidFill>
+                          <a:latin typeface="Calibri"/>
+                        </a:rPr>
+                        <a:t>9</a:t>
+                      </a:r>
+                    </a:p>
+                  </a:txBody>
+                  <a:tcPr marL="64008" marR="64008" marT="18288" marB="18288" anchor="ctr">
+                    <a:lnL w="19050">
+                      <a:solidFill>
+                        <a:srgbClr val="FFFFFF"/>
+                      </a:solidFill>
+                    </a:lnL>
+                    <a:lnR w="19050">
+                      <a:solidFill>
+                        <a:srgbClr val="FFFFFF"/>
+                      </a:solidFill>
+                    </a:lnR>
+                    <a:lnT w="19050">
+                      <a:solidFill>
+                        <a:srgbClr val="FFFFFF"/>
+                      </a:solidFill>
+                    </a:lnT>
+                    <a:lnB w="19050">
+                      <a:solidFill>
+                        <a:srgbClr val="FFFFFF"/>
+                      </a:solidFill>
+                    </a:lnB>
+                    <a:solidFill>
+                      <a:srgbClr val="EDF5F5"/>
+                    </a:solidFill>
+                  </a:tcPr>
+                </a:tc>
+                <a:tc>
+                  <a:txBody>
+                    <a:bodyPr/>
+                    <a:lstStyle/>
+                    <a:p>
+                      <a:r>
+                        <a:rPr sz="1000" b="0">
+                          <a:solidFill>
+                            <a:srgbClr val="16262B"/>
+                          </a:solidFill>
+                          <a:latin typeface="Calibri"/>
+                        </a:rPr>
+                        <a:t>200 to 225</a:t>
+                      </a:r>
+                    </a:p>
+                  </a:txBody>
+                  <a:tcPr marL="64008" marR="64008" marT="18288" marB="18288" anchor="ctr">
+                    <a:lnL w="19050">
+                      <a:solidFill>
+                        <a:srgbClr val="FFFFFF"/>
+                      </a:solidFill>
+                    </a:lnL>
+                    <a:lnR w="19050">
+                      <a:solidFill>
+                        <a:srgbClr val="FFFFFF"/>
+                      </a:solidFill>
+                    </a:lnR>
+                    <a:lnT w="19050">
+                      <a:solidFill>
+                        <a:srgbClr val="FFFFFF"/>
+                      </a:solidFill>
+                    </a:lnT>
+                    <a:lnB w="19050">
+                      <a:solidFill>
+                        <a:srgbClr val="FFFFFF"/>
+                      </a:solidFill>
+                    </a:lnB>
+                    <a:solidFill>
+                      <a:srgbClr val="EDF5F5"/>
+                    </a:solidFill>
+                  </a:tcPr>
+                </a:tc>
+                <a:tc>
+                  <a:txBody>
+                    <a:bodyPr/>
+                    <a:lstStyle/>
+                    <a:p>
+                      <a:r>
+                        <a:rPr sz="1000" b="0">
+                          <a:solidFill>
+                            <a:srgbClr val="16262B"/>
+                          </a:solidFill>
+                          <a:latin typeface="Calibri"/>
+                        </a:rPr>
+                        <a:t>−3.6</a:t>
+                      </a:r>
+                    </a:p>
+                  </a:txBody>
+                  <a:tcPr marL="64008" marR="64008" marT="18288" marB="18288" anchor="ctr">
+                    <a:lnL w="19050">
+                      <a:solidFill>
+                        <a:srgbClr val="FFFFFF"/>
+                      </a:solidFill>
+                    </a:lnL>
+                    <a:lnR w="19050">
+                      <a:solidFill>
+                        <a:srgbClr val="FFFFFF"/>
+                      </a:solidFill>
+                    </a:lnR>
+                    <a:lnT w="19050">
+                      <a:solidFill>
+                        <a:srgbClr val="FFFFFF"/>
+                      </a:solidFill>
+                    </a:lnT>
+                    <a:lnB w="19050">
+                      <a:solidFill>
+                        <a:srgbClr val="FFFFFF"/>
+                      </a:solidFill>
+                    </a:lnB>
+                    <a:solidFill>
+                      <a:srgbClr val="EDF5F5"/>
+                    </a:solidFill>
+                  </a:tcPr>
+                </a:tc>
+                <a:tc>
+                  <a:txBody>
+                    <a:bodyPr/>
+                    <a:lstStyle/>
+                    <a:p>
+                      <a:r>
+                        <a:rPr sz="1000" b="0">
+                          <a:solidFill>
+                            <a:srgbClr val="16262B"/>
+                          </a:solidFill>
+                          <a:latin typeface="Calibri"/>
+                        </a:rPr>
+                        <a:t>0.39</a:t>
+                      </a:r>
+                    </a:p>
+                  </a:txBody>
+                  <a:tcPr marL="64008" marR="64008" marT="18288" marB="18288" anchor="ctr">
+                    <a:lnL w="19050">
+                      <a:solidFill>
+                        <a:srgbClr val="FFFFFF"/>
+                      </a:solidFill>
+                    </a:lnL>
+                    <a:lnR w="19050">
+                      <a:solidFill>
+                        <a:srgbClr val="FFFFFF"/>
+                      </a:solidFill>
+                    </a:lnR>
+                    <a:lnT w="19050">
+                      <a:solidFill>
+                        <a:srgbClr val="FFFFFF"/>
+                      </a:solidFill>
+                    </a:lnT>
+                    <a:lnB w="19050">
+                      <a:solidFill>
+                        <a:srgbClr val="FFFFFF"/>
+                      </a:solidFill>
+                    </a:lnB>
+                    <a:solidFill>
+                      <a:srgbClr val="EDF5F5"/>
+                    </a:solidFill>
+                  </a:tcPr>
+                </a:tc>
+                <a:tc>
+                  <a:txBody>
+                    <a:bodyPr/>
+                    <a:lstStyle/>
+                    <a:p>
+                      <a:r>
+                        <a:rPr sz="1000" b="0">
+                          <a:solidFill>
+                            <a:srgbClr val="9AA9AD"/>
+                          </a:solidFill>
+                          <a:latin typeface="Calibri"/>
+                        </a:rPr>
+                        <a:t>–</a:t>
+                      </a:r>
+                    </a:p>
+                  </a:txBody>
+                  <a:tcPr marL="64008" marR="64008" marT="18288" marB="18288" anchor="ctr">
+                    <a:lnL w="19050">
+                      <a:solidFill>
+                        <a:srgbClr val="FFFFFF"/>
+                      </a:solidFill>
+                    </a:lnL>
+                    <a:lnR w="19050">
+                      <a:solidFill>
+                        <a:srgbClr val="FFFFFF"/>
+                      </a:solidFill>
+                    </a:lnR>
+                    <a:lnT w="19050">
+                      <a:solidFill>
+                        <a:srgbClr val="FFFFFF"/>
+                      </a:solidFill>
+                    </a:lnT>
+                    <a:lnB w="19050">
+                      <a:solidFill>
+                        <a:srgbClr val="FFFFFF"/>
+                      </a:solidFill>
+                    </a:lnB>
+                    <a:solidFill>
+                      <a:srgbClr val="EDF5F5"/>
+                    </a:solidFill>
+                  </a:tcPr>
+                </a:tc>
+                <a:tc>
+                  <a:txBody>
+                    <a:bodyPr/>
+                    <a:lstStyle/>
+                    <a:p>
+                      <a:r>
+                        <a:rPr sz="1000" b="0">
+                          <a:solidFill>
+                            <a:srgbClr val="9AA9AD"/>
+                          </a:solidFill>
+                          <a:latin typeface="Calibri"/>
+                        </a:rPr>
+                        <a:t>–</a:t>
+                      </a:r>
+                    </a:p>
+                  </a:txBody>
+                  <a:tcPr marL="64008" marR="64008" marT="18288" marB="18288" anchor="ctr">
+                    <a:lnL w="19050">
+                      <a:solidFill>
+                        <a:srgbClr val="FFFFFF"/>
+                      </a:solidFill>
+                    </a:lnL>
+                    <a:lnR w="19050">
+                      <a:solidFill>
+                        <a:srgbClr val="FFFFFF"/>
+                      </a:solidFill>
+                    </a:lnR>
+                    <a:lnT w="19050">
+                      <a:solidFill>
+                        <a:srgbClr val="FFFFFF"/>
+                      </a:solidFill>
+                    </a:lnT>
+                    <a:lnB w="19050">
+                      <a:solidFill>
+                        <a:srgbClr val="FFFFFF"/>
+                      </a:solidFill>
+                    </a:lnB>
+                    <a:solidFill>
+                      <a:srgbClr val="EDF5F5"/>
+                    </a:solidFill>
+                  </a:tcPr>
+                </a:tc>
+                <a:tc>
+                  <a:txBody>
+                    <a:bodyPr/>
+                    <a:lstStyle/>
+                    <a:p>
+                      <a:r>
+                        <a:rPr sz="1000" b="0">
+                          <a:solidFill>
+                            <a:srgbClr val="9AA9AD"/>
+                          </a:solidFill>
+                          <a:latin typeface="Calibri"/>
+                        </a:rPr>
+                        <a:t>–</a:t>
+                      </a:r>
+                    </a:p>
+                  </a:txBody>
+                  <a:tcPr marL="64008" marR="64008" marT="18288" marB="18288" anchor="ctr">
+                    <a:lnL w="19050">
+                      <a:solidFill>
+                        <a:srgbClr val="FFFFFF"/>
+                      </a:solidFill>
+                    </a:lnL>
+                    <a:lnR w="19050">
+                      <a:solidFill>
+                        <a:srgbClr val="FFFFFF"/>
+                      </a:solidFill>
+                    </a:lnR>
+                    <a:lnT w="19050">
+                      <a:solidFill>
+                        <a:srgbClr val="FFFFFF"/>
+                      </a:solidFill>
+                    </a:lnT>
+                    <a:lnB w="19050">
+                      <a:solidFill>
+                        <a:srgbClr val="FFFFFF"/>
+                      </a:solidFill>
+                    </a:lnB>
+                    <a:solidFill>
+                      <a:srgbClr val="EDF5F5"/>
+                    </a:solidFill>
+                  </a:tcPr>
+                </a:tc>
+                <a:extLst>
+                  <a:ext uri="{0D108BD9-81ED-4DB2-BD59-A6C34878D82A}">
+                    <a16:rowId xmlns:a16="http://schemas.microsoft.com/office/drawing/2014/main" val="10009"/>
+                  </a:ext>
+                </a:extLst>
+              </a:tr>
+              <a:tr h="228600">
+                <a:tc>
+                  <a:txBody>
+                    <a:bodyPr/>
+                    <a:lstStyle/>
+                    <a:p>
+                      <a:r>
+                        <a:rPr sz="1000" b="1">
+                          <a:solidFill>
+                            <a:srgbClr val="16262B"/>
+                          </a:solidFill>
+                          <a:latin typeface="Calibri"/>
+                        </a:rPr>
+                        <a:t>10</a:t>
+                      </a:r>
+                    </a:p>
+                  </a:txBody>
+                  <a:tcPr marL="64008" marR="64008" marT="18288" marB="18288" anchor="ctr">
+                    <a:lnL w="19050">
+                      <a:solidFill>
+                        <a:srgbClr val="FFFFFF"/>
+                      </a:solidFill>
+                    </a:lnL>
+                    <a:lnR w="19050">
+                      <a:solidFill>
+                        <a:srgbClr val="FFFFFF"/>
+                      </a:solidFill>
+                    </a:lnR>
+                    <a:lnT w="19050">
+                      <a:solidFill>
+                        <a:srgbClr val="FFFFFF"/>
+                      </a:solidFill>
+                    </a:lnT>
+                    <a:lnB w="19050">
+                      <a:solidFill>
+                        <a:srgbClr val="FFFFFF"/>
+                      </a:solidFill>
+                    </a:lnB>
+                    <a:solidFill>
+                      <a:srgbClr val="FFFFFF"/>
+                    </a:solidFill>
+                  </a:tcPr>
+                </a:tc>
+                <a:tc>
+                  <a:txBody>
+                    <a:bodyPr/>
+                    <a:lstStyle/>
+                    <a:p>
+                      <a:r>
+                        <a:rPr sz="1000" b="0">
+                          <a:solidFill>
+                            <a:srgbClr val="16262B"/>
+                          </a:solidFill>
+                          <a:latin typeface="Calibri"/>
+                        </a:rPr>
+                        <a:t>225 to 250</a:t>
+                      </a:r>
+                    </a:p>
+                  </a:txBody>
+                  <a:tcPr marL="64008" marR="64008" marT="18288" marB="18288" anchor="ctr">
+                    <a:lnL w="19050">
+                      <a:solidFill>
+                        <a:srgbClr val="FFFFFF"/>
+                      </a:solidFill>
+                    </a:lnL>
+                    <a:lnR w="19050">
+                      <a:solidFill>
+                        <a:srgbClr val="FFFFFF"/>
+                      </a:solidFill>
+                    </a:lnR>
+                    <a:lnT w="19050">
+                      <a:solidFill>
+                        <a:srgbClr val="FFFFFF"/>
+                      </a:solidFill>
+                    </a:lnT>
+                    <a:lnB w="19050">
+                      <a:solidFill>
+                        <a:srgbClr val="FFFFFF"/>
+                      </a:solidFill>
+                    </a:lnB>
+                    <a:solidFill>
+                      <a:srgbClr val="FFFFFF"/>
+                    </a:solidFill>
+                  </a:tcPr>
+                </a:tc>
+                <a:tc>
+                  <a:txBody>
+                    <a:bodyPr/>
+                    <a:lstStyle/>
+                    <a:p>
+                      <a:r>
+                        <a:rPr sz="1000" b="0">
+                          <a:solidFill>
+                            <a:srgbClr val="16262B"/>
+                          </a:solidFill>
+                          <a:latin typeface="Calibri"/>
+                        </a:rPr>
+                        <a:t>−3.5</a:t>
+                      </a:r>
+                    </a:p>
+                  </a:txBody>
+                  <a:tcPr marL="64008" marR="64008" marT="18288" marB="18288" anchor="ctr">
+                    <a:lnL w="19050">
+                      <a:solidFill>
+                        <a:srgbClr val="FFFFFF"/>
+                      </a:solidFill>
+                    </a:lnL>
+                    <a:lnR w="19050">
+                      <a:solidFill>
+                        <a:srgbClr val="FFFFFF"/>
+                      </a:solidFill>
+                    </a:lnR>
+                    <a:lnT w="19050">
+                      <a:solidFill>
+                        <a:srgbClr val="FFFFFF"/>
+                      </a:solidFill>
+                    </a:lnT>
+                    <a:lnB w="19050">
+                      <a:solidFill>
+                        <a:srgbClr val="FFFFFF"/>
+                      </a:solidFill>
+                    </a:lnB>
+                    <a:solidFill>
+                      <a:srgbClr val="FFFFFF"/>
+                    </a:solidFill>
+                  </a:tcPr>
+                </a:tc>
+                <a:tc>
+                  <a:txBody>
+                    <a:bodyPr/>
+                    <a:lstStyle/>
+                    <a:p>
+                      <a:r>
+                        <a:rPr sz="1000" b="0">
+                          <a:solidFill>
+                            <a:srgbClr val="16262B"/>
+                          </a:solidFill>
+                          <a:latin typeface="Calibri"/>
+                        </a:rPr>
+                        <a:t>0.32</a:t>
+                      </a:r>
+                    </a:p>
+                  </a:txBody>
+                  <a:tcPr marL="64008" marR="64008" marT="18288" marB="18288" anchor="ctr">
+                    <a:lnL w="19050">
+                      <a:solidFill>
+                        <a:srgbClr val="FFFFFF"/>
+                      </a:solidFill>
+                    </a:lnL>
+                    <a:lnR w="19050">
+                      <a:solidFill>
+                        <a:srgbClr val="FFFFFF"/>
+                      </a:solidFill>
+                    </a:lnR>
+                    <a:lnT w="19050">
+                      <a:solidFill>
+                        <a:srgbClr val="FFFFFF"/>
+                      </a:solidFill>
+                    </a:lnT>
+                    <a:lnB w="19050">
+                      <a:solidFill>
+                        <a:srgbClr val="FFFFFF"/>
+                      </a:solidFill>
+                    </a:lnB>
+                    <a:solidFill>
+                      <a:srgbClr val="FFFFFF"/>
+                    </a:solidFill>
+                  </a:tcPr>
+                </a:tc>
+                <a:tc>
+                  <a:txBody>
+                    <a:bodyPr/>
+                    <a:lstStyle/>
+                    <a:p>
+                      <a:r>
+                        <a:rPr sz="1000" b="0">
+                          <a:solidFill>
+                            <a:srgbClr val="9AA9AD"/>
+                          </a:solidFill>
+                          <a:latin typeface="Calibri"/>
+                        </a:rPr>
+                        <a:t>–</a:t>
+                      </a:r>
+                    </a:p>
+                  </a:txBody>
+                  <a:tcPr marL="64008" marR="64008" marT="18288" marB="18288" anchor="ctr">
+                    <a:lnL w="19050">
+                      <a:solidFill>
+                        <a:srgbClr val="FFFFFF"/>
+                      </a:solidFill>
+                    </a:lnL>
+                    <a:lnR w="19050">
+                      <a:solidFill>
+                        <a:srgbClr val="FFFFFF"/>
+                      </a:solidFill>
+                    </a:lnR>
+                    <a:lnT w="19050">
+                      <a:solidFill>
+                        <a:srgbClr val="FFFFFF"/>
+                      </a:solidFill>
+                    </a:lnT>
+                    <a:lnB w="19050">
+                      <a:solidFill>
+                        <a:srgbClr val="FFFFFF"/>
+                      </a:solidFill>
+                    </a:lnB>
+                    <a:solidFill>
+                      <a:srgbClr val="FFFFFF"/>
+                    </a:solidFill>
+                  </a:tcPr>
+                </a:tc>
+                <a:tc>
+                  <a:txBody>
+                    <a:bodyPr/>
+                    <a:lstStyle/>
+                    <a:p>
+                      <a:r>
+                        <a:rPr sz="1000" b="0">
+                          <a:solidFill>
+                            <a:srgbClr val="9AA9AD"/>
+                          </a:solidFill>
+                          <a:latin typeface="Calibri"/>
+                        </a:rPr>
+                        <a:t>–</a:t>
+                      </a:r>
+                    </a:p>
+                  </a:txBody>
+                  <a:tcPr marL="64008" marR="64008" marT="18288" marB="18288" anchor="ctr">
+                    <a:lnL w="19050">
+                      <a:solidFill>
+                        <a:srgbClr val="FFFFFF"/>
+                      </a:solidFill>
+                    </a:lnL>
+                    <a:lnR w="19050">
+                      <a:solidFill>
+                        <a:srgbClr val="FFFFFF"/>
+                      </a:solidFill>
+                    </a:lnR>
+                    <a:lnT w="19050">
+                      <a:solidFill>
+                        <a:srgbClr val="FFFFFF"/>
+                      </a:solidFill>
+                    </a:lnT>
+                    <a:lnB w="19050">
+                      <a:solidFill>
+                        <a:srgbClr val="FFFFFF"/>
+                      </a:solidFill>
+                    </a:lnB>
+                    <a:solidFill>
+                      <a:srgbClr val="FFFFFF"/>
+                    </a:solidFill>
+                  </a:tcPr>
+                </a:tc>
+                <a:tc>
+                  <a:txBody>
+                    <a:bodyPr/>
+                    <a:lstStyle/>
+                    <a:p>
+                      <a:r>
+                        <a:rPr sz="1000" b="0">
+                          <a:solidFill>
+                            <a:srgbClr val="9AA9AD"/>
+                          </a:solidFill>
+                          <a:latin typeface="Calibri"/>
+                        </a:rPr>
+                        <a:t>–</a:t>
+                      </a:r>
+                    </a:p>
+                  </a:txBody>
+                  <a:tcPr marL="64008" marR="64008" marT="18288" marB="18288" anchor="ctr">
+                    <a:lnL w="19050">
+                      <a:solidFill>
+                        <a:srgbClr val="FFFFFF"/>
+                      </a:solidFill>
+                    </a:lnL>
+                    <a:lnR w="19050">
+                      <a:solidFill>
+                        <a:srgbClr val="FFFFFF"/>
+                      </a:solidFill>
+                    </a:lnR>
+                    <a:lnT w="19050">
+                      <a:solidFill>
+                        <a:srgbClr val="FFFFFF"/>
+                      </a:solidFill>
+                    </a:lnT>
+                    <a:lnB w="19050">
+                      <a:solidFill>
+                        <a:srgbClr val="FFFFFF"/>
+                      </a:solidFill>
+                    </a:lnB>
+                    <a:solidFill>
+                      <a:srgbClr val="FFFFFF"/>
+                    </a:solidFill>
+                  </a:tcPr>
+                </a:tc>
+                <a:extLst>
+                  <a:ext uri="{0D108BD9-81ED-4DB2-BD59-A6C34878D82A}">
+                    <a16:rowId xmlns:a16="http://schemas.microsoft.com/office/drawing/2014/main" val="10010"/>
+                  </a:ext>
+                </a:extLst>
+              </a:tr>
+            </a:tbl>
+          </a:graphicData>
+        </a:graphic>
+      </p:graphicFrame>
+      <p:sp>
+        <p:nvSpPr>
+          <p:cNvPr id="5" name="Shape 4"/>
+          <p:cNvSpPr/>
+          <p:nvPr/>
+        </p:nvSpPr>
+        <p:spPr>
+          <a:xfrm>
+            <a:off x="6035040" y="1234440"/>
+            <a:ext cx="2651760" cy="2514600"/>
+          </a:xfrm>
+          <a:prstGeom prst="roundRect">
+            <a:avLst>
+              <a:gd name="adj" fmla="val 9375"/>
+            </a:avLst>
+          </a:prstGeom>
+          <a:solidFill>
+            <a:srgbClr val="EDF5F5"/>
+          </a:solidFill>
+          <a:ln w="12700">
+            <a:solidFill>
+              <a:srgbClr val="EDF5F5"/>
+            </a:solidFill>
+            <a:prstDash val="solid"/>
+          </a:ln>
+        </p:spPr>
+        <p:txBody>
+          <a:bodyPr/>
+          <a:lstStyle/>
+          <a:p>
+            <a:endParaRPr lang="sv-SE"/>
+          </a:p>
+        </p:txBody>
+      </p:sp>
+      <p:sp>
+        <p:nvSpPr>
+          <p:cNvPr id="6" name="TextBox 5"/>
+          <p:cNvSpPr txBox="1"/>
+          <p:nvPr/>
+        </p:nvSpPr>
+        <p:spPr>
+          <a:xfrm>
+            <a:off x="6217920" y="1389888"/>
+            <a:ext cx="2286000" cy="228600"/>
+          </a:xfrm>
+          <a:prstGeom prst="rect">
+            <a:avLst/>
+          </a:prstGeom>
+          <a:noFill/>
+        </p:spPr>
+        <p:txBody>
+          <a:bodyPr wrap="square" lIns="0" tIns="0" rIns="0" bIns="0" anchor="t">
+            <a:spAutoFit/>
+          </a:bodyPr>
+          <a:lstStyle/>
+          <a:p>
+            <a:r>
+              <a:rPr sz="1100" b="1" spc="200">
+                <a:solidFill>
+                  <a:srgbClr val="028090"/>
+                </a:solidFill>
+                <a:latin typeface="Calibri"/>
+              </a:rPr>
+              <a:t>WHAT IT GIVES</a:t>
+            </a:r>
+          </a:p>
+        </p:txBody>
+      </p:sp>
+      <p:sp>
+        <p:nvSpPr>
+          <p:cNvPr id="7" name="TextBox 6"/>
+          <p:cNvSpPr txBox="1"/>
+          <p:nvPr/>
+        </p:nvSpPr>
+        <p:spPr>
+          <a:xfrm>
+            <a:off x="6217920" y="1737360"/>
+            <a:ext cx="2331720" cy="1920240"/>
+          </a:xfrm>
+          <a:prstGeom prst="rect">
+            <a:avLst/>
+          </a:prstGeom>
+          <a:noFill/>
+        </p:spPr>
+        <p:txBody>
+          <a:bodyPr wrap="square" lIns="0" tIns="0" rIns="0" bIns="0" anchor="t">
+            <a:spAutoFit/>
+          </a:bodyPr>
+          <a:lstStyle/>
+          <a:p>
+            <a:pPr marL="171450" indent="-171450">
+              <a:spcAft>
+                <a:spcPts val="600"/>
+              </a:spcAft>
+              <a:buChar char="•"/>
+            </a:pPr>
+            <a:r>
+              <a:rPr sz="1100" b="0">
+                <a:solidFill>
+                  <a:srgbClr val="16262B"/>
+                </a:solidFill>
+                <a:latin typeface="Calibri"/>
+              </a:rPr>
+              <a:t>TQI per section over time shows how fast each stretch deteriorates</a:t>
+            </a:r>
+          </a:p>
+          <a:p>
+            <a:pPr marL="171450" indent="-171450">
+              <a:spcAft>
+                <a:spcPts val="600"/>
+              </a:spcAft>
+              <a:buChar char="•"/>
+            </a:pPr>
+            <a:r>
+              <a:rPr sz="1100" b="0">
+                <a:solidFill>
+                  <a:srgbClr val="16262B"/>
+                </a:solidFill>
+                <a:latin typeface="Calibri"/>
+              </a:rPr>
+              <a:t>Differences between runs flag where a fault is growing</a:t>
+            </a:r>
+          </a:p>
+          <a:p>
+            <a:pPr marL="171450" indent="-171450">
+              <a:spcAft>
+                <a:spcPts val="600"/>
+              </a:spcAft>
+              <a:buChar char="•"/>
+            </a:pPr>
+            <a:r>
+              <a:rPr sz="1100" b="0">
+                <a:solidFill>
+                  <a:srgbClr val="16262B"/>
+                </a:solidFill>
+                <a:latin typeface="Calibri"/>
+              </a:rPr>
+              <a:t>Sharma et al. (2018) model TQI over 13 inspection runs in the same way</a:t>
+            </a:r>
+          </a:p>
+        </p:txBody>
+      </p:sp>
+      <p:sp>
+        <p:nvSpPr>
+          <p:cNvPr id="8" name="Text 3"/>
+          <p:cNvSpPr txBox="1"/>
+          <p:nvPr/>
+        </p:nvSpPr>
+        <p:spPr>
+          <a:xfrm>
+            <a:off x="457200" y="3822191"/>
+            <a:ext cx="8229600" cy="365760"/>
+          </a:xfrm>
+          <a:prstGeom prst="rect">
+            <a:avLst/>
+          </a:prstGeom>
+          <a:noFill/>
+          <a:ln/>
+        </p:spPr>
+        <p:txBody>
+          <a:bodyPr wrap="square" lIns="0" tIns="0" rIns="0" bIns="0" rtlCol="0" anchor="ctr"/>
+          <a:lstStyle/>
+          <a:p>
+            <a:pPr marL="0" indent="0">
+              <a:buNone/>
+            </a:pPr>
+            <a:r>
+              <a:rPr lang="en-US" sz="950" i="1" dirty="0">
+                <a:solidFill>
+                  <a:srgbClr val="5F7178"/>
+                </a:solidFill>
+                <a:latin typeface="Calibri" pitchFamily="34" charset="0"/>
+                <a:ea typeface="Calibri" pitchFamily="34" charset="-122"/>
+                <a:cs typeface="Calibri" pitchFamily="34" charset="-120"/>
+              </a:rPr>
+              <a:t>Run 1 is this scan on the fixed 25 m grid: gauge is the mean deviation from 1435 mm (mm), TQI combines gauge and alignment and is normalised with run 1. Runs 2 to n are not available yet.</a:t>
+            </a:r>
+            <a:endParaRPr lang="en-US" sz="950" dirty="0"/>
+          </a:p>
+        </p:txBody>
+      </p:sp>
+      <p:sp>
+        <p:nvSpPr>
+          <p:cNvPr id="9" name="Shape 16"/>
+          <p:cNvSpPr/>
+          <p:nvPr/>
+        </p:nvSpPr>
+        <p:spPr>
+          <a:xfrm>
+            <a:off x="457200" y="4224528"/>
+            <a:ext cx="8229600" cy="457200"/>
+          </a:xfrm>
+          <a:prstGeom prst="roundRect">
+            <a:avLst>
+              <a:gd name="adj" fmla="val 9091"/>
+            </a:avLst>
+          </a:prstGeom>
+          <a:solidFill>
+            <a:srgbClr val="0B2027"/>
+          </a:solidFill>
+          <a:ln w="12700">
+            <a:solidFill>
+              <a:srgbClr val="0B2027"/>
+            </a:solidFill>
+            <a:prstDash val="solid"/>
+          </a:ln>
+        </p:spPr>
+        <p:txBody>
+          <a:bodyPr/>
+          <a:lstStyle/>
+          <a:p>
+            <a:endParaRPr lang="sv-SE"/>
+          </a:p>
+        </p:txBody>
+      </p:sp>
+      <p:sp>
+        <p:nvSpPr>
+          <p:cNvPr id="10" name="Text 17"/>
+          <p:cNvSpPr txBox="1"/>
+          <p:nvPr/>
+        </p:nvSpPr>
+        <p:spPr>
+          <a:xfrm>
+            <a:off x="731520" y="4224528"/>
+            <a:ext cx="7680960" cy="457200"/>
+          </a:xfrm>
+          <a:prstGeom prst="rect">
+            <a:avLst/>
+          </a:prstGeom>
+          <a:noFill/>
+          <a:ln/>
+        </p:spPr>
+        <p:txBody>
+          <a:bodyPr wrap="square" lIns="0" tIns="0" rIns="0" bIns="0" rtlCol="0" anchor="ctr"/>
+          <a:lstStyle/>
+          <a:p>
+            <a:pPr marL="0" indent="0">
+              <a:buNone/>
+            </a:pPr>
+            <a:r>
+              <a:rPr lang="en-US" sz="1200" b="1" dirty="0">
+                <a:solidFill>
+                  <a:srgbClr val="FFFFFF"/>
+                </a:solidFill>
+                <a:latin typeface="Calibri" pitchFamily="34" charset="0"/>
+                <a:ea typeface="Calibri" pitchFamily="34" charset="-122"/>
+                <a:cs typeface="Calibri" pitchFamily="34" charset="-120"/>
+              </a:rPr>
+              <a:t>Each new run adds a column. The trend per section is the result.</a:t>
+            </a:r>
+            <a:endParaRPr lang="en-US" sz="1200" dirty="0"/>
+          </a:p>
+        </p:txBody>
+      </p:sp>
+    </p:spTree>
+  </p:cSld>
+  <p:clrMapOvr>
+    <a:masterClrMapping/>
+  </p:clrMapOvr>
+</p:sld>
+</file>
+
+<file path=ppt/slides/slide23.xml><?xml version="1.0" encoding="utf-8"?>
+<p:sld xmlns:a="http://schemas.openxmlformats.org/drawingml/2006/main" xmlns:r="http://schemas.openxmlformats.org/officeDocument/2006/relationships" xmlns:p="http://schemas.openxmlformats.org/presentationml/2006/main">
+  <p:cSld>
+    <p:spTree>
+      <p:nvGrpSpPr>
+        <p:cNvPr id="1" name=""/>
+        <p:cNvGrpSpPr/>
+        <p:nvPr/>
+      </p:nvGrpSpPr>
+      <p:grpSpPr>
+        <a:xfrm>
+          <a:off x="0" y="0"/>
+          <a:ext cx="0" cy="0"/>
+          <a:chOff x="0" y="0"/>
+          <a:chExt cx="0" cy="0"/>
+        </a:xfrm>
+      </p:grpSpPr>
+      <p:sp>
+        <p:nvSpPr>
+          <p:cNvPr id="2" name="Text 0"/>
+          <p:cNvSpPr txBox="1"/>
+          <p:nvPr/>
+        </p:nvSpPr>
+        <p:spPr>
+          <a:xfrm>
+            <a:off x="457200" y="274320"/>
+            <a:ext cx="8229600" cy="228600"/>
+          </a:xfrm>
+          <a:prstGeom prst="rect">
+            <a:avLst/>
+          </a:prstGeom>
+          <a:noFill/>
+          <a:ln/>
+        </p:spPr>
+        <p:txBody>
+          <a:bodyPr wrap="square" lIns="0" tIns="0" rIns="0" bIns="0" rtlCol="0" anchor="ctr"/>
+          <a:lstStyle/>
+          <a:p>
+            <a:pPr marL="0" indent="0">
+              <a:buNone/>
+            </a:pPr>
+            <a:r>
+              <a:rPr lang="en-US" sz="1100" b="1" kern="0" spc="200" dirty="0">
+                <a:solidFill>
+                  <a:srgbClr val="028090"/>
+                </a:solidFill>
+                <a:latin typeface="Calibri" pitchFamily="34" charset="0"/>
+                <a:ea typeface="Calibri" pitchFamily="34" charset="-122"/>
+                <a:cs typeface="Calibri" pitchFamily="34" charset="-120"/>
+              </a:rPr>
+              <a:t>NEXT</a:t>
+            </a:r>
+            <a:endParaRPr lang="en-US" sz="1100" dirty="0"/>
+          </a:p>
+        </p:txBody>
+      </p:sp>
+      <p:sp>
+        <p:nvSpPr>
+          <p:cNvPr id="3" name="Text 1"/>
+          <p:cNvSpPr txBox="1"/>
+          <p:nvPr/>
+        </p:nvSpPr>
+        <p:spPr>
+          <a:xfrm>
+            <a:off x="457200" y="502920"/>
+            <a:ext cx="8229600" cy="548640"/>
+          </a:xfrm>
+          <a:prstGeom prst="rect">
+            <a:avLst/>
+          </a:prstGeom>
+          <a:noFill/>
+          <a:ln/>
+        </p:spPr>
+        <p:txBody>
+          <a:bodyPr wrap="square" lIns="0" tIns="0" rIns="0" bIns="0" rtlCol="0" anchor="ctr"/>
+          <a:lstStyle/>
+          <a:p>
+            <a:pPr marL="0" indent="0">
+              <a:buNone/>
+            </a:pPr>
+            <a:r>
+              <a:rPr lang="en-US" sz="2700" b="1" dirty="0">
+                <a:solidFill>
+                  <a:srgbClr val="16262B"/>
+                </a:solidFill>
+                <a:latin typeface="Cambria" pitchFamily="34" charset="0"/>
+                <a:ea typeface="Cambria" pitchFamily="34" charset="-122"/>
+                <a:cs typeface="Cambria" pitchFamily="34" charset="-120"/>
+              </a:rPr>
+              <a:t>Questions for Amit, and what comes next</a:t>
+            </a:r>
+            <a:endParaRPr lang="en-US" sz="2700" dirty="0"/>
+          </a:p>
+        </p:txBody>
+      </p:sp>
+      <p:sp>
+        <p:nvSpPr>
+          <p:cNvPr id="4" name="Shape 4"/>
+          <p:cNvSpPr/>
+          <p:nvPr/>
+        </p:nvSpPr>
+        <p:spPr>
+          <a:xfrm>
+            <a:off x="457200" y="1325880"/>
+            <a:ext cx="4023360" cy="2514600"/>
+          </a:xfrm>
+          <a:prstGeom prst="roundRect">
+            <a:avLst>
+              <a:gd name="adj" fmla="val 9375"/>
+            </a:avLst>
+          </a:prstGeom>
+          <a:solidFill>
+            <a:srgbClr val="EDF5F5"/>
+          </a:solidFill>
+          <a:ln w="12700">
+            <a:solidFill>
+              <a:srgbClr val="EDF5F5"/>
+            </a:solidFill>
+            <a:prstDash val="solid"/>
+          </a:ln>
+        </p:spPr>
+        <p:txBody>
+          <a:bodyPr/>
+          <a:lstStyle/>
+          <a:p>
+            <a:endParaRPr lang="sv-SE"/>
+          </a:p>
+        </p:txBody>
+      </p:sp>
+      <p:sp>
+        <p:nvSpPr>
+          <p:cNvPr id="5" name="TextBox 4"/>
+          <p:cNvSpPr txBox="1"/>
+          <p:nvPr/>
+        </p:nvSpPr>
+        <p:spPr>
+          <a:xfrm>
+            <a:off x="685800" y="1508760"/>
+            <a:ext cx="3566160" cy="228600"/>
+          </a:xfrm>
+          <a:prstGeom prst="rect">
+            <a:avLst/>
+          </a:prstGeom>
+          <a:noFill/>
+        </p:spPr>
+        <p:txBody>
+          <a:bodyPr wrap="square" lIns="0" tIns="0" rIns="0" bIns="0" anchor="t">
+            <a:spAutoFit/>
+          </a:bodyPr>
+          <a:lstStyle/>
+          <a:p>
+            <a:r>
+              <a:rPr sz="1100" b="1" spc="200">
+                <a:solidFill>
+                  <a:srgbClr val="028090"/>
+                </a:solidFill>
+                <a:latin typeface="Calibri"/>
+              </a:rPr>
+              <a:t>QUESTIONS FOR AMIT</a:t>
+            </a:r>
+          </a:p>
+        </p:txBody>
+      </p:sp>
+      <p:sp>
+        <p:nvSpPr>
+          <p:cNvPr id="6" name="TextBox 5"/>
+          <p:cNvSpPr txBox="1"/>
+          <p:nvPr/>
+        </p:nvSpPr>
+        <p:spPr>
+          <a:xfrm>
+            <a:off x="685800" y="1874519"/>
+            <a:ext cx="3611880" cy="1920240"/>
+          </a:xfrm>
+          <a:prstGeom prst="rect">
+            <a:avLst/>
+          </a:prstGeom>
+          <a:noFill/>
+        </p:spPr>
+        <p:txBody>
+          <a:bodyPr wrap="square" lIns="0" tIns="0" rIns="0" bIns="0" anchor="t">
+            <a:spAutoFit/>
+          </a:bodyPr>
+          <a:lstStyle/>
+          <a:p>
+            <a:pPr marL="171450" indent="-171450">
+              <a:spcAft>
+                <a:spcPts val="700"/>
+              </a:spcAft>
+              <a:buChar char="•"/>
+            </a:pPr>
+            <a:r>
+              <a:rPr sz="1200" b="0">
+                <a:solidFill>
+                  <a:srgbClr val="16262B"/>
+                </a:solidFill>
+                <a:latin typeface="Calibri"/>
+              </a:rPr>
+              <a:t>Are there more runs of this track, in the same coordinate system?</a:t>
+            </a:r>
+          </a:p>
+          <a:p>
+            <a:pPr marL="171450" indent="-171450">
+              <a:spcAft>
+                <a:spcPts val="700"/>
+              </a:spcAft>
+              <a:buChar char="•"/>
+            </a:pPr>
+            <a:r>
+              <a:rPr sz="1200" b="0">
+                <a:solidFill>
+                  <a:srgbClr val="16262B"/>
+                </a:solidFill>
+                <a:latin typeface="Calibri"/>
+              </a:rPr>
+              <a:t>How repeatable are the positions between runs?</a:t>
+            </a:r>
+          </a:p>
+          <a:p>
+            <a:pPr marL="171450" indent="-171450">
+              <a:spcAft>
+                <a:spcPts val="700"/>
+              </a:spcAft>
+              <a:buChar char="•"/>
+            </a:pPr>
+            <a:r>
+              <a:rPr sz="1200" b="0">
+                <a:solidFill>
+                  <a:srgbClr val="16262B"/>
+                </a:solidFill>
+                <a:latin typeface="Calibri"/>
+              </a:rPr>
+              <a:t>Is the height relative to the sensor, as it looks, and do all runs use the same reference?</a:t>
+            </a:r>
+          </a:p>
+        </p:txBody>
+      </p:sp>
+      <p:sp>
+        <p:nvSpPr>
+          <p:cNvPr id="7" name="Shape 4"/>
+          <p:cNvSpPr/>
+          <p:nvPr/>
+        </p:nvSpPr>
+        <p:spPr>
+          <a:xfrm>
+            <a:off x="4663440" y="1325880"/>
+            <a:ext cx="4023360" cy="2514600"/>
+          </a:xfrm>
+          <a:prstGeom prst="roundRect">
+            <a:avLst>
+              <a:gd name="adj" fmla="val 9375"/>
+            </a:avLst>
+          </a:prstGeom>
+          <a:solidFill>
+            <a:srgbClr val="EDF5F5"/>
+          </a:solidFill>
+          <a:ln w="12700">
+            <a:solidFill>
+              <a:srgbClr val="EDF5F5"/>
+            </a:solidFill>
+            <a:prstDash val="solid"/>
+          </a:ln>
+        </p:spPr>
+        <p:txBody>
+          <a:bodyPr/>
+          <a:lstStyle/>
+          <a:p>
+            <a:endParaRPr lang="sv-SE"/>
+          </a:p>
+        </p:txBody>
+      </p:sp>
+      <p:sp>
+        <p:nvSpPr>
+          <p:cNvPr id="8" name="TextBox 7"/>
+          <p:cNvSpPr txBox="1"/>
+          <p:nvPr/>
+        </p:nvSpPr>
+        <p:spPr>
+          <a:xfrm>
+            <a:off x="4892040" y="1508760"/>
+            <a:ext cx="3566160" cy="228600"/>
+          </a:xfrm>
+          <a:prstGeom prst="rect">
+            <a:avLst/>
+          </a:prstGeom>
+          <a:noFill/>
+        </p:spPr>
+        <p:txBody>
+          <a:bodyPr wrap="square" lIns="0" tIns="0" rIns="0" bIns="0" anchor="t">
+            <a:spAutoFit/>
+          </a:bodyPr>
+          <a:lstStyle/>
+          <a:p>
+            <a:r>
+              <a:rPr sz="1100" b="1" spc="200">
+                <a:solidFill>
+                  <a:srgbClr val="028090"/>
+                </a:solidFill>
+                <a:latin typeface="Calibri"/>
+              </a:rPr>
+              <a:t>NEXT STEPS</a:t>
+            </a:r>
+          </a:p>
+        </p:txBody>
+      </p:sp>
+      <p:sp>
+        <p:nvSpPr>
+          <p:cNvPr id="9" name="TextBox 8"/>
+          <p:cNvSpPr txBox="1"/>
+          <p:nvPr/>
+        </p:nvSpPr>
+        <p:spPr>
+          <a:xfrm>
+            <a:off x="4892040" y="1874519"/>
+            <a:ext cx="3611880" cy="1920240"/>
+          </a:xfrm>
+          <a:prstGeom prst="rect">
+            <a:avLst/>
+          </a:prstGeom>
+          <a:noFill/>
+        </p:spPr>
+        <p:txBody>
+          <a:bodyPr wrap="square" lIns="0" tIns="0" rIns="0" bIns="0" anchor="t">
+            <a:spAutoFit/>
+          </a:bodyPr>
+          <a:lstStyle/>
+          <a:p>
+            <a:pPr marL="171450" indent="-171450">
+              <a:spcAft>
+                <a:spcPts val="700"/>
+              </a:spcAft>
+              <a:buChar char="•"/>
+            </a:pPr>
+            <a:r>
+              <a:rPr sz="1200" b="0">
+                <a:solidFill>
+                  <a:srgbClr val="16262B"/>
+                </a:solidFill>
+                <a:latin typeface="Calibri"/>
+              </a:rPr>
+              <a:t>Build a second run with the same reference and compare it with run 1</a:t>
+            </a:r>
+          </a:p>
+          <a:p>
+            <a:pPr marL="171450" indent="-171450">
+              <a:spcAft>
+                <a:spcPts val="700"/>
+              </a:spcAft>
+              <a:buChar char="•"/>
+            </a:pPr>
+            <a:r>
+              <a:rPr sz="1200" b="0">
+                <a:solidFill>
+                  <a:srgbClr val="16262B"/>
+                </a:solidFill>
+                <a:latin typeface="Calibri"/>
+              </a:rPr>
+              <a:t>Check how well the coordinates of real runs line up, and set change thresholds from that</a:t>
+            </a:r>
+          </a:p>
+          <a:p>
+            <a:pPr marL="171450" indent="-171450">
+              <a:spcAft>
+                <a:spcPts val="700"/>
+              </a:spcAft>
+              <a:buChar char="•"/>
+            </a:pPr>
+            <a:r>
+              <a:rPr sz="1200" b="0">
+                <a:solidFill>
+                  <a:srgbClr val="16262B"/>
+                </a:solidFill>
+                <a:latin typeface="Calibri"/>
+              </a:rPr>
+              <a:t>Follow TQI per section over the runs, normalised with run 1</a:t>
+            </a:r>
+          </a:p>
+        </p:txBody>
+      </p:sp>
+      <p:sp>
+        <p:nvSpPr>
+          <p:cNvPr id="10" name="Shape 16"/>
+          <p:cNvSpPr/>
+          <p:nvPr/>
+        </p:nvSpPr>
+        <p:spPr>
+          <a:xfrm>
+            <a:off x="457200" y="4114800"/>
+            <a:ext cx="8229600" cy="530352"/>
+          </a:xfrm>
+          <a:prstGeom prst="roundRect">
+            <a:avLst>
+              <a:gd name="adj" fmla="val 9091"/>
+            </a:avLst>
+          </a:prstGeom>
+          <a:solidFill>
+            <a:srgbClr val="0B2027"/>
+          </a:solidFill>
+          <a:ln w="12700">
+            <a:solidFill>
+              <a:srgbClr val="0B2027"/>
+            </a:solidFill>
+            <a:prstDash val="solid"/>
+          </a:ln>
+        </p:spPr>
+        <p:txBody>
+          <a:bodyPr/>
+          <a:lstStyle/>
+          <a:p>
+            <a:endParaRPr lang="sv-SE"/>
+          </a:p>
+        </p:txBody>
+      </p:sp>
+      <p:sp>
+        <p:nvSpPr>
+          <p:cNvPr id="11" name="Text 17"/>
+          <p:cNvSpPr txBox="1"/>
+          <p:nvPr/>
+        </p:nvSpPr>
+        <p:spPr>
+          <a:xfrm>
+            <a:off x="731520" y="4114800"/>
+            <a:ext cx="7680960" cy="530352"/>
+          </a:xfrm>
+          <a:prstGeom prst="rect">
+            <a:avLst/>
+          </a:prstGeom>
+          <a:noFill/>
+          <a:ln/>
+        </p:spPr>
+        <p:txBody>
+          <a:bodyPr wrap="square" lIns="0" tIns="0" rIns="0" bIns="0" rtlCol="0" anchor="ctr"/>
+          <a:lstStyle/>
+          <a:p>
+            <a:pPr marL="0" indent="0">
+              <a:buNone/>
+            </a:pPr>
+            <a:r>
+              <a:rPr lang="en-US" sz="1200" b="1" dirty="0">
+                <a:solidFill>
+                  <a:srgbClr val="FFFFFF"/>
+                </a:solidFill>
+                <a:latin typeface="Calibri" pitchFamily="34" charset="0"/>
+                <a:ea typeface="Calibri" pitchFamily="34" charset="-122"/>
+                <a:cs typeface="Calibri" pitchFamily="34" charset="-120"/>
+              </a:rPr>
+              <a:t>The number of runs, and how well they line up, decide how much change we can detect.</a:t>
+            </a:r>
+            <a:endParaRPr lang="en-US" sz="1200" dirty="0"/>
+          </a:p>
+        </p:txBody>
+      </p:sp>
+    </p:spTree>
+  </p:cSld>
+  <p:clrMapOvr>
+    <a:masterClrMapping/>
+  </p:clrMapOvr>
+</p:sld>
+</file>
+
+<file path=ppt/slides/slide24.xml><?xml version="1.0" encoding="utf-8"?>
+<p:sld xmlns:a="http://schemas.openxmlformats.org/drawingml/2006/main" xmlns:r="http://schemas.openxmlformats.org/officeDocument/2006/relationships" xmlns:p="http://schemas.openxmlformats.org/presentationml/2006/main">
+  <p:cSld>
+    <p:spTree>
+      <p:nvGrpSpPr>
+        <p:cNvPr id="1" name=""/>
+        <p:cNvGrpSpPr/>
+        <p:nvPr/>
+      </p:nvGrpSpPr>
+      <p:grpSpPr>
+        <a:xfrm>
+          <a:off x="0" y="0"/>
+          <a:ext cx="0" cy="0"/>
+          <a:chOff x="0" y="0"/>
+          <a:chExt cx="0" cy="0"/>
+        </a:xfrm>
+      </p:grpSpPr>
+      <p:pic>
+        <p:nvPicPr>
+          <p:cNvPr id="3" name="Picture 2">
+            <a:extLst>
+              <a:ext uri="{FF2B5EF4-FFF2-40B4-BE49-F238E27FC236}">
+                <a16:creationId xmlns:a16="http://schemas.microsoft.com/office/drawing/2014/main" id="{02784521-C6C8-DADF-EE43-75F3B2008BE2}"/>
+              </a:ext>
+            </a:extLst>
+          </p:cNvPr>
+          <p:cNvPicPr>
+            <a:picLocks noChangeAspect="1"/>
+          </p:cNvPicPr>
+          <p:nvPr/>
+        </p:nvPicPr>
+        <p:blipFill>
+          <a:blip r:embed="rId2"/>
+          <a:stretch>
+            <a:fillRect/>
+          </a:stretch>
+        </p:blipFill>
+        <p:spPr>
+          <a:xfrm>
+            <a:off x="0" y="891623"/>
+            <a:ext cx="9144000" cy="3360254"/>
+          </a:xfrm>
+          <a:prstGeom prst="rect">
+            <a:avLst/>
+          </a:prstGeom>
+        </p:spPr>
+      </p:pic>
+    </p:spTree>
+    <p:extLst>
+      <p:ext uri="{BB962C8B-B14F-4D97-AF65-F5344CB8AC3E}">
+        <p14:creationId xmlns:p14="http://schemas.microsoft.com/office/powerpoint/2010/main" val="1827569825"/>
+      </p:ext>
+    </p:extLst>
   </p:cSld>
   <p:clrMapOvr>
     <a:masterClrMapping/>

--- a/D7016B_Demo1_Viktor_Lindberg.pptx
+++ b/D7016B_Demo1_Viktor_Lindberg.pptx
@@ -5,7 +5,7 @@
     <p:sldMasterId id="2147483648" r:id="rId1"/>
   </p:sldMasterIdLst>
   <p:notesMasterIdLst>
-    <p:notesMasterId r:id="rId26"/>
+    <p:notesMasterId r:id="rId27"/>
   </p:notesMasterIdLst>
   <p:sldIdLst>
     <p:sldId id="256" r:id="rId2"/>
@@ -23,15 +23,16 @@
     <p:sldId id="268" r:id="rId14"/>
     <p:sldId id="269" r:id="rId15"/>
     <p:sldId id="270" r:id="rId16"/>
-    <p:sldId id="271" r:id="rId17"/>
-    <p:sldId id="272" r:id="rId18"/>
-    <p:sldId id="273" r:id="rId19"/>
-    <p:sldId id="274" r:id="rId20"/>
-    <p:sldId id="275" r:id="rId21"/>
-    <p:sldId id="276" r:id="rId22"/>
-    <p:sldId id="277" r:id="rId23"/>
-    <p:sldId id="278" r:id="rId24"/>
-    <p:sldId id="279" r:id="rId25"/>
+    <p:sldId id="280" r:id="rId17"/>
+    <p:sldId id="271" r:id="rId18"/>
+    <p:sldId id="272" r:id="rId19"/>
+    <p:sldId id="273" r:id="rId20"/>
+    <p:sldId id="274" r:id="rId21"/>
+    <p:sldId id="275" r:id="rId22"/>
+    <p:sldId id="276" r:id="rId23"/>
+    <p:sldId id="277" r:id="rId24"/>
+    <p:sldId id="278" r:id="rId25"/>
+    <p:sldId id="279" r:id="rId26"/>
   </p:sldIdLst>
   <p:sldSz cx="9144000" cy="5143500" type="screen16x9"/>
   <p:notesSz cx="5143500" cy="9144000"/>
@@ -138,7 +139,7 @@
 <file path=ppt/charts/chart1.xml><?xml version="1.0" encoding="utf-8"?>
 <c:chartSpace xmlns:c="http://schemas.openxmlformats.org/drawingml/2006/chart" xmlns:a="http://schemas.openxmlformats.org/drawingml/2006/main" xmlns:r="http://schemas.openxmlformats.org/officeDocument/2006/relationships" xmlns:c16r2="http://schemas.microsoft.com/office/drawing/2015/06/chart">
   <c:date1904 val="0"/>
-  <c:lang val="en-GB"/>
+  <c:lang val="sv-SE"/>
   <c:roundedCorners val="1"/>
   <c:style val="2"/>
   <c:chart>
@@ -430,7 +431,7 @@
 <file path=ppt/charts/chart2.xml><?xml version="1.0" encoding="utf-8"?>
 <c:chartSpace xmlns:c="http://schemas.openxmlformats.org/drawingml/2006/chart" xmlns:a="http://schemas.openxmlformats.org/drawingml/2006/main" xmlns:r="http://schemas.openxmlformats.org/officeDocument/2006/relationships" xmlns:c16r2="http://schemas.microsoft.com/office/drawing/2015/06/chart">
   <c:date1904 val="0"/>
-  <c:lang val="en-GB"/>
+  <c:lang val="sv-SE"/>
   <c:roundedCorners val="1"/>
   <c:style val="2"/>
   <c:chart>
@@ -842,7 +843,7 @@
 <file path=ppt/charts/chart3.xml><?xml version="1.0" encoding="utf-8"?>
 <c:chartSpace xmlns:c="http://schemas.openxmlformats.org/drawingml/2006/chart" xmlns:a="http://schemas.openxmlformats.org/drawingml/2006/main" xmlns:r="http://schemas.openxmlformats.org/officeDocument/2006/relationships" xmlns:c16r2="http://schemas.microsoft.com/office/drawing/2015/06/chart">
   <c:date1904 val="0"/>
-  <c:lang val="en-GB"/>
+  <c:lang val="sv-SE"/>
   <c:roundedCorners val="1"/>
   <c:style val="2"/>
   <c:chart>
@@ -11559,750 +11560,126 @@
       </p:grpSpPr>
       <p:sp>
         <p:nvSpPr>
-          <p:cNvPr id="2" name="Text 0"/>
+          <p:cNvPr id="3" name="textruta 2">
+            <a:extLst>
+              <a:ext uri="{FF2B5EF4-FFF2-40B4-BE49-F238E27FC236}">
+                <a16:creationId xmlns:a16="http://schemas.microsoft.com/office/drawing/2014/main" id="{06F2AB30-7995-EDC7-95E0-5CF9BE535009}"/>
+              </a:ext>
+            </a:extLst>
+          </p:cNvPr>
           <p:cNvSpPr txBox="1"/>
           <p:nvPr/>
         </p:nvSpPr>
         <p:spPr>
           <a:xfrm>
-            <a:off x="457200" y="274320"/>
-            <a:ext cx="8229600" cy="228600"/>
+            <a:off x="2012302" y="366078"/>
+            <a:ext cx="4572000" cy="1102866"/>
           </a:xfrm>
           <a:prstGeom prst="rect">
             <a:avLst/>
           </a:prstGeom>
           <a:noFill/>
-          <a:ln/>
-        </p:spPr>
-        <p:txBody>
-          <a:bodyPr wrap="square" lIns="0" tIns="0" rIns="0" bIns="0" rtlCol="0" anchor="ctr"/>
-          <a:lstStyle/>
-          <a:p>
-            <a:pPr marL="0" indent="0">
+        </p:spPr>
+        <p:txBody>
+          <a:bodyPr wrap="square">
+            <a:spAutoFit/>
+          </a:bodyPr>
+          <a:lstStyle/>
+          <a:p>
+            <a:pPr algn="just">
+              <a:spcAft>
+                <a:spcPts val="600"/>
+              </a:spcAft>
               <a:buNone/>
             </a:pPr>
             <a:r>
-              <a:rPr lang="en-US" sz="1100" b="1" kern="0" spc="200" dirty="0">
-                <a:solidFill>
-                  <a:srgbClr val="028090"/>
-                </a:solidFill>
-                <a:latin typeface="Calibri" pitchFamily="34" charset="0"/>
-                <a:ea typeface="Calibri" pitchFamily="34" charset="-122"/>
-                <a:cs typeface="Calibri" pitchFamily="34" charset="-120"/>
-              </a:rPr>
-              <a:t>THE DATA</a:t>
-            </a:r>
-            <a:endParaRPr lang="en-US" sz="1100" dirty="0"/>
-          </a:p>
-        </p:txBody>
-      </p:sp>
-      <p:sp>
-        <p:nvSpPr>
-          <p:cNvPr id="3" name="Text 1"/>
-          <p:cNvSpPr txBox="1"/>
-          <p:nvPr/>
-        </p:nvSpPr>
-        <p:spPr>
-          <a:xfrm>
-            <a:off x="457200" y="502920"/>
-            <a:ext cx="8229600" cy="548640"/>
-          </a:xfrm>
-          <a:prstGeom prst="rect">
-            <a:avLst/>
-          </a:prstGeom>
-          <a:noFill/>
-          <a:ln/>
-        </p:spPr>
-        <p:txBody>
-          <a:bodyPr wrap="square" lIns="0" tIns="0" rIns="0" bIns="0" rtlCol="0" anchor="ctr"/>
-          <a:lstStyle/>
-          <a:p>
-            <a:pPr marL="0" indent="0">
-              <a:buNone/>
+              <a:rPr lang="en-GB" sz="1800" b="1" dirty="0">
+                <a:effectLst/>
+                <a:latin typeface="+mn-lt"/>
+                <a:ea typeface="Times New Roman" panose="02020603050405020304" pitchFamily="18" charset="0"/>
+              </a:rPr>
+              <a:t>The following dashed list is old and what created based on assumption that certain data would be available. The project have changed and these do not apply anymore:</a:t>
+            </a:r>
+            <a:endParaRPr lang="sv-SE" sz="1800" dirty="0">
+              <a:effectLst/>
+              <a:latin typeface="+mn-lt"/>
+              <a:ea typeface="Times New Roman" panose="02020603050405020304" pitchFamily="18" charset="0"/>
+            </a:endParaRPr>
+          </a:p>
+          <a:p>
+            <a:pPr marL="342900" lvl="0" indent="-342900" algn="just">
+              <a:spcAft>
+                <a:spcPts val="400"/>
+              </a:spcAft>
+              <a:buFont typeface="Symbol" panose="05050102010706020507" pitchFamily="18" charset="2"/>
+              <a:buChar char="-"/>
             </a:pPr>
             <a:r>
-              <a:rPr lang="en-US" sz="2700" b="1" dirty="0">
-                <a:solidFill>
-                  <a:srgbClr val="16262B"/>
-                </a:solidFill>
-                <a:latin typeface="Cambria" pitchFamily="34" charset="0"/>
-                <a:ea typeface="Cambria" pitchFamily="34" charset="-122"/>
-                <a:cs typeface="Cambria" pitchFamily="34" charset="-120"/>
-              </a:rPr>
-              <a:t>One scan of double track, no vibration data</a:t>
-            </a:r>
-            <a:endParaRPr lang="en-US" sz="2700" dirty="0"/>
-          </a:p>
-        </p:txBody>
-      </p:sp>
-      <p:pic>
-        <p:nvPicPr>
-          <p:cNvPr id="4" name="Picture 3" descr="f1_topdown.png"/>
-          <p:cNvPicPr>
-            <a:picLocks noChangeAspect="1"/>
-          </p:cNvPicPr>
-          <p:nvPr/>
-        </p:nvPicPr>
-        <p:blipFill>
-          <a:blip r:embed="rId2"/>
-          <a:stretch>
-            <a:fillRect/>
-          </a:stretch>
-        </p:blipFill>
-        <p:spPr>
-          <a:xfrm>
-            <a:off x="457200" y="1280160"/>
-            <a:ext cx="4572000" cy="3017520"/>
-          </a:xfrm>
-          <a:prstGeom prst="rect">
-            <a:avLst/>
-          </a:prstGeom>
-        </p:spPr>
-      </p:pic>
-      <p:sp>
-        <p:nvSpPr>
-          <p:cNvPr id="5" name="Text 3"/>
-          <p:cNvSpPr txBox="1"/>
-          <p:nvPr/>
-        </p:nvSpPr>
-        <p:spPr>
-          <a:xfrm>
-            <a:off x="457200" y="4343400"/>
-            <a:ext cx="4572000" cy="237744"/>
-          </a:xfrm>
-          <a:prstGeom prst="rect">
-            <a:avLst/>
-          </a:prstGeom>
-          <a:noFill/>
-          <a:ln/>
-        </p:spPr>
-        <p:txBody>
-          <a:bodyPr wrap="square" lIns="0" tIns="0" rIns="0" bIns="0" rtlCol="0" anchor="ctr"/>
-          <a:lstStyle/>
-          <a:p>
-            <a:pPr marL="0" indent="0">
-              <a:buNone/>
+              <a:rPr lang="en-GB" sz="1800" u="none" strike="noStrike" dirty="0">
+                <a:effectLst/>
+                <a:latin typeface="+mn-lt"/>
+                <a:ea typeface="Times New Roman" panose="02020603050405020304" pitchFamily="18" charset="0"/>
+              </a:rPr>
+              <a:t>Connect vibration/acceleration data to maintenance decisions</a:t>
+            </a:r>
+            <a:endParaRPr lang="sv-SE" sz="1800" u="none" strike="noStrike" dirty="0">
+              <a:effectLst/>
+              <a:latin typeface="+mn-lt"/>
+              <a:ea typeface="Times New Roman" panose="02020603050405020304" pitchFamily="18" charset="0"/>
+            </a:endParaRPr>
+          </a:p>
+          <a:p>
+            <a:pPr marL="342900" lvl="0" indent="-342900" algn="just">
+              <a:spcAft>
+                <a:spcPts val="400"/>
+              </a:spcAft>
+              <a:buFont typeface="Symbol" panose="05050102010706020507" pitchFamily="18" charset="2"/>
+              <a:buChar char="-"/>
             </a:pPr>
             <a:r>
-              <a:rPr lang="en-US" sz="950" i="1" dirty="0">
-                <a:solidFill>
-                  <a:srgbClr val="5F7178"/>
-                </a:solidFill>
-                <a:latin typeface="Calibri" pitchFamily="34" charset="0"/>
-                <a:ea typeface="Calibri" pitchFamily="34" charset="-122"/>
-                <a:cs typeface="Calibri" pitchFamily="34" charset="-120"/>
-              </a:rPr>
-              <a:t>Top-down point density (log scale). Two parallel tracks run through the scan.</a:t>
-            </a:r>
-            <a:endParaRPr lang="en-US" sz="950" dirty="0"/>
-          </a:p>
-        </p:txBody>
-      </p:sp>
-      <p:sp>
-        <p:nvSpPr>
-          <p:cNvPr id="6" name="Shape 4"/>
-          <p:cNvSpPr/>
-          <p:nvPr/>
-        </p:nvSpPr>
-        <p:spPr>
-          <a:xfrm>
-            <a:off x="5257800" y="1325880"/>
-            <a:ext cx="3429000" cy="676656"/>
-          </a:xfrm>
-          <a:prstGeom prst="roundRect">
-            <a:avLst>
-              <a:gd name="adj" fmla="val 9375"/>
-            </a:avLst>
-          </a:prstGeom>
-          <a:solidFill>
-            <a:srgbClr val="EDF5F5"/>
-          </a:solidFill>
-          <a:ln w="12700">
-            <a:solidFill>
-              <a:srgbClr val="EDF5F5"/>
-            </a:solidFill>
-            <a:prstDash val="solid"/>
-          </a:ln>
-        </p:spPr>
-        <p:txBody>
-          <a:bodyPr/>
-          <a:lstStyle/>
-          <a:p>
-            <a:endParaRPr lang="sv-SE"/>
-          </a:p>
-        </p:txBody>
-      </p:sp>
-      <p:sp>
-        <p:nvSpPr>
-          <p:cNvPr id="7" name="Text 5"/>
-          <p:cNvSpPr txBox="1"/>
-          <p:nvPr/>
-        </p:nvSpPr>
-        <p:spPr>
-          <a:xfrm>
-            <a:off x="5367528" y="1325880"/>
-            <a:ext cx="1005840" cy="676656"/>
-          </a:xfrm>
-          <a:prstGeom prst="rect">
-            <a:avLst/>
-          </a:prstGeom>
-          <a:noFill/>
-          <a:ln/>
-        </p:spPr>
-        <p:txBody>
-          <a:bodyPr wrap="square" lIns="0" tIns="0" rIns="0" bIns="0" rtlCol="0" anchor="ctr"/>
-          <a:lstStyle/>
-          <a:p>
-            <a:pPr marL="0" indent="0" algn="ctr">
-              <a:buNone/>
+              <a:rPr lang="en-GB" sz="1800" u="none" strike="noStrike" dirty="0">
+                <a:effectLst/>
+                <a:latin typeface="+mn-lt"/>
+                <a:ea typeface="Times New Roman" panose="02020603050405020304" pitchFamily="18" charset="0"/>
+              </a:rPr>
+              <a:t>Connect 3d point cloud / geometric data to maintenance decisions </a:t>
+            </a:r>
+            <a:endParaRPr lang="sv-SE" sz="1800" u="none" strike="noStrike" dirty="0">
+              <a:effectLst/>
+              <a:latin typeface="+mn-lt"/>
+              <a:ea typeface="Times New Roman" panose="02020603050405020304" pitchFamily="18" charset="0"/>
+            </a:endParaRPr>
+          </a:p>
+          <a:p>
+            <a:pPr marL="342900" lvl="0" indent="-342900" algn="just">
+              <a:spcAft>
+                <a:spcPts val="600"/>
+              </a:spcAft>
+              <a:buFont typeface="Symbol" panose="05050102010706020507" pitchFamily="18" charset="2"/>
+              <a:buChar char="-"/>
             </a:pPr>
             <a:r>
-              <a:rPr lang="en-US" sz="1800" b="1" dirty="0">
-                <a:solidFill>
-                  <a:srgbClr val="028090"/>
-                </a:solidFill>
-                <a:latin typeface="Cambria" pitchFamily="34" charset="0"/>
-                <a:ea typeface="Cambria" pitchFamily="34" charset="-122"/>
-                <a:cs typeface="Cambria" pitchFamily="34" charset="-120"/>
-              </a:rPr>
-              <a:t>15.9 M</a:t>
-            </a:r>
-            <a:endParaRPr lang="en-US" sz="1800" dirty="0"/>
-          </a:p>
-        </p:txBody>
-      </p:sp>
-      <p:sp>
-        <p:nvSpPr>
-          <p:cNvPr id="8" name="Text 6"/>
-          <p:cNvSpPr txBox="1"/>
-          <p:nvPr/>
-        </p:nvSpPr>
-        <p:spPr>
-          <a:xfrm>
-            <a:off x="6446520" y="1399032"/>
-            <a:ext cx="2148840" cy="237744"/>
-          </a:xfrm>
-          <a:prstGeom prst="rect">
-            <a:avLst/>
-          </a:prstGeom>
-          <a:noFill/>
-          <a:ln/>
-        </p:spPr>
-        <p:txBody>
-          <a:bodyPr wrap="square" lIns="0" tIns="0" rIns="0" bIns="0" rtlCol="0" anchor="ctr"/>
-          <a:lstStyle/>
-          <a:p>
-            <a:pPr marL="0" indent="0">
-              <a:buNone/>
-            </a:pPr>
-            <a:r>
-              <a:rPr lang="en-US" sz="1100" b="1" dirty="0">
-                <a:solidFill>
-                  <a:srgbClr val="16262B"/>
-                </a:solidFill>
-                <a:latin typeface="Calibri" pitchFamily="34" charset="0"/>
-                <a:ea typeface="Calibri" pitchFamily="34" charset="-122"/>
-                <a:cs typeface="Calibri" pitchFamily="34" charset="-120"/>
-              </a:rPr>
-              <a:t>points in one LAZ file</a:t>
-            </a:r>
-            <a:endParaRPr lang="en-US" sz="1100" dirty="0"/>
-          </a:p>
-        </p:txBody>
-      </p:sp>
-      <p:sp>
-        <p:nvSpPr>
-          <p:cNvPr id="9" name="Text 7"/>
-          <p:cNvSpPr txBox="1"/>
-          <p:nvPr/>
-        </p:nvSpPr>
-        <p:spPr>
-          <a:xfrm>
-            <a:off x="6446520" y="1636776"/>
-            <a:ext cx="2148840" cy="310896"/>
-          </a:xfrm>
-          <a:prstGeom prst="rect">
-            <a:avLst/>
-          </a:prstGeom>
-          <a:noFill/>
-          <a:ln/>
-        </p:spPr>
-        <p:txBody>
-          <a:bodyPr wrap="square" lIns="0" tIns="0" rIns="0" bIns="0" rtlCol="0" anchor="ctr"/>
-          <a:lstStyle/>
-          <a:p>
-            <a:pPr marL="0" indent="0">
-              <a:buNone/>
-            </a:pPr>
-            <a:r>
-              <a:rPr lang="en-US" sz="900" dirty="0">
-                <a:solidFill>
-                  <a:srgbClr val="5F7178"/>
-                </a:solidFill>
-                <a:latin typeface="Calibri" pitchFamily="34" charset="0"/>
-                <a:ea typeface="Calibri" pitchFamily="34" charset="-122"/>
-                <a:cs typeface="Calibri" pitchFamily="34" charset="-120"/>
-              </a:rPr>
-              <a:t>47 MB, LAS 1.2, point format 0</a:t>
-            </a:r>
-            <a:endParaRPr lang="en-US" sz="900" dirty="0"/>
-          </a:p>
-        </p:txBody>
-      </p:sp>
-      <p:sp>
-        <p:nvSpPr>
-          <p:cNvPr id="10" name="Shape 4"/>
-          <p:cNvSpPr/>
-          <p:nvPr/>
-        </p:nvSpPr>
-        <p:spPr>
-          <a:xfrm>
-            <a:off x="5257800" y="2093976"/>
-            <a:ext cx="3429000" cy="676656"/>
-          </a:xfrm>
-          <a:prstGeom prst="roundRect">
-            <a:avLst>
-              <a:gd name="adj" fmla="val 9375"/>
-            </a:avLst>
-          </a:prstGeom>
-          <a:solidFill>
-            <a:srgbClr val="EDF5F5"/>
-          </a:solidFill>
-          <a:ln w="12700">
-            <a:solidFill>
-              <a:srgbClr val="EDF5F5"/>
-            </a:solidFill>
-            <a:prstDash val="solid"/>
-          </a:ln>
-        </p:spPr>
-        <p:txBody>
-          <a:bodyPr/>
-          <a:lstStyle/>
-          <a:p>
-            <a:endParaRPr lang="sv-SE"/>
-          </a:p>
-        </p:txBody>
-      </p:sp>
-      <p:sp>
-        <p:nvSpPr>
-          <p:cNvPr id="11" name="Text 5"/>
-          <p:cNvSpPr txBox="1"/>
-          <p:nvPr/>
-        </p:nvSpPr>
-        <p:spPr>
-          <a:xfrm>
-            <a:off x="5367528" y="2093976"/>
-            <a:ext cx="1005840" cy="676656"/>
-          </a:xfrm>
-          <a:prstGeom prst="rect">
-            <a:avLst/>
-          </a:prstGeom>
-          <a:noFill/>
-          <a:ln/>
-        </p:spPr>
-        <p:txBody>
-          <a:bodyPr wrap="square" lIns="0" tIns="0" rIns="0" bIns="0" rtlCol="0" anchor="ctr"/>
-          <a:lstStyle/>
-          <a:p>
-            <a:pPr marL="0" indent="0" algn="ctr">
-              <a:buNone/>
-            </a:pPr>
-            <a:r>
-              <a:rPr lang="en-US" sz="1800" b="1" dirty="0">
-                <a:solidFill>
-                  <a:srgbClr val="028090"/>
-                </a:solidFill>
-                <a:latin typeface="Cambria" pitchFamily="34" charset="0"/>
-                <a:ea typeface="Cambria" pitchFamily="34" charset="-122"/>
-                <a:cs typeface="Cambria" pitchFamily="34" charset="-120"/>
-              </a:rPr>
-              <a:t>≈ 260 m</a:t>
-            </a:r>
-            <a:endParaRPr lang="en-US" sz="1800" dirty="0"/>
-          </a:p>
-        </p:txBody>
-      </p:sp>
-      <p:sp>
-        <p:nvSpPr>
-          <p:cNvPr id="12" name="Text 6"/>
-          <p:cNvSpPr txBox="1"/>
-          <p:nvPr/>
-        </p:nvSpPr>
-        <p:spPr>
-          <a:xfrm>
-            <a:off x="6446520" y="2167128"/>
-            <a:ext cx="2148840" cy="237744"/>
-          </a:xfrm>
-          <a:prstGeom prst="rect">
-            <a:avLst/>
-          </a:prstGeom>
-          <a:noFill/>
-          <a:ln/>
-        </p:spPr>
-        <p:txBody>
-          <a:bodyPr wrap="square" lIns="0" tIns="0" rIns="0" bIns="0" rtlCol="0" anchor="ctr"/>
-          <a:lstStyle/>
-          <a:p>
-            <a:pPr marL="0" indent="0">
-              <a:buNone/>
-            </a:pPr>
-            <a:r>
-              <a:rPr lang="en-US" sz="1100" b="1" dirty="0">
-                <a:solidFill>
-                  <a:srgbClr val="16262B"/>
-                </a:solidFill>
-                <a:latin typeface="Calibri" pitchFamily="34" charset="0"/>
-                <a:ea typeface="Calibri" pitchFamily="34" charset="-122"/>
-                <a:cs typeface="Calibri" pitchFamily="34" charset="-120"/>
-              </a:rPr>
-              <a:t>of track, with one gentle curve</a:t>
-            </a:r>
-            <a:endParaRPr lang="en-US" sz="1100" dirty="0"/>
-          </a:p>
-        </p:txBody>
-      </p:sp>
-      <p:sp>
-        <p:nvSpPr>
-          <p:cNvPr id="13" name="Text 7"/>
-          <p:cNvSpPr txBox="1"/>
-          <p:nvPr/>
-        </p:nvSpPr>
-        <p:spPr>
-          <a:xfrm>
-            <a:off x="6446520" y="2404872"/>
-            <a:ext cx="2148840" cy="310896"/>
-          </a:xfrm>
-          <a:prstGeom prst="rect">
-            <a:avLst/>
-          </a:prstGeom>
-          <a:noFill/>
-          <a:ln/>
-        </p:spPr>
-        <p:txBody>
-          <a:bodyPr wrap="square" lIns="0" tIns="0" rIns="0" bIns="0" rtlCol="0" anchor="ctr"/>
-          <a:lstStyle/>
-          <a:p>
-            <a:pPr marL="0" indent="0">
-              <a:buNone/>
-            </a:pPr>
-            <a:r>
-              <a:rPr lang="en-US" sz="900" dirty="0">
-                <a:solidFill>
-                  <a:srgbClr val="5F7178"/>
-                </a:solidFill>
-                <a:latin typeface="Calibri" pitchFamily="34" charset="0"/>
-                <a:ea typeface="Calibri" pitchFamily="34" charset="-122"/>
-                <a:cs typeface="Calibri" pitchFamily="34" charset="-120"/>
-              </a:rPr>
-              <a:t>straight for most of the scan, curving at the start</a:t>
-            </a:r>
-            <a:endParaRPr lang="en-US" sz="900" dirty="0"/>
-          </a:p>
-        </p:txBody>
-      </p:sp>
-      <p:sp>
-        <p:nvSpPr>
-          <p:cNvPr id="14" name="Shape 4"/>
-          <p:cNvSpPr/>
-          <p:nvPr/>
-        </p:nvSpPr>
-        <p:spPr>
-          <a:xfrm>
-            <a:off x="5257800" y="2862072"/>
-            <a:ext cx="3429000" cy="676656"/>
-          </a:xfrm>
-          <a:prstGeom prst="roundRect">
-            <a:avLst>
-              <a:gd name="adj" fmla="val 9375"/>
-            </a:avLst>
-          </a:prstGeom>
-          <a:solidFill>
-            <a:srgbClr val="EDF5F5"/>
-          </a:solidFill>
-          <a:ln w="12700">
-            <a:solidFill>
-              <a:srgbClr val="EDF5F5"/>
-            </a:solidFill>
-            <a:prstDash val="solid"/>
-          </a:ln>
-        </p:spPr>
-        <p:txBody>
-          <a:bodyPr/>
-          <a:lstStyle/>
-          <a:p>
-            <a:endParaRPr lang="sv-SE"/>
-          </a:p>
-        </p:txBody>
-      </p:sp>
-      <p:sp>
-        <p:nvSpPr>
-          <p:cNvPr id="15" name="Text 5"/>
-          <p:cNvSpPr txBox="1"/>
-          <p:nvPr/>
-        </p:nvSpPr>
-        <p:spPr>
-          <a:xfrm>
-            <a:off x="5367528" y="2862072"/>
-            <a:ext cx="1005840" cy="676656"/>
-          </a:xfrm>
-          <a:prstGeom prst="rect">
-            <a:avLst/>
-          </a:prstGeom>
-          <a:noFill/>
-          <a:ln/>
-        </p:spPr>
-        <p:txBody>
-          <a:bodyPr wrap="square" lIns="0" tIns="0" rIns="0" bIns="0" rtlCol="0" anchor="ctr"/>
-          <a:lstStyle/>
-          <a:p>
-            <a:pPr marL="0" indent="0" algn="ctr">
-              <a:buNone/>
-            </a:pPr>
-            <a:r>
-              <a:rPr lang="en-US" sz="1800" b="1" dirty="0">
-                <a:solidFill>
-                  <a:srgbClr val="028090"/>
-                </a:solidFill>
-                <a:latin typeface="Cambria" pitchFamily="34" charset="0"/>
-                <a:ea typeface="Cambria" pitchFamily="34" charset="-122"/>
-                <a:cs typeface="Cambria" pitchFamily="34" charset="-120"/>
-              </a:rPr>
-              <a:t>2</a:t>
-            </a:r>
-            <a:endParaRPr lang="en-US" sz="1800" dirty="0"/>
-          </a:p>
-        </p:txBody>
-      </p:sp>
-      <p:sp>
-        <p:nvSpPr>
-          <p:cNvPr id="16" name="Text 6"/>
-          <p:cNvSpPr txBox="1"/>
-          <p:nvPr/>
-        </p:nvSpPr>
-        <p:spPr>
-          <a:xfrm>
-            <a:off x="6446520" y="2935224"/>
-            <a:ext cx="2148840" cy="237744"/>
-          </a:xfrm>
-          <a:prstGeom prst="rect">
-            <a:avLst/>
-          </a:prstGeom>
-          <a:noFill/>
-          <a:ln/>
-        </p:spPr>
-        <p:txBody>
-          <a:bodyPr wrap="square" lIns="0" tIns="0" rIns="0" bIns="0" rtlCol="0" anchor="ctr"/>
-          <a:lstStyle/>
-          <a:p>
-            <a:pPr marL="0" indent="0">
-              <a:buNone/>
-            </a:pPr>
-            <a:r>
-              <a:rPr lang="en-US" sz="1100" b="1" dirty="0">
-                <a:solidFill>
-                  <a:srgbClr val="16262B"/>
-                </a:solidFill>
-                <a:latin typeface="Calibri" pitchFamily="34" charset="0"/>
-                <a:ea typeface="Calibri" pitchFamily="34" charset="-122"/>
-                <a:cs typeface="Calibri" pitchFamily="34" charset="-120"/>
-              </a:rPr>
-              <a:t>tracks in the scan</a:t>
-            </a:r>
-            <a:endParaRPr lang="en-US" sz="1100" dirty="0"/>
-          </a:p>
-        </p:txBody>
-      </p:sp>
-      <p:sp>
-        <p:nvSpPr>
-          <p:cNvPr id="17" name="Text 7"/>
-          <p:cNvSpPr txBox="1"/>
-          <p:nvPr/>
-        </p:nvSpPr>
-        <p:spPr>
-          <a:xfrm>
-            <a:off x="6446520" y="3172968"/>
-            <a:ext cx="2148840" cy="310896"/>
-          </a:xfrm>
-          <a:prstGeom prst="rect">
-            <a:avLst/>
-          </a:prstGeom>
-          <a:noFill/>
-          <a:ln/>
-        </p:spPr>
-        <p:txBody>
-          <a:bodyPr wrap="square" lIns="0" tIns="0" rIns="0" bIns="0" rtlCol="0" anchor="ctr"/>
-          <a:lstStyle/>
-          <a:p>
-            <a:pPr marL="0" indent="0">
-              <a:buNone/>
-            </a:pPr>
-            <a:r>
-              <a:rPr lang="en-US" sz="900" dirty="0">
-                <a:solidFill>
-                  <a:srgbClr val="5F7178"/>
-                </a:solidFill>
-                <a:latin typeface="Calibri" pitchFamily="34" charset="0"/>
-                <a:ea typeface="Calibri" pitchFamily="34" charset="-122"/>
-                <a:cs typeface="Calibri" pitchFamily="34" charset="-120"/>
-              </a:rPr>
-              <a:t>the LiDAR rode the left one, so we work on that track</a:t>
-            </a:r>
-            <a:endParaRPr lang="en-US" sz="900" dirty="0"/>
-          </a:p>
-        </p:txBody>
-      </p:sp>
-      <p:sp>
-        <p:nvSpPr>
-          <p:cNvPr id="18" name="Shape 4"/>
-          <p:cNvSpPr/>
-          <p:nvPr/>
-        </p:nvSpPr>
-        <p:spPr>
-          <a:xfrm>
-            <a:off x="5257800" y="3630168"/>
-            <a:ext cx="3429000" cy="676656"/>
-          </a:xfrm>
-          <a:prstGeom prst="roundRect">
-            <a:avLst>
-              <a:gd name="adj" fmla="val 9375"/>
-            </a:avLst>
-          </a:prstGeom>
-          <a:solidFill>
-            <a:srgbClr val="EDF5F5"/>
-          </a:solidFill>
-          <a:ln w="12700">
-            <a:solidFill>
-              <a:srgbClr val="EDF5F5"/>
-            </a:solidFill>
-            <a:prstDash val="solid"/>
-          </a:ln>
-        </p:spPr>
-        <p:txBody>
-          <a:bodyPr/>
-          <a:lstStyle/>
-          <a:p>
-            <a:endParaRPr lang="sv-SE"/>
-          </a:p>
-        </p:txBody>
-      </p:sp>
-      <p:sp>
-        <p:nvSpPr>
-          <p:cNvPr id="19" name="Text 5"/>
-          <p:cNvSpPr txBox="1"/>
-          <p:nvPr/>
-        </p:nvSpPr>
-        <p:spPr>
-          <a:xfrm>
-            <a:off x="5367528" y="3630168"/>
-            <a:ext cx="1005840" cy="676656"/>
-          </a:xfrm>
-          <a:prstGeom prst="rect">
-            <a:avLst/>
-          </a:prstGeom>
-          <a:noFill/>
-          <a:ln/>
-        </p:spPr>
-        <p:txBody>
-          <a:bodyPr wrap="square" lIns="0" tIns="0" rIns="0" bIns="0" rtlCol="0" anchor="ctr"/>
-          <a:lstStyle/>
-          <a:p>
-            <a:pPr marL="0" indent="0" algn="ctr">
-              <a:buNone/>
-            </a:pPr>
-            <a:r>
-              <a:rPr lang="en-US" sz="1800" b="1" dirty="0">
-                <a:solidFill>
-                  <a:srgbClr val="028090"/>
-                </a:solidFill>
-                <a:latin typeface="Cambria" pitchFamily="34" charset="0"/>
-                <a:ea typeface="Cambria" pitchFamily="34" charset="-122"/>
-                <a:cs typeface="Cambria" pitchFamily="34" charset="-120"/>
-              </a:rPr>
-              <a:t>0</a:t>
-            </a:r>
-            <a:endParaRPr lang="en-US" sz="1800" dirty="0"/>
-          </a:p>
-        </p:txBody>
-      </p:sp>
-      <p:sp>
-        <p:nvSpPr>
-          <p:cNvPr id="20" name="Text 6"/>
-          <p:cNvSpPr txBox="1"/>
-          <p:nvPr/>
-        </p:nvSpPr>
-        <p:spPr>
-          <a:xfrm>
-            <a:off x="6446520" y="3703320"/>
-            <a:ext cx="2148840" cy="237744"/>
-          </a:xfrm>
-          <a:prstGeom prst="rect">
-            <a:avLst/>
-          </a:prstGeom>
-          <a:noFill/>
-          <a:ln/>
-        </p:spPr>
-        <p:txBody>
-          <a:bodyPr wrap="square" lIns="0" tIns="0" rIns="0" bIns="0" rtlCol="0" anchor="ctr"/>
-          <a:lstStyle/>
-          <a:p>
-            <a:pPr marL="0" indent="0">
-              <a:buNone/>
-            </a:pPr>
-            <a:r>
-              <a:rPr lang="en-US" sz="1100" b="1" dirty="0">
-                <a:solidFill>
-                  <a:srgbClr val="16262B"/>
-                </a:solidFill>
-                <a:latin typeface="Calibri" pitchFamily="34" charset="0"/>
-                <a:ea typeface="Calibri" pitchFamily="34" charset="-122"/>
-                <a:cs typeface="Calibri" pitchFamily="34" charset="-120"/>
-              </a:rPr>
-              <a:t>timestamps or coordinate system</a:t>
-            </a:r>
-            <a:endParaRPr lang="en-US" sz="1100" dirty="0"/>
-          </a:p>
-        </p:txBody>
-      </p:sp>
-      <p:sp>
-        <p:nvSpPr>
-          <p:cNvPr id="21" name="Text 7"/>
-          <p:cNvSpPr txBox="1"/>
-          <p:nvPr/>
-        </p:nvSpPr>
-        <p:spPr>
-          <a:xfrm>
-            <a:off x="6446520" y="3941063"/>
-            <a:ext cx="2148840" cy="310896"/>
-          </a:xfrm>
-          <a:prstGeom prst="rect">
-            <a:avLst/>
-          </a:prstGeom>
-          <a:noFill/>
-          <a:ln/>
-        </p:spPr>
-        <p:txBody>
-          <a:bodyPr wrap="square" lIns="0" tIns="0" rIns="0" bIns="0" rtlCol="0" anchor="ctr"/>
-          <a:lstStyle/>
-          <a:p>
-            <a:pPr marL="0" indent="0">
-              <a:buNone/>
-            </a:pPr>
-            <a:r>
-              <a:rPr lang="en-US" sz="900" dirty="0">
-                <a:solidFill>
-                  <a:srgbClr val="5F7178"/>
-                </a:solidFill>
-                <a:latin typeface="Calibri" pitchFamily="34" charset="0"/>
-                <a:ea typeface="Calibri" pitchFamily="34" charset="-122"/>
-                <a:cs typeface="Calibri" pitchFamily="34" charset="-120"/>
-              </a:rPr>
-              <a:t>only intensity is stored besides X, Y and Z</a:t>
-            </a:r>
-            <a:endParaRPr lang="en-US" sz="900" dirty="0"/>
+              <a:rPr lang="en-GB" sz="1800" u="none" strike="noStrike" dirty="0">
+                <a:effectLst/>
+                <a:latin typeface="+mn-lt"/>
+                <a:ea typeface="Times New Roman" panose="02020603050405020304" pitchFamily="18" charset="0"/>
+              </a:rPr>
+              <a:t>Explain the idea of the project - to cluster and classify abnormal events based on geometric faults and train a SVM that can predict these without geometric data.</a:t>
+            </a:r>
+            <a:endParaRPr lang="sv-SE" sz="900" u="none" strike="noStrike" dirty="0">
+              <a:effectLst/>
+              <a:latin typeface="Times New Roman" panose="02020603050405020304" pitchFamily="18" charset="0"/>
+              <a:ea typeface="Times New Roman" panose="02020603050405020304" pitchFamily="18" charset="0"/>
+            </a:endParaRPr>
           </a:p>
         </p:txBody>
       </p:sp>
     </p:spTree>
+    <p:extLst>
+      <p:ext uri="{BB962C8B-B14F-4D97-AF65-F5344CB8AC3E}">
+        <p14:creationId xmlns:p14="http://schemas.microsoft.com/office/powerpoint/2010/main" val="1372921543"/>
+      </p:ext>
+    </p:extLst>
   </p:cSld>
   <p:clrMapOvr>
     <a:masterClrMapping/>
@@ -12360,7 +11737,7 @@
                 <a:ea typeface="Calibri" pitchFamily="34" charset="-122"/>
                 <a:cs typeface="Calibri" pitchFamily="34" charset="-120"/>
               </a:rPr>
-              <a:t>DIRECTION</a:t>
+              <a:t>THE DATA</a:t>
             </a:r>
             <a:endParaRPr lang="en-US" sz="1100" dirty="0"/>
           </a:p>
@@ -12399,22 +11776,85 @@
                 <a:ea typeface="Cambria" pitchFamily="34" charset="-122"/>
                 <a:cs typeface="Cambria" pitchFamily="34" charset="-120"/>
               </a:rPr>
-              <a:t>From fault types to change over time</a:t>
+              <a:t>One scan of double track, no vibration data</a:t>
             </a:r>
             <a:endParaRPr lang="en-US" sz="2700" dirty="0"/>
           </a:p>
         </p:txBody>
       </p:sp>
-      <p:sp>
-        <p:nvSpPr>
-          <p:cNvPr id="4" name="Shape 4"/>
+      <p:pic>
+        <p:nvPicPr>
+          <p:cNvPr id="4" name="Picture 3" descr="f1_topdown.png"/>
+          <p:cNvPicPr>
+            <a:picLocks noChangeAspect="1"/>
+          </p:cNvPicPr>
+          <p:nvPr/>
+        </p:nvPicPr>
+        <p:blipFill>
+          <a:blip r:embed="rId2"/>
+          <a:stretch>
+            <a:fillRect/>
+          </a:stretch>
+        </p:blipFill>
+        <p:spPr>
+          <a:xfrm>
+            <a:off x="457200" y="1280160"/>
+            <a:ext cx="4572000" cy="3017520"/>
+          </a:xfrm>
+          <a:prstGeom prst="rect">
+            <a:avLst/>
+          </a:prstGeom>
+        </p:spPr>
+      </p:pic>
+      <p:sp>
+        <p:nvSpPr>
+          <p:cNvPr id="5" name="Text 3"/>
+          <p:cNvSpPr txBox="1"/>
+          <p:nvPr/>
+        </p:nvSpPr>
+        <p:spPr>
+          <a:xfrm>
+            <a:off x="457200" y="4343400"/>
+            <a:ext cx="4572000" cy="237744"/>
+          </a:xfrm>
+          <a:prstGeom prst="rect">
+            <a:avLst/>
+          </a:prstGeom>
+          <a:noFill/>
+          <a:ln/>
+        </p:spPr>
+        <p:txBody>
+          <a:bodyPr wrap="square" lIns="0" tIns="0" rIns="0" bIns="0" rtlCol="0" anchor="ctr"/>
+          <a:lstStyle/>
+          <a:p>
+            <a:pPr marL="0" indent="0">
+              <a:buNone/>
+            </a:pPr>
+            <a:r>
+              <a:rPr lang="en-US" sz="950" i="1" dirty="0">
+                <a:solidFill>
+                  <a:srgbClr val="5F7178"/>
+                </a:solidFill>
+                <a:latin typeface="Calibri" pitchFamily="34" charset="0"/>
+                <a:ea typeface="Calibri" pitchFamily="34" charset="-122"/>
+                <a:cs typeface="Calibri" pitchFamily="34" charset="-120"/>
+              </a:rPr>
+              <a:t>Top-down point density (log scale). Two parallel tracks run through the scan.</a:t>
+            </a:r>
+            <a:endParaRPr lang="en-US" sz="950" dirty="0"/>
+          </a:p>
+        </p:txBody>
+      </p:sp>
+      <p:sp>
+        <p:nvSpPr>
+          <p:cNvPr id="6" name="Shape 4"/>
           <p:cNvSpPr/>
           <p:nvPr/>
         </p:nvSpPr>
         <p:spPr>
           <a:xfrm>
-            <a:off x="457200" y="1325880"/>
-            <a:ext cx="3611880" cy="1691640"/>
+            <a:off x="5257800" y="1325880"/>
+            <a:ext cx="3429000" cy="676656"/>
           </a:xfrm>
           <a:prstGeom prst="roundRect">
             <a:avLst>
@@ -12441,296 +11881,131 @@
       </p:sp>
       <p:sp>
         <p:nvSpPr>
-          <p:cNvPr id="5" name="TextBox 4"/>
+          <p:cNvPr id="7" name="Text 5"/>
           <p:cNvSpPr txBox="1"/>
           <p:nvPr/>
         </p:nvSpPr>
         <p:spPr>
           <a:xfrm>
-            <a:off x="685800" y="1481328"/>
-            <a:ext cx="3200400" cy="228600"/>
+            <a:off x="5367528" y="1325880"/>
+            <a:ext cx="1005840" cy="676656"/>
           </a:xfrm>
           <a:prstGeom prst="rect">
             <a:avLst/>
           </a:prstGeom>
           <a:noFill/>
-        </p:spPr>
-        <p:txBody>
-          <a:bodyPr wrap="square" lIns="0" tIns="0" rIns="0" bIns="0" anchor="t">
-            <a:spAutoFit/>
-          </a:bodyPr>
-          <a:lstStyle/>
-          <a:p>
-            <a:r>
-              <a:rPr sz="1100" b="1" spc="200">
+          <a:ln/>
+        </p:spPr>
+        <p:txBody>
+          <a:bodyPr wrap="square" lIns="0" tIns="0" rIns="0" bIns="0" rtlCol="0" anchor="ctr"/>
+          <a:lstStyle/>
+          <a:p>
+            <a:pPr marL="0" indent="0" algn="ctr">
+              <a:buNone/>
+            </a:pPr>
+            <a:r>
+              <a:rPr lang="en-US" sz="1800" b="1" dirty="0">
+                <a:solidFill>
+                  <a:srgbClr val="028090"/>
+                </a:solidFill>
+                <a:latin typeface="Cambria" pitchFamily="34" charset="0"/>
+                <a:ea typeface="Cambria" pitchFamily="34" charset="-122"/>
+                <a:cs typeface="Cambria" pitchFamily="34" charset="-120"/>
+              </a:rPr>
+              <a:t>15.9 M</a:t>
+            </a:r>
+            <a:endParaRPr lang="en-US" sz="1800" dirty="0"/>
+          </a:p>
+        </p:txBody>
+      </p:sp>
+      <p:sp>
+        <p:nvSpPr>
+          <p:cNvPr id="8" name="Text 6"/>
+          <p:cNvSpPr txBox="1"/>
+          <p:nvPr/>
+        </p:nvSpPr>
+        <p:spPr>
+          <a:xfrm>
+            <a:off x="6446520" y="1399032"/>
+            <a:ext cx="2148840" cy="237744"/>
+          </a:xfrm>
+          <a:prstGeom prst="rect">
+            <a:avLst/>
+          </a:prstGeom>
+          <a:noFill/>
+          <a:ln/>
+        </p:spPr>
+        <p:txBody>
+          <a:bodyPr wrap="square" lIns="0" tIns="0" rIns="0" bIns="0" rtlCol="0" anchor="ctr"/>
+          <a:lstStyle/>
+          <a:p>
+            <a:pPr marL="0" indent="0">
+              <a:buNone/>
+            </a:pPr>
+            <a:r>
+              <a:rPr lang="en-US" sz="1100" b="1" dirty="0">
+                <a:solidFill>
+                  <a:srgbClr val="16262B"/>
+                </a:solidFill>
+                <a:latin typeface="Calibri" pitchFamily="34" charset="0"/>
+                <a:ea typeface="Calibri" pitchFamily="34" charset="-122"/>
+                <a:cs typeface="Calibri" pitchFamily="34" charset="-120"/>
+              </a:rPr>
+              <a:t>points in one LAZ file</a:t>
+            </a:r>
+            <a:endParaRPr lang="en-US" sz="1100" dirty="0"/>
+          </a:p>
+        </p:txBody>
+      </p:sp>
+      <p:sp>
+        <p:nvSpPr>
+          <p:cNvPr id="9" name="Text 7"/>
+          <p:cNvSpPr txBox="1"/>
+          <p:nvPr/>
+        </p:nvSpPr>
+        <p:spPr>
+          <a:xfrm>
+            <a:off x="6446520" y="1636776"/>
+            <a:ext cx="2148840" cy="310896"/>
+          </a:xfrm>
+          <a:prstGeom prst="rect">
+            <a:avLst/>
+          </a:prstGeom>
+          <a:noFill/>
+          <a:ln/>
+        </p:spPr>
+        <p:txBody>
+          <a:bodyPr wrap="square" lIns="0" tIns="0" rIns="0" bIns="0" rtlCol="0" anchor="ctr"/>
+          <a:lstStyle/>
+          <a:p>
+            <a:pPr marL="0" indent="0">
+              <a:buNone/>
+            </a:pPr>
+            <a:r>
+              <a:rPr lang="en-US" sz="900" dirty="0">
                 <a:solidFill>
                   <a:srgbClr val="5F7178"/>
                 </a:solidFill>
-                <a:latin typeface="Calibri"/>
-              </a:rPr>
-              <a:t>BEFORE</a:t>
-            </a:r>
-          </a:p>
-        </p:txBody>
-      </p:sp>
-      <p:sp>
-        <p:nvSpPr>
-          <p:cNvPr id="6" name="TextBox 5"/>
-          <p:cNvSpPr txBox="1"/>
-          <p:nvPr/>
-        </p:nvSpPr>
-        <p:spPr>
-          <a:xfrm>
-            <a:off x="685800" y="1755648"/>
-            <a:ext cx="3200400" cy="274320"/>
-          </a:xfrm>
-          <a:prstGeom prst="rect">
-            <a:avLst/>
-          </a:prstGeom>
-          <a:noFill/>
-        </p:spPr>
-        <p:txBody>
-          <a:bodyPr wrap="square" lIns="0" tIns="0" rIns="0" bIns="0" anchor="t">
-            <a:spAutoFit/>
-          </a:bodyPr>
-          <a:lstStyle/>
-          <a:p>
-            <a:r>
-              <a:rPr sz="1500" b="1">
-                <a:solidFill>
-                  <a:srgbClr val="5F7178"/>
-                </a:solidFill>
-                <a:latin typeface="Calibri"/>
-              </a:rPr>
-              <a:t>Link vibration events to geometry</a:t>
-            </a:r>
-          </a:p>
-        </p:txBody>
-      </p:sp>
-      <p:sp>
-        <p:nvSpPr>
-          <p:cNvPr id="7" name="TextBox 6"/>
-          <p:cNvSpPr txBox="1"/>
-          <p:nvPr/>
-        </p:nvSpPr>
-        <p:spPr>
-          <a:xfrm>
-            <a:off x="685800" y="2157984"/>
-            <a:ext cx="3200400" cy="777240"/>
-          </a:xfrm>
-          <a:prstGeom prst="rect">
-            <a:avLst/>
-          </a:prstGeom>
-          <a:noFill/>
-        </p:spPr>
-        <p:txBody>
-          <a:bodyPr wrap="square" lIns="0" tIns="0" rIns="0" bIns="0" anchor="t">
-            <a:spAutoFit/>
-          </a:bodyPr>
-          <a:lstStyle/>
-          <a:p>
-            <a:r>
-              <a:rPr sz="1150" b="0">
-                <a:solidFill>
-                  <a:srgbClr val="5F7178"/>
-                </a:solidFill>
-                <a:latin typeface="Calibri"/>
-              </a:rPr>
-              <a:t>Cluster the abnormal vibration events by their geometry, then predict the fault type from vibration alone.</a:t>
-            </a:r>
-          </a:p>
-        </p:txBody>
-      </p:sp>
-      <p:sp>
-        <p:nvSpPr>
-          <p:cNvPr id="8" name="Right Arrow 7"/>
+                <a:latin typeface="Calibri" pitchFamily="34" charset="0"/>
+                <a:ea typeface="Calibri" pitchFamily="34" charset="-122"/>
+                <a:cs typeface="Calibri" pitchFamily="34" charset="-120"/>
+              </a:rPr>
+              <a:t>47 MB, LAS 1.2, point format 0</a:t>
+            </a:r>
+            <a:endParaRPr lang="en-US" sz="900" dirty="0"/>
+          </a:p>
+        </p:txBody>
+      </p:sp>
+      <p:sp>
+        <p:nvSpPr>
+          <p:cNvPr id="10" name="Shape 4"/>
           <p:cNvSpPr/>
           <p:nvPr/>
         </p:nvSpPr>
         <p:spPr>
           <a:xfrm>
-            <a:off x="4206240" y="1965960"/>
-            <a:ext cx="731520" cy="457200"/>
-          </a:xfrm>
-          <a:prstGeom prst="rightArrow">
-            <a:avLst/>
-          </a:prstGeom>
-          <a:solidFill>
-            <a:srgbClr val="028090"/>
-          </a:solidFill>
-          <a:ln>
-            <a:noFill/>
-          </a:ln>
-        </p:spPr>
-        <p:style>
-          <a:lnRef idx="1">
-            <a:schemeClr val="accent1"/>
-          </a:lnRef>
-          <a:fillRef idx="3">
-            <a:schemeClr val="accent1"/>
-          </a:fillRef>
-          <a:effectRef idx="2">
-            <a:schemeClr val="accent1"/>
-          </a:effectRef>
-          <a:fontRef idx="minor">
-            <a:schemeClr val="lt1"/>
-          </a:fontRef>
-        </p:style>
-        <p:txBody>
-          <a:bodyPr rtlCol="0" anchor="ctr"/>
-          <a:lstStyle/>
-          <a:p>
-            <a:pPr algn="ctr"/>
-            <a:endParaRPr/>
-          </a:p>
-        </p:txBody>
-      </p:sp>
-      <p:sp>
-        <p:nvSpPr>
-          <p:cNvPr id="9" name="Shape 16"/>
-          <p:cNvSpPr/>
-          <p:nvPr/>
-        </p:nvSpPr>
-        <p:spPr>
-          <a:xfrm>
-            <a:off x="5074920" y="1325880"/>
-            <a:ext cx="3611880" cy="1691640"/>
-          </a:xfrm>
-          <a:prstGeom prst="roundRect">
-            <a:avLst>
-              <a:gd name="adj" fmla="val 9091"/>
-            </a:avLst>
-          </a:prstGeom>
-          <a:solidFill>
-            <a:srgbClr val="0B2027"/>
-          </a:solidFill>
-          <a:ln w="12700">
-            <a:solidFill>
-              <a:srgbClr val="0B2027"/>
-            </a:solidFill>
-            <a:prstDash val="solid"/>
-          </a:ln>
-        </p:spPr>
-        <p:txBody>
-          <a:bodyPr/>
-          <a:lstStyle/>
-          <a:p>
-            <a:endParaRPr lang="sv-SE"/>
-          </a:p>
-        </p:txBody>
-      </p:sp>
-      <p:sp>
-        <p:nvSpPr>
-          <p:cNvPr id="10" name="TextBox 9"/>
-          <p:cNvSpPr txBox="1"/>
-          <p:nvPr/>
-        </p:nvSpPr>
-        <p:spPr>
-          <a:xfrm>
-            <a:off x="5303520" y="1481328"/>
-            <a:ext cx="3200400" cy="228600"/>
-          </a:xfrm>
-          <a:prstGeom prst="rect">
-            <a:avLst/>
-          </a:prstGeom>
-          <a:noFill/>
-        </p:spPr>
-        <p:txBody>
-          <a:bodyPr wrap="square" lIns="0" tIns="0" rIns="0" bIns="0" anchor="t">
-            <a:spAutoFit/>
-          </a:bodyPr>
-          <a:lstStyle/>
-          <a:p>
-            <a:r>
-              <a:rPr sz="1100" b="1" spc="200">
-                <a:solidFill>
-                  <a:srgbClr val="00A896"/>
-                </a:solidFill>
-                <a:latin typeface="Calibri"/>
-              </a:rPr>
-              <a:t>NOW</a:t>
-            </a:r>
-          </a:p>
-        </p:txBody>
-      </p:sp>
-      <p:sp>
-        <p:nvSpPr>
-          <p:cNvPr id="11" name="TextBox 10"/>
-          <p:cNvSpPr txBox="1"/>
-          <p:nvPr/>
-        </p:nvSpPr>
-        <p:spPr>
-          <a:xfrm>
-            <a:off x="5303520" y="1755648"/>
-            <a:ext cx="3200400" cy="274320"/>
-          </a:xfrm>
-          <a:prstGeom prst="rect">
-            <a:avLst/>
-          </a:prstGeom>
-          <a:noFill/>
-        </p:spPr>
-        <p:txBody>
-          <a:bodyPr wrap="square" lIns="0" tIns="0" rIns="0" bIns="0" anchor="t">
-            <a:spAutoFit/>
-          </a:bodyPr>
-          <a:lstStyle/>
-          <a:p>
-            <a:r>
-              <a:rPr sz="1500" b="1">
-                <a:solidFill>
-                  <a:srgbClr val="FFFFFF"/>
-                </a:solidFill>
-                <a:latin typeface="Calibri"/>
-              </a:rPr>
-              <a:t>Follow the track over time</a:t>
-            </a:r>
-          </a:p>
-        </p:txBody>
-      </p:sp>
-      <p:sp>
-        <p:nvSpPr>
-          <p:cNvPr id="12" name="TextBox 11"/>
-          <p:cNvSpPr txBox="1"/>
-          <p:nvPr/>
-        </p:nvSpPr>
-        <p:spPr>
-          <a:xfrm>
-            <a:off x="5303520" y="2157984"/>
-            <a:ext cx="3200400" cy="777240"/>
-          </a:xfrm>
-          <a:prstGeom prst="rect">
-            <a:avLst/>
-          </a:prstGeom>
-          <a:noFill/>
-        </p:spPr>
-        <p:txBody>
-          <a:bodyPr wrap="square" lIns="0" tIns="0" rIns="0" bIns="0" anchor="t">
-            <a:spAutoFit/>
-          </a:bodyPr>
-          <a:lstStyle/>
-          <a:p>
-            <a:r>
-              <a:rPr sz="1150" b="0">
-                <a:solidFill>
-                  <a:srgbClr val="C7D8DB"/>
-                </a:solidFill>
-                <a:latin typeface="Calibri"/>
-              </a:rPr>
-              <a:t>Represent every run as a 3D curve and compare runs of the same track, to see where faults appear and how they grow.</a:t>
-            </a:r>
-          </a:p>
-        </p:txBody>
-      </p:sp>
-      <p:sp>
-        <p:nvSpPr>
-          <p:cNvPr id="13" name="Shape 4"/>
-          <p:cNvSpPr/>
-          <p:nvPr/>
-        </p:nvSpPr>
-        <p:spPr>
-          <a:xfrm>
-            <a:off x="457200" y="3200400"/>
-            <a:ext cx="8229600" cy="777240"/>
+            <a:off x="5257800" y="2093976"/>
+            <a:ext cx="3429000" cy="676656"/>
           </a:xfrm>
           <a:prstGeom prst="roundRect">
             <a:avLst>
@@ -12757,69 +12032,143 @@
       </p:sp>
       <p:sp>
         <p:nvSpPr>
-          <p:cNvPr id="14" name="TextBox 13"/>
+          <p:cNvPr id="11" name="Text 5"/>
           <p:cNvSpPr txBox="1"/>
           <p:nvPr/>
         </p:nvSpPr>
         <p:spPr>
           <a:xfrm>
-            <a:off x="731520" y="3200400"/>
-            <a:ext cx="7680960" cy="777240"/>
+            <a:off x="5367528" y="2093976"/>
+            <a:ext cx="1005840" cy="676656"/>
           </a:xfrm>
           <a:prstGeom prst="rect">
             <a:avLst/>
           </a:prstGeom>
           <a:noFill/>
-        </p:spPr>
-        <p:txBody>
-          <a:bodyPr wrap="square" lIns="0" tIns="0" rIns="0" bIns="0" anchor="ctr">
-            <a:spAutoFit/>
-          </a:bodyPr>
-          <a:lstStyle/>
-          <a:p>
-            <a:r>
-              <a:rPr sz="1200" b="1">
+          <a:ln/>
+        </p:spPr>
+        <p:txBody>
+          <a:bodyPr wrap="square" lIns="0" tIns="0" rIns="0" bIns="0" rtlCol="0" anchor="ctr"/>
+          <a:lstStyle/>
+          <a:p>
+            <a:pPr marL="0" indent="0" algn="ctr">
+              <a:buNone/>
+            </a:pPr>
+            <a:r>
+              <a:rPr lang="en-US" sz="1800" b="1" dirty="0">
                 <a:solidFill>
                   <a:srgbClr val="028090"/>
                 </a:solidFill>
-                <a:latin typeface="Calibri"/>
-              </a:rPr>
-              <a:t>Why the change.  </a:t>
-            </a:r>
-            <a:r>
-              <a:rPr sz="1200" b="0">
+                <a:latin typeface="Cambria" pitchFamily="34" charset="0"/>
+                <a:ea typeface="Cambria" pitchFamily="34" charset="-122"/>
+                <a:cs typeface="Cambria" pitchFamily="34" charset="-120"/>
+              </a:rPr>
+              <a:t>≈ 260 m</a:t>
+            </a:r>
+            <a:endParaRPr lang="en-US" sz="1800" dirty="0"/>
+          </a:p>
+        </p:txBody>
+      </p:sp>
+      <p:sp>
+        <p:nvSpPr>
+          <p:cNvPr id="12" name="Text 6"/>
+          <p:cNvSpPr txBox="1"/>
+          <p:nvPr/>
+        </p:nvSpPr>
+        <p:spPr>
+          <a:xfrm>
+            <a:off x="6446520" y="2167128"/>
+            <a:ext cx="2148840" cy="237744"/>
+          </a:xfrm>
+          <a:prstGeom prst="rect">
+            <a:avLst/>
+          </a:prstGeom>
+          <a:noFill/>
+          <a:ln/>
+        </p:spPr>
+        <p:txBody>
+          <a:bodyPr wrap="square" lIns="0" tIns="0" rIns="0" bIns="0" rtlCol="0" anchor="ctr"/>
+          <a:lstStyle/>
+          <a:p>
+            <a:pPr marL="0" indent="0">
+              <a:buNone/>
+            </a:pPr>
+            <a:r>
+              <a:rPr lang="en-US" sz="1100" b="1" dirty="0">
                 <a:solidFill>
                   <a:srgbClr val="16262B"/>
                 </a:solidFill>
-                <a:latin typeface="Calibri"/>
-              </a:rPr>
-              <a:t>The vibration data that would link events to the geometry is not available, so the first idea cannot be tested. A point cloud gives every point an exact location, so runs of the same track can be compared directly.</a:t>
-            </a:r>
-          </a:p>
-        </p:txBody>
-      </p:sp>
-      <p:sp>
-        <p:nvSpPr>
-          <p:cNvPr id="15" name="Shape 16"/>
+                <a:latin typeface="Calibri" pitchFamily="34" charset="0"/>
+                <a:ea typeface="Calibri" pitchFamily="34" charset="-122"/>
+                <a:cs typeface="Calibri" pitchFamily="34" charset="-120"/>
+              </a:rPr>
+              <a:t>of track, with one gentle curve</a:t>
+            </a:r>
+            <a:endParaRPr lang="en-US" sz="1100" dirty="0"/>
+          </a:p>
+        </p:txBody>
+      </p:sp>
+      <p:sp>
+        <p:nvSpPr>
+          <p:cNvPr id="13" name="Text 7"/>
+          <p:cNvSpPr txBox="1"/>
+          <p:nvPr/>
+        </p:nvSpPr>
+        <p:spPr>
+          <a:xfrm>
+            <a:off x="6446520" y="2404872"/>
+            <a:ext cx="2148840" cy="310896"/>
+          </a:xfrm>
+          <a:prstGeom prst="rect">
+            <a:avLst/>
+          </a:prstGeom>
+          <a:noFill/>
+          <a:ln/>
+        </p:spPr>
+        <p:txBody>
+          <a:bodyPr wrap="square" lIns="0" tIns="0" rIns="0" bIns="0" rtlCol="0" anchor="ctr"/>
+          <a:lstStyle/>
+          <a:p>
+            <a:pPr marL="0" indent="0">
+              <a:buNone/>
+            </a:pPr>
+            <a:r>
+              <a:rPr lang="en-US" sz="900" dirty="0">
+                <a:solidFill>
+                  <a:srgbClr val="5F7178"/>
+                </a:solidFill>
+                <a:latin typeface="Calibri" pitchFamily="34" charset="0"/>
+                <a:ea typeface="Calibri" pitchFamily="34" charset="-122"/>
+                <a:cs typeface="Calibri" pitchFamily="34" charset="-120"/>
+              </a:rPr>
+              <a:t>straight for most of the scan, curving at the start</a:t>
+            </a:r>
+            <a:endParaRPr lang="en-US" sz="900" dirty="0"/>
+          </a:p>
+        </p:txBody>
+      </p:sp>
+      <p:sp>
+        <p:nvSpPr>
+          <p:cNvPr id="14" name="Shape 4"/>
           <p:cNvSpPr/>
           <p:nvPr/>
         </p:nvSpPr>
         <p:spPr>
           <a:xfrm>
-            <a:off x="457200" y="4160520"/>
-            <a:ext cx="8229600" cy="457200"/>
+            <a:off x="5257800" y="2862072"/>
+            <a:ext cx="3429000" cy="676656"/>
           </a:xfrm>
           <a:prstGeom prst="roundRect">
             <a:avLst>
-              <a:gd name="adj" fmla="val 9091"/>
+              <a:gd name="adj" fmla="val 9375"/>
             </a:avLst>
           </a:prstGeom>
           <a:solidFill>
-            <a:srgbClr val="0B2027"/>
+            <a:srgbClr val="EDF5F5"/>
           </a:solidFill>
           <a:ln w="12700">
             <a:solidFill>
-              <a:srgbClr val="0B2027"/>
+              <a:srgbClr val="EDF5F5"/>
             </a:solidFill>
             <a:prstDash val="solid"/>
           </a:ln>
@@ -12834,14 +12183,53 @@
       </p:sp>
       <p:sp>
         <p:nvSpPr>
-          <p:cNvPr id="16" name="Text 17"/>
+          <p:cNvPr id="15" name="Text 5"/>
           <p:cNvSpPr txBox="1"/>
           <p:nvPr/>
         </p:nvSpPr>
         <p:spPr>
           <a:xfrm>
-            <a:off x="731520" y="4160520"/>
-            <a:ext cx="7680960" cy="457200"/>
+            <a:off x="5367528" y="2862072"/>
+            <a:ext cx="1005840" cy="676656"/>
+          </a:xfrm>
+          <a:prstGeom prst="rect">
+            <a:avLst/>
+          </a:prstGeom>
+          <a:noFill/>
+          <a:ln/>
+        </p:spPr>
+        <p:txBody>
+          <a:bodyPr wrap="square" lIns="0" tIns="0" rIns="0" bIns="0" rtlCol="0" anchor="ctr"/>
+          <a:lstStyle/>
+          <a:p>
+            <a:pPr marL="0" indent="0" algn="ctr">
+              <a:buNone/>
+            </a:pPr>
+            <a:r>
+              <a:rPr lang="en-US" sz="1800" b="1" dirty="0">
+                <a:solidFill>
+                  <a:srgbClr val="028090"/>
+                </a:solidFill>
+                <a:latin typeface="Cambria" pitchFamily="34" charset="0"/>
+                <a:ea typeface="Cambria" pitchFamily="34" charset="-122"/>
+                <a:cs typeface="Cambria" pitchFamily="34" charset="-120"/>
+              </a:rPr>
+              <a:t>2</a:t>
+            </a:r>
+            <a:endParaRPr lang="en-US" sz="1800" dirty="0"/>
+          </a:p>
+        </p:txBody>
+      </p:sp>
+      <p:sp>
+        <p:nvSpPr>
+          <p:cNvPr id="16" name="Text 6"/>
+          <p:cNvSpPr txBox="1"/>
+          <p:nvPr/>
+        </p:nvSpPr>
+        <p:spPr>
+          <a:xfrm>
+            <a:off x="6446520" y="2935224"/>
+            <a:ext cx="2148840" cy="237744"/>
           </a:xfrm>
           <a:prstGeom prst="rect">
             <a:avLst/>
@@ -12857,17 +12245,207 @@
               <a:buNone/>
             </a:pPr>
             <a:r>
-              <a:rPr lang="en-US" sz="1200" b="1" dirty="0">
-                <a:solidFill>
-                  <a:srgbClr val="FFFFFF"/>
+              <a:rPr lang="en-US" sz="1100" b="1" dirty="0">
+                <a:solidFill>
+                  <a:srgbClr val="16262B"/>
                 </a:solidFill>
                 <a:latin typeface="Calibri" pitchFamily="34" charset="0"/>
                 <a:ea typeface="Calibri" pitchFamily="34" charset="-122"/>
                 <a:cs typeface="Calibri" pitchFamily="34" charset="-120"/>
               </a:rPr>
-              <a:t>One run is a snapshot. Several runs show a trend.</a:t>
-            </a:r>
-            <a:endParaRPr lang="en-US" sz="1200" dirty="0"/>
+              <a:t>tracks in the scan</a:t>
+            </a:r>
+            <a:endParaRPr lang="en-US" sz="1100" dirty="0"/>
+          </a:p>
+        </p:txBody>
+      </p:sp>
+      <p:sp>
+        <p:nvSpPr>
+          <p:cNvPr id="17" name="Text 7"/>
+          <p:cNvSpPr txBox="1"/>
+          <p:nvPr/>
+        </p:nvSpPr>
+        <p:spPr>
+          <a:xfrm>
+            <a:off x="6446520" y="3172968"/>
+            <a:ext cx="2148840" cy="310896"/>
+          </a:xfrm>
+          <a:prstGeom prst="rect">
+            <a:avLst/>
+          </a:prstGeom>
+          <a:noFill/>
+          <a:ln/>
+        </p:spPr>
+        <p:txBody>
+          <a:bodyPr wrap="square" lIns="0" tIns="0" rIns="0" bIns="0" rtlCol="0" anchor="ctr"/>
+          <a:lstStyle/>
+          <a:p>
+            <a:pPr marL="0" indent="0">
+              <a:buNone/>
+            </a:pPr>
+            <a:r>
+              <a:rPr lang="en-US" sz="900" dirty="0">
+                <a:solidFill>
+                  <a:srgbClr val="5F7178"/>
+                </a:solidFill>
+                <a:latin typeface="Calibri" pitchFamily="34" charset="0"/>
+                <a:ea typeface="Calibri" pitchFamily="34" charset="-122"/>
+                <a:cs typeface="Calibri" pitchFamily="34" charset="-120"/>
+              </a:rPr>
+              <a:t>the LiDAR rode the left one, so we work on that track</a:t>
+            </a:r>
+            <a:endParaRPr lang="en-US" sz="900" dirty="0"/>
+          </a:p>
+        </p:txBody>
+      </p:sp>
+      <p:sp>
+        <p:nvSpPr>
+          <p:cNvPr id="18" name="Shape 4"/>
+          <p:cNvSpPr/>
+          <p:nvPr/>
+        </p:nvSpPr>
+        <p:spPr>
+          <a:xfrm>
+            <a:off x="5257800" y="3630168"/>
+            <a:ext cx="3429000" cy="676656"/>
+          </a:xfrm>
+          <a:prstGeom prst="roundRect">
+            <a:avLst>
+              <a:gd name="adj" fmla="val 9375"/>
+            </a:avLst>
+          </a:prstGeom>
+          <a:solidFill>
+            <a:srgbClr val="EDF5F5"/>
+          </a:solidFill>
+          <a:ln w="12700">
+            <a:solidFill>
+              <a:srgbClr val="EDF5F5"/>
+            </a:solidFill>
+            <a:prstDash val="solid"/>
+          </a:ln>
+        </p:spPr>
+        <p:txBody>
+          <a:bodyPr/>
+          <a:lstStyle/>
+          <a:p>
+            <a:endParaRPr lang="sv-SE"/>
+          </a:p>
+        </p:txBody>
+      </p:sp>
+      <p:sp>
+        <p:nvSpPr>
+          <p:cNvPr id="19" name="Text 5"/>
+          <p:cNvSpPr txBox="1"/>
+          <p:nvPr/>
+        </p:nvSpPr>
+        <p:spPr>
+          <a:xfrm>
+            <a:off x="5367528" y="3630168"/>
+            <a:ext cx="1005840" cy="676656"/>
+          </a:xfrm>
+          <a:prstGeom prst="rect">
+            <a:avLst/>
+          </a:prstGeom>
+          <a:noFill/>
+          <a:ln/>
+        </p:spPr>
+        <p:txBody>
+          <a:bodyPr wrap="square" lIns="0" tIns="0" rIns="0" bIns="0" rtlCol="0" anchor="ctr"/>
+          <a:lstStyle/>
+          <a:p>
+            <a:pPr marL="0" indent="0" algn="ctr">
+              <a:buNone/>
+            </a:pPr>
+            <a:r>
+              <a:rPr lang="en-US" sz="1800" b="1" dirty="0">
+                <a:solidFill>
+                  <a:srgbClr val="028090"/>
+                </a:solidFill>
+                <a:latin typeface="Cambria" pitchFamily="34" charset="0"/>
+                <a:ea typeface="Cambria" pitchFamily="34" charset="-122"/>
+                <a:cs typeface="Cambria" pitchFamily="34" charset="-120"/>
+              </a:rPr>
+              <a:t>0</a:t>
+            </a:r>
+            <a:endParaRPr lang="en-US" sz="1800" dirty="0"/>
+          </a:p>
+        </p:txBody>
+      </p:sp>
+      <p:sp>
+        <p:nvSpPr>
+          <p:cNvPr id="20" name="Text 6"/>
+          <p:cNvSpPr txBox="1"/>
+          <p:nvPr/>
+        </p:nvSpPr>
+        <p:spPr>
+          <a:xfrm>
+            <a:off x="6446520" y="3703320"/>
+            <a:ext cx="2148840" cy="237744"/>
+          </a:xfrm>
+          <a:prstGeom prst="rect">
+            <a:avLst/>
+          </a:prstGeom>
+          <a:noFill/>
+          <a:ln/>
+        </p:spPr>
+        <p:txBody>
+          <a:bodyPr wrap="square" lIns="0" tIns="0" rIns="0" bIns="0" rtlCol="0" anchor="ctr"/>
+          <a:lstStyle/>
+          <a:p>
+            <a:pPr marL="0" indent="0">
+              <a:buNone/>
+            </a:pPr>
+            <a:r>
+              <a:rPr lang="en-US" sz="1100" b="1" dirty="0">
+                <a:solidFill>
+                  <a:srgbClr val="16262B"/>
+                </a:solidFill>
+                <a:latin typeface="Calibri" pitchFamily="34" charset="0"/>
+                <a:ea typeface="Calibri" pitchFamily="34" charset="-122"/>
+                <a:cs typeface="Calibri" pitchFamily="34" charset="-120"/>
+              </a:rPr>
+              <a:t>timestamps or coordinate system</a:t>
+            </a:r>
+            <a:endParaRPr lang="en-US" sz="1100" dirty="0"/>
+          </a:p>
+        </p:txBody>
+      </p:sp>
+      <p:sp>
+        <p:nvSpPr>
+          <p:cNvPr id="21" name="Text 7"/>
+          <p:cNvSpPr txBox="1"/>
+          <p:nvPr/>
+        </p:nvSpPr>
+        <p:spPr>
+          <a:xfrm>
+            <a:off x="6446520" y="3941063"/>
+            <a:ext cx="2148840" cy="310896"/>
+          </a:xfrm>
+          <a:prstGeom prst="rect">
+            <a:avLst/>
+          </a:prstGeom>
+          <a:noFill/>
+          <a:ln/>
+        </p:spPr>
+        <p:txBody>
+          <a:bodyPr wrap="square" lIns="0" tIns="0" rIns="0" bIns="0" rtlCol="0" anchor="ctr"/>
+          <a:lstStyle/>
+          <a:p>
+            <a:pPr marL="0" indent="0">
+              <a:buNone/>
+            </a:pPr>
+            <a:r>
+              <a:rPr lang="en-US" sz="900" dirty="0">
+                <a:solidFill>
+                  <a:srgbClr val="5F7178"/>
+                </a:solidFill>
+                <a:latin typeface="Calibri" pitchFamily="34" charset="0"/>
+                <a:ea typeface="Calibri" pitchFamily="34" charset="-122"/>
+                <a:cs typeface="Calibri" pitchFamily="34" charset="-120"/>
+              </a:rPr>
+              <a:t>only intensity is stored besides X, Y and Z</a:t>
+            </a:r>
+            <a:endParaRPr lang="en-US" sz="900" dirty="0"/>
           </a:p>
         </p:txBody>
       </p:sp>
@@ -12929,7 +12507,7 @@
                 <a:ea typeface="Calibri" pitchFamily="34" charset="-122"/>
                 <a:cs typeface="Calibri" pitchFamily="34" charset="-120"/>
               </a:rPr>
-              <a:t>REPRESENTATION</a:t>
+              <a:t>DIRECTION</a:t>
             </a:r>
             <a:endParaRPr lang="en-US" sz="1100" dirty="0"/>
           </a:p>
@@ -12968,7 +12546,7 @@
                 <a:ea typeface="Cambria" pitchFamily="34" charset="-122"/>
                 <a:cs typeface="Cambria" pitchFamily="34" charset="-120"/>
               </a:rPr>
-              <a:t>One run becomes one 3D curve</a:t>
+              <a:t>From fault types to change over time</a:t>
             </a:r>
             <a:endParaRPr lang="en-US" sz="2700" dirty="0"/>
           </a:p>
@@ -12976,24 +12554,206 @@
       </p:sp>
       <p:sp>
         <p:nvSpPr>
-          <p:cNvPr id="4" name="Shape 2"/>
+          <p:cNvPr id="4" name="Shape 4"/>
           <p:cNvSpPr/>
           <p:nvPr/>
         </p:nvSpPr>
         <p:spPr>
           <a:xfrm>
             <a:off x="457200" y="1325880"/>
-            <a:ext cx="384048" cy="384048"/>
-          </a:xfrm>
-          <a:prstGeom prst="ellipse">
+            <a:ext cx="3611880" cy="1691640"/>
+          </a:xfrm>
+          <a:prstGeom prst="roundRect">
+            <a:avLst>
+              <a:gd name="adj" fmla="val 9375"/>
+            </a:avLst>
+          </a:prstGeom>
+          <a:solidFill>
+            <a:srgbClr val="EDF5F5"/>
+          </a:solidFill>
+          <a:ln w="12700">
+            <a:solidFill>
+              <a:srgbClr val="EDF5F5"/>
+            </a:solidFill>
+            <a:prstDash val="solid"/>
+          </a:ln>
+        </p:spPr>
+        <p:txBody>
+          <a:bodyPr/>
+          <a:lstStyle/>
+          <a:p>
+            <a:endParaRPr lang="sv-SE"/>
+          </a:p>
+        </p:txBody>
+      </p:sp>
+      <p:sp>
+        <p:nvSpPr>
+          <p:cNvPr id="5" name="TextBox 4"/>
+          <p:cNvSpPr txBox="1"/>
+          <p:nvPr/>
+        </p:nvSpPr>
+        <p:spPr>
+          <a:xfrm>
+            <a:off x="685800" y="1481328"/>
+            <a:ext cx="3200400" cy="228600"/>
+          </a:xfrm>
+          <a:prstGeom prst="rect">
+            <a:avLst/>
+          </a:prstGeom>
+          <a:noFill/>
+        </p:spPr>
+        <p:txBody>
+          <a:bodyPr wrap="square" lIns="0" tIns="0" rIns="0" bIns="0" anchor="t">
+            <a:spAutoFit/>
+          </a:bodyPr>
+          <a:lstStyle/>
+          <a:p>
+            <a:r>
+              <a:rPr sz="1100" b="1" spc="200">
+                <a:solidFill>
+                  <a:srgbClr val="5F7178"/>
+                </a:solidFill>
+                <a:latin typeface="Calibri"/>
+              </a:rPr>
+              <a:t>BEFORE</a:t>
+            </a:r>
+          </a:p>
+        </p:txBody>
+      </p:sp>
+      <p:sp>
+        <p:nvSpPr>
+          <p:cNvPr id="6" name="TextBox 5"/>
+          <p:cNvSpPr txBox="1"/>
+          <p:nvPr/>
+        </p:nvSpPr>
+        <p:spPr>
+          <a:xfrm>
+            <a:off x="685800" y="1755648"/>
+            <a:ext cx="3200400" cy="274320"/>
+          </a:xfrm>
+          <a:prstGeom prst="rect">
+            <a:avLst/>
+          </a:prstGeom>
+          <a:noFill/>
+        </p:spPr>
+        <p:txBody>
+          <a:bodyPr wrap="square" lIns="0" tIns="0" rIns="0" bIns="0" anchor="t">
+            <a:spAutoFit/>
+          </a:bodyPr>
+          <a:lstStyle/>
+          <a:p>
+            <a:r>
+              <a:rPr sz="1500" b="1">
+                <a:solidFill>
+                  <a:srgbClr val="5F7178"/>
+                </a:solidFill>
+                <a:latin typeface="Calibri"/>
+              </a:rPr>
+              <a:t>Link vibration events to geometry</a:t>
+            </a:r>
+          </a:p>
+        </p:txBody>
+      </p:sp>
+      <p:sp>
+        <p:nvSpPr>
+          <p:cNvPr id="7" name="TextBox 6"/>
+          <p:cNvSpPr txBox="1"/>
+          <p:nvPr/>
+        </p:nvSpPr>
+        <p:spPr>
+          <a:xfrm>
+            <a:off x="685800" y="2157984"/>
+            <a:ext cx="3200400" cy="777240"/>
+          </a:xfrm>
+          <a:prstGeom prst="rect">
+            <a:avLst/>
+          </a:prstGeom>
+          <a:noFill/>
+        </p:spPr>
+        <p:txBody>
+          <a:bodyPr wrap="square" lIns="0" tIns="0" rIns="0" bIns="0" anchor="t">
+            <a:spAutoFit/>
+          </a:bodyPr>
+          <a:lstStyle/>
+          <a:p>
+            <a:r>
+              <a:rPr sz="1150" b="0">
+                <a:solidFill>
+                  <a:srgbClr val="5F7178"/>
+                </a:solidFill>
+                <a:latin typeface="Calibri"/>
+              </a:rPr>
+              <a:t>Cluster the abnormal vibration events by their geometry, then predict the fault type from vibration alone.</a:t>
+            </a:r>
+          </a:p>
+        </p:txBody>
+      </p:sp>
+      <p:sp>
+        <p:nvSpPr>
+          <p:cNvPr id="8" name="Right Arrow 7"/>
+          <p:cNvSpPr/>
+          <p:nvPr/>
+        </p:nvSpPr>
+        <p:spPr>
+          <a:xfrm>
+            <a:off x="4206240" y="1965960"/>
+            <a:ext cx="731520" cy="457200"/>
+          </a:xfrm>
+          <a:prstGeom prst="rightArrow">
             <a:avLst/>
           </a:prstGeom>
           <a:solidFill>
             <a:srgbClr val="028090"/>
           </a:solidFill>
+          <a:ln>
+            <a:noFill/>
+          </a:ln>
+        </p:spPr>
+        <p:style>
+          <a:lnRef idx="1">
+            <a:schemeClr val="accent1"/>
+          </a:lnRef>
+          <a:fillRef idx="3">
+            <a:schemeClr val="accent1"/>
+          </a:fillRef>
+          <a:effectRef idx="2">
+            <a:schemeClr val="accent1"/>
+          </a:effectRef>
+          <a:fontRef idx="minor">
+            <a:schemeClr val="lt1"/>
+          </a:fontRef>
+        </p:style>
+        <p:txBody>
+          <a:bodyPr rtlCol="0" anchor="ctr"/>
+          <a:lstStyle/>
+          <a:p>
+            <a:pPr algn="ctr"/>
+            <a:endParaRPr/>
+          </a:p>
+        </p:txBody>
+      </p:sp>
+      <p:sp>
+        <p:nvSpPr>
+          <p:cNvPr id="9" name="Shape 16"/>
+          <p:cNvSpPr/>
+          <p:nvPr/>
+        </p:nvSpPr>
+        <p:spPr>
+          <a:xfrm>
+            <a:off x="5074920" y="1325880"/>
+            <a:ext cx="3611880" cy="1691640"/>
+          </a:xfrm>
+          <a:prstGeom prst="roundRect">
+            <a:avLst>
+              <a:gd name="adj" fmla="val 9091"/>
+            </a:avLst>
+          </a:prstGeom>
+          <a:solidFill>
+            <a:srgbClr val="0B2027"/>
+          </a:solidFill>
           <a:ln w="12700">
             <a:solidFill>
-              <a:srgbClr val="028090"/>
+              <a:srgbClr val="0B2027"/>
             </a:solidFill>
             <a:prstDash val="solid"/>
           </a:ln>
@@ -13008,14 +12768,227 @@
       </p:sp>
       <p:sp>
         <p:nvSpPr>
-          <p:cNvPr id="5" name="Text 3"/>
+          <p:cNvPr id="10" name="TextBox 9"/>
           <p:cNvSpPr txBox="1"/>
           <p:nvPr/>
         </p:nvSpPr>
         <p:spPr>
           <a:xfrm>
-            <a:off x="457200" y="1325880"/>
-            <a:ext cx="384048" cy="384048"/>
+            <a:off x="5303520" y="1481328"/>
+            <a:ext cx="3200400" cy="228600"/>
+          </a:xfrm>
+          <a:prstGeom prst="rect">
+            <a:avLst/>
+          </a:prstGeom>
+          <a:noFill/>
+        </p:spPr>
+        <p:txBody>
+          <a:bodyPr wrap="square" lIns="0" tIns="0" rIns="0" bIns="0" anchor="t">
+            <a:spAutoFit/>
+          </a:bodyPr>
+          <a:lstStyle/>
+          <a:p>
+            <a:r>
+              <a:rPr sz="1100" b="1" spc="200">
+                <a:solidFill>
+                  <a:srgbClr val="00A896"/>
+                </a:solidFill>
+                <a:latin typeface="Calibri"/>
+              </a:rPr>
+              <a:t>NOW</a:t>
+            </a:r>
+          </a:p>
+        </p:txBody>
+      </p:sp>
+      <p:sp>
+        <p:nvSpPr>
+          <p:cNvPr id="11" name="TextBox 10"/>
+          <p:cNvSpPr txBox="1"/>
+          <p:nvPr/>
+        </p:nvSpPr>
+        <p:spPr>
+          <a:xfrm>
+            <a:off x="5303520" y="1755648"/>
+            <a:ext cx="3200400" cy="274320"/>
+          </a:xfrm>
+          <a:prstGeom prst="rect">
+            <a:avLst/>
+          </a:prstGeom>
+          <a:noFill/>
+        </p:spPr>
+        <p:txBody>
+          <a:bodyPr wrap="square" lIns="0" tIns="0" rIns="0" bIns="0" anchor="t">
+            <a:spAutoFit/>
+          </a:bodyPr>
+          <a:lstStyle/>
+          <a:p>
+            <a:r>
+              <a:rPr sz="1500" b="1">
+                <a:solidFill>
+                  <a:srgbClr val="FFFFFF"/>
+                </a:solidFill>
+                <a:latin typeface="Calibri"/>
+              </a:rPr>
+              <a:t>Follow the track over time</a:t>
+            </a:r>
+          </a:p>
+        </p:txBody>
+      </p:sp>
+      <p:sp>
+        <p:nvSpPr>
+          <p:cNvPr id="12" name="TextBox 11"/>
+          <p:cNvSpPr txBox="1"/>
+          <p:nvPr/>
+        </p:nvSpPr>
+        <p:spPr>
+          <a:xfrm>
+            <a:off x="5303520" y="2157984"/>
+            <a:ext cx="3200400" cy="777240"/>
+          </a:xfrm>
+          <a:prstGeom prst="rect">
+            <a:avLst/>
+          </a:prstGeom>
+          <a:noFill/>
+        </p:spPr>
+        <p:txBody>
+          <a:bodyPr wrap="square" lIns="0" tIns="0" rIns="0" bIns="0" anchor="t">
+            <a:spAutoFit/>
+          </a:bodyPr>
+          <a:lstStyle/>
+          <a:p>
+            <a:r>
+              <a:rPr sz="1150" b="0">
+                <a:solidFill>
+                  <a:srgbClr val="C7D8DB"/>
+                </a:solidFill>
+                <a:latin typeface="Calibri"/>
+              </a:rPr>
+              <a:t>Represent every run as a 3D curve and compare runs of the same track, to see where faults appear and how they grow.</a:t>
+            </a:r>
+          </a:p>
+        </p:txBody>
+      </p:sp>
+      <p:sp>
+        <p:nvSpPr>
+          <p:cNvPr id="13" name="Shape 4"/>
+          <p:cNvSpPr/>
+          <p:nvPr/>
+        </p:nvSpPr>
+        <p:spPr>
+          <a:xfrm>
+            <a:off x="457200" y="3200400"/>
+            <a:ext cx="8229600" cy="777240"/>
+          </a:xfrm>
+          <a:prstGeom prst="roundRect">
+            <a:avLst>
+              <a:gd name="adj" fmla="val 9375"/>
+            </a:avLst>
+          </a:prstGeom>
+          <a:solidFill>
+            <a:srgbClr val="EDF5F5"/>
+          </a:solidFill>
+          <a:ln w="12700">
+            <a:solidFill>
+              <a:srgbClr val="EDF5F5"/>
+            </a:solidFill>
+            <a:prstDash val="solid"/>
+          </a:ln>
+        </p:spPr>
+        <p:txBody>
+          <a:bodyPr/>
+          <a:lstStyle/>
+          <a:p>
+            <a:endParaRPr lang="sv-SE"/>
+          </a:p>
+        </p:txBody>
+      </p:sp>
+      <p:sp>
+        <p:nvSpPr>
+          <p:cNvPr id="14" name="TextBox 13"/>
+          <p:cNvSpPr txBox="1"/>
+          <p:nvPr/>
+        </p:nvSpPr>
+        <p:spPr>
+          <a:xfrm>
+            <a:off x="731520" y="3200400"/>
+            <a:ext cx="7680960" cy="777240"/>
+          </a:xfrm>
+          <a:prstGeom prst="rect">
+            <a:avLst/>
+          </a:prstGeom>
+          <a:noFill/>
+        </p:spPr>
+        <p:txBody>
+          <a:bodyPr wrap="square" lIns="0" tIns="0" rIns="0" bIns="0" anchor="ctr">
+            <a:spAutoFit/>
+          </a:bodyPr>
+          <a:lstStyle/>
+          <a:p>
+            <a:r>
+              <a:rPr sz="1200" b="1">
+                <a:solidFill>
+                  <a:srgbClr val="028090"/>
+                </a:solidFill>
+                <a:latin typeface="Calibri"/>
+              </a:rPr>
+              <a:t>Why the change.  </a:t>
+            </a:r>
+            <a:r>
+              <a:rPr sz="1200" b="0">
+                <a:solidFill>
+                  <a:srgbClr val="16262B"/>
+                </a:solidFill>
+                <a:latin typeface="Calibri"/>
+              </a:rPr>
+              <a:t>The vibration data that would link events to the geometry is not available, so the first idea cannot be tested. A point cloud gives every point an exact location, so runs of the same track can be compared directly.</a:t>
+            </a:r>
+          </a:p>
+        </p:txBody>
+      </p:sp>
+      <p:sp>
+        <p:nvSpPr>
+          <p:cNvPr id="15" name="Shape 16"/>
+          <p:cNvSpPr/>
+          <p:nvPr/>
+        </p:nvSpPr>
+        <p:spPr>
+          <a:xfrm>
+            <a:off x="457200" y="4160520"/>
+            <a:ext cx="8229600" cy="457200"/>
+          </a:xfrm>
+          <a:prstGeom prst="roundRect">
+            <a:avLst>
+              <a:gd name="adj" fmla="val 9091"/>
+            </a:avLst>
+          </a:prstGeom>
+          <a:solidFill>
+            <a:srgbClr val="0B2027"/>
+          </a:solidFill>
+          <a:ln w="12700">
+            <a:solidFill>
+              <a:srgbClr val="0B2027"/>
+            </a:solidFill>
+            <a:prstDash val="solid"/>
+          </a:ln>
+        </p:spPr>
+        <p:txBody>
+          <a:bodyPr/>
+          <a:lstStyle/>
+          <a:p>
+            <a:endParaRPr lang="sv-SE"/>
+          </a:p>
+        </p:txBody>
+      </p:sp>
+      <p:sp>
+        <p:nvSpPr>
+          <p:cNvPr id="16" name="Text 17"/>
+          <p:cNvSpPr txBox="1"/>
+          <p:nvPr/>
+        </p:nvSpPr>
+        <p:spPr>
+          <a:xfrm>
+            <a:off x="731520" y="4160520"/>
+            <a:ext cx="7680960" cy="457200"/>
           </a:xfrm>
           <a:prstGeom prst="rect">
             <a:avLst/>
@@ -13027,11 +13000,11 @@
           <a:bodyPr wrap="square" lIns="0" tIns="0" rIns="0" bIns="0" rtlCol="0" anchor="ctr"/>
           <a:lstStyle/>
           <a:p>
-            <a:pPr marL="0" indent="0" algn="ctr">
+            <a:pPr marL="0" indent="0">
               <a:buNone/>
             </a:pPr>
             <a:r>
-              <a:rPr lang="en-US" sz="1400" b="1" dirty="0">
+              <a:rPr lang="en-US" sz="1200" b="1" dirty="0">
                 <a:solidFill>
                   <a:srgbClr val="FFFFFF"/>
                 </a:solidFill>
@@ -13039,746 +13012,9 @@
                 <a:ea typeface="Calibri" pitchFamily="34" charset="-122"/>
                 <a:cs typeface="Calibri" pitchFamily="34" charset="-120"/>
               </a:rPr>
-              <a:t>1</a:t>
-            </a:r>
-            <a:endParaRPr lang="en-US" sz="1400" dirty="0"/>
-          </a:p>
-        </p:txBody>
-      </p:sp>
-      <p:sp>
-        <p:nvSpPr>
-          <p:cNvPr id="6" name="Text 4"/>
-          <p:cNvSpPr txBox="1"/>
-          <p:nvPr/>
-        </p:nvSpPr>
-        <p:spPr>
-          <a:xfrm>
-            <a:off x="1005840" y="1316736"/>
-            <a:ext cx="1463040" cy="274320"/>
-          </a:xfrm>
-          <a:prstGeom prst="rect">
-            <a:avLst/>
-          </a:prstGeom>
-          <a:noFill/>
-          <a:ln/>
-        </p:spPr>
-        <p:txBody>
-          <a:bodyPr wrap="square" lIns="0" tIns="0" rIns="0" bIns="0" rtlCol="0" anchor="ctr"/>
-          <a:lstStyle/>
-          <a:p>
-            <a:pPr marL="0" indent="0">
-              <a:buNone/>
-            </a:pPr>
-            <a:r>
-              <a:rPr lang="en-US" sz="1400" b="1" dirty="0">
-                <a:solidFill>
-                  <a:srgbClr val="16262B"/>
-                </a:solidFill>
-                <a:latin typeface="Calibri" pitchFamily="34" charset="0"/>
-                <a:ea typeface="Calibri" pitchFamily="34" charset="-122"/>
-                <a:cs typeface="Calibri" pitchFamily="34" charset="-120"/>
-              </a:rPr>
-              <a:t>Reference</a:t>
-            </a:r>
-            <a:endParaRPr lang="en-US" sz="1400" dirty="0"/>
-          </a:p>
-        </p:txBody>
-      </p:sp>
-      <p:sp>
-        <p:nvSpPr>
-          <p:cNvPr id="7" name="Text 5"/>
-          <p:cNvSpPr txBox="1"/>
-          <p:nvPr/>
-        </p:nvSpPr>
-        <p:spPr>
-          <a:xfrm>
-            <a:off x="2514600" y="1307592"/>
-            <a:ext cx="2148840" cy="420624"/>
-          </a:xfrm>
-          <a:prstGeom prst="rect">
-            <a:avLst/>
-          </a:prstGeom>
-          <a:noFill/>
-          <a:ln/>
-        </p:spPr>
-        <p:txBody>
-          <a:bodyPr wrap="square" lIns="0" tIns="0" rIns="0" bIns="0" rtlCol="0" anchor="ctr"/>
-          <a:lstStyle/>
-          <a:p>
-            <a:pPr marL="0" indent="0">
-              <a:buNone/>
-            </a:pPr>
-            <a:r>
-              <a:rPr lang="en-US" sz="1100" dirty="0">
-                <a:solidFill>
-                  <a:srgbClr val="5F7178"/>
-                </a:solidFill>
-                <a:latin typeface="Calibri" pitchFamily="34" charset="0"/>
-                <a:ea typeface="Calibri" pitchFamily="34" charset="-122"/>
-                <a:cs typeface="Calibri" pitchFamily="34" charset="-120"/>
-              </a:rPr>
-              <a:t>one track centreline from run 1, used for every run</a:t>
-            </a:r>
-            <a:endParaRPr lang="en-US" sz="1100" dirty="0"/>
-          </a:p>
-        </p:txBody>
-      </p:sp>
-      <p:sp>
-        <p:nvSpPr>
-          <p:cNvPr id="8" name="Shape 2"/>
-          <p:cNvSpPr/>
-          <p:nvPr/>
-        </p:nvSpPr>
-        <p:spPr>
-          <a:xfrm>
-            <a:off x="457200" y="1929384"/>
-            <a:ext cx="384048" cy="384048"/>
-          </a:xfrm>
-          <a:prstGeom prst="ellipse">
-            <a:avLst/>
-          </a:prstGeom>
-          <a:solidFill>
-            <a:srgbClr val="028090"/>
-          </a:solidFill>
-          <a:ln w="12700">
-            <a:solidFill>
-              <a:srgbClr val="028090"/>
-            </a:solidFill>
-            <a:prstDash val="solid"/>
-          </a:ln>
-        </p:spPr>
-        <p:txBody>
-          <a:bodyPr/>
-          <a:lstStyle/>
-          <a:p>
-            <a:endParaRPr lang="sv-SE"/>
-          </a:p>
-        </p:txBody>
-      </p:sp>
-      <p:sp>
-        <p:nvSpPr>
-          <p:cNvPr id="9" name="Text 3"/>
-          <p:cNvSpPr txBox="1"/>
-          <p:nvPr/>
-        </p:nvSpPr>
-        <p:spPr>
-          <a:xfrm>
-            <a:off x="457200" y="1929384"/>
-            <a:ext cx="384048" cy="384048"/>
-          </a:xfrm>
-          <a:prstGeom prst="rect">
-            <a:avLst/>
-          </a:prstGeom>
-          <a:noFill/>
-          <a:ln/>
-        </p:spPr>
-        <p:txBody>
-          <a:bodyPr wrap="square" lIns="0" tIns="0" rIns="0" bIns="0" rtlCol="0" anchor="ctr"/>
-          <a:lstStyle/>
-          <a:p>
-            <a:pPr marL="0" indent="0" algn="ctr">
-              <a:buNone/>
-            </a:pPr>
-            <a:r>
-              <a:rPr lang="en-US" sz="1400" b="1" dirty="0">
-                <a:solidFill>
-                  <a:srgbClr val="FFFFFF"/>
-                </a:solidFill>
-                <a:latin typeface="Calibri" pitchFamily="34" charset="0"/>
-                <a:ea typeface="Calibri" pitchFamily="34" charset="-122"/>
-                <a:cs typeface="Calibri" pitchFamily="34" charset="-120"/>
-              </a:rPr>
-              <a:t>2</a:t>
-            </a:r>
-            <a:endParaRPr lang="en-US" sz="1400" dirty="0"/>
-          </a:p>
-        </p:txBody>
-      </p:sp>
-      <p:sp>
-        <p:nvSpPr>
-          <p:cNvPr id="10" name="Text 4"/>
-          <p:cNvSpPr txBox="1"/>
-          <p:nvPr/>
-        </p:nvSpPr>
-        <p:spPr>
-          <a:xfrm>
-            <a:off x="1005840" y="1920240"/>
-            <a:ext cx="1463040" cy="274320"/>
-          </a:xfrm>
-          <a:prstGeom prst="rect">
-            <a:avLst/>
-          </a:prstGeom>
-          <a:noFill/>
-          <a:ln/>
-        </p:spPr>
-        <p:txBody>
-          <a:bodyPr wrap="square" lIns="0" tIns="0" rIns="0" bIns="0" rtlCol="0" anchor="ctr"/>
-          <a:lstStyle/>
-          <a:p>
-            <a:pPr marL="0" indent="0">
-              <a:buNone/>
-            </a:pPr>
-            <a:r>
-              <a:rPr lang="en-US" sz="1400" b="1" dirty="0">
-                <a:solidFill>
-                  <a:srgbClr val="16262B"/>
-                </a:solidFill>
-                <a:latin typeface="Calibri" pitchFamily="34" charset="0"/>
-                <a:ea typeface="Calibri" pitchFamily="34" charset="-122"/>
-                <a:cs typeface="Calibri" pitchFamily="34" charset="-120"/>
-              </a:rPr>
-              <a:t>Position</a:t>
-            </a:r>
-            <a:endParaRPr lang="en-US" sz="1400" dirty="0"/>
-          </a:p>
-        </p:txBody>
-      </p:sp>
-      <p:sp>
-        <p:nvSpPr>
-          <p:cNvPr id="11" name="Text 5"/>
-          <p:cNvSpPr txBox="1"/>
-          <p:nvPr/>
-        </p:nvSpPr>
-        <p:spPr>
-          <a:xfrm>
-            <a:off x="2514600" y="1911095"/>
-            <a:ext cx="2148840" cy="420624"/>
-          </a:xfrm>
-          <a:prstGeom prst="rect">
-            <a:avLst/>
-          </a:prstGeom>
-          <a:noFill/>
-          <a:ln/>
-        </p:spPr>
-        <p:txBody>
-          <a:bodyPr wrap="square" lIns="0" tIns="0" rIns="0" bIns="0" rtlCol="0" anchor="ctr"/>
-          <a:lstStyle/>
-          <a:p>
-            <a:pPr marL="0" indent="0">
-              <a:buNone/>
-            </a:pPr>
-            <a:r>
-              <a:rPr lang="en-US" sz="1100" dirty="0">
-                <a:solidFill>
-                  <a:srgbClr val="5F7178"/>
-                </a:solidFill>
-                <a:latin typeface="Calibri" pitchFamily="34" charset="0"/>
-                <a:ea typeface="Calibri" pitchFamily="34" charset="-122"/>
-                <a:cs typeface="Calibri" pitchFamily="34" charset="-120"/>
-              </a:rPr>
-              <a:t>chainage s, sideways offset d and the LiDAR height Z</a:t>
-            </a:r>
-            <a:endParaRPr lang="en-US" sz="1100" dirty="0"/>
-          </a:p>
-        </p:txBody>
-      </p:sp>
-      <p:sp>
-        <p:nvSpPr>
-          <p:cNvPr id="12" name="Shape 2"/>
-          <p:cNvSpPr/>
-          <p:nvPr/>
-        </p:nvSpPr>
-        <p:spPr>
-          <a:xfrm>
-            <a:off x="457200" y="2532888"/>
-            <a:ext cx="384048" cy="384048"/>
-          </a:xfrm>
-          <a:prstGeom prst="ellipse">
-            <a:avLst/>
-          </a:prstGeom>
-          <a:solidFill>
-            <a:srgbClr val="028090"/>
-          </a:solidFill>
-          <a:ln w="12700">
-            <a:solidFill>
-              <a:srgbClr val="028090"/>
-            </a:solidFill>
-            <a:prstDash val="solid"/>
-          </a:ln>
-        </p:spPr>
-        <p:txBody>
-          <a:bodyPr/>
-          <a:lstStyle/>
-          <a:p>
-            <a:endParaRPr lang="sv-SE"/>
-          </a:p>
-        </p:txBody>
-      </p:sp>
-      <p:sp>
-        <p:nvSpPr>
-          <p:cNvPr id="13" name="Text 3"/>
-          <p:cNvSpPr txBox="1"/>
-          <p:nvPr/>
-        </p:nvSpPr>
-        <p:spPr>
-          <a:xfrm>
-            <a:off x="457200" y="2532888"/>
-            <a:ext cx="384048" cy="384048"/>
-          </a:xfrm>
-          <a:prstGeom prst="rect">
-            <a:avLst/>
-          </a:prstGeom>
-          <a:noFill/>
-          <a:ln/>
-        </p:spPr>
-        <p:txBody>
-          <a:bodyPr wrap="square" lIns="0" tIns="0" rIns="0" bIns="0" rtlCol="0" anchor="ctr"/>
-          <a:lstStyle/>
-          <a:p>
-            <a:pPr marL="0" indent="0" algn="ctr">
-              <a:buNone/>
-            </a:pPr>
-            <a:r>
-              <a:rPr lang="en-US" sz="1400" b="1" dirty="0">
-                <a:solidFill>
-                  <a:srgbClr val="FFFFFF"/>
-                </a:solidFill>
-                <a:latin typeface="Calibri" pitchFamily="34" charset="0"/>
-                <a:ea typeface="Calibri" pitchFamily="34" charset="-122"/>
-                <a:cs typeface="Calibri" pitchFamily="34" charset="-120"/>
-              </a:rPr>
-              <a:t>3</a:t>
-            </a:r>
-            <a:endParaRPr lang="en-US" sz="1400" dirty="0"/>
-          </a:p>
-        </p:txBody>
-      </p:sp>
-      <p:sp>
-        <p:nvSpPr>
-          <p:cNvPr id="14" name="Text 4"/>
-          <p:cNvSpPr txBox="1"/>
-          <p:nvPr/>
-        </p:nvSpPr>
-        <p:spPr>
-          <a:xfrm>
-            <a:off x="1005840" y="2523744"/>
-            <a:ext cx="1463040" cy="274320"/>
-          </a:xfrm>
-          <a:prstGeom prst="rect">
-            <a:avLst/>
-          </a:prstGeom>
-          <a:noFill/>
-          <a:ln/>
-        </p:spPr>
-        <p:txBody>
-          <a:bodyPr wrap="square" lIns="0" tIns="0" rIns="0" bIns="0" rtlCol="0" anchor="ctr"/>
-          <a:lstStyle/>
-          <a:p>
-            <a:pPr marL="0" indent="0">
-              <a:buNone/>
-            </a:pPr>
-            <a:r>
-              <a:rPr lang="en-US" sz="1400" b="1" dirty="0">
-                <a:solidFill>
-                  <a:srgbClr val="16262B"/>
-                </a:solidFill>
-                <a:latin typeface="Calibri" pitchFamily="34" charset="0"/>
-                <a:ea typeface="Calibri" pitchFamily="34" charset="-122"/>
-                <a:cs typeface="Calibri" pitchFamily="34" charset="-120"/>
-              </a:rPr>
-              <a:t>Control points</a:t>
-            </a:r>
-            <a:endParaRPr lang="en-US" sz="1400" dirty="0"/>
-          </a:p>
-        </p:txBody>
-      </p:sp>
-      <p:sp>
-        <p:nvSpPr>
-          <p:cNvPr id="15" name="Text 5"/>
-          <p:cNvSpPr txBox="1"/>
-          <p:nvPr/>
-        </p:nvSpPr>
-        <p:spPr>
-          <a:xfrm>
-            <a:off x="2514600" y="2514600"/>
-            <a:ext cx="2148840" cy="420624"/>
-          </a:xfrm>
-          <a:prstGeom prst="rect">
-            <a:avLst/>
-          </a:prstGeom>
-          <a:noFill/>
-          <a:ln/>
-        </p:spPr>
-        <p:txBody>
-          <a:bodyPr wrap="square" lIns="0" tIns="0" rIns="0" bIns="0" rtlCol="0" anchor="ctr"/>
-          <a:lstStyle/>
-          <a:p>
-            <a:pPr marL="0" indent="0">
-              <a:buNone/>
-            </a:pPr>
-            <a:r>
-              <a:rPr lang="en-US" sz="1100" dirty="0">
-                <a:solidFill>
-                  <a:srgbClr val="5F7178"/>
-                </a:solidFill>
-                <a:latin typeface="Calibri" pitchFamily="34" charset="0"/>
-                <a:ea typeface="Calibri" pitchFamily="34" charset="-122"/>
-                <a:cs typeface="Calibri" pitchFamily="34" charset="-120"/>
-              </a:rPr>
-              <a:t>1 m averages on a fixed grid, so runs line up</a:t>
-            </a:r>
-            <a:endParaRPr lang="en-US" sz="1100" dirty="0"/>
-          </a:p>
-        </p:txBody>
-      </p:sp>
-      <p:sp>
-        <p:nvSpPr>
-          <p:cNvPr id="16" name="Shape 2"/>
-          <p:cNvSpPr/>
-          <p:nvPr/>
-        </p:nvSpPr>
-        <p:spPr>
-          <a:xfrm>
-            <a:off x="457200" y="3136391"/>
-            <a:ext cx="384048" cy="384048"/>
-          </a:xfrm>
-          <a:prstGeom prst="ellipse">
-            <a:avLst/>
-          </a:prstGeom>
-          <a:solidFill>
-            <a:srgbClr val="028090"/>
-          </a:solidFill>
-          <a:ln w="12700">
-            <a:solidFill>
-              <a:srgbClr val="028090"/>
-            </a:solidFill>
-            <a:prstDash val="solid"/>
-          </a:ln>
-        </p:spPr>
-        <p:txBody>
-          <a:bodyPr/>
-          <a:lstStyle/>
-          <a:p>
-            <a:endParaRPr lang="sv-SE"/>
-          </a:p>
-        </p:txBody>
-      </p:sp>
-      <p:sp>
-        <p:nvSpPr>
-          <p:cNvPr id="17" name="Text 3"/>
-          <p:cNvSpPr txBox="1"/>
-          <p:nvPr/>
-        </p:nvSpPr>
-        <p:spPr>
-          <a:xfrm>
-            <a:off x="457200" y="3136391"/>
-            <a:ext cx="384048" cy="384048"/>
-          </a:xfrm>
-          <a:prstGeom prst="rect">
-            <a:avLst/>
-          </a:prstGeom>
-          <a:noFill/>
-          <a:ln/>
-        </p:spPr>
-        <p:txBody>
-          <a:bodyPr wrap="square" lIns="0" tIns="0" rIns="0" bIns="0" rtlCol="0" anchor="ctr"/>
-          <a:lstStyle/>
-          <a:p>
-            <a:pPr marL="0" indent="0" algn="ctr">
-              <a:buNone/>
-            </a:pPr>
-            <a:r>
-              <a:rPr lang="en-US" sz="1400" b="1" dirty="0">
-                <a:solidFill>
-                  <a:srgbClr val="FFFFFF"/>
-                </a:solidFill>
-                <a:latin typeface="Calibri" pitchFamily="34" charset="0"/>
-                <a:ea typeface="Calibri" pitchFamily="34" charset="-122"/>
-                <a:cs typeface="Calibri" pitchFamily="34" charset="-120"/>
-              </a:rPr>
-              <a:t>4</a:t>
-            </a:r>
-            <a:endParaRPr lang="en-US" sz="1400" dirty="0"/>
-          </a:p>
-        </p:txBody>
-      </p:sp>
-      <p:sp>
-        <p:nvSpPr>
-          <p:cNvPr id="18" name="Text 4"/>
-          <p:cNvSpPr txBox="1"/>
-          <p:nvPr/>
-        </p:nvSpPr>
-        <p:spPr>
-          <a:xfrm>
-            <a:off x="1005840" y="3127248"/>
-            <a:ext cx="1463040" cy="274320"/>
-          </a:xfrm>
-          <a:prstGeom prst="rect">
-            <a:avLst/>
-          </a:prstGeom>
-          <a:noFill/>
-          <a:ln/>
-        </p:spPr>
-        <p:txBody>
-          <a:bodyPr wrap="square" lIns="0" tIns="0" rIns="0" bIns="0" rtlCol="0" anchor="ctr"/>
-          <a:lstStyle/>
-          <a:p>
-            <a:pPr marL="0" indent="0">
-              <a:buNone/>
-            </a:pPr>
-            <a:r>
-              <a:rPr lang="en-US" sz="1400" b="1" dirty="0">
-                <a:solidFill>
-                  <a:srgbClr val="16262B"/>
-                </a:solidFill>
-                <a:latin typeface="Calibri" pitchFamily="34" charset="0"/>
-                <a:ea typeface="Calibri" pitchFamily="34" charset="-122"/>
-                <a:cs typeface="Calibri" pitchFamily="34" charset="-120"/>
-              </a:rPr>
-              <a:t>Catmull-Rom</a:t>
-            </a:r>
-            <a:endParaRPr lang="en-US" sz="1400" dirty="0"/>
-          </a:p>
-        </p:txBody>
-      </p:sp>
-      <p:sp>
-        <p:nvSpPr>
-          <p:cNvPr id="19" name="Text 5"/>
-          <p:cNvSpPr txBox="1"/>
-          <p:nvPr/>
-        </p:nvSpPr>
-        <p:spPr>
-          <a:xfrm>
-            <a:off x="2514600" y="3118103"/>
-            <a:ext cx="2148840" cy="420624"/>
-          </a:xfrm>
-          <a:prstGeom prst="rect">
-            <a:avLst/>
-          </a:prstGeom>
-          <a:noFill/>
-          <a:ln/>
-        </p:spPr>
-        <p:txBody>
-          <a:bodyPr wrap="square" lIns="0" tIns="0" rIns="0" bIns="0" rtlCol="0" anchor="ctr"/>
-          <a:lstStyle/>
-          <a:p>
-            <a:pPr marL="0" indent="0">
-              <a:buNone/>
-            </a:pPr>
-            <a:r>
-              <a:rPr lang="en-US" sz="1100" dirty="0">
-                <a:solidFill>
-                  <a:srgbClr val="5F7178"/>
-                </a:solidFill>
-                <a:latin typeface="Calibri" pitchFamily="34" charset="0"/>
-                <a:ea typeface="Calibri" pitchFamily="34" charset="-122"/>
-                <a:cs typeface="Calibri" pitchFamily="34" charset="-120"/>
-              </a:rPr>
-              <a:t>a smooth curve through every control point</a:t>
-            </a:r>
-            <a:endParaRPr lang="en-US" sz="1100" dirty="0"/>
-          </a:p>
-        </p:txBody>
-      </p:sp>
-      <p:sp>
-        <p:nvSpPr>
-          <p:cNvPr id="20" name="Shape 2"/>
-          <p:cNvSpPr/>
-          <p:nvPr/>
-        </p:nvSpPr>
-        <p:spPr>
-          <a:xfrm>
-            <a:off x="457200" y="3739896"/>
-            <a:ext cx="384048" cy="384048"/>
-          </a:xfrm>
-          <a:prstGeom prst="ellipse">
-            <a:avLst/>
-          </a:prstGeom>
-          <a:solidFill>
-            <a:srgbClr val="028090"/>
-          </a:solidFill>
-          <a:ln w="12700">
-            <a:solidFill>
-              <a:srgbClr val="028090"/>
-            </a:solidFill>
-            <a:prstDash val="solid"/>
-          </a:ln>
-        </p:spPr>
-        <p:txBody>
-          <a:bodyPr/>
-          <a:lstStyle/>
-          <a:p>
-            <a:endParaRPr lang="sv-SE"/>
-          </a:p>
-        </p:txBody>
-      </p:sp>
-      <p:sp>
-        <p:nvSpPr>
-          <p:cNvPr id="21" name="Text 3"/>
-          <p:cNvSpPr txBox="1"/>
-          <p:nvPr/>
-        </p:nvSpPr>
-        <p:spPr>
-          <a:xfrm>
-            <a:off x="457200" y="3739896"/>
-            <a:ext cx="384048" cy="384048"/>
-          </a:xfrm>
-          <a:prstGeom prst="rect">
-            <a:avLst/>
-          </a:prstGeom>
-          <a:noFill/>
-          <a:ln/>
-        </p:spPr>
-        <p:txBody>
-          <a:bodyPr wrap="square" lIns="0" tIns="0" rIns="0" bIns="0" rtlCol="0" anchor="ctr"/>
-          <a:lstStyle/>
-          <a:p>
-            <a:pPr marL="0" indent="0" algn="ctr">
-              <a:buNone/>
-            </a:pPr>
-            <a:r>
-              <a:rPr lang="en-US" sz="1400" b="1" dirty="0">
-                <a:solidFill>
-                  <a:srgbClr val="FFFFFF"/>
-                </a:solidFill>
-                <a:latin typeface="Calibri" pitchFamily="34" charset="0"/>
-                <a:ea typeface="Calibri" pitchFamily="34" charset="-122"/>
-                <a:cs typeface="Calibri" pitchFamily="34" charset="-120"/>
-              </a:rPr>
-              <a:t>5</a:t>
-            </a:r>
-            <a:endParaRPr lang="en-US" sz="1400" dirty="0"/>
-          </a:p>
-        </p:txBody>
-      </p:sp>
-      <p:sp>
-        <p:nvSpPr>
-          <p:cNvPr id="22" name="Text 4"/>
-          <p:cNvSpPr txBox="1"/>
-          <p:nvPr/>
-        </p:nvSpPr>
-        <p:spPr>
-          <a:xfrm>
-            <a:off x="1005840" y="3730752"/>
-            <a:ext cx="1463040" cy="274320"/>
-          </a:xfrm>
-          <a:prstGeom prst="rect">
-            <a:avLst/>
-          </a:prstGeom>
-          <a:noFill/>
-          <a:ln/>
-        </p:spPr>
-        <p:txBody>
-          <a:bodyPr wrap="square" lIns="0" tIns="0" rIns="0" bIns="0" rtlCol="0" anchor="ctr"/>
-          <a:lstStyle/>
-          <a:p>
-            <a:pPr marL="0" indent="0">
-              <a:buNone/>
-            </a:pPr>
-            <a:r>
-              <a:rPr lang="en-US" sz="1400" b="1" dirty="0">
-                <a:solidFill>
-                  <a:srgbClr val="16262B"/>
-                </a:solidFill>
-                <a:latin typeface="Calibri" pitchFamily="34" charset="0"/>
-                <a:ea typeface="Calibri" pitchFamily="34" charset="-122"/>
-                <a:cs typeface="Calibri" pitchFamily="34" charset="-120"/>
-              </a:rPr>
-              <a:t>Repeatable</a:t>
-            </a:r>
-            <a:endParaRPr lang="en-US" sz="1400" dirty="0"/>
-          </a:p>
-        </p:txBody>
-      </p:sp>
-      <p:sp>
-        <p:nvSpPr>
-          <p:cNvPr id="23" name="Text 5"/>
-          <p:cNvSpPr txBox="1"/>
-          <p:nvPr/>
-        </p:nvSpPr>
-        <p:spPr>
-          <a:xfrm>
-            <a:off x="2514600" y="3721608"/>
-            <a:ext cx="2148840" cy="420624"/>
-          </a:xfrm>
-          <a:prstGeom prst="rect">
-            <a:avLst/>
-          </a:prstGeom>
-          <a:noFill/>
-          <a:ln/>
-        </p:spPr>
-        <p:txBody>
-          <a:bodyPr wrap="square" lIns="0" tIns="0" rIns="0" bIns="0" rtlCol="0" anchor="ctr"/>
-          <a:lstStyle/>
-          <a:p>
-            <a:pPr marL="0" indent="0">
-              <a:buNone/>
-            </a:pPr>
-            <a:r>
-              <a:rPr lang="en-US" sz="1100" dirty="0">
-                <a:solidFill>
-                  <a:srgbClr val="5F7178"/>
-                </a:solidFill>
-                <a:latin typeface="Calibri" pitchFamily="34" charset="0"/>
-                <a:ea typeface="Calibri" pitchFamily="34" charset="-122"/>
-                <a:cs typeface="Calibri" pitchFamily="34" charset="-120"/>
-              </a:rPr>
-              <a:t>settings and file hashes stored; rebuilds are byte-identical</a:t>
-            </a:r>
-            <a:endParaRPr lang="en-US" sz="1100" dirty="0"/>
-          </a:p>
-        </p:txBody>
-      </p:sp>
-      <p:pic>
-        <p:nvPicPr>
-          <p:cNvPr id="24" name="Picture 23" descr="f6_catmull_rom.png"/>
-          <p:cNvPicPr>
-            <a:picLocks noChangeAspect="1"/>
-          </p:cNvPicPr>
-          <p:nvPr/>
-        </p:nvPicPr>
-        <p:blipFill>
-          <a:blip r:embed="rId2"/>
-          <a:stretch>
-            <a:fillRect/>
-          </a:stretch>
-        </p:blipFill>
-        <p:spPr>
-          <a:xfrm>
-            <a:off x="4846320" y="1234440"/>
-            <a:ext cx="3840480" cy="2618509"/>
-          </a:xfrm>
-          <a:prstGeom prst="rect">
-            <a:avLst/>
-          </a:prstGeom>
-        </p:spPr>
-      </p:pic>
-      <p:sp>
-        <p:nvSpPr>
-          <p:cNvPr id="25" name="Text 3"/>
-          <p:cNvSpPr txBox="1"/>
-          <p:nvPr/>
-        </p:nvSpPr>
-        <p:spPr>
-          <a:xfrm>
-            <a:off x="4846320" y="3950208"/>
-            <a:ext cx="3840480" cy="365760"/>
-          </a:xfrm>
-          <a:prstGeom prst="rect">
-            <a:avLst/>
-          </a:prstGeom>
-          <a:noFill/>
-          <a:ln/>
-        </p:spPr>
-        <p:txBody>
-          <a:bodyPr wrap="square" lIns="0" tIns="0" rIns="0" bIns="0" rtlCol="0" anchor="ctr"/>
-          <a:lstStyle/>
-          <a:p>
-            <a:pPr marL="0" indent="0">
-              <a:buNone/>
-            </a:pPr>
-            <a:r>
-              <a:rPr lang="en-US" sz="950" i="1" dirty="0">
-                <a:solidFill>
-                  <a:srgbClr val="5F7178"/>
-                </a:solidFill>
-                <a:latin typeface="Calibri" pitchFamily="34" charset="0"/>
-                <a:ea typeface="Calibri" pitchFamily="34" charset="-122"/>
-                <a:cs typeface="Calibri" pitchFamily="34" charset="-120"/>
-              </a:rPr>
-              <a:t>Left rail, 15 m of the run. A curve through every slab copies the noise; one through 1 m control points does not.</a:t>
-            </a:r>
-            <a:endParaRPr lang="en-US" sz="950" dirty="0"/>
+              <a:t>One run is a snapshot. Several runs show a trend.</a:t>
+            </a:r>
+            <a:endParaRPr lang="en-US" sz="1200" dirty="0"/>
           </a:p>
         </p:txBody>
       </p:sp>
@@ -13840,7 +13076,7 @@
                 <a:ea typeface="Calibri" pitchFamily="34" charset="-122"/>
                 <a:cs typeface="Calibri" pitchFamily="34" charset="-120"/>
               </a:rPr>
-              <a:t>FIRST TEST</a:t>
+              <a:t>REPRESENTATION</a:t>
             </a:r>
             <a:endParaRPr lang="en-US" sz="1100" dirty="0"/>
           </a:p>
@@ -13879,30 +13115,44 @@
                 <a:ea typeface="Cambria" pitchFamily="34" charset="-122"/>
                 <a:cs typeface="Cambria" pitchFamily="34" charset="-120"/>
               </a:rPr>
-              <a:t>Catmull-Rom on the real run</a:t>
+              <a:t>One run becomes one 3D curve</a:t>
             </a:r>
             <a:endParaRPr lang="en-US" sz="2700" dirty="0"/>
           </a:p>
         </p:txBody>
       </p:sp>
-      <p:graphicFrame>
-        <p:nvGraphicFramePr>
-          <p:cNvPr id="4" name="Chart 3"/>
-          <p:cNvGraphicFramePr>
-            <a:graphicFrameLocks noGrp="1"/>
-          </p:cNvGraphicFramePr>
-          <p:nvPr/>
-        </p:nvGraphicFramePr>
-        <p:xfrm>
-          <a:off x="457200" y="1234440"/>
-          <a:ext cx="4754880" cy="2697480"/>
-        </p:xfrm>
-        <a:graphic>
-          <a:graphicData uri="http://schemas.openxmlformats.org/drawingml/2006/chart">
-            <c:chart xmlns:c="http://schemas.openxmlformats.org/drawingml/2006/chart" xmlns:r="http://schemas.openxmlformats.org/officeDocument/2006/relationships" r:id="rId2"/>
-          </a:graphicData>
-        </a:graphic>
-      </p:graphicFrame>
+      <p:sp>
+        <p:nvSpPr>
+          <p:cNvPr id="4" name="Shape 2"/>
+          <p:cNvSpPr/>
+          <p:nvPr/>
+        </p:nvSpPr>
+        <p:spPr>
+          <a:xfrm>
+            <a:off x="457200" y="1325880"/>
+            <a:ext cx="384048" cy="384048"/>
+          </a:xfrm>
+          <a:prstGeom prst="ellipse">
+            <a:avLst/>
+          </a:prstGeom>
+          <a:solidFill>
+            <a:srgbClr val="028090"/>
+          </a:solidFill>
+          <a:ln w="12700">
+            <a:solidFill>
+              <a:srgbClr val="028090"/>
+            </a:solidFill>
+            <a:prstDash val="solid"/>
+          </a:ln>
+        </p:spPr>
+        <p:txBody>
+          <a:bodyPr/>
+          <a:lstStyle/>
+          <a:p>
+            <a:endParaRPr lang="sv-SE"/>
+          </a:p>
+        </p:txBody>
+      </p:sp>
       <p:sp>
         <p:nvSpPr>
           <p:cNvPr id="5" name="Text 3"/>
@@ -13911,8 +13161,47 @@
         </p:nvSpPr>
         <p:spPr>
           <a:xfrm>
-            <a:off x="457200" y="4023360"/>
-            <a:ext cx="4754880" cy="365760"/>
+            <a:off x="457200" y="1325880"/>
+            <a:ext cx="384048" cy="384048"/>
+          </a:xfrm>
+          <a:prstGeom prst="rect">
+            <a:avLst/>
+          </a:prstGeom>
+          <a:noFill/>
+          <a:ln/>
+        </p:spPr>
+        <p:txBody>
+          <a:bodyPr wrap="square" lIns="0" tIns="0" rIns="0" bIns="0" rtlCol="0" anchor="ctr"/>
+          <a:lstStyle/>
+          <a:p>
+            <a:pPr marL="0" indent="0" algn="ctr">
+              <a:buNone/>
+            </a:pPr>
+            <a:r>
+              <a:rPr lang="en-US" sz="1400" b="1" dirty="0">
+                <a:solidFill>
+                  <a:srgbClr val="FFFFFF"/>
+                </a:solidFill>
+                <a:latin typeface="Calibri" pitchFamily="34" charset="0"/>
+                <a:ea typeface="Calibri" pitchFamily="34" charset="-122"/>
+                <a:cs typeface="Calibri" pitchFamily="34" charset="-120"/>
+              </a:rPr>
+              <a:t>1</a:t>
+            </a:r>
+            <a:endParaRPr lang="en-US" sz="1400" dirty="0"/>
+          </a:p>
+        </p:txBody>
+      </p:sp>
+      <p:sp>
+        <p:nvSpPr>
+          <p:cNvPr id="6" name="Text 4"/>
+          <p:cNvSpPr txBox="1"/>
+          <p:nvPr/>
+        </p:nvSpPr>
+        <p:spPr>
+          <a:xfrm>
+            <a:off x="1005840" y="1316736"/>
+            <a:ext cx="1463040" cy="274320"/>
           </a:xfrm>
           <a:prstGeom prst="rect">
             <a:avLst/>
@@ -13928,42 +13217,79 @@
               <a:buNone/>
             </a:pPr>
             <a:r>
-              <a:rPr lang="en-US" sz="950" i="1" dirty="0">
-                <a:solidFill>
-                  <a:srgbClr val="5F7178"/>
+              <a:rPr lang="en-US" sz="1400" b="1" dirty="0">
+                <a:solidFill>
+                  <a:srgbClr val="16262B"/>
                 </a:solidFill>
                 <a:latin typeface="Calibri" pitchFamily="34" charset="0"/>
                 <a:ea typeface="Calibri" pitchFamily="34" charset="-122"/>
                 <a:cs typeface="Calibri" pitchFamily="34" charset="-120"/>
               </a:rPr>
-              <a:t>Control points are averages over 1, 2, 5 and 10 m. Wider spacing smooths away real lateral structure of a few millimetres.</a:t>
-            </a:r>
-            <a:endParaRPr lang="en-US" sz="950" dirty="0"/>
-          </a:p>
-        </p:txBody>
-      </p:sp>
-      <p:sp>
-        <p:nvSpPr>
-          <p:cNvPr id="6" name="Shape 4"/>
+              <a:t>Reference</a:t>
+            </a:r>
+            <a:endParaRPr lang="en-US" sz="1400" dirty="0"/>
+          </a:p>
+        </p:txBody>
+      </p:sp>
+      <p:sp>
+        <p:nvSpPr>
+          <p:cNvPr id="7" name="Text 5"/>
+          <p:cNvSpPr txBox="1"/>
+          <p:nvPr/>
+        </p:nvSpPr>
+        <p:spPr>
+          <a:xfrm>
+            <a:off x="2514600" y="1307592"/>
+            <a:ext cx="2148840" cy="420624"/>
+          </a:xfrm>
+          <a:prstGeom prst="rect">
+            <a:avLst/>
+          </a:prstGeom>
+          <a:noFill/>
+          <a:ln/>
+        </p:spPr>
+        <p:txBody>
+          <a:bodyPr wrap="square" lIns="0" tIns="0" rIns="0" bIns="0" rtlCol="0" anchor="ctr"/>
+          <a:lstStyle/>
+          <a:p>
+            <a:pPr marL="0" indent="0">
+              <a:buNone/>
+            </a:pPr>
+            <a:r>
+              <a:rPr lang="en-US" sz="1100" dirty="0">
+                <a:solidFill>
+                  <a:srgbClr val="5F7178"/>
+                </a:solidFill>
+                <a:latin typeface="Calibri" pitchFamily="34" charset="0"/>
+                <a:ea typeface="Calibri" pitchFamily="34" charset="-122"/>
+                <a:cs typeface="Calibri" pitchFamily="34" charset="-120"/>
+              </a:rPr>
+              <a:t>one track centreline from run 1, used for every run</a:t>
+            </a:r>
+            <a:endParaRPr lang="en-US" sz="1100" dirty="0"/>
+          </a:p>
+        </p:txBody>
+      </p:sp>
+      <p:sp>
+        <p:nvSpPr>
+          <p:cNvPr id="8" name="Shape 2"/>
           <p:cNvSpPr/>
           <p:nvPr/>
         </p:nvSpPr>
         <p:spPr>
           <a:xfrm>
-            <a:off x="5440680" y="1280160"/>
-            <a:ext cx="3246120" cy="877824"/>
-          </a:xfrm>
-          <a:prstGeom prst="roundRect">
-            <a:avLst>
-              <a:gd name="adj" fmla="val 9375"/>
-            </a:avLst>
+            <a:off x="457200" y="1929384"/>
+            <a:ext cx="384048" cy="384048"/>
+          </a:xfrm>
+          <a:prstGeom prst="ellipse">
+            <a:avLst/>
           </a:prstGeom>
           <a:solidFill>
-            <a:srgbClr val="EDF5F5"/>
+            <a:srgbClr val="028090"/>
           </a:solidFill>
           <a:ln w="12700">
             <a:solidFill>
-              <a:srgbClr val="EDF5F5"/>
+              <a:srgbClr val="028090"/>
             </a:solidFill>
             <a:prstDash val="solid"/>
           </a:ln>
@@ -13978,14 +13304,14 @@
       </p:sp>
       <p:sp>
         <p:nvSpPr>
-          <p:cNvPr id="7" name="Text 5"/>
+          <p:cNvPr id="9" name="Text 3"/>
           <p:cNvSpPr txBox="1"/>
           <p:nvPr/>
         </p:nvSpPr>
         <p:spPr>
           <a:xfrm>
-            <a:off x="5550408" y="1280160"/>
-            <a:ext cx="1371600" cy="877824"/>
+            <a:off x="457200" y="1929384"/>
+            <a:ext cx="384048" cy="384048"/>
           </a:xfrm>
           <a:prstGeom prst="rect">
             <a:avLst/>
@@ -14001,30 +13327,30 @@
               <a:buNone/>
             </a:pPr>
             <a:r>
-              <a:rPr lang="en-US" sz="1800" b="1" dirty="0">
-                <a:solidFill>
-                  <a:srgbClr val="028090"/>
-                </a:solidFill>
-                <a:latin typeface="Cambria" pitchFamily="34" charset="0"/>
-                <a:ea typeface="Cambria" pitchFamily="34" charset="-122"/>
-                <a:cs typeface="Cambria" pitchFamily="34" charset="-120"/>
-              </a:rPr>
-              <a:t>261</a:t>
-            </a:r>
-            <a:endParaRPr lang="en-US" sz="1800" dirty="0"/>
-          </a:p>
-        </p:txBody>
-      </p:sp>
-      <p:sp>
-        <p:nvSpPr>
-          <p:cNvPr id="8" name="Text 6"/>
+              <a:rPr lang="en-US" sz="1400" b="1" dirty="0">
+                <a:solidFill>
+                  <a:srgbClr val="FFFFFF"/>
+                </a:solidFill>
+                <a:latin typeface="Calibri" pitchFamily="34" charset="0"/>
+                <a:ea typeface="Calibri" pitchFamily="34" charset="-122"/>
+                <a:cs typeface="Calibri" pitchFamily="34" charset="-120"/>
+              </a:rPr>
+              <a:t>2</a:t>
+            </a:r>
+            <a:endParaRPr lang="en-US" sz="1400" dirty="0"/>
+          </a:p>
+        </p:txBody>
+      </p:sp>
+      <p:sp>
+        <p:nvSpPr>
+          <p:cNvPr id="10" name="Text 4"/>
           <p:cNvSpPr txBox="1"/>
           <p:nvPr/>
         </p:nvSpPr>
         <p:spPr>
           <a:xfrm>
-            <a:off x="6995160" y="1353312"/>
-            <a:ext cx="1600199" cy="237744"/>
+            <a:off x="1005840" y="1920240"/>
+            <a:ext cx="1463040" cy="274320"/>
           </a:xfrm>
           <a:prstGeom prst="rect">
             <a:avLst/>
@@ -14040,7 +13366,7 @@
               <a:buNone/>
             </a:pPr>
             <a:r>
-              <a:rPr lang="en-US" sz="1100" b="1" dirty="0">
+              <a:rPr lang="en-US" sz="1400" b="1" dirty="0">
                 <a:solidFill>
                   <a:srgbClr val="16262B"/>
                 </a:solidFill>
@@ -14048,22 +13374,22 @@
                 <a:ea typeface="Calibri" pitchFamily="34" charset="-122"/>
                 <a:cs typeface="Calibri" pitchFamily="34" charset="-120"/>
               </a:rPr>
-              <a:t>control points per rail</a:t>
-            </a:r>
-            <a:endParaRPr lang="en-US" sz="1100" dirty="0"/>
-          </a:p>
-        </p:txBody>
-      </p:sp>
-      <p:sp>
-        <p:nvSpPr>
-          <p:cNvPr id="9" name="Text 7"/>
+              <a:t>Position</a:t>
+            </a:r>
+            <a:endParaRPr lang="en-US" sz="1400" dirty="0"/>
+          </a:p>
+        </p:txBody>
+      </p:sp>
+      <p:sp>
+        <p:nvSpPr>
+          <p:cNvPr id="11" name="Text 5"/>
           <p:cNvSpPr txBox="1"/>
           <p:nvPr/>
         </p:nvSpPr>
         <p:spPr>
           <a:xfrm>
-            <a:off x="6995160" y="1591056"/>
-            <a:ext cx="1600199" cy="512063"/>
+            <a:off x="2514600" y="1911095"/>
+            <a:ext cx="2148840" cy="420624"/>
           </a:xfrm>
           <a:prstGeom prst="rect">
             <a:avLst/>
@@ -14079,7 +13405,7 @@
               <a:buNone/>
             </a:pPr>
             <a:r>
-              <a:rPr lang="en-US" sz="900" dirty="0">
+              <a:rPr lang="en-US" sz="1100" dirty="0">
                 <a:solidFill>
                   <a:srgbClr val="5F7178"/>
                 </a:solidFill>
@@ -14087,34 +13413,32 @@
                 <a:ea typeface="Calibri" pitchFamily="34" charset="-122"/>
                 <a:cs typeface="Calibri" pitchFamily="34" charset="-120"/>
               </a:rPr>
-              <a:t>1 m spacing keeps the curve within 1.4 mm of the measurements</a:t>
-            </a:r>
-            <a:endParaRPr lang="en-US" sz="900" dirty="0"/>
-          </a:p>
-        </p:txBody>
-      </p:sp>
-      <p:sp>
-        <p:nvSpPr>
-          <p:cNvPr id="10" name="Shape 4"/>
+              <a:t>chainage s, sideways offset d and the LiDAR height Z</a:t>
+            </a:r>
+            <a:endParaRPr lang="en-US" sz="1100" dirty="0"/>
+          </a:p>
+        </p:txBody>
+      </p:sp>
+      <p:sp>
+        <p:nvSpPr>
+          <p:cNvPr id="12" name="Shape 2"/>
           <p:cNvSpPr/>
           <p:nvPr/>
         </p:nvSpPr>
         <p:spPr>
           <a:xfrm>
-            <a:off x="5440680" y="2249424"/>
-            <a:ext cx="3246120" cy="877824"/>
-          </a:xfrm>
-          <a:prstGeom prst="roundRect">
-            <a:avLst>
-              <a:gd name="adj" fmla="val 9375"/>
-            </a:avLst>
+            <a:off x="457200" y="2532888"/>
+            <a:ext cx="384048" cy="384048"/>
+          </a:xfrm>
+          <a:prstGeom prst="ellipse">
+            <a:avLst/>
           </a:prstGeom>
           <a:solidFill>
-            <a:srgbClr val="EDF5F5"/>
+            <a:srgbClr val="028090"/>
           </a:solidFill>
           <a:ln w="12700">
             <a:solidFill>
-              <a:srgbClr val="EDF5F5"/>
+              <a:srgbClr val="028090"/>
             </a:solidFill>
             <a:prstDash val="solid"/>
           </a:ln>
@@ -14129,14 +13453,14 @@
       </p:sp>
       <p:sp>
         <p:nvSpPr>
-          <p:cNvPr id="11" name="Text 5"/>
+          <p:cNvPr id="13" name="Text 3"/>
           <p:cNvSpPr txBox="1"/>
           <p:nvPr/>
         </p:nvSpPr>
         <p:spPr>
           <a:xfrm>
-            <a:off x="5550408" y="2249424"/>
-            <a:ext cx="1371600" cy="877824"/>
+            <a:off x="457200" y="2532888"/>
+            <a:ext cx="384048" cy="384048"/>
           </a:xfrm>
           <a:prstGeom prst="rect">
             <a:avLst/>
@@ -14152,30 +13476,30 @@
               <a:buNone/>
             </a:pPr>
             <a:r>
-              <a:rPr lang="en-US" sz="1800" b="1" dirty="0">
-                <a:solidFill>
-                  <a:srgbClr val="028090"/>
-                </a:solidFill>
-                <a:latin typeface="Cambria" pitchFamily="34" charset="0"/>
-                <a:ea typeface="Cambria" pitchFamily="34" charset="-122"/>
-                <a:cs typeface="Cambria" pitchFamily="34" charset="-120"/>
-              </a:rPr>
-              <a:t>0.9 mm</a:t>
-            </a:r>
-            <a:endParaRPr lang="en-US" sz="1800" dirty="0"/>
-          </a:p>
-        </p:txBody>
-      </p:sp>
-      <p:sp>
-        <p:nvSpPr>
-          <p:cNvPr id="12" name="Text 6"/>
+              <a:rPr lang="en-US" sz="1400" b="1" dirty="0">
+                <a:solidFill>
+                  <a:srgbClr val="FFFFFF"/>
+                </a:solidFill>
+                <a:latin typeface="Calibri" pitchFamily="34" charset="0"/>
+                <a:ea typeface="Calibri" pitchFamily="34" charset="-122"/>
+                <a:cs typeface="Calibri" pitchFamily="34" charset="-120"/>
+              </a:rPr>
+              <a:t>3</a:t>
+            </a:r>
+            <a:endParaRPr lang="en-US" sz="1400" dirty="0"/>
+          </a:p>
+        </p:txBody>
+      </p:sp>
+      <p:sp>
+        <p:nvSpPr>
+          <p:cNvPr id="14" name="Text 4"/>
           <p:cNvSpPr txBox="1"/>
           <p:nvPr/>
         </p:nvSpPr>
         <p:spPr>
           <a:xfrm>
-            <a:off x="6995160" y="2322576"/>
-            <a:ext cx="1600199" cy="237744"/>
+            <a:off x="1005840" y="2523744"/>
+            <a:ext cx="1463040" cy="274320"/>
           </a:xfrm>
           <a:prstGeom prst="rect">
             <a:avLst/>
@@ -14191,7 +13515,7 @@
               <a:buNone/>
             </a:pPr>
             <a:r>
-              <a:rPr lang="en-US" sz="1100" b="1" dirty="0">
+              <a:rPr lang="en-US" sz="1400" b="1" dirty="0">
                 <a:solidFill>
                   <a:srgbClr val="16262B"/>
                 </a:solidFill>
@@ -14199,22 +13523,22 @@
                 <a:ea typeface="Calibri" pitchFamily="34" charset="-122"/>
                 <a:cs typeface="Calibri" pitchFamily="34" charset="-120"/>
               </a:rPr>
-              <a:t>noise floor, gauge</a:t>
-            </a:r>
-            <a:endParaRPr lang="en-US" sz="1100" dirty="0"/>
-          </a:p>
-        </p:txBody>
-      </p:sp>
-      <p:sp>
-        <p:nvSpPr>
-          <p:cNvPr id="13" name="Text 7"/>
+              <a:t>Control points</a:t>
+            </a:r>
+            <a:endParaRPr lang="en-US" sz="1400" dirty="0"/>
+          </a:p>
+        </p:txBody>
+      </p:sp>
+      <p:sp>
+        <p:nvSpPr>
+          <p:cNvPr id="15" name="Text 5"/>
           <p:cNvSpPr txBox="1"/>
           <p:nvPr/>
         </p:nvSpPr>
         <p:spPr>
           <a:xfrm>
-            <a:off x="6995160" y="2560320"/>
-            <a:ext cx="1600199" cy="512063"/>
+            <a:off x="2514600" y="2514600"/>
+            <a:ext cx="2148840" cy="420624"/>
           </a:xfrm>
           <a:prstGeom prst="rect">
             <a:avLst/>
@@ -14230,7 +13554,7 @@
               <a:buNone/>
             </a:pPr>
             <a:r>
-              <a:rPr lang="en-US" sz="900" dirty="0">
+              <a:rPr lang="en-US" sz="1100" dirty="0">
                 <a:solidFill>
                   <a:srgbClr val="5F7178"/>
                 </a:solidFill>
@@ -14238,34 +13562,32 @@
                 <a:ea typeface="Calibri" pitchFamily="34" charset="-122"/>
                 <a:cs typeface="Calibri" pitchFamily="34" charset="-120"/>
               </a:rPr>
-              <a:t>lateral 1.4–1.5 mm, height 0.3 mm; two halves of the scan compared (RMS)</a:t>
-            </a:r>
-            <a:endParaRPr lang="en-US" sz="900" dirty="0"/>
-          </a:p>
-        </p:txBody>
-      </p:sp>
-      <p:sp>
-        <p:nvSpPr>
-          <p:cNvPr id="14" name="Shape 4"/>
+              <a:t>1 m averages on a fixed grid, so runs line up</a:t>
+            </a:r>
+            <a:endParaRPr lang="en-US" sz="1100" dirty="0"/>
+          </a:p>
+        </p:txBody>
+      </p:sp>
+      <p:sp>
+        <p:nvSpPr>
+          <p:cNvPr id="16" name="Shape 2"/>
           <p:cNvSpPr/>
           <p:nvPr/>
         </p:nvSpPr>
         <p:spPr>
           <a:xfrm>
-            <a:off x="5440680" y="3218688"/>
-            <a:ext cx="3246120" cy="877824"/>
-          </a:xfrm>
-          <a:prstGeom prst="roundRect">
-            <a:avLst>
-              <a:gd name="adj" fmla="val 9375"/>
-            </a:avLst>
+            <a:off x="457200" y="3136391"/>
+            <a:ext cx="384048" cy="384048"/>
+          </a:xfrm>
+          <a:prstGeom prst="ellipse">
+            <a:avLst/>
           </a:prstGeom>
           <a:solidFill>
-            <a:srgbClr val="EDF5F5"/>
+            <a:srgbClr val="028090"/>
           </a:solidFill>
           <a:ln w="12700">
             <a:solidFill>
-              <a:srgbClr val="EDF5F5"/>
+              <a:srgbClr val="028090"/>
             </a:solidFill>
             <a:prstDash val="solid"/>
           </a:ln>
@@ -14280,14 +13602,14 @@
       </p:sp>
       <p:sp>
         <p:nvSpPr>
-          <p:cNvPr id="15" name="Text 5"/>
+          <p:cNvPr id="17" name="Text 3"/>
           <p:cNvSpPr txBox="1"/>
           <p:nvPr/>
         </p:nvSpPr>
         <p:spPr>
           <a:xfrm>
-            <a:off x="5550408" y="3218688"/>
-            <a:ext cx="1371600" cy="877824"/>
+            <a:off x="457200" y="3136391"/>
+            <a:ext cx="384048" cy="384048"/>
           </a:xfrm>
           <a:prstGeom prst="rect">
             <a:avLst/>
@@ -14303,30 +13625,30 @@
               <a:buNone/>
             </a:pPr>
             <a:r>
-              <a:rPr lang="en-US" sz="1800" b="1" dirty="0">
-                <a:solidFill>
-                  <a:srgbClr val="028090"/>
-                </a:solidFill>
-                <a:latin typeface="Cambria" pitchFamily="34" charset="0"/>
-                <a:ea typeface="Cambria" pitchFamily="34" charset="-122"/>
-                <a:cs typeface="Cambria" pitchFamily="34" charset="-120"/>
-              </a:rPr>
-              <a:t>3.9 mm</a:t>
-            </a:r>
-            <a:endParaRPr lang="en-US" sz="1800" dirty="0"/>
-          </a:p>
-        </p:txBody>
-      </p:sp>
-      <p:sp>
-        <p:nvSpPr>
-          <p:cNvPr id="16" name="Text 6"/>
+              <a:rPr lang="en-US" sz="1400" b="1" dirty="0">
+                <a:solidFill>
+                  <a:srgbClr val="FFFFFF"/>
+                </a:solidFill>
+                <a:latin typeface="Calibri" pitchFamily="34" charset="0"/>
+                <a:ea typeface="Calibri" pitchFamily="34" charset="-122"/>
+                <a:cs typeface="Calibri" pitchFamily="34" charset="-120"/>
+              </a:rPr>
+              <a:t>4</a:t>
+            </a:r>
+            <a:endParaRPr lang="en-US" sz="1400" dirty="0"/>
+          </a:p>
+        </p:txBody>
+      </p:sp>
+      <p:sp>
+        <p:nvSpPr>
+          <p:cNvPr id="18" name="Text 4"/>
           <p:cNvSpPr txBox="1"/>
           <p:nvPr/>
         </p:nvSpPr>
         <p:spPr>
           <a:xfrm>
-            <a:off x="6995160" y="3291840"/>
-            <a:ext cx="1600199" cy="237744"/>
+            <a:off x="1005840" y="3127248"/>
+            <a:ext cx="1463040" cy="274320"/>
           </a:xfrm>
           <a:prstGeom prst="rect">
             <a:avLst/>
@@ -14342,7 +13664,7 @@
               <a:buNone/>
             </a:pPr>
             <a:r>
-              <a:rPr lang="en-US" sz="1100" b="1" dirty="0">
+              <a:rPr lang="en-US" sz="1400" b="1" dirty="0">
                 <a:solidFill>
                   <a:srgbClr val="16262B"/>
                 </a:solidFill>
@@ -14350,22 +13672,22 @@
                 <a:ea typeface="Calibri" pitchFamily="34" charset="-122"/>
                 <a:cs typeface="Calibri" pitchFamily="34" charset="-120"/>
               </a:rPr>
-              <a:t>change recovered</a:t>
-            </a:r>
-            <a:endParaRPr lang="en-US" sz="1100" dirty="0"/>
-          </a:p>
-        </p:txBody>
-      </p:sp>
-      <p:sp>
-        <p:nvSpPr>
-          <p:cNvPr id="17" name="Text 7"/>
+              <a:t>Catmull-Rom</a:t>
+            </a:r>
+            <a:endParaRPr lang="en-US" sz="1400" dirty="0"/>
+          </a:p>
+        </p:txBody>
+      </p:sp>
+      <p:sp>
+        <p:nvSpPr>
+          <p:cNvPr id="19" name="Text 5"/>
           <p:cNvSpPr txBox="1"/>
           <p:nvPr/>
         </p:nvSpPr>
         <p:spPr>
           <a:xfrm>
-            <a:off x="6995160" y="3529584"/>
-            <a:ext cx="1600199" cy="512063"/>
+            <a:off x="2514600" y="3118103"/>
+            <a:ext cx="2148840" cy="420624"/>
           </a:xfrm>
           <a:prstGeom prst="rect">
             <a:avLst/>
@@ -14381,7 +13703,7 @@
               <a:buNone/>
             </a:pPr>
             <a:r>
-              <a:rPr lang="en-US" sz="900" dirty="0">
+              <a:rPr lang="en-US" sz="1100" dirty="0">
                 <a:solidFill>
                   <a:srgbClr val="5F7178"/>
                 </a:solidFill>
@@ -14389,9 +13711,221 @@
                 <a:ea typeface="Calibri" pitchFamily="34" charset="-122"/>
                 <a:cs typeface="Calibri" pitchFamily="34" charset="-120"/>
               </a:rPr>
-              <a:t>a known 4 mm gauge change added to one half of the scan; found across the stretch</a:t>
-            </a:r>
-            <a:endParaRPr lang="en-US" sz="900" dirty="0"/>
+              <a:t>a smooth curve through every control point</a:t>
+            </a:r>
+            <a:endParaRPr lang="en-US" sz="1100" dirty="0"/>
+          </a:p>
+        </p:txBody>
+      </p:sp>
+      <p:sp>
+        <p:nvSpPr>
+          <p:cNvPr id="20" name="Shape 2"/>
+          <p:cNvSpPr/>
+          <p:nvPr/>
+        </p:nvSpPr>
+        <p:spPr>
+          <a:xfrm>
+            <a:off x="457200" y="3739896"/>
+            <a:ext cx="384048" cy="384048"/>
+          </a:xfrm>
+          <a:prstGeom prst="ellipse">
+            <a:avLst/>
+          </a:prstGeom>
+          <a:solidFill>
+            <a:srgbClr val="028090"/>
+          </a:solidFill>
+          <a:ln w="12700">
+            <a:solidFill>
+              <a:srgbClr val="028090"/>
+            </a:solidFill>
+            <a:prstDash val="solid"/>
+          </a:ln>
+        </p:spPr>
+        <p:txBody>
+          <a:bodyPr/>
+          <a:lstStyle/>
+          <a:p>
+            <a:endParaRPr lang="sv-SE"/>
+          </a:p>
+        </p:txBody>
+      </p:sp>
+      <p:sp>
+        <p:nvSpPr>
+          <p:cNvPr id="21" name="Text 3"/>
+          <p:cNvSpPr txBox="1"/>
+          <p:nvPr/>
+        </p:nvSpPr>
+        <p:spPr>
+          <a:xfrm>
+            <a:off x="457200" y="3739896"/>
+            <a:ext cx="384048" cy="384048"/>
+          </a:xfrm>
+          <a:prstGeom prst="rect">
+            <a:avLst/>
+          </a:prstGeom>
+          <a:noFill/>
+          <a:ln/>
+        </p:spPr>
+        <p:txBody>
+          <a:bodyPr wrap="square" lIns="0" tIns="0" rIns="0" bIns="0" rtlCol="0" anchor="ctr"/>
+          <a:lstStyle/>
+          <a:p>
+            <a:pPr marL="0" indent="0" algn="ctr">
+              <a:buNone/>
+            </a:pPr>
+            <a:r>
+              <a:rPr lang="en-US" sz="1400" b="1" dirty="0">
+                <a:solidFill>
+                  <a:srgbClr val="FFFFFF"/>
+                </a:solidFill>
+                <a:latin typeface="Calibri" pitchFamily="34" charset="0"/>
+                <a:ea typeface="Calibri" pitchFamily="34" charset="-122"/>
+                <a:cs typeface="Calibri" pitchFamily="34" charset="-120"/>
+              </a:rPr>
+              <a:t>5</a:t>
+            </a:r>
+            <a:endParaRPr lang="en-US" sz="1400" dirty="0"/>
+          </a:p>
+        </p:txBody>
+      </p:sp>
+      <p:sp>
+        <p:nvSpPr>
+          <p:cNvPr id="22" name="Text 4"/>
+          <p:cNvSpPr txBox="1"/>
+          <p:nvPr/>
+        </p:nvSpPr>
+        <p:spPr>
+          <a:xfrm>
+            <a:off x="1005840" y="3730752"/>
+            <a:ext cx="1463040" cy="274320"/>
+          </a:xfrm>
+          <a:prstGeom prst="rect">
+            <a:avLst/>
+          </a:prstGeom>
+          <a:noFill/>
+          <a:ln/>
+        </p:spPr>
+        <p:txBody>
+          <a:bodyPr wrap="square" lIns="0" tIns="0" rIns="0" bIns="0" rtlCol="0" anchor="ctr"/>
+          <a:lstStyle/>
+          <a:p>
+            <a:pPr marL="0" indent="0">
+              <a:buNone/>
+            </a:pPr>
+            <a:r>
+              <a:rPr lang="en-US" sz="1400" b="1" dirty="0">
+                <a:solidFill>
+                  <a:srgbClr val="16262B"/>
+                </a:solidFill>
+                <a:latin typeface="Calibri" pitchFamily="34" charset="0"/>
+                <a:ea typeface="Calibri" pitchFamily="34" charset="-122"/>
+                <a:cs typeface="Calibri" pitchFamily="34" charset="-120"/>
+              </a:rPr>
+              <a:t>Repeatable</a:t>
+            </a:r>
+            <a:endParaRPr lang="en-US" sz="1400" dirty="0"/>
+          </a:p>
+        </p:txBody>
+      </p:sp>
+      <p:sp>
+        <p:nvSpPr>
+          <p:cNvPr id="23" name="Text 5"/>
+          <p:cNvSpPr txBox="1"/>
+          <p:nvPr/>
+        </p:nvSpPr>
+        <p:spPr>
+          <a:xfrm>
+            <a:off x="2514600" y="3721608"/>
+            <a:ext cx="2148840" cy="420624"/>
+          </a:xfrm>
+          <a:prstGeom prst="rect">
+            <a:avLst/>
+          </a:prstGeom>
+          <a:noFill/>
+          <a:ln/>
+        </p:spPr>
+        <p:txBody>
+          <a:bodyPr wrap="square" lIns="0" tIns="0" rIns="0" bIns="0" rtlCol="0" anchor="ctr"/>
+          <a:lstStyle/>
+          <a:p>
+            <a:pPr marL="0" indent="0">
+              <a:buNone/>
+            </a:pPr>
+            <a:r>
+              <a:rPr lang="en-US" sz="1100" dirty="0">
+                <a:solidFill>
+                  <a:srgbClr val="5F7178"/>
+                </a:solidFill>
+                <a:latin typeface="Calibri" pitchFamily="34" charset="0"/>
+                <a:ea typeface="Calibri" pitchFamily="34" charset="-122"/>
+                <a:cs typeface="Calibri" pitchFamily="34" charset="-120"/>
+              </a:rPr>
+              <a:t>settings and file hashes stored; rebuilds are byte-identical</a:t>
+            </a:r>
+            <a:endParaRPr lang="en-US" sz="1100" dirty="0"/>
+          </a:p>
+        </p:txBody>
+      </p:sp>
+      <p:pic>
+        <p:nvPicPr>
+          <p:cNvPr id="24" name="Picture 23" descr="f6_catmull_rom.png"/>
+          <p:cNvPicPr>
+            <a:picLocks noChangeAspect="1"/>
+          </p:cNvPicPr>
+          <p:nvPr/>
+        </p:nvPicPr>
+        <p:blipFill>
+          <a:blip r:embed="rId2"/>
+          <a:stretch>
+            <a:fillRect/>
+          </a:stretch>
+        </p:blipFill>
+        <p:spPr>
+          <a:xfrm>
+            <a:off x="4846320" y="1234440"/>
+            <a:ext cx="3840480" cy="2618509"/>
+          </a:xfrm>
+          <a:prstGeom prst="rect">
+            <a:avLst/>
+          </a:prstGeom>
+        </p:spPr>
+      </p:pic>
+      <p:sp>
+        <p:nvSpPr>
+          <p:cNvPr id="25" name="Text 3"/>
+          <p:cNvSpPr txBox="1"/>
+          <p:nvPr/>
+        </p:nvSpPr>
+        <p:spPr>
+          <a:xfrm>
+            <a:off x="4846320" y="3950208"/>
+            <a:ext cx="3840480" cy="365760"/>
+          </a:xfrm>
+          <a:prstGeom prst="rect">
+            <a:avLst/>
+          </a:prstGeom>
+          <a:noFill/>
+          <a:ln/>
+        </p:spPr>
+        <p:txBody>
+          <a:bodyPr wrap="square" lIns="0" tIns="0" rIns="0" bIns="0" rtlCol="0" anchor="ctr"/>
+          <a:lstStyle/>
+          <a:p>
+            <a:pPr marL="0" indent="0">
+              <a:buNone/>
+            </a:pPr>
+            <a:r>
+              <a:rPr lang="en-US" sz="950" i="1" dirty="0">
+                <a:solidFill>
+                  <a:srgbClr val="5F7178"/>
+                </a:solidFill>
+                <a:latin typeface="Calibri" pitchFamily="34" charset="0"/>
+                <a:ea typeface="Calibri" pitchFamily="34" charset="-122"/>
+                <a:cs typeface="Calibri" pitchFamily="34" charset="-120"/>
+              </a:rPr>
+              <a:t>Left rail, 15 m of the run. A curve through every slab copies the noise; one through 1 m control points does not.</a:t>
+            </a:r>
+            <a:endParaRPr lang="en-US" sz="950" dirty="0"/>
           </a:p>
         </p:txBody>
       </p:sp>
@@ -15215,6 +14749,619 @@
                 <a:ea typeface="Calibri" pitchFamily="34" charset="-122"/>
                 <a:cs typeface="Calibri" pitchFamily="34" charset="-120"/>
               </a:rPr>
+              <a:t>FIRST TEST</a:t>
+            </a:r>
+            <a:endParaRPr lang="en-US" sz="1100" dirty="0"/>
+          </a:p>
+        </p:txBody>
+      </p:sp>
+      <p:sp>
+        <p:nvSpPr>
+          <p:cNvPr id="3" name="Text 1"/>
+          <p:cNvSpPr txBox="1"/>
+          <p:nvPr/>
+        </p:nvSpPr>
+        <p:spPr>
+          <a:xfrm>
+            <a:off x="457200" y="502920"/>
+            <a:ext cx="8229600" cy="548640"/>
+          </a:xfrm>
+          <a:prstGeom prst="rect">
+            <a:avLst/>
+          </a:prstGeom>
+          <a:noFill/>
+          <a:ln/>
+        </p:spPr>
+        <p:txBody>
+          <a:bodyPr wrap="square" lIns="0" tIns="0" rIns="0" bIns="0" rtlCol="0" anchor="ctr"/>
+          <a:lstStyle/>
+          <a:p>
+            <a:pPr marL="0" indent="0">
+              <a:buNone/>
+            </a:pPr>
+            <a:r>
+              <a:rPr lang="en-US" sz="2700" b="1" dirty="0">
+                <a:solidFill>
+                  <a:srgbClr val="16262B"/>
+                </a:solidFill>
+                <a:latin typeface="Cambria" pitchFamily="34" charset="0"/>
+                <a:ea typeface="Cambria" pitchFamily="34" charset="-122"/>
+                <a:cs typeface="Cambria" pitchFamily="34" charset="-120"/>
+              </a:rPr>
+              <a:t>Catmull-Rom on the real run</a:t>
+            </a:r>
+            <a:endParaRPr lang="en-US" sz="2700" dirty="0"/>
+          </a:p>
+        </p:txBody>
+      </p:sp>
+      <p:graphicFrame>
+        <p:nvGraphicFramePr>
+          <p:cNvPr id="4" name="Chart 3"/>
+          <p:cNvGraphicFramePr>
+            <a:graphicFrameLocks noGrp="1"/>
+          </p:cNvGraphicFramePr>
+          <p:nvPr/>
+        </p:nvGraphicFramePr>
+        <p:xfrm>
+          <a:off x="457200" y="1234440"/>
+          <a:ext cx="4754880" cy="2697480"/>
+        </p:xfrm>
+        <a:graphic>
+          <a:graphicData uri="http://schemas.openxmlformats.org/drawingml/2006/chart">
+            <c:chart xmlns:c="http://schemas.openxmlformats.org/drawingml/2006/chart" xmlns:r="http://schemas.openxmlformats.org/officeDocument/2006/relationships" r:id="rId2"/>
+          </a:graphicData>
+        </a:graphic>
+      </p:graphicFrame>
+      <p:sp>
+        <p:nvSpPr>
+          <p:cNvPr id="5" name="Text 3"/>
+          <p:cNvSpPr txBox="1"/>
+          <p:nvPr/>
+        </p:nvSpPr>
+        <p:spPr>
+          <a:xfrm>
+            <a:off x="457200" y="4023360"/>
+            <a:ext cx="4754880" cy="365760"/>
+          </a:xfrm>
+          <a:prstGeom prst="rect">
+            <a:avLst/>
+          </a:prstGeom>
+          <a:noFill/>
+          <a:ln/>
+        </p:spPr>
+        <p:txBody>
+          <a:bodyPr wrap="square" lIns="0" tIns="0" rIns="0" bIns="0" rtlCol="0" anchor="ctr"/>
+          <a:lstStyle/>
+          <a:p>
+            <a:pPr marL="0" indent="0">
+              <a:buNone/>
+            </a:pPr>
+            <a:r>
+              <a:rPr lang="en-US" sz="950" i="1" dirty="0">
+                <a:solidFill>
+                  <a:srgbClr val="5F7178"/>
+                </a:solidFill>
+                <a:latin typeface="Calibri" pitchFamily="34" charset="0"/>
+                <a:ea typeface="Calibri" pitchFamily="34" charset="-122"/>
+                <a:cs typeface="Calibri" pitchFamily="34" charset="-120"/>
+              </a:rPr>
+              <a:t>Control points are averages over 1, 2, 5 and 10 m. Wider spacing smooths away real lateral structure of a few millimetres.</a:t>
+            </a:r>
+            <a:endParaRPr lang="en-US" sz="950" dirty="0"/>
+          </a:p>
+        </p:txBody>
+      </p:sp>
+      <p:sp>
+        <p:nvSpPr>
+          <p:cNvPr id="6" name="Shape 4"/>
+          <p:cNvSpPr/>
+          <p:nvPr/>
+        </p:nvSpPr>
+        <p:spPr>
+          <a:xfrm>
+            <a:off x="5440680" y="1280160"/>
+            <a:ext cx="3246120" cy="877824"/>
+          </a:xfrm>
+          <a:prstGeom prst="roundRect">
+            <a:avLst>
+              <a:gd name="adj" fmla="val 9375"/>
+            </a:avLst>
+          </a:prstGeom>
+          <a:solidFill>
+            <a:srgbClr val="EDF5F5"/>
+          </a:solidFill>
+          <a:ln w="12700">
+            <a:solidFill>
+              <a:srgbClr val="EDF5F5"/>
+            </a:solidFill>
+            <a:prstDash val="solid"/>
+          </a:ln>
+        </p:spPr>
+        <p:txBody>
+          <a:bodyPr/>
+          <a:lstStyle/>
+          <a:p>
+            <a:endParaRPr lang="sv-SE"/>
+          </a:p>
+        </p:txBody>
+      </p:sp>
+      <p:sp>
+        <p:nvSpPr>
+          <p:cNvPr id="7" name="Text 5"/>
+          <p:cNvSpPr txBox="1"/>
+          <p:nvPr/>
+        </p:nvSpPr>
+        <p:spPr>
+          <a:xfrm>
+            <a:off x="5550408" y="1280160"/>
+            <a:ext cx="1371600" cy="877824"/>
+          </a:xfrm>
+          <a:prstGeom prst="rect">
+            <a:avLst/>
+          </a:prstGeom>
+          <a:noFill/>
+          <a:ln/>
+        </p:spPr>
+        <p:txBody>
+          <a:bodyPr wrap="square" lIns="0" tIns="0" rIns="0" bIns="0" rtlCol="0" anchor="ctr"/>
+          <a:lstStyle/>
+          <a:p>
+            <a:pPr marL="0" indent="0" algn="ctr">
+              <a:buNone/>
+            </a:pPr>
+            <a:r>
+              <a:rPr lang="en-US" sz="1800" b="1" dirty="0">
+                <a:solidFill>
+                  <a:srgbClr val="028090"/>
+                </a:solidFill>
+                <a:latin typeface="Cambria" pitchFamily="34" charset="0"/>
+                <a:ea typeface="Cambria" pitchFamily="34" charset="-122"/>
+                <a:cs typeface="Cambria" pitchFamily="34" charset="-120"/>
+              </a:rPr>
+              <a:t>261</a:t>
+            </a:r>
+            <a:endParaRPr lang="en-US" sz="1800" dirty="0"/>
+          </a:p>
+        </p:txBody>
+      </p:sp>
+      <p:sp>
+        <p:nvSpPr>
+          <p:cNvPr id="8" name="Text 6"/>
+          <p:cNvSpPr txBox="1"/>
+          <p:nvPr/>
+        </p:nvSpPr>
+        <p:spPr>
+          <a:xfrm>
+            <a:off x="6995160" y="1353312"/>
+            <a:ext cx="1600199" cy="237744"/>
+          </a:xfrm>
+          <a:prstGeom prst="rect">
+            <a:avLst/>
+          </a:prstGeom>
+          <a:noFill/>
+          <a:ln/>
+        </p:spPr>
+        <p:txBody>
+          <a:bodyPr wrap="square" lIns="0" tIns="0" rIns="0" bIns="0" rtlCol="0" anchor="ctr"/>
+          <a:lstStyle/>
+          <a:p>
+            <a:pPr marL="0" indent="0">
+              <a:buNone/>
+            </a:pPr>
+            <a:r>
+              <a:rPr lang="en-US" sz="1100" b="1" dirty="0">
+                <a:solidFill>
+                  <a:srgbClr val="16262B"/>
+                </a:solidFill>
+                <a:latin typeface="Calibri" pitchFamily="34" charset="0"/>
+                <a:ea typeface="Calibri" pitchFamily="34" charset="-122"/>
+                <a:cs typeface="Calibri" pitchFamily="34" charset="-120"/>
+              </a:rPr>
+              <a:t>control points per rail</a:t>
+            </a:r>
+            <a:endParaRPr lang="en-US" sz="1100" dirty="0"/>
+          </a:p>
+        </p:txBody>
+      </p:sp>
+      <p:sp>
+        <p:nvSpPr>
+          <p:cNvPr id="9" name="Text 7"/>
+          <p:cNvSpPr txBox="1"/>
+          <p:nvPr/>
+        </p:nvSpPr>
+        <p:spPr>
+          <a:xfrm>
+            <a:off x="6995160" y="1591056"/>
+            <a:ext cx="1600199" cy="512063"/>
+          </a:xfrm>
+          <a:prstGeom prst="rect">
+            <a:avLst/>
+          </a:prstGeom>
+          <a:noFill/>
+          <a:ln/>
+        </p:spPr>
+        <p:txBody>
+          <a:bodyPr wrap="square" lIns="0" tIns="0" rIns="0" bIns="0" rtlCol="0" anchor="ctr"/>
+          <a:lstStyle/>
+          <a:p>
+            <a:pPr marL="0" indent="0">
+              <a:buNone/>
+            </a:pPr>
+            <a:r>
+              <a:rPr lang="en-US" sz="900" dirty="0">
+                <a:solidFill>
+                  <a:srgbClr val="5F7178"/>
+                </a:solidFill>
+                <a:latin typeface="Calibri" pitchFamily="34" charset="0"/>
+                <a:ea typeface="Calibri" pitchFamily="34" charset="-122"/>
+                <a:cs typeface="Calibri" pitchFamily="34" charset="-120"/>
+              </a:rPr>
+              <a:t>1 m spacing keeps the curve within 1.4 mm of the measurements</a:t>
+            </a:r>
+            <a:endParaRPr lang="en-US" sz="900" dirty="0"/>
+          </a:p>
+        </p:txBody>
+      </p:sp>
+      <p:sp>
+        <p:nvSpPr>
+          <p:cNvPr id="10" name="Shape 4"/>
+          <p:cNvSpPr/>
+          <p:nvPr/>
+        </p:nvSpPr>
+        <p:spPr>
+          <a:xfrm>
+            <a:off x="5440680" y="2249424"/>
+            <a:ext cx="3246120" cy="877824"/>
+          </a:xfrm>
+          <a:prstGeom prst="roundRect">
+            <a:avLst>
+              <a:gd name="adj" fmla="val 9375"/>
+            </a:avLst>
+          </a:prstGeom>
+          <a:solidFill>
+            <a:srgbClr val="EDF5F5"/>
+          </a:solidFill>
+          <a:ln w="12700">
+            <a:solidFill>
+              <a:srgbClr val="EDF5F5"/>
+            </a:solidFill>
+            <a:prstDash val="solid"/>
+          </a:ln>
+        </p:spPr>
+        <p:txBody>
+          <a:bodyPr/>
+          <a:lstStyle/>
+          <a:p>
+            <a:endParaRPr lang="sv-SE"/>
+          </a:p>
+        </p:txBody>
+      </p:sp>
+      <p:sp>
+        <p:nvSpPr>
+          <p:cNvPr id="11" name="Text 5"/>
+          <p:cNvSpPr txBox="1"/>
+          <p:nvPr/>
+        </p:nvSpPr>
+        <p:spPr>
+          <a:xfrm>
+            <a:off x="5550408" y="2249424"/>
+            <a:ext cx="1371600" cy="877824"/>
+          </a:xfrm>
+          <a:prstGeom prst="rect">
+            <a:avLst/>
+          </a:prstGeom>
+          <a:noFill/>
+          <a:ln/>
+        </p:spPr>
+        <p:txBody>
+          <a:bodyPr wrap="square" lIns="0" tIns="0" rIns="0" bIns="0" rtlCol="0" anchor="ctr"/>
+          <a:lstStyle/>
+          <a:p>
+            <a:pPr marL="0" indent="0" algn="ctr">
+              <a:buNone/>
+            </a:pPr>
+            <a:r>
+              <a:rPr lang="en-US" sz="1800" b="1" dirty="0">
+                <a:solidFill>
+                  <a:srgbClr val="028090"/>
+                </a:solidFill>
+                <a:latin typeface="Cambria" pitchFamily="34" charset="0"/>
+                <a:ea typeface="Cambria" pitchFamily="34" charset="-122"/>
+                <a:cs typeface="Cambria" pitchFamily="34" charset="-120"/>
+              </a:rPr>
+              <a:t>0.9 mm</a:t>
+            </a:r>
+            <a:endParaRPr lang="en-US" sz="1800" dirty="0"/>
+          </a:p>
+        </p:txBody>
+      </p:sp>
+      <p:sp>
+        <p:nvSpPr>
+          <p:cNvPr id="12" name="Text 6"/>
+          <p:cNvSpPr txBox="1"/>
+          <p:nvPr/>
+        </p:nvSpPr>
+        <p:spPr>
+          <a:xfrm>
+            <a:off x="6995160" y="2322576"/>
+            <a:ext cx="1600199" cy="237744"/>
+          </a:xfrm>
+          <a:prstGeom prst="rect">
+            <a:avLst/>
+          </a:prstGeom>
+          <a:noFill/>
+          <a:ln/>
+        </p:spPr>
+        <p:txBody>
+          <a:bodyPr wrap="square" lIns="0" tIns="0" rIns="0" bIns="0" rtlCol="0" anchor="ctr"/>
+          <a:lstStyle/>
+          <a:p>
+            <a:pPr marL="0" indent="0">
+              <a:buNone/>
+            </a:pPr>
+            <a:r>
+              <a:rPr lang="en-US" sz="1100" b="1" dirty="0">
+                <a:solidFill>
+                  <a:srgbClr val="16262B"/>
+                </a:solidFill>
+                <a:latin typeface="Calibri" pitchFamily="34" charset="0"/>
+                <a:ea typeface="Calibri" pitchFamily="34" charset="-122"/>
+                <a:cs typeface="Calibri" pitchFamily="34" charset="-120"/>
+              </a:rPr>
+              <a:t>noise floor, gauge</a:t>
+            </a:r>
+            <a:endParaRPr lang="en-US" sz="1100" dirty="0"/>
+          </a:p>
+        </p:txBody>
+      </p:sp>
+      <p:sp>
+        <p:nvSpPr>
+          <p:cNvPr id="13" name="Text 7"/>
+          <p:cNvSpPr txBox="1"/>
+          <p:nvPr/>
+        </p:nvSpPr>
+        <p:spPr>
+          <a:xfrm>
+            <a:off x="6995160" y="2560320"/>
+            <a:ext cx="1600199" cy="512063"/>
+          </a:xfrm>
+          <a:prstGeom prst="rect">
+            <a:avLst/>
+          </a:prstGeom>
+          <a:noFill/>
+          <a:ln/>
+        </p:spPr>
+        <p:txBody>
+          <a:bodyPr wrap="square" lIns="0" tIns="0" rIns="0" bIns="0" rtlCol="0" anchor="ctr"/>
+          <a:lstStyle/>
+          <a:p>
+            <a:pPr marL="0" indent="0">
+              <a:buNone/>
+            </a:pPr>
+            <a:r>
+              <a:rPr lang="en-US" sz="900" dirty="0">
+                <a:solidFill>
+                  <a:srgbClr val="5F7178"/>
+                </a:solidFill>
+                <a:latin typeface="Calibri" pitchFamily="34" charset="0"/>
+                <a:ea typeface="Calibri" pitchFamily="34" charset="-122"/>
+                <a:cs typeface="Calibri" pitchFamily="34" charset="-120"/>
+              </a:rPr>
+              <a:t>lateral 1.4–1.5 mm, height 0.3 mm; two halves of the scan compared (RMS)</a:t>
+            </a:r>
+            <a:endParaRPr lang="en-US" sz="900" dirty="0"/>
+          </a:p>
+        </p:txBody>
+      </p:sp>
+      <p:sp>
+        <p:nvSpPr>
+          <p:cNvPr id="14" name="Shape 4"/>
+          <p:cNvSpPr/>
+          <p:nvPr/>
+        </p:nvSpPr>
+        <p:spPr>
+          <a:xfrm>
+            <a:off x="5440680" y="3218688"/>
+            <a:ext cx="3246120" cy="877824"/>
+          </a:xfrm>
+          <a:prstGeom prst="roundRect">
+            <a:avLst>
+              <a:gd name="adj" fmla="val 9375"/>
+            </a:avLst>
+          </a:prstGeom>
+          <a:solidFill>
+            <a:srgbClr val="EDF5F5"/>
+          </a:solidFill>
+          <a:ln w="12700">
+            <a:solidFill>
+              <a:srgbClr val="EDF5F5"/>
+            </a:solidFill>
+            <a:prstDash val="solid"/>
+          </a:ln>
+        </p:spPr>
+        <p:txBody>
+          <a:bodyPr/>
+          <a:lstStyle/>
+          <a:p>
+            <a:endParaRPr lang="sv-SE"/>
+          </a:p>
+        </p:txBody>
+      </p:sp>
+      <p:sp>
+        <p:nvSpPr>
+          <p:cNvPr id="15" name="Text 5"/>
+          <p:cNvSpPr txBox="1"/>
+          <p:nvPr/>
+        </p:nvSpPr>
+        <p:spPr>
+          <a:xfrm>
+            <a:off x="5550408" y="3218688"/>
+            <a:ext cx="1371600" cy="877824"/>
+          </a:xfrm>
+          <a:prstGeom prst="rect">
+            <a:avLst/>
+          </a:prstGeom>
+          <a:noFill/>
+          <a:ln/>
+        </p:spPr>
+        <p:txBody>
+          <a:bodyPr wrap="square" lIns="0" tIns="0" rIns="0" bIns="0" rtlCol="0" anchor="ctr"/>
+          <a:lstStyle/>
+          <a:p>
+            <a:pPr marL="0" indent="0" algn="ctr">
+              <a:buNone/>
+            </a:pPr>
+            <a:r>
+              <a:rPr lang="en-US" sz="1800" b="1" dirty="0">
+                <a:solidFill>
+                  <a:srgbClr val="028090"/>
+                </a:solidFill>
+                <a:latin typeface="Cambria" pitchFamily="34" charset="0"/>
+                <a:ea typeface="Cambria" pitchFamily="34" charset="-122"/>
+                <a:cs typeface="Cambria" pitchFamily="34" charset="-120"/>
+              </a:rPr>
+              <a:t>3.9 mm</a:t>
+            </a:r>
+            <a:endParaRPr lang="en-US" sz="1800" dirty="0"/>
+          </a:p>
+        </p:txBody>
+      </p:sp>
+      <p:sp>
+        <p:nvSpPr>
+          <p:cNvPr id="16" name="Text 6"/>
+          <p:cNvSpPr txBox="1"/>
+          <p:nvPr/>
+        </p:nvSpPr>
+        <p:spPr>
+          <a:xfrm>
+            <a:off x="6995160" y="3291840"/>
+            <a:ext cx="1600199" cy="237744"/>
+          </a:xfrm>
+          <a:prstGeom prst="rect">
+            <a:avLst/>
+          </a:prstGeom>
+          <a:noFill/>
+          <a:ln/>
+        </p:spPr>
+        <p:txBody>
+          <a:bodyPr wrap="square" lIns="0" tIns="0" rIns="0" bIns="0" rtlCol="0" anchor="ctr"/>
+          <a:lstStyle/>
+          <a:p>
+            <a:pPr marL="0" indent="0">
+              <a:buNone/>
+            </a:pPr>
+            <a:r>
+              <a:rPr lang="en-US" sz="1100" b="1" dirty="0">
+                <a:solidFill>
+                  <a:srgbClr val="16262B"/>
+                </a:solidFill>
+                <a:latin typeface="Calibri" pitchFamily="34" charset="0"/>
+                <a:ea typeface="Calibri" pitchFamily="34" charset="-122"/>
+                <a:cs typeface="Calibri" pitchFamily="34" charset="-120"/>
+              </a:rPr>
+              <a:t>change recovered</a:t>
+            </a:r>
+            <a:endParaRPr lang="en-US" sz="1100" dirty="0"/>
+          </a:p>
+        </p:txBody>
+      </p:sp>
+      <p:sp>
+        <p:nvSpPr>
+          <p:cNvPr id="17" name="Text 7"/>
+          <p:cNvSpPr txBox="1"/>
+          <p:nvPr/>
+        </p:nvSpPr>
+        <p:spPr>
+          <a:xfrm>
+            <a:off x="6995160" y="3529584"/>
+            <a:ext cx="1600199" cy="512063"/>
+          </a:xfrm>
+          <a:prstGeom prst="rect">
+            <a:avLst/>
+          </a:prstGeom>
+          <a:noFill/>
+          <a:ln/>
+        </p:spPr>
+        <p:txBody>
+          <a:bodyPr wrap="square" lIns="0" tIns="0" rIns="0" bIns="0" rtlCol="0" anchor="ctr"/>
+          <a:lstStyle/>
+          <a:p>
+            <a:pPr marL="0" indent="0">
+              <a:buNone/>
+            </a:pPr>
+            <a:r>
+              <a:rPr lang="en-US" sz="900" dirty="0">
+                <a:solidFill>
+                  <a:srgbClr val="5F7178"/>
+                </a:solidFill>
+                <a:latin typeface="Calibri" pitchFamily="34" charset="0"/>
+                <a:ea typeface="Calibri" pitchFamily="34" charset="-122"/>
+                <a:cs typeface="Calibri" pitchFamily="34" charset="-120"/>
+              </a:rPr>
+              <a:t>a known 4 mm gauge change added to one half of the scan; found across the stretch</a:t>
+            </a:r>
+            <a:endParaRPr lang="en-US" sz="900" dirty="0"/>
+          </a:p>
+        </p:txBody>
+      </p:sp>
+    </p:spTree>
+  </p:cSld>
+  <p:clrMapOvr>
+    <a:masterClrMapping/>
+  </p:clrMapOvr>
+</p:sld>
+</file>
+
+<file path=ppt/slides/slide21.xml><?xml version="1.0" encoding="utf-8"?>
+<p:sld xmlns:a="http://schemas.openxmlformats.org/drawingml/2006/main" xmlns:r="http://schemas.openxmlformats.org/officeDocument/2006/relationships" xmlns:p="http://schemas.openxmlformats.org/presentationml/2006/main">
+  <p:cSld>
+    <p:spTree>
+      <p:nvGrpSpPr>
+        <p:cNvPr id="1" name=""/>
+        <p:cNvGrpSpPr/>
+        <p:nvPr/>
+      </p:nvGrpSpPr>
+      <p:grpSpPr>
+        <a:xfrm>
+          <a:off x="0" y="0"/>
+          <a:ext cx="0" cy="0"/>
+          <a:chOff x="0" y="0"/>
+          <a:chExt cx="0" cy="0"/>
+        </a:xfrm>
+      </p:grpSpPr>
+      <p:sp>
+        <p:nvSpPr>
+          <p:cNvPr id="2" name="Text 0"/>
+          <p:cNvSpPr txBox="1"/>
+          <p:nvPr/>
+        </p:nvSpPr>
+        <p:spPr>
+          <a:xfrm>
+            <a:off x="457200" y="274320"/>
+            <a:ext cx="8229600" cy="228600"/>
+          </a:xfrm>
+          <a:prstGeom prst="rect">
+            <a:avLst/>
+          </a:prstGeom>
+          <a:noFill/>
+          <a:ln/>
+        </p:spPr>
+        <p:txBody>
+          <a:bodyPr wrap="square" lIns="0" tIns="0" rIns="0" bIns="0" rtlCol="0" anchor="ctr"/>
+          <a:lstStyle/>
+          <a:p>
+            <a:pPr marL="0" indent="0">
+              <a:buNone/>
+            </a:pPr>
+            <a:r>
+              <a:rPr lang="en-US" sz="1100" b="1" kern="0" spc="200" dirty="0">
+                <a:solidFill>
+                  <a:srgbClr val="028090"/>
+                </a:solidFill>
+                <a:latin typeface="Calibri" pitchFamily="34" charset="0"/>
+                <a:ea typeface="Calibri" pitchFamily="34" charset="-122"/>
+                <a:cs typeface="Calibri" pitchFamily="34" charset="-120"/>
+              </a:rPr>
               <a:t>COMPARING RUNS</a:t>
             </a:r>
             <a:endParaRPr lang="en-US" sz="1100" dirty="0"/>
@@ -16076,7 +16223,7 @@
 </p:sld>
 </file>
 
-<file path=ppt/slides/slide21.xml><?xml version="1.0" encoding="utf-8"?>
+<file path=ppt/slides/slide22.xml><?xml version="1.0" encoding="utf-8"?>
 <p:sld xmlns:a="http://schemas.openxmlformats.org/drawingml/2006/main" xmlns:r="http://schemas.openxmlformats.org/officeDocument/2006/relationships" xmlns:p="http://schemas.openxmlformats.org/presentationml/2006/main">
   <p:cSld>
     <p:spTree>
@@ -17158,7 +17305,7 @@
 </p:sld>
 </file>
 
-<file path=ppt/slides/slide22.xml><?xml version="1.0" encoding="utf-8"?>
+<file path=ppt/slides/slide23.xml><?xml version="1.0" encoding="utf-8"?>
 <p:sld xmlns:a="http://schemas.openxmlformats.org/drawingml/2006/main" xmlns:r="http://schemas.openxmlformats.org/officeDocument/2006/relationships" xmlns:p="http://schemas.openxmlformats.org/presentationml/2006/main">
   <p:cSld>
     <p:spTree>
@@ -20899,7 +21046,7 @@
 </p:sld>
 </file>
 
-<file path=ppt/slides/slide23.xml><?xml version="1.0" encoding="utf-8"?>
+<file path=ppt/slides/slide24.xml><?xml version="1.0" encoding="utf-8"?>
 <p:sld xmlns:a="http://schemas.openxmlformats.org/drawingml/2006/main" xmlns:r="http://schemas.openxmlformats.org/officeDocument/2006/relationships" xmlns:p="http://schemas.openxmlformats.org/presentationml/2006/main">
   <p:cSld>
     <p:spTree>
@@ -21359,7 +21506,7 @@
 </p:sld>
 </file>
 
-<file path=ppt/slides/slide24.xml><?xml version="1.0" encoding="utf-8"?>
+<file path=ppt/slides/slide25.xml><?xml version="1.0" encoding="utf-8"?>
 <p:sld xmlns:a="http://schemas.openxmlformats.org/drawingml/2006/main" xmlns:r="http://schemas.openxmlformats.org/officeDocument/2006/relationships" xmlns:p="http://schemas.openxmlformats.org/presentationml/2006/main">
   <p:cSld>
     <p:spTree>
